--- a/docs/Apresentacoes_IVS/1_APRESENTAR_Comparativo_EDA_antiga_vs_nova.pptx
+++ b/docs/Apresentacoes_IVS/1_APRESENTAR_Comparativo_EDA_antiga_vs_nova.pptx
@@ -4,6 +4,9 @@
   <p:sldMasterIdLst>
     <p:sldMasterId id="2147483648" r:id="rId1"/>
   </p:sldMasterIdLst>
+  <p:notesMasterIdLst>
+    <p:notesMasterId r:id="rId18"/>
+  </p:notesMasterIdLst>
   <p:sldIdLst>
     <p:sldId id="256" r:id="rId2"/>
     <p:sldId id="257" r:id="rId3"/>
@@ -22,10 +25,7 @@
     <p:sldId id="270" r:id="rId16"/>
     <p:sldId id="271" r:id="rId17"/>
   </p:sldIdLst>
-  <p:notesMasterIdLst>
-    <p:notesMasterId r:id="rId18"/>
-  </p:notesMasterIdLst>
-  <p:sldSz cx="9144000" cy="5143500"/>
+  <p:sldSz cx="9144000" cy="5143500" type="screen16x9"/>
   <p:notesSz cx="5143500" cy="9144000"/>
   <p:defaultTextStyle>
     <a:lvl1pPr marL="0" algn="l" defTabSz="914400" rtl="0" eaLnBrk="1" latinLnBrk="0" hangingPunct="1">
@@ -119,13 +119,20 @@
       </a:defRPr>
     </a:lvl9pPr>
   </p:defaultTextStyle>
+  <p:extLst>
+    <p:ext uri="{EFAFB233-063F-42B5-8137-9DF3F51BA10A}">
+      <p15:sldGuideLst xmlns:p15="http://schemas.microsoft.com/office/powerpoint/2012/main"/>
+    </p:ext>
+  </p:extLst>
 </p:presentation>
 </file>
 
 <file path=ppt/charts/chart1.xml><?xml version="1.0" encoding="utf-8"?>
-<c:chartSpace xmlns:c="http://schemas.openxmlformats.org/drawingml/2006/chart" xmlns:a="http://schemas.openxmlformats.org/drawingml/2006/main" xmlns:r="http://schemas.openxmlformats.org/officeDocument/2006/relationships">
+<c:chartSpace xmlns:c="http://schemas.openxmlformats.org/drawingml/2006/chart" xmlns:a="http://schemas.openxmlformats.org/drawingml/2006/main" xmlns:r="http://schemas.openxmlformats.org/officeDocument/2006/relationships" xmlns:c16r2="http://schemas.microsoft.com/office/drawing/2015/06/chart">
   <c:date1904 val="0"/>
+  <c:lang val="pt-BR"/>
   <c:roundedCorners val="1"/>
+  <c:style val="2"/>
   <c:chart>
     <c:autoTitleDeleted val="1"/>
     <c:plotArea>
@@ -155,54 +162,28 @@
             <a:effectLst/>
           </c:spPr>
           <c:invertIfNegative val="0"/>
-          <c:dLbls>
-            <c:numFmt formatCode="#,##0" sourceLinked="0"/>
-            <c:txPr>
-              <a:bodyPr/>
-              <a:lstStyle/>
-              <a:p>
-                <a:pPr>
-                  <a:defRPr b="0" i="0" strike="noStrike" sz="1200" u="none">
-                    <a:solidFill>
-                      <a:srgbClr val="000000"/>
-                    </a:solidFill>
-                    <a:latin typeface="Arial"/>
-                  </a:defRPr>
-                </a:pPr>
-              </a:p>
-            </c:txPr>
-            <c:showLegendKey val="0"/>
-            <c:showVal val="0"/>
-            <c:showCatName val="0"/>
-            <c:showSerName val="0"/>
-            <c:showPercent val="0"/>
-            <c:showBubbleSize val="0"/>
-            <c:showLeaderLines val="0"/>
-          </c:dLbls>
           <c:cat>
-            <c:multiLvlStrRef>
+            <c:strRef>
               <c:f>Sheet1!$A$2:$A$6</c:f>
-              <c:multiLvlStrCache>
+              <c:strCache>
                 <c:ptCount val="5"/>
-                <c:lvl>
-                  <c:pt idx="0">
-                    <c:v>Norte</c:v>
-                  </c:pt>
-                  <c:pt idx="1">
-                    <c:v>Nordeste</c:v>
-                  </c:pt>
-                  <c:pt idx="2">
-                    <c:v>Centro-Oeste</c:v>
-                  </c:pt>
-                  <c:pt idx="3">
-                    <c:v>Sudeste</c:v>
-                  </c:pt>
-                  <c:pt idx="4">
-                    <c:v>Sul</c:v>
-                  </c:pt>
-                </c:lvl>
-              </c:multiLvlStrCache>
-            </c:multiLvlStrRef>
+                <c:pt idx="0">
+                  <c:v>Norte</c:v>
+                </c:pt>
+                <c:pt idx="1">
+                  <c:v>Nordeste</c:v>
+                </c:pt>
+                <c:pt idx="2">
+                  <c:v>Centro-Oeste</c:v>
+                </c:pt>
+                <c:pt idx="3">
+                  <c:v>Sudeste</c:v>
+                </c:pt>
+                <c:pt idx="4">
+                  <c:v>Sul</c:v>
+                </c:pt>
+              </c:strCache>
+            </c:strRef>
           </c:cat>
           <c:val>
             <c:numRef>
@@ -211,23 +192,28 @@
                 <c:formatCode>General</c:formatCode>
                 <c:ptCount val="5"/>
                 <c:pt idx="0">
-                  <c:v>0.356</c:v>
+                  <c:v>0.35599999999999998</c:v>
                 </c:pt>
                 <c:pt idx="1">
                   <c:v>0.127</c:v>
                 </c:pt>
                 <c:pt idx="2">
-                  <c:v>0.092</c:v>
+                  <c:v>9.1999999999999998E-2</c:v>
                 </c:pt>
                 <c:pt idx="3">
-                  <c:v>0.045</c:v>
+                  <c:v>4.4999999999999998E-2</c:v>
                 </c:pt>
                 <c:pt idx="4">
-                  <c:v>0.035</c:v>
+                  <c:v>3.5000000000000003E-2</c:v>
                 </c:pt>
               </c:numCache>
             </c:numRef>
           </c:val>
+          <c:extLst>
+            <c:ext xmlns:c16="http://schemas.microsoft.com/office/drawing/2014/chart" uri="{C3380CC4-5D6E-409C-BE32-E72D297353CC}">
+              <c16:uniqueId val="{00000000-14BB-40E2-9F8B-B34F400800C1}"/>
+            </c:ext>
+          </c:extLst>
         </c:ser>
         <c:ser>
           <c:idx val="1"/>
@@ -250,54 +236,28 @@
             <a:effectLst/>
           </c:spPr>
           <c:invertIfNegative val="0"/>
-          <c:dLbls>
-            <c:numFmt formatCode="#,##0" sourceLinked="0"/>
-            <c:txPr>
-              <a:bodyPr/>
-              <a:lstStyle/>
-              <a:p>
-                <a:pPr>
-                  <a:defRPr b="0" i="0" strike="noStrike" sz="1200" u="none">
-                    <a:solidFill>
-                      <a:srgbClr val="000000"/>
-                    </a:solidFill>
-                    <a:latin typeface="Arial"/>
-                  </a:defRPr>
-                </a:pPr>
-              </a:p>
-            </c:txPr>
-            <c:showLegendKey val="0"/>
-            <c:showVal val="0"/>
-            <c:showCatName val="0"/>
-            <c:showSerName val="0"/>
-            <c:showPercent val="0"/>
-            <c:showBubbleSize val="0"/>
-            <c:showLeaderLines val="0"/>
-          </c:dLbls>
           <c:cat>
-            <c:multiLvlStrRef>
+            <c:strRef>
               <c:f>Sheet1!$A$2:$A$6</c:f>
-              <c:multiLvlStrCache>
+              <c:strCache>
                 <c:ptCount val="5"/>
-                <c:lvl>
-                  <c:pt idx="0">
-                    <c:v>Norte</c:v>
-                  </c:pt>
-                  <c:pt idx="1">
-                    <c:v>Nordeste</c:v>
-                  </c:pt>
-                  <c:pt idx="2">
-                    <c:v>Centro-Oeste</c:v>
-                  </c:pt>
-                  <c:pt idx="3">
-                    <c:v>Sudeste</c:v>
-                  </c:pt>
-                  <c:pt idx="4">
-                    <c:v>Sul</c:v>
-                  </c:pt>
-                </c:lvl>
-              </c:multiLvlStrCache>
-            </c:multiLvlStrRef>
+                <c:pt idx="0">
+                  <c:v>Norte</c:v>
+                </c:pt>
+                <c:pt idx="1">
+                  <c:v>Nordeste</c:v>
+                </c:pt>
+                <c:pt idx="2">
+                  <c:v>Centro-Oeste</c:v>
+                </c:pt>
+                <c:pt idx="3">
+                  <c:v>Sudeste</c:v>
+                </c:pt>
+                <c:pt idx="4">
+                  <c:v>Sul</c:v>
+                </c:pt>
+              </c:strCache>
+            </c:strRef>
           </c:cat>
           <c:val>
             <c:numRef>
@@ -306,23 +266,28 @@
                 <c:formatCode>General</c:formatCode>
                 <c:ptCount val="5"/>
                 <c:pt idx="0">
-                  <c:v>0.271</c:v>
+                  <c:v>0.27100000000000002</c:v>
                 </c:pt>
                 <c:pt idx="1">
-                  <c:v>0.176</c:v>
+                  <c:v>0.17599999999999999</c:v>
                 </c:pt>
                 <c:pt idx="2">
-                  <c:v>0.094</c:v>
+                  <c:v>9.4E-2</c:v>
                 </c:pt>
                 <c:pt idx="3">
-                  <c:v>0.054</c:v>
+                  <c:v>5.3999999999999999E-2</c:v>
                 </c:pt>
                 <c:pt idx="4">
-                  <c:v>0.039</c:v>
+                  <c:v>3.9E-2</c:v>
                 </c:pt>
               </c:numCache>
             </c:numRef>
           </c:val>
+          <c:extLst>
+            <c:ext xmlns:c16="http://schemas.microsoft.com/office/drawing/2014/chart" uri="{C3380CC4-5D6E-409C-BE32-E72D297353CC}">
+              <c16:uniqueId val="{00000001-14BB-40E2-9F8B-B34F400800C1}"/>
+            </c:ext>
+          </c:extLst>
         </c:ser>
         <c:ser>
           <c:idx val="2"/>
@@ -345,54 +310,28 @@
             <a:effectLst/>
           </c:spPr>
           <c:invertIfNegative val="0"/>
-          <c:dLbls>
-            <c:numFmt formatCode="#,##0" sourceLinked="0"/>
-            <c:txPr>
-              <a:bodyPr/>
-              <a:lstStyle/>
-              <a:p>
-                <a:pPr>
-                  <a:defRPr b="0" i="0" strike="noStrike" sz="1200" u="none">
-                    <a:solidFill>
-                      <a:srgbClr val="000000"/>
-                    </a:solidFill>
-                    <a:latin typeface="Arial"/>
-                  </a:defRPr>
-                </a:pPr>
-              </a:p>
-            </c:txPr>
-            <c:showLegendKey val="0"/>
-            <c:showVal val="0"/>
-            <c:showCatName val="0"/>
-            <c:showSerName val="0"/>
-            <c:showPercent val="0"/>
-            <c:showBubbleSize val="0"/>
-            <c:showLeaderLines val="0"/>
-          </c:dLbls>
           <c:cat>
-            <c:multiLvlStrRef>
+            <c:strRef>
               <c:f>Sheet1!$A$2:$A$6</c:f>
-              <c:multiLvlStrCache>
+              <c:strCache>
                 <c:ptCount val="5"/>
-                <c:lvl>
-                  <c:pt idx="0">
-                    <c:v>Norte</c:v>
-                  </c:pt>
-                  <c:pt idx="1">
-                    <c:v>Nordeste</c:v>
-                  </c:pt>
-                  <c:pt idx="2">
-                    <c:v>Centro-Oeste</c:v>
-                  </c:pt>
-                  <c:pt idx="3">
-                    <c:v>Sudeste</c:v>
-                  </c:pt>
-                  <c:pt idx="4">
-                    <c:v>Sul</c:v>
-                  </c:pt>
-                </c:lvl>
-              </c:multiLvlStrCache>
-            </c:multiLvlStrRef>
+                <c:pt idx="0">
+                  <c:v>Norte</c:v>
+                </c:pt>
+                <c:pt idx="1">
+                  <c:v>Nordeste</c:v>
+                </c:pt>
+                <c:pt idx="2">
+                  <c:v>Centro-Oeste</c:v>
+                </c:pt>
+                <c:pt idx="3">
+                  <c:v>Sudeste</c:v>
+                </c:pt>
+                <c:pt idx="4">
+                  <c:v>Sul</c:v>
+                </c:pt>
+              </c:strCache>
+            </c:strRef>
           </c:cat>
           <c:val>
             <c:numRef>
@@ -401,10 +340,10 @@
                 <c:formatCode>General</c:formatCode>
                 <c:ptCount val="5"/>
                 <c:pt idx="0">
-                  <c:v>0.14</c:v>
+                  <c:v>0.14000000000000001</c:v>
                 </c:pt>
                 <c:pt idx="1">
-                  <c:v>0.165</c:v>
+                  <c:v>0.16500000000000001</c:v>
                 </c:pt>
                 <c:pt idx="2">
                   <c:v>0.12</c:v>
@@ -418,36 +357,23 @@
               </c:numCache>
             </c:numRef>
           </c:val>
+          <c:extLst>
+            <c:ext xmlns:c16="http://schemas.microsoft.com/office/drawing/2014/chart" uri="{C3380CC4-5D6E-409C-BE32-E72D297353CC}">
+              <c16:uniqueId val="{00000002-14BB-40E2-9F8B-B34F400800C1}"/>
+            </c:ext>
+          </c:extLst>
         </c:ser>
         <c:dLbls>
-          <c:numFmt formatCode="#,##0" sourceLinked="0"/>
-          <c:txPr>
-            <a:bodyPr/>
-            <a:lstStyle/>
-            <a:p>
-              <a:pPr>
-                <a:defRPr b="0" i="0" strike="noStrike" sz="1200" u="none">
-                  <a:solidFill>
-                    <a:srgbClr val="000000"/>
-                  </a:solidFill>
-                  <a:latin typeface="Arial"/>
-                </a:defRPr>
-              </a:pPr>
-            </a:p>
-          </c:txPr>
           <c:showLegendKey val="0"/>
           <c:showVal val="0"/>
           <c:showCatName val="0"/>
           <c:showSerName val="0"/>
           <c:showPercent val="0"/>
           <c:showBubbleSize val="0"/>
-          <c:showLeaderLines val="0"/>
         </c:dLbls>
         <c:gapWidth val="150"/>
-        <c:overlap val="0"/>
         <c:axId val="2094734554"/>
         <c:axId val="2094734552"/>
-        <c:axId val="2094734556"/>
       </c:barChart>
       <c:catAx>
         <c:axId val="2094734554"/>
@@ -488,6 +414,7 @@
         <c:crosses val="autoZero"/>
         <c:auto val="1"/>
         <c:lblAlgn val="ctr"/>
+        <c:lblOffset val="100"/>
         <c:noMultiLvlLbl val="1"/>
       </c:catAx>
       <c:valAx>
@@ -558,7 +485,7 @@
         <a:lstStyle/>
         <a:p>
           <a:pPr>
-            <a:defRPr sz="1100">      </a:defRPr>
+            <a:defRPr sz="1100"/>
           </a:pPr>
           <a:endParaRPr lang="en-US"/>
         </a:p>
@@ -566,6 +493,7 @@
     </c:legend>
     <c:plotVisOnly val="1"/>
     <c:dispBlanksAs val="span"/>
+    <c:showDLblsOverMax val="1"/>
   </c:chart>
   <c:spPr>
     <a:solidFill>
@@ -604,234 +532,10 @@
           <a:chExt cx="0" cy="0"/>
         </a:xfrm>
       </p:grpSpPr>
-      <p:sp>
-        <p:nvSpPr>
-          <p:cNvPr id="2" name="Header Placeholder 1"/>
-          <p:cNvSpPr>
-            <a:spLocks noGrp="1"/>
-          </p:cNvSpPr>
-          <p:nvPr>
-            <p:ph type="hdr" sz="quarter"/>
-          </p:nvPr>
-        </p:nvSpPr>
-        <p:spPr>
-          <a:xfrm>
-            <a:off x="0" y="0"/>
-            <a:ext cx="2971800" cy="458788"/>
-          </a:xfrm>
-          <a:prstGeom prst="rect">
-            <a:avLst/>
-          </a:prstGeom>
-        </p:spPr>
-        <p:txBody>
-          <a:bodyPr vert="horz" lIns="91440" tIns="45720" rIns="91440" bIns="45720" rtlCol="0"/>
-          <a:lstStyle>
-            <a:lvl1pPr algn="l">
-              <a:defRPr sz="1200"/>
-            </a:lvl1pPr>
-          </a:lstStyle>
-          <a:p>
-            <a:endParaRPr lang="en-US"/>
-          </a:p>
-        </p:txBody>
-      </p:sp>
-      <p:sp>
-        <p:nvSpPr>
-          <p:cNvPr id="3" name="Date Placeholder 2"/>
-          <p:cNvSpPr>
-            <a:spLocks noGrp="1"/>
-          </p:cNvSpPr>
-          <p:nvPr>
-            <p:ph type="dt" idx="1"/>
-          </p:nvPr>
-        </p:nvSpPr>
-        <p:spPr>
-          <a:xfrm>
-            <a:off x="3884613" y="0"/>
-            <a:ext cx="2971800" cy="458788"/>
-          </a:xfrm>
-          <a:prstGeom prst="rect">
-            <a:avLst/>
-          </a:prstGeom>
-        </p:spPr>
-        <p:txBody>
-          <a:bodyPr vert="horz" lIns="91440" tIns="45720" rIns="91440" bIns="45720" rtlCol="0"/>
-          <a:lstStyle>
-            <a:lvl1pPr algn="r">
-              <a:defRPr sz="1200"/>
-            </a:lvl1pPr>
-          </a:lstStyle>
-          <a:p>
-            <a:fld id="{5282F153-3F37-0F45-9E97-73ACFA13230C}" type="datetimeFigureOut">
-              <a:rPr lang="en-US"/>
-              <a:t>7/23/19</a:t>
-            </a:fld>
-            <a:endParaRPr lang="en-US"/>
-          </a:p>
-        </p:txBody>
-      </p:sp>
-      <p:sp>
-        <p:nvSpPr>
-          <p:cNvPr id="4" name="Slide Image Placeholder 3"/>
-          <p:cNvSpPr>
-            <a:spLocks noGrp="1" noRot="1" noChangeAspect="1"/>
-          </p:cNvSpPr>
-          <p:nvPr>
-            <p:ph type="sldImg" idx="2"/>
-          </p:nvPr>
-        </p:nvSpPr>
-        <p:spPr>
-          <a:xfrm>
-            <a:off x="685800" y="1143000"/>
-            <a:ext cx="5486400" cy="3086100"/>
-          </a:xfrm>
-          <a:prstGeom prst="rect">
-            <a:avLst/>
-          </a:prstGeom>
-          <a:noFill/>
-          <a:ln w="12700">
-            <a:solidFill>
-              <a:prstClr val="black"/>
-            </a:solidFill>
-          </a:ln>
-        </p:spPr>
-        <p:txBody>
-          <a:bodyPr vert="horz" lIns="91440" tIns="45720" rIns="91440" bIns="45720" rtlCol="0" anchor="ctr"/>
-          <a:lstStyle/>
-          <a:p>
-            <a:endParaRPr lang="en-US"/>
-          </a:p>
-        </p:txBody>
-      </p:sp>
-      <p:sp>
-        <p:nvSpPr>
-          <p:cNvPr id="5" name="Notes Placeholder 4"/>
-          <p:cNvSpPr>
-            <a:spLocks noGrp="1"/>
-          </p:cNvSpPr>
-          <p:nvPr>
-            <p:ph type="body" sz="quarter" idx="3"/>
-          </p:nvPr>
-        </p:nvSpPr>
-        <p:spPr>
-          <a:xfrm>
-            <a:off x="685800" y="4400550"/>
-            <a:ext cx="5486400" cy="3600450"/>
-          </a:xfrm>
-          <a:prstGeom prst="rect">
-            <a:avLst/>
-          </a:prstGeom>
-        </p:spPr>
-        <p:txBody>
-          <a:bodyPr vert="horz" lIns="91440" tIns="45720" rIns="91440" bIns="45720" rtlCol="0"/>
-          <a:lstStyle/>
-          <a:p>
-            <a:pPr lvl="0"/>
-            <a:r>
-              <a:rPr lang="en-US"/>
-              <a:t>Click to edit Master text styles</a:t>
-            </a:r>
-          </a:p>
-          <a:p>
-            <a:pPr lvl="1"/>
-            <a:r>
-              <a:rPr lang="en-US"/>
-              <a:t>Second level</a:t>
-            </a:r>
-          </a:p>
-          <a:p>
-            <a:pPr lvl="2"/>
-            <a:r>
-              <a:rPr lang="en-US"/>
-              <a:t>Third level</a:t>
-            </a:r>
-          </a:p>
-          <a:p>
-            <a:pPr lvl="3"/>
-            <a:r>
-              <a:rPr lang="en-US"/>
-              <a:t>Fourth level</a:t>
-            </a:r>
-          </a:p>
-          <a:p>
-            <a:pPr lvl="4"/>
-            <a:r>
-              <a:rPr lang="en-US"/>
-              <a:t>Fifth level</a:t>
-            </a:r>
-          </a:p>
-        </p:txBody>
-      </p:sp>
-      <p:sp>
-        <p:nvSpPr>
-          <p:cNvPr id="6" name="Footer Placeholder 5"/>
-          <p:cNvSpPr>
-            <a:spLocks noGrp="1"/>
-          </p:cNvSpPr>
-          <p:nvPr>
-            <p:ph type="ftr" sz="quarter" idx="4"/>
-          </p:nvPr>
-        </p:nvSpPr>
-        <p:spPr>
-          <a:xfrm>
-            <a:off x="0" y="8685213"/>
-            <a:ext cx="2971800" cy="458787"/>
-          </a:xfrm>
-          <a:prstGeom prst="rect">
-            <a:avLst/>
-          </a:prstGeom>
-        </p:spPr>
-        <p:txBody>
-          <a:bodyPr vert="horz" lIns="91440" tIns="45720" rIns="91440" bIns="45720" rtlCol="0" anchor="b"/>
-          <a:lstStyle>
-            <a:lvl1pPr algn="l">
-              <a:defRPr sz="1200"/>
-            </a:lvl1pPr>
-          </a:lstStyle>
-          <a:p>
-            <a:endParaRPr lang="en-US"/>
-          </a:p>
-        </p:txBody>
-      </p:sp>
-      <p:sp>
-        <p:nvSpPr>
-          <p:cNvPr id="7" name="Slide Number Placeholder 6"/>
-          <p:cNvSpPr>
-            <a:spLocks noGrp="1"/>
-          </p:cNvSpPr>
-          <p:nvPr>
-            <p:ph type="sldNum" sz="quarter" idx="5"/>
-          </p:nvPr>
-        </p:nvSpPr>
-        <p:spPr>
-          <a:xfrm>
-            <a:off x="3884613" y="8685213"/>
-            <a:ext cx="2971800" cy="458787"/>
-          </a:xfrm>
-          <a:prstGeom prst="rect">
-            <a:avLst/>
-          </a:prstGeom>
-        </p:spPr>
-        <p:txBody>
-          <a:bodyPr vert="horz" lIns="91440" tIns="45720" rIns="91440" bIns="45720" rtlCol="0" anchor="b"/>
-          <a:lstStyle>
-            <a:lvl1pPr algn="r">
-              <a:defRPr sz="1200"/>
-            </a:lvl1pPr>
-          </a:lstStyle>
-          <a:p>
-            <a:fld id="{CE5E9CC1-C706-0F49-92D6-E571CC5EEA8F}" type="slidenum">
-              <a:rPr lang="en-US"/>
-              <a:t>‹#›</a:t>
-            </a:fld>
-            <a:endParaRPr lang="en-US"/>
-          </a:p>
-        </p:txBody>
-      </p:sp>
     </p:spTree>
     <p:extLst>
       <p:ext uri="{BB962C8B-B14F-4D97-AF65-F5344CB8AC3E}">
-        <p14:creationId xmlns:p14="http://schemas.microsoft.com/office/powerpoint/2010/main" val="1024086991"/>
+        <p14:creationId xmlns:p14="http://schemas.microsoft.com/office/powerpoint/2010/main" val="2621370036"/>
       </p:ext>
     </p:extLst>
   </p:cSld>
@@ -975,10 +679,6 @@
           <a:bodyPr/>
           <a:lstStyle/>
           <a:p>
-            <a:r>
-              <a:rPr lang="en-US" dirty="0"/>
-              <a:t/>
-            </a:r>
             <a:endParaRPr lang="en-US" dirty="0"/>
           </a:p>
         </p:txBody>
@@ -1063,10 +763,6 @@
           <a:bodyPr/>
           <a:lstStyle/>
           <a:p>
-            <a:r>
-              <a:rPr lang="en-US" dirty="0"/>
-              <a:t/>
-            </a:r>
             <a:endParaRPr lang="en-US" dirty="0"/>
           </a:p>
         </p:txBody>
@@ -1151,10 +847,6 @@
           <a:bodyPr/>
           <a:lstStyle/>
           <a:p>
-            <a:r>
-              <a:rPr lang="en-US" dirty="0"/>
-              <a:t/>
-            </a:r>
             <a:endParaRPr lang="en-US" dirty="0"/>
           </a:p>
         </p:txBody>
@@ -1239,10 +931,6 @@
           <a:bodyPr/>
           <a:lstStyle/>
           <a:p>
-            <a:r>
-              <a:rPr lang="en-US" dirty="0"/>
-              <a:t/>
-            </a:r>
             <a:endParaRPr lang="en-US" dirty="0"/>
           </a:p>
         </p:txBody>
@@ -1327,10 +1015,6 @@
           <a:bodyPr/>
           <a:lstStyle/>
           <a:p>
-            <a:r>
-              <a:rPr lang="en-US" dirty="0"/>
-              <a:t/>
-            </a:r>
             <a:endParaRPr lang="en-US" dirty="0"/>
           </a:p>
         </p:txBody>
@@ -1415,10 +1099,6 @@
           <a:bodyPr/>
           <a:lstStyle/>
           <a:p>
-            <a:r>
-              <a:rPr lang="en-US" dirty="0"/>
-              <a:t/>
-            </a:r>
             <a:endParaRPr lang="en-US" dirty="0"/>
           </a:p>
         </p:txBody>
@@ -1503,10 +1183,6 @@
           <a:bodyPr/>
           <a:lstStyle/>
           <a:p>
-            <a:r>
-              <a:rPr lang="en-US" dirty="0"/>
-              <a:t/>
-            </a:r>
             <a:endParaRPr lang="en-US" dirty="0"/>
           </a:p>
         </p:txBody>
@@ -1591,10 +1267,6 @@
           <a:bodyPr/>
           <a:lstStyle/>
           <a:p>
-            <a:r>
-              <a:rPr lang="en-US" dirty="0"/>
-              <a:t/>
-            </a:r>
             <a:endParaRPr lang="en-US" dirty="0"/>
           </a:p>
         </p:txBody>
@@ -1679,10 +1351,6 @@
           <a:bodyPr/>
           <a:lstStyle/>
           <a:p>
-            <a:r>
-              <a:rPr lang="en-US" dirty="0"/>
-              <a:t/>
-            </a:r>
             <a:endParaRPr lang="en-US" dirty="0"/>
           </a:p>
         </p:txBody>
@@ -1767,10 +1435,6 @@
           <a:bodyPr/>
           <a:lstStyle/>
           <a:p>
-            <a:r>
-              <a:rPr lang="en-US" dirty="0"/>
-              <a:t/>
-            </a:r>
             <a:endParaRPr lang="en-US" dirty="0"/>
           </a:p>
         </p:txBody>
@@ -1855,10 +1519,6 @@
           <a:bodyPr/>
           <a:lstStyle/>
           <a:p>
-            <a:r>
-              <a:rPr lang="en-US" dirty="0"/>
-              <a:t/>
-            </a:r>
             <a:endParaRPr lang="en-US" dirty="0"/>
           </a:p>
         </p:txBody>
@@ -1943,10 +1603,6 @@
           <a:bodyPr/>
           <a:lstStyle/>
           <a:p>
-            <a:r>
-              <a:rPr lang="en-US" dirty="0"/>
-              <a:t/>
-            </a:r>
             <a:endParaRPr lang="en-US" dirty="0"/>
           </a:p>
         </p:txBody>
@@ -2031,10 +1687,6 @@
           <a:bodyPr/>
           <a:lstStyle/>
           <a:p>
-            <a:r>
-              <a:rPr lang="en-US" dirty="0"/>
-              <a:t/>
-            </a:r>
             <a:endParaRPr lang="en-US" dirty="0"/>
           </a:p>
         </p:txBody>
@@ -2119,10 +1771,6 @@
           <a:bodyPr/>
           <a:lstStyle/>
           <a:p>
-            <a:r>
-              <a:rPr lang="en-US" dirty="0"/>
-              <a:t/>
-            </a:r>
             <a:endParaRPr lang="en-US" dirty="0"/>
           </a:p>
         </p:txBody>
@@ -2207,10 +1855,6 @@
           <a:bodyPr/>
           <a:lstStyle/>
           <a:p>
-            <a:r>
-              <a:rPr lang="en-US" dirty="0"/>
-              <a:t/>
-            </a:r>
             <a:endParaRPr lang="en-US" dirty="0"/>
           </a:p>
         </p:txBody>
@@ -2295,10 +1939,6 @@
           <a:bodyPr/>
           <a:lstStyle/>
           <a:p>
-            <a:r>
-              <a:rPr lang="en-US" dirty="0"/>
-              <a:t/>
-            </a:r>
             <a:endParaRPr lang="en-US" dirty="0"/>
           </a:p>
         </p:txBody>
@@ -2372,6 +2012,11 @@
 <file path=ppt/slideMasters/slideMaster1.xml><?xml version="1.0" encoding="utf-8"?>
 <p:sldMaster xmlns:a="http://schemas.openxmlformats.org/drawingml/2006/main" xmlns:r="http://schemas.openxmlformats.org/officeDocument/2006/relationships" xmlns:p="http://schemas.openxmlformats.org/presentationml/2006/main">
   <p:cSld>
+    <p:bg>
+      <p:bgRef idx="1001">
+        <a:schemeClr val="bg1"/>
+      </p:bgRef>
+    </p:bg>
     <p:spTree>
       <p:nvGrpSpPr>
         <p:cNvPr id="1" name=""/>
@@ -2654,6 +2299,7 @@
         <a:solidFill>
           <a:srgbClr val="0B2447"/>
         </a:solidFill>
+        <a:effectLst/>
       </p:bgPr>
     </p:bg>
     <p:spTree>
@@ -2689,6 +2335,13 @@
           </a:solidFill>
           <a:ln/>
         </p:spPr>
+        <p:txBody>
+          <a:bodyPr/>
+          <a:lstStyle/>
+          <a:p>
+            <a:endParaRPr lang="pt-BR" noProof="0" dirty="0"/>
+          </a:p>
+        </p:txBody>
       </p:sp>
       <p:sp>
         <p:nvSpPr>
@@ -2711,11 +2364,11 @@
           <a:bodyPr wrap="square" lIns="0" tIns="0" rIns="0" bIns="0" rtlCol="0" anchor="ctr"/>
           <a:lstStyle/>
           <a:p>
-            <a:pPr indent="0" marL="0">
+            <a:pPr marL="0" indent="0">
               <a:buNone/>
             </a:pPr>
             <a:r>
-              <a:rPr lang="en-US" sz="1300" b="1" spc="200" kern="0" dirty="0">
+              <a:rPr lang="pt-BR" sz="1300" b="1" kern="0" spc="200" noProof="0" dirty="0">
                 <a:solidFill>
                   <a:srgbClr val="8FB7D9"/>
                 </a:solidFill>
@@ -2725,7 +2378,7 @@
               </a:rPr>
               <a:t>REVISÃO DA ANÁLISE EXPLORATÓRIA  ·  FASE 3</a:t>
             </a:r>
-            <a:endParaRPr lang="en-US" sz="1300" dirty="0"/>
+            <a:endParaRPr lang="pt-BR" sz="1300" noProof="0" dirty="0"/>
           </a:p>
         </p:txBody>
       </p:sp>
@@ -2750,14 +2403,14 @@
           <a:bodyPr wrap="square" lIns="0" tIns="0" rIns="0" bIns="0" rtlCol="0" anchor="ctr"/>
           <a:lstStyle/>
           <a:p>
-            <a:pPr indent="0" marL="0">
+            <a:pPr marL="0" indent="0">
               <a:lnSpc>
                 <a:spcPct val="102000"/>
               </a:lnSpc>
               <a:buNone/>
             </a:pPr>
             <a:r>
-              <a:rPr lang="en-US" sz="3800" b="1" dirty="0">
+              <a:rPr lang="pt-BR" sz="3800" b="1" noProof="0" dirty="0">
                 <a:solidFill>
                   <a:srgbClr val="FFFFFF"/>
                 </a:solidFill>
@@ -2767,17 +2420,17 @@
               </a:rPr>
               <a:t>O que mudou na EDA</a:t>
             </a:r>
-            <a:endParaRPr lang="en-US" sz="3800" dirty="0"/>
-          </a:p>
-          <a:p>
-            <a:pPr indent="0" marL="0">
+            <a:endParaRPr lang="pt-BR" sz="3800" noProof="0" dirty="0"/>
+          </a:p>
+          <a:p>
+            <a:pPr marL="0" indent="0">
               <a:lnSpc>
                 <a:spcPct val="102000"/>
               </a:lnSpc>
               <a:buNone/>
             </a:pPr>
             <a:r>
-              <a:rPr lang="en-US" sz="3800" b="1" dirty="0">
+              <a:rPr lang="pt-BR" sz="3800" b="1" noProof="0" dirty="0">
                 <a:solidFill>
                   <a:srgbClr val="FFFFFF"/>
                 </a:solidFill>
@@ -2787,46 +2440,7 @@
               </a:rPr>
               <a:t>do IVS — e por quê</a:t>
             </a:r>
-            <a:endParaRPr lang="en-US" sz="3800" dirty="0"/>
-          </a:p>
-        </p:txBody>
-      </p:sp>
-      <p:sp>
-        <p:nvSpPr>
-          <p:cNvPr id="5" name="Text 3"/>
-          <p:cNvSpPr/>
-          <p:nvPr/>
-        </p:nvSpPr>
-        <p:spPr>
-          <a:xfrm>
-            <a:off x="822960" y="2788920"/>
-            <a:ext cx="7863840" cy="365760"/>
-          </a:xfrm>
-          <a:prstGeom prst="rect">
-            <a:avLst/>
-          </a:prstGeom>
-          <a:noFill/>
-          <a:ln/>
-        </p:spPr>
-        <p:txBody>
-          <a:bodyPr wrap="square" lIns="0" tIns="0" rIns="0" bIns="0" rtlCol="0" anchor="ctr"/>
-          <a:lstStyle/>
-          <a:p>
-            <a:pPr indent="0" marL="0">
-              <a:buNone/>
-            </a:pPr>
-            <a:r>
-              <a:rPr lang="en-US" sz="1500" i="1" dirty="0">
-                <a:solidFill>
-                  <a:srgbClr val="CADCFC"/>
-                </a:solidFill>
-                <a:latin typeface="Calibri" pitchFamily="34" charset="0"/>
-                <a:ea typeface="Calibri" pitchFamily="34" charset="-122"/>
-                <a:cs typeface="Calibri" pitchFamily="34" charset="-120"/>
-              </a:rPr>
-              <a:t>Comparação entre a versão de 15/05 e a versão corrigida de 22/05/2026</a:t>
-            </a:r>
-            <a:endParaRPr lang="en-US" sz="1500" dirty="0"/>
+            <a:endParaRPr lang="pt-BR" sz="3800" noProof="0" dirty="0"/>
           </a:p>
         </p:txBody>
       </p:sp>
@@ -2856,6 +2470,13 @@
             <a:prstDash val="solid"/>
           </a:ln>
         </p:spPr>
+        <p:txBody>
+          <a:bodyPr/>
+          <a:lstStyle/>
+          <a:p>
+            <a:endParaRPr lang="pt-BR" noProof="0" dirty="0"/>
+          </a:p>
+        </p:txBody>
       </p:sp>
       <p:sp>
         <p:nvSpPr>
@@ -2878,11 +2499,11 @@
           <a:bodyPr wrap="square" lIns="0" tIns="0" rIns="0" bIns="0" rtlCol="0" anchor="ctr"/>
           <a:lstStyle/>
           <a:p>
-            <a:pPr indent="0" marL="0">
+            <a:pPr marL="0" indent="0">
               <a:buNone/>
             </a:pPr>
             <a:r>
-              <a:rPr lang="en-US" sz="1300" b="1" dirty="0">
+              <a:rPr lang="pt-BR" sz="1300" b="1" noProof="0" dirty="0">
                 <a:solidFill>
                   <a:srgbClr val="FFFFFF"/>
                 </a:solidFill>
@@ -2892,7 +2513,7 @@
               </a:rPr>
               <a:t>Denominador domiciliar</a:t>
             </a:r>
-            <a:endParaRPr lang="en-US" sz="1300" dirty="0"/>
+            <a:endParaRPr lang="pt-BR" sz="1300" noProof="0" dirty="0"/>
           </a:p>
         </p:txBody>
       </p:sp>
@@ -2917,11 +2538,11 @@
           <a:bodyPr wrap="square" lIns="0" tIns="0" rIns="0" bIns="0" rtlCol="0" anchor="ctr"/>
           <a:lstStyle/>
           <a:p>
-            <a:pPr indent="0" marL="0">
+            <a:pPr marL="0" indent="0">
               <a:buNone/>
             </a:pPr>
             <a:r>
-              <a:rPr lang="en-US" sz="1100" dirty="0">
+              <a:rPr lang="pt-BR" sz="1100" noProof="0" dirty="0">
                 <a:solidFill>
                   <a:srgbClr val="AFC4DA"/>
                 </a:solidFill>
@@ -2931,7 +2552,7 @@
               </a:rPr>
               <a:t>V01042 (pessoas) → V00001 (domicílios)</a:t>
             </a:r>
-            <a:endParaRPr lang="en-US" sz="1100" dirty="0"/>
+            <a:endParaRPr lang="pt-BR" sz="1100" noProof="0" dirty="0"/>
           </a:p>
         </p:txBody>
       </p:sp>
@@ -2961,6 +2582,13 @@
             <a:prstDash val="solid"/>
           </a:ln>
         </p:spPr>
+        <p:txBody>
+          <a:bodyPr/>
+          <a:lstStyle/>
+          <a:p>
+            <a:endParaRPr lang="pt-BR" noProof="0" dirty="0"/>
+          </a:p>
+        </p:txBody>
       </p:sp>
       <p:sp>
         <p:nvSpPr>
@@ -2983,11 +2611,11 @@
           <a:bodyPr wrap="square" lIns="0" tIns="0" rIns="0" bIns="0" rtlCol="0" anchor="ctr"/>
           <a:lstStyle/>
           <a:p>
-            <a:pPr indent="0" marL="0">
+            <a:pPr marL="0" indent="0">
               <a:buNone/>
             </a:pPr>
             <a:r>
-              <a:rPr lang="en-US" sz="1300" b="1" dirty="0">
+              <a:rPr lang="pt-BR" sz="1300" b="1" noProof="0" dirty="0">
                 <a:solidFill>
                   <a:srgbClr val="FFFFFF"/>
                 </a:solidFill>
@@ -2997,7 +2625,7 @@
               </a:rPr>
               <a:t>Taxa de analfabetismo</a:t>
             </a:r>
-            <a:endParaRPr lang="en-US" sz="1300" dirty="0"/>
+            <a:endParaRPr lang="pt-BR" sz="1300" noProof="0" dirty="0"/>
           </a:p>
         </p:txBody>
       </p:sp>
@@ -3022,11 +2650,11 @@
           <a:bodyPr wrap="square" lIns="0" tIns="0" rIns="0" bIns="0" rtlCol="0" anchor="ctr"/>
           <a:lstStyle/>
           <a:p>
-            <a:pPr indent="0" marL="0">
+            <a:pPr marL="0" indent="0">
               <a:buNone/>
             </a:pPr>
             <a:r>
-              <a:rPr lang="en-US" sz="1100" dirty="0">
+              <a:rPr lang="pt-BR" sz="1100" noProof="0" dirty="0">
                 <a:solidFill>
                   <a:srgbClr val="AFC4DA"/>
                 </a:solidFill>
@@ -3036,46 +2664,7 @@
               </a:rPr>
               <a:t>÷ V00900 → ÷ (V00900 + V00901)</a:t>
             </a:r>
-            <a:endParaRPr lang="en-US" sz="1100" dirty="0"/>
-          </a:p>
-        </p:txBody>
-      </p:sp>
-      <p:sp>
-        <p:nvSpPr>
-          <p:cNvPr id="12" name="Text 10"/>
-          <p:cNvSpPr/>
-          <p:nvPr/>
-        </p:nvSpPr>
-        <p:spPr>
-          <a:xfrm>
-            <a:off x="822960" y="4572000"/>
-            <a:ext cx="7863840" cy="320040"/>
-          </a:xfrm>
-          <a:prstGeom prst="rect">
-            <a:avLst/>
-          </a:prstGeom>
-          <a:noFill/>
-          <a:ln/>
-        </p:spPr>
-        <p:txBody>
-          <a:bodyPr wrap="square" lIns="0" tIns="0" rIns="0" bIns="0" rtlCol="0" anchor="ctr"/>
-          <a:lstStyle/>
-          <a:p>
-            <a:pPr indent="0" marL="0">
-              <a:buNone/>
-            </a:pPr>
-            <a:r>
-              <a:rPr lang="en-US" sz="1200" dirty="0">
-                <a:solidFill>
-                  <a:srgbClr val="7E97AE"/>
-                </a:solidFill>
-                <a:latin typeface="Calibri" pitchFamily="34" charset="0"/>
-                <a:ea typeface="Calibri" pitchFamily="34" charset="-122"/>
-                <a:cs typeface="Calibri" pitchFamily="34" charset="-120"/>
-              </a:rPr>
-              <a:t>Pedro Dias Soares  ·  Iniciação Científica  ·  Fiocruz Minas — IRR</a:t>
-            </a:r>
-            <a:endParaRPr lang="en-US" sz="1200" dirty="0"/>
+            <a:endParaRPr lang="pt-BR" sz="1100" noProof="0" dirty="0"/>
           </a:p>
         </p:txBody>
       </p:sp>
@@ -3095,6 +2684,7 @@
         <a:solidFill>
           <a:srgbClr val="FFFFFF"/>
         </a:solidFill>
+        <a:effectLst/>
       </p:bgPr>
     </p:bg>
     <p:spTree>
@@ -3132,11 +2722,11 @@
           <a:bodyPr wrap="square" lIns="0" tIns="0" rIns="0" bIns="0" rtlCol="0" anchor="ctr"/>
           <a:lstStyle/>
           <a:p>
-            <a:pPr indent="0" marL="0">
+            <a:pPr marL="0" indent="0">
               <a:buNone/>
             </a:pPr>
             <a:r>
-              <a:rPr lang="en-US" sz="1100" b="1" spc="200" kern="0" dirty="0">
+              <a:rPr lang="pt-BR" sz="1100" b="1" kern="0" spc="200" noProof="0" dirty="0">
                 <a:solidFill>
                   <a:srgbClr val="1C7293"/>
                 </a:solidFill>
@@ -3146,7 +2736,7 @@
               </a:rPr>
               <a:t>COMPARATIVO</a:t>
             </a:r>
-            <a:endParaRPr lang="en-US" sz="1100" dirty="0"/>
+            <a:endParaRPr lang="pt-BR" sz="1100" noProof="0" dirty="0"/>
           </a:p>
         </p:txBody>
       </p:sp>
@@ -3171,11 +2761,11 @@
           <a:bodyPr wrap="square" lIns="0" tIns="0" rIns="0" bIns="0" rtlCol="0" anchor="ctr"/>
           <a:lstStyle/>
           <a:p>
-            <a:pPr indent="0" marL="0">
+            <a:pPr marL="0" indent="0">
               <a:buNone/>
             </a:pPr>
             <a:r>
-              <a:rPr lang="en-US" sz="2500" b="1" dirty="0">
+              <a:rPr lang="pt-BR" sz="2500" b="1" noProof="0" dirty="0">
                 <a:solidFill>
                   <a:srgbClr val="1E2A36"/>
                 </a:solidFill>
@@ -3185,7 +2775,7 @@
               </a:rPr>
               <a:t>Descritivas: EDA antiga × EDA nova</a:t>
             </a:r>
-            <a:endParaRPr lang="en-US" sz="2500" dirty="0"/>
+            <a:endParaRPr lang="pt-BR" sz="2500" noProof="0" dirty="0"/>
           </a:p>
         </p:txBody>
       </p:sp>
@@ -3198,25 +2788,55 @@
           <p:nvPr>
             <p:extLst>
               <p:ext uri="{D42A27DB-BD31-4B8C-83A1-F6EECF244321}">
-                <p14:modId xmlns:p14="http://schemas.microsoft.com/office/powerpoint/2010/main" val="1579011935"/>
+                <p14:modId xmlns:p14="http://schemas.microsoft.com/office/powerpoint/2010/main" val="2620005971"/>
               </p:ext>
             </p:extLst>
           </p:nvPr>
         </p:nvGraphicFramePr>
         <p:xfrm>
           <a:off x="457200" y="1188720"/>
-          <a:ext cx="8229600" cy="914400"/>
+          <a:ext cx="8229600" cy="2921508"/>
         </p:xfrm>
         <a:graphic>
           <a:graphicData uri="http://schemas.openxmlformats.org/drawingml/2006/table">
             <a:tbl>
               <a:tblPr/>
               <a:tblGrid>
-                <a:gridCol w="2377440"/>
-                <a:gridCol w="1371600"/>
-                <a:gridCol w="1554480"/>
-                <a:gridCol w="1463040"/>
-                <a:gridCol w="1463040"/>
+                <a:gridCol w="2377440">
+                  <a:extLst>
+                    <a:ext uri="{9D8B030D-6E8A-4147-A177-3AD203B41FA5}">
+                      <a16:colId xmlns:a16="http://schemas.microsoft.com/office/drawing/2014/main" val="20000"/>
+                    </a:ext>
+                  </a:extLst>
+                </a:gridCol>
+                <a:gridCol w="1371600">
+                  <a:extLst>
+                    <a:ext uri="{9D8B030D-6E8A-4147-A177-3AD203B41FA5}">
+                      <a16:colId xmlns:a16="http://schemas.microsoft.com/office/drawing/2014/main" val="20001"/>
+                    </a:ext>
+                  </a:extLst>
+                </a:gridCol>
+                <a:gridCol w="1554480">
+                  <a:extLst>
+                    <a:ext uri="{9D8B030D-6E8A-4147-A177-3AD203B41FA5}">
+                      <a16:colId xmlns:a16="http://schemas.microsoft.com/office/drawing/2014/main" val="20002"/>
+                    </a:ext>
+                  </a:extLst>
+                </a:gridCol>
+                <a:gridCol w="1463040">
+                  <a:extLst>
+                    <a:ext uri="{9D8B030D-6E8A-4147-A177-3AD203B41FA5}">
+                      <a16:colId xmlns:a16="http://schemas.microsoft.com/office/drawing/2014/main" val="20003"/>
+                    </a:ext>
+                  </a:extLst>
+                </a:gridCol>
+                <a:gridCol w="1463040">
+                  <a:extLst>
+                    <a:ext uri="{9D8B030D-6E8A-4147-A177-3AD203B41FA5}">
+                      <a16:colId xmlns:a16="http://schemas.microsoft.com/office/drawing/2014/main" val="20004"/>
+                    </a:ext>
+                  </a:extLst>
+                </a:gridCol>
               </a:tblGrid>
               <a:tr h="324612">
                 <a:tc>
@@ -3224,11 +2844,11 @@
                     <a:bodyPr/>
                     <a:lstStyle/>
                     <a:p>
-                      <a:pPr algn="ctr" indent="0" marL="0">
+                      <a:pPr marL="0" indent="0" algn="ctr">
                         <a:buNone/>
                       </a:pPr>
                       <a:r>
-                        <a:rPr lang="en-US" sz="1150" b="1" dirty="0">
+                        <a:rPr lang="pt-BR" sz="1150" b="1" noProof="0" dirty="0">
                           <a:solidFill>
                             <a:srgbClr val="FFFFFF"/>
                           </a:solidFill>
@@ -3238,14 +2858,14 @@
                         </a:rPr>
                         <a:t>Indicador</a:t>
                       </a:r>
-                      <a:endParaRPr lang="en-US" sz="1150" dirty="0">
+                      <a:endParaRPr lang="pt-BR" sz="1150" noProof="0" dirty="0">
                         <a:latin typeface="Calibri" charset="0"/>
                         <a:ea typeface="Calibri" charset="0"/>
                         <a:cs typeface="Calibri" charset="0"/>
                       </a:endParaRPr>
                     </a:p>
                   </a:txBody>
-                  <a:tcPr marL="91440" marR="91440" marT="45720" marB="45720" anchor="ctr">
+                  <a:tcPr anchor="ctr">
                     <a:lnL w="6350" cap="flat" cmpd="sng" algn="ctr">
                       <a:solidFill>
                         <a:srgbClr val="D8E2EA"/>
@@ -3292,11 +2912,11 @@
                     <a:bodyPr/>
                     <a:lstStyle/>
                     <a:p>
-                      <a:pPr algn="ctr" indent="0" marL="0">
+                      <a:pPr marL="0" indent="0" algn="ctr">
                         <a:buNone/>
                       </a:pPr>
                       <a:r>
-                        <a:rPr lang="en-US" sz="1150" b="1" dirty="0">
+                        <a:rPr lang="pt-BR" sz="1150" b="1" noProof="0" dirty="0">
                           <a:solidFill>
                             <a:srgbClr val="FFFFFF"/>
                           </a:solidFill>
@@ -3306,14 +2926,14 @@
                         </a:rPr>
                         <a:t>Métrica</a:t>
                       </a:r>
-                      <a:endParaRPr lang="en-US" sz="1150" dirty="0">
+                      <a:endParaRPr lang="pt-BR" sz="1150" noProof="0" dirty="0">
                         <a:latin typeface="Calibri" charset="0"/>
                         <a:ea typeface="Calibri" charset="0"/>
                         <a:cs typeface="Calibri" charset="0"/>
                       </a:endParaRPr>
                     </a:p>
                   </a:txBody>
-                  <a:tcPr marL="91440" marR="91440" marT="45720" marB="45720" anchor="ctr">
+                  <a:tcPr anchor="ctr">
                     <a:lnL w="6350" cap="flat" cmpd="sng" algn="ctr">
                       <a:solidFill>
                         <a:srgbClr val="D8E2EA"/>
@@ -3360,11 +2980,11 @@
                     <a:bodyPr/>
                     <a:lstStyle/>
                     <a:p>
-                      <a:pPr algn="ctr" indent="0" marL="0">
+                      <a:pPr marL="0" indent="0" algn="ctr">
                         <a:buNone/>
                       </a:pPr>
                       <a:r>
-                        <a:rPr lang="en-US" sz="1150" b="1" dirty="0">
+                        <a:rPr lang="pt-BR" sz="1150" b="1" noProof="0" dirty="0">
                           <a:solidFill>
                             <a:srgbClr val="FFFFFF"/>
                           </a:solidFill>
@@ -3374,14 +2994,14 @@
                         </a:rPr>
                         <a:t>Antiga (15/05)</a:t>
                       </a:r>
-                      <a:endParaRPr lang="en-US" sz="1150" dirty="0">
+                      <a:endParaRPr lang="pt-BR" sz="1150" noProof="0" dirty="0">
                         <a:latin typeface="Calibri" charset="0"/>
                         <a:ea typeface="Calibri" charset="0"/>
                         <a:cs typeface="Calibri" charset="0"/>
                       </a:endParaRPr>
                     </a:p>
                   </a:txBody>
-                  <a:tcPr marL="91440" marR="91440" marT="45720" marB="45720" anchor="ctr">
+                  <a:tcPr anchor="ctr">
                     <a:lnL w="6350" cap="flat" cmpd="sng" algn="ctr">
                       <a:solidFill>
                         <a:srgbClr val="D8E2EA"/>
@@ -3428,11 +3048,11 @@
                     <a:bodyPr/>
                     <a:lstStyle/>
                     <a:p>
-                      <a:pPr algn="ctr" indent="0" marL="0">
+                      <a:pPr marL="0" indent="0" algn="ctr">
                         <a:buNone/>
                       </a:pPr>
                       <a:r>
-                        <a:rPr lang="en-US" sz="1150" b="1" dirty="0">
+                        <a:rPr lang="pt-BR" sz="1150" b="1" noProof="0" dirty="0">
                           <a:solidFill>
                             <a:srgbClr val="FFFFFF"/>
                           </a:solidFill>
@@ -3442,14 +3062,14 @@
                         </a:rPr>
                         <a:t>Nova (22/05)</a:t>
                       </a:r>
-                      <a:endParaRPr lang="en-US" sz="1150" dirty="0">
+                      <a:endParaRPr lang="pt-BR" sz="1150" noProof="0" dirty="0">
                         <a:latin typeface="Calibri" charset="0"/>
                         <a:ea typeface="Calibri" charset="0"/>
                         <a:cs typeface="Calibri" charset="0"/>
                       </a:endParaRPr>
                     </a:p>
                   </a:txBody>
-                  <a:tcPr marL="91440" marR="91440" marT="45720" marB="45720" anchor="ctr">
+                  <a:tcPr anchor="ctr">
                     <a:lnL w="6350" cap="flat" cmpd="sng" algn="ctr">
                       <a:solidFill>
                         <a:srgbClr val="D8E2EA"/>
@@ -3496,11 +3116,11 @@
                     <a:bodyPr/>
                     <a:lstStyle/>
                     <a:p>
-                      <a:pPr algn="ctr" indent="0" marL="0">
+                      <a:pPr marL="0" indent="0" algn="ctr">
                         <a:buNone/>
                       </a:pPr>
                       <a:r>
-                        <a:rPr lang="en-US" sz="1150" b="1" dirty="0">
+                        <a:rPr lang="pt-BR" sz="1150" b="1" noProof="0" dirty="0">
                           <a:solidFill>
                             <a:srgbClr val="FFFFFF"/>
                           </a:solidFill>
@@ -3510,14 +3130,14 @@
                         </a:rPr>
                         <a:t>Mudou?</a:t>
                       </a:r>
-                      <a:endParaRPr lang="en-US" sz="1150" dirty="0">
+                      <a:endParaRPr lang="pt-BR" sz="1150" noProof="0" dirty="0">
                         <a:latin typeface="Calibri" charset="0"/>
                         <a:ea typeface="Calibri" charset="0"/>
                         <a:cs typeface="Calibri" charset="0"/>
                       </a:endParaRPr>
                     </a:p>
                   </a:txBody>
-                  <a:tcPr marL="91440" marR="91440" marT="45720" marB="45720" anchor="ctr">
+                  <a:tcPr anchor="ctr">
                     <a:lnL w="6350" cap="flat" cmpd="sng" algn="ctr">
                       <a:solidFill>
                         <a:srgbClr val="D8E2EA"/>
@@ -3559,6 +3179,11 @@
                     </a:solidFill>
                   </a:tcPr>
                 </a:tc>
+                <a:extLst>
+                  <a:ext uri="{0D108BD9-81ED-4DB2-BD59-A6C34878D82A}">
+                    <a16:rowId xmlns:a16="http://schemas.microsoft.com/office/drawing/2014/main" val="10000"/>
+                  </a:ext>
+                </a:extLst>
               </a:tr>
               <a:tr h="324612">
                 <a:tc>
@@ -3566,11 +3191,11 @@
                     <a:bodyPr/>
                     <a:lstStyle/>
                     <a:p>
-                      <a:pPr algn="l" indent="0" marL="0">
+                      <a:pPr marL="0" indent="0" algn="l">
                         <a:buNone/>
                       </a:pPr>
                       <a:r>
-                        <a:rPr lang="en-US" sz="1150" b="1" dirty="0">
+                        <a:rPr lang="pt-BR" sz="1150" b="1" noProof="0" dirty="0">
                           <a:solidFill>
                             <a:srgbClr val="1E2A36"/>
                           </a:solidFill>
@@ -3580,14 +3205,14 @@
                         </a:rPr>
                         <a:t>% água inadequada</a:t>
                       </a:r>
-                      <a:endParaRPr lang="en-US" sz="1150" dirty="0">
+                      <a:endParaRPr lang="pt-BR" sz="1150" noProof="0" dirty="0">
                         <a:latin typeface="Calibri" charset="0"/>
                         <a:ea typeface="Calibri" charset="0"/>
                         <a:cs typeface="Calibri" charset="0"/>
                       </a:endParaRPr>
                     </a:p>
                   </a:txBody>
-                  <a:tcPr marL="91440" marR="91440" marT="45720" marB="45720" anchor="ctr">
+                  <a:tcPr anchor="ctr">
                     <a:lnL w="6350" cap="flat" cmpd="sng" algn="ctr">
                       <a:solidFill>
                         <a:srgbClr val="D8E2EA"/>
@@ -3634,11 +3259,11 @@
                     <a:bodyPr/>
                     <a:lstStyle/>
                     <a:p>
-                      <a:pPr algn="ctr" indent="0" marL="0">
+                      <a:pPr marL="0" indent="0" algn="ctr">
                         <a:buNone/>
                       </a:pPr>
                       <a:r>
-                        <a:rPr lang="en-US" sz="1150" dirty="0">
+                        <a:rPr lang="pt-BR" sz="1150" noProof="0" dirty="0">
                           <a:solidFill>
                             <a:srgbClr val="1E2A36"/>
                           </a:solidFill>
@@ -3648,14 +3273,14 @@
                         </a:rPr>
                         <a:t>média</a:t>
                       </a:r>
-                      <a:endParaRPr lang="en-US" sz="1150" dirty="0">
+                      <a:endParaRPr lang="pt-BR" sz="1150" noProof="0" dirty="0">
                         <a:latin typeface="Calibri" charset="0"/>
                         <a:ea typeface="Calibri" charset="0"/>
                         <a:cs typeface="Calibri" charset="0"/>
                       </a:endParaRPr>
                     </a:p>
                   </a:txBody>
-                  <a:tcPr marL="91440" marR="91440" marT="45720" marB="45720" anchor="ctr">
+                  <a:tcPr anchor="ctr">
                     <a:lnL w="6350" cap="flat" cmpd="sng" algn="ctr">
                       <a:solidFill>
                         <a:srgbClr val="D8E2EA"/>
@@ -3702,11 +3327,11 @@
                     <a:bodyPr/>
                     <a:lstStyle/>
                     <a:p>
-                      <a:pPr algn="ctr" indent="0" marL="0">
+                      <a:pPr marL="0" indent="0" algn="ctr">
                         <a:buNone/>
                       </a:pPr>
                       <a:r>
-                        <a:rPr lang="en-US" sz="1150" dirty="0">
+                        <a:rPr lang="pt-BR" sz="1150" noProof="0" dirty="0">
                           <a:solidFill>
                             <a:srgbClr val="1E2A36"/>
                           </a:solidFill>
@@ -3716,14 +3341,14 @@
                         </a:rPr>
                         <a:t>0,083</a:t>
                       </a:r>
-                      <a:endParaRPr lang="en-US" sz="1150" dirty="0">
+                      <a:endParaRPr lang="pt-BR" sz="1150" noProof="0" dirty="0">
                         <a:latin typeface="Calibri" charset="0"/>
                         <a:ea typeface="Calibri" charset="0"/>
                         <a:cs typeface="Calibri" charset="0"/>
                       </a:endParaRPr>
                     </a:p>
                   </a:txBody>
-                  <a:tcPr marL="91440" marR="91440" marT="45720" marB="45720" anchor="ctr">
+                  <a:tcPr anchor="ctr">
                     <a:lnL w="6350" cap="flat" cmpd="sng" algn="ctr">
                       <a:solidFill>
                         <a:srgbClr val="D8E2EA"/>
@@ -3770,11 +3395,11 @@
                     <a:bodyPr/>
                     <a:lstStyle/>
                     <a:p>
-                      <a:pPr algn="ctr" indent="0" marL="0">
+                      <a:pPr marL="0" indent="0" algn="ctr">
                         <a:buNone/>
                       </a:pPr>
                       <a:r>
-                        <a:rPr lang="en-US" sz="1150" dirty="0">
+                        <a:rPr lang="pt-BR" sz="1150" noProof="0" dirty="0">
                           <a:solidFill>
                             <a:srgbClr val="1E2A36"/>
                           </a:solidFill>
@@ -3784,14 +3409,14 @@
                         </a:rPr>
                         <a:t>0,083</a:t>
                       </a:r>
-                      <a:endParaRPr lang="en-US" sz="1150" dirty="0">
+                      <a:endParaRPr lang="pt-BR" sz="1150" noProof="0" dirty="0">
                         <a:latin typeface="Calibri" charset="0"/>
                         <a:ea typeface="Calibri" charset="0"/>
                         <a:cs typeface="Calibri" charset="0"/>
                       </a:endParaRPr>
                     </a:p>
                   </a:txBody>
-                  <a:tcPr marL="91440" marR="91440" marT="45720" marB="45720" anchor="ctr">
+                  <a:tcPr anchor="ctr">
                     <a:lnL w="6350" cap="flat" cmpd="sng" algn="ctr">
                       <a:solidFill>
                         <a:srgbClr val="D8E2EA"/>
@@ -3838,11 +3463,11 @@
                     <a:bodyPr/>
                     <a:lstStyle/>
                     <a:p>
-                      <a:pPr algn="ctr" indent="0" marL="0">
+                      <a:pPr marL="0" indent="0" algn="ctr">
                         <a:buNone/>
                       </a:pPr>
                       <a:r>
-                        <a:rPr lang="en-US" sz="1150" dirty="0">
+                        <a:rPr lang="pt-BR" sz="1150" noProof="0" dirty="0">
                           <a:solidFill>
                             <a:srgbClr val="5B6B7A"/>
                           </a:solidFill>
@@ -3852,14 +3477,14 @@
                         </a:rPr>
                         <a:t>≈ igual</a:t>
                       </a:r>
-                      <a:endParaRPr lang="en-US" sz="1150" dirty="0">
+                      <a:endParaRPr lang="pt-BR" sz="1150" noProof="0" dirty="0">
                         <a:latin typeface="Calibri" charset="0"/>
                         <a:ea typeface="Calibri" charset="0"/>
                         <a:cs typeface="Calibri" charset="0"/>
                       </a:endParaRPr>
                     </a:p>
                   </a:txBody>
-                  <a:tcPr marL="91440" marR="91440" marT="45720" marB="45720" anchor="ctr">
+                  <a:tcPr anchor="ctr">
                     <a:lnL w="6350" cap="flat" cmpd="sng" algn="ctr">
                       <a:solidFill>
                         <a:srgbClr val="D8E2EA"/>
@@ -3901,6 +3526,11 @@
                     </a:solidFill>
                   </a:tcPr>
                 </a:tc>
+                <a:extLst>
+                  <a:ext uri="{0D108BD9-81ED-4DB2-BD59-A6C34878D82A}">
+                    <a16:rowId xmlns:a16="http://schemas.microsoft.com/office/drawing/2014/main" val="10001"/>
+                  </a:ext>
+                </a:extLst>
               </a:tr>
               <a:tr h="324612">
                 <a:tc>
@@ -3908,11 +3538,11 @@
                     <a:bodyPr/>
                     <a:lstStyle/>
                     <a:p>
-                      <a:pPr algn="l" indent="0" marL="0">
+                      <a:pPr marL="0" indent="0" algn="l">
                         <a:buNone/>
                       </a:pPr>
                       <a:r>
-                        <a:rPr lang="en-US" sz="1150" b="1" dirty="0">
+                        <a:rPr lang="pt-BR" sz="1150" b="1" noProof="0" dirty="0">
                           <a:solidFill>
                             <a:srgbClr val="1E2A36"/>
                           </a:solidFill>
@@ -3922,14 +3552,14 @@
                         </a:rPr>
                         <a:t>% esgoto inadequado</a:t>
                       </a:r>
-                      <a:endParaRPr lang="en-US" sz="1150" dirty="0">
+                      <a:endParaRPr lang="pt-BR" sz="1150" noProof="0" dirty="0">
                         <a:latin typeface="Calibri" charset="0"/>
                         <a:ea typeface="Calibri" charset="0"/>
                         <a:cs typeface="Calibri" charset="0"/>
                       </a:endParaRPr>
                     </a:p>
                   </a:txBody>
-                  <a:tcPr marL="91440" marR="91440" marT="45720" marB="45720" anchor="ctr">
+                  <a:tcPr anchor="ctr">
                     <a:lnL w="6350" cap="flat" cmpd="sng" algn="ctr">
                       <a:solidFill>
                         <a:srgbClr val="D8E2EA"/>
@@ -3976,11 +3606,11 @@
                     <a:bodyPr/>
                     <a:lstStyle/>
                     <a:p>
-                      <a:pPr algn="ctr" indent="0" marL="0">
+                      <a:pPr marL="0" indent="0" algn="ctr">
                         <a:buNone/>
                       </a:pPr>
                       <a:r>
-                        <a:rPr lang="en-US" sz="1150" dirty="0">
+                        <a:rPr lang="pt-BR" sz="1150" noProof="0" dirty="0">
                           <a:solidFill>
                             <a:srgbClr val="1E2A36"/>
                           </a:solidFill>
@@ -3990,14 +3620,14 @@
                         </a:rPr>
                         <a:t>média</a:t>
                       </a:r>
-                      <a:endParaRPr lang="en-US" sz="1150" dirty="0">
+                      <a:endParaRPr lang="pt-BR" sz="1150" noProof="0" dirty="0">
                         <a:latin typeface="Calibri" charset="0"/>
                         <a:ea typeface="Calibri" charset="0"/>
                         <a:cs typeface="Calibri" charset="0"/>
                       </a:endParaRPr>
                     </a:p>
                   </a:txBody>
-                  <a:tcPr marL="91440" marR="91440" marT="45720" marB="45720" anchor="ctr">
+                  <a:tcPr anchor="ctr">
                     <a:lnL w="6350" cap="flat" cmpd="sng" algn="ctr">
                       <a:solidFill>
                         <a:srgbClr val="D8E2EA"/>
@@ -4044,11 +3674,11 @@
                     <a:bodyPr/>
                     <a:lstStyle/>
                     <a:p>
-                      <a:pPr algn="ctr" indent="0" marL="0">
+                      <a:pPr marL="0" indent="0" algn="ctr">
                         <a:buNone/>
                       </a:pPr>
                       <a:r>
-                        <a:rPr lang="en-US" sz="1150" dirty="0">
+                        <a:rPr lang="pt-BR" sz="1150" noProof="0" dirty="0">
                           <a:solidFill>
                             <a:srgbClr val="1E2A36"/>
                           </a:solidFill>
@@ -4058,14 +3688,14 @@
                         </a:rPr>
                         <a:t>0,092</a:t>
                       </a:r>
-                      <a:endParaRPr lang="en-US" sz="1150" dirty="0">
+                      <a:endParaRPr lang="pt-BR" sz="1150" noProof="0" dirty="0">
                         <a:latin typeface="Calibri" charset="0"/>
                         <a:ea typeface="Calibri" charset="0"/>
                         <a:cs typeface="Calibri" charset="0"/>
                       </a:endParaRPr>
                     </a:p>
                   </a:txBody>
-                  <a:tcPr marL="91440" marR="91440" marT="45720" marB="45720" anchor="ctr">
+                  <a:tcPr anchor="ctr">
                     <a:lnL w="6350" cap="flat" cmpd="sng" algn="ctr">
                       <a:solidFill>
                         <a:srgbClr val="D8E2EA"/>
@@ -4112,11 +3742,11 @@
                     <a:bodyPr/>
                     <a:lstStyle/>
                     <a:p>
-                      <a:pPr algn="ctr" indent="0" marL="0">
+                      <a:pPr marL="0" indent="0" algn="ctr">
                         <a:buNone/>
                       </a:pPr>
                       <a:r>
-                        <a:rPr lang="en-US" sz="1150" dirty="0">
+                        <a:rPr lang="pt-BR" sz="1150" noProof="0" dirty="0">
                           <a:solidFill>
                             <a:srgbClr val="1E2A36"/>
                           </a:solidFill>
@@ -4126,14 +3756,14 @@
                         </a:rPr>
                         <a:t>0,093</a:t>
                       </a:r>
-                      <a:endParaRPr lang="en-US" sz="1150" dirty="0">
+                      <a:endParaRPr lang="pt-BR" sz="1150" noProof="0" dirty="0">
                         <a:latin typeface="Calibri" charset="0"/>
                         <a:ea typeface="Calibri" charset="0"/>
                         <a:cs typeface="Calibri" charset="0"/>
                       </a:endParaRPr>
                     </a:p>
                   </a:txBody>
-                  <a:tcPr marL="91440" marR="91440" marT="45720" marB="45720" anchor="ctr">
+                  <a:tcPr anchor="ctr">
                     <a:lnL w="6350" cap="flat" cmpd="sng" algn="ctr">
                       <a:solidFill>
                         <a:srgbClr val="D8E2EA"/>
@@ -4180,11 +3810,11 @@
                     <a:bodyPr/>
                     <a:lstStyle/>
                     <a:p>
-                      <a:pPr algn="ctr" indent="0" marL="0">
+                      <a:pPr marL="0" indent="0" algn="ctr">
                         <a:buNone/>
                       </a:pPr>
                       <a:r>
-                        <a:rPr lang="en-US" sz="1150" dirty="0">
+                        <a:rPr lang="pt-BR" sz="1150" noProof="0" dirty="0">
                           <a:solidFill>
                             <a:srgbClr val="5B6B7A"/>
                           </a:solidFill>
@@ -4194,14 +3824,14 @@
                         </a:rPr>
                         <a:t>≈ igual</a:t>
                       </a:r>
-                      <a:endParaRPr lang="en-US" sz="1150" dirty="0">
+                      <a:endParaRPr lang="pt-BR" sz="1150" noProof="0" dirty="0">
                         <a:latin typeface="Calibri" charset="0"/>
                         <a:ea typeface="Calibri" charset="0"/>
                         <a:cs typeface="Calibri" charset="0"/>
                       </a:endParaRPr>
                     </a:p>
                   </a:txBody>
-                  <a:tcPr marL="91440" marR="91440" marT="45720" marB="45720" anchor="ctr">
+                  <a:tcPr anchor="ctr">
                     <a:lnL w="6350" cap="flat" cmpd="sng" algn="ctr">
                       <a:solidFill>
                         <a:srgbClr val="D8E2EA"/>
@@ -4243,6 +3873,11 @@
                     </a:solidFill>
                   </a:tcPr>
                 </a:tc>
+                <a:extLst>
+                  <a:ext uri="{0D108BD9-81ED-4DB2-BD59-A6C34878D82A}">
+                    <a16:rowId xmlns:a16="http://schemas.microsoft.com/office/drawing/2014/main" val="10002"/>
+                  </a:ext>
+                </a:extLst>
               </a:tr>
               <a:tr h="324612">
                 <a:tc>
@@ -4250,11 +3885,11 @@
                     <a:bodyPr/>
                     <a:lstStyle/>
                     <a:p>
-                      <a:pPr algn="l" indent="0" marL="0">
+                      <a:pPr marL="0" indent="0" algn="l">
                         <a:buNone/>
                       </a:pPr>
                       <a:r>
-                        <a:rPr lang="en-US" sz="1150" b="1" dirty="0">
+                        <a:rPr lang="pt-BR" sz="1150" b="1" noProof="0" dirty="0">
                           <a:solidFill>
                             <a:srgbClr val="1E2A36"/>
                           </a:solidFill>
@@ -4264,14 +3899,14 @@
                         </a:rPr>
                         <a:t>% lixo inadequado</a:t>
                       </a:r>
-                      <a:endParaRPr lang="en-US" sz="1150" dirty="0">
+                      <a:endParaRPr lang="pt-BR" sz="1150" noProof="0" dirty="0">
                         <a:latin typeface="Calibri" charset="0"/>
                         <a:ea typeface="Calibri" charset="0"/>
                         <a:cs typeface="Calibri" charset="0"/>
                       </a:endParaRPr>
                     </a:p>
                   </a:txBody>
-                  <a:tcPr marL="91440" marR="91440" marT="45720" marB="45720" anchor="ctr">
+                  <a:tcPr anchor="ctr">
                     <a:lnL w="6350" cap="flat" cmpd="sng" algn="ctr">
                       <a:solidFill>
                         <a:srgbClr val="D8E2EA"/>
@@ -4318,11 +3953,11 @@
                     <a:bodyPr/>
                     <a:lstStyle/>
                     <a:p>
-                      <a:pPr algn="ctr" indent="0" marL="0">
+                      <a:pPr marL="0" indent="0" algn="ctr">
                         <a:buNone/>
                       </a:pPr>
                       <a:r>
-                        <a:rPr lang="en-US" sz="1150" dirty="0">
+                        <a:rPr lang="pt-BR" sz="1150" noProof="0" dirty="0">
                           <a:solidFill>
                             <a:srgbClr val="1E2A36"/>
                           </a:solidFill>
@@ -4332,14 +3967,14 @@
                         </a:rPr>
                         <a:t>média</a:t>
                       </a:r>
-                      <a:endParaRPr lang="en-US" sz="1150" dirty="0">
+                      <a:endParaRPr lang="pt-BR" sz="1150" noProof="0" dirty="0">
                         <a:latin typeface="Calibri" charset="0"/>
                         <a:ea typeface="Calibri" charset="0"/>
                         <a:cs typeface="Calibri" charset="0"/>
                       </a:endParaRPr>
                     </a:p>
                   </a:txBody>
-                  <a:tcPr marL="91440" marR="91440" marT="45720" marB="45720" anchor="ctr">
+                  <a:tcPr anchor="ctr">
                     <a:lnL w="6350" cap="flat" cmpd="sng" algn="ctr">
                       <a:solidFill>
                         <a:srgbClr val="D8E2EA"/>
@@ -4386,11 +4021,11 @@
                     <a:bodyPr/>
                     <a:lstStyle/>
                     <a:p>
-                      <a:pPr algn="ctr" indent="0" marL="0">
+                      <a:pPr marL="0" indent="0" algn="ctr">
                         <a:buNone/>
                       </a:pPr>
                       <a:r>
-                        <a:rPr lang="en-US" sz="1150" dirty="0">
+                        <a:rPr lang="pt-BR" sz="1150" noProof="0" dirty="0">
                           <a:solidFill>
                             <a:srgbClr val="1E2A36"/>
                           </a:solidFill>
@@ -4400,14 +4035,14 @@
                         </a:rPr>
                         <a:t>0,126</a:t>
                       </a:r>
-                      <a:endParaRPr lang="en-US" sz="1150" dirty="0">
+                      <a:endParaRPr lang="pt-BR" sz="1150" noProof="0" dirty="0">
                         <a:latin typeface="Calibri" charset="0"/>
                         <a:ea typeface="Calibri" charset="0"/>
                         <a:cs typeface="Calibri" charset="0"/>
                       </a:endParaRPr>
                     </a:p>
                   </a:txBody>
-                  <a:tcPr marL="91440" marR="91440" marT="45720" marB="45720" anchor="ctr">
+                  <a:tcPr anchor="ctr">
                     <a:lnL w="6350" cap="flat" cmpd="sng" algn="ctr">
                       <a:solidFill>
                         <a:srgbClr val="D8E2EA"/>
@@ -4454,11 +4089,11 @@
                     <a:bodyPr/>
                     <a:lstStyle/>
                     <a:p>
-                      <a:pPr algn="ctr" indent="0" marL="0">
+                      <a:pPr marL="0" indent="0" algn="ctr">
                         <a:buNone/>
                       </a:pPr>
                       <a:r>
-                        <a:rPr lang="en-US" sz="1150" dirty="0">
+                        <a:rPr lang="pt-BR" sz="1150" noProof="0" dirty="0">
                           <a:solidFill>
                             <a:srgbClr val="1E2A36"/>
                           </a:solidFill>
@@ -4468,14 +4103,14 @@
                         </a:rPr>
                         <a:t>0,126</a:t>
                       </a:r>
-                      <a:endParaRPr lang="en-US" sz="1150" dirty="0">
+                      <a:endParaRPr lang="pt-BR" sz="1150" noProof="0" dirty="0">
                         <a:latin typeface="Calibri" charset="0"/>
                         <a:ea typeface="Calibri" charset="0"/>
                         <a:cs typeface="Calibri" charset="0"/>
                       </a:endParaRPr>
                     </a:p>
                   </a:txBody>
-                  <a:tcPr marL="91440" marR="91440" marT="45720" marB="45720" anchor="ctr">
+                  <a:tcPr anchor="ctr">
                     <a:lnL w="6350" cap="flat" cmpd="sng" algn="ctr">
                       <a:solidFill>
                         <a:srgbClr val="D8E2EA"/>
@@ -4522,11 +4157,11 @@
                     <a:bodyPr/>
                     <a:lstStyle/>
                     <a:p>
-                      <a:pPr algn="ctr" indent="0" marL="0">
+                      <a:pPr marL="0" indent="0" algn="ctr">
                         <a:buNone/>
                       </a:pPr>
                       <a:r>
-                        <a:rPr lang="en-US" sz="1150" dirty="0">
+                        <a:rPr lang="pt-BR" sz="1150" noProof="0" dirty="0">
                           <a:solidFill>
                             <a:srgbClr val="5B6B7A"/>
                           </a:solidFill>
@@ -4536,14 +4171,14 @@
                         </a:rPr>
                         <a:t>≈ igual</a:t>
                       </a:r>
-                      <a:endParaRPr lang="en-US" sz="1150" dirty="0">
+                      <a:endParaRPr lang="pt-BR" sz="1150" noProof="0" dirty="0">
                         <a:latin typeface="Calibri" charset="0"/>
                         <a:ea typeface="Calibri" charset="0"/>
                         <a:cs typeface="Calibri" charset="0"/>
                       </a:endParaRPr>
                     </a:p>
                   </a:txBody>
-                  <a:tcPr marL="91440" marR="91440" marT="45720" marB="45720" anchor="ctr">
+                  <a:tcPr anchor="ctr">
                     <a:lnL w="6350" cap="flat" cmpd="sng" algn="ctr">
                       <a:solidFill>
                         <a:srgbClr val="D8E2EA"/>
@@ -4585,6 +4220,11 @@
                     </a:solidFill>
                   </a:tcPr>
                 </a:tc>
+                <a:extLst>
+                  <a:ext uri="{0D108BD9-81ED-4DB2-BD59-A6C34878D82A}">
+                    <a16:rowId xmlns:a16="http://schemas.microsoft.com/office/drawing/2014/main" val="10003"/>
+                  </a:ext>
+                </a:extLst>
               </a:tr>
               <a:tr h="324612">
                 <a:tc>
@@ -4592,11 +4232,11 @@
                     <a:bodyPr/>
                     <a:lstStyle/>
                     <a:p>
-                      <a:pPr algn="l" indent="0" marL="0">
+                      <a:pPr marL="0" indent="0" algn="l">
                         <a:buNone/>
                       </a:pPr>
                       <a:r>
-                        <a:rPr lang="en-US" sz="1150" b="1" dirty="0">
+                        <a:rPr lang="pt-BR" sz="1150" b="1" noProof="0" dirty="0">
                           <a:solidFill>
                             <a:srgbClr val="1E2A36"/>
                           </a:solidFill>
@@ -4606,14 +4246,14 @@
                         </a:rPr>
                         <a:t>razão de moradores</a:t>
                       </a:r>
-                      <a:endParaRPr lang="en-US" sz="1150" dirty="0">
+                      <a:endParaRPr lang="pt-BR" sz="1150" noProof="0" dirty="0">
                         <a:latin typeface="Calibri" charset="0"/>
                         <a:ea typeface="Calibri" charset="0"/>
                         <a:cs typeface="Calibri" charset="0"/>
                       </a:endParaRPr>
                     </a:p>
                   </a:txBody>
-                  <a:tcPr marL="91440" marR="91440" marT="45720" marB="45720" anchor="ctr">
+                  <a:tcPr anchor="ctr">
                     <a:lnL w="6350" cap="flat" cmpd="sng" algn="ctr">
                       <a:solidFill>
                         <a:srgbClr val="D8E2EA"/>
@@ -4660,11 +4300,11 @@
                     <a:bodyPr/>
                     <a:lstStyle/>
                     <a:p>
-                      <a:pPr algn="ctr" indent="0" marL="0">
+                      <a:pPr marL="0" indent="0" algn="ctr">
                         <a:buNone/>
                       </a:pPr>
                       <a:r>
-                        <a:rPr lang="en-US" sz="1150" dirty="0">
+                        <a:rPr lang="pt-BR" sz="1150" noProof="0" dirty="0">
                           <a:solidFill>
                             <a:srgbClr val="1E2A36"/>
                           </a:solidFill>
@@ -4674,14 +4314,14 @@
                         </a:rPr>
                         <a:t>mínimo</a:t>
                       </a:r>
-                      <a:endParaRPr lang="en-US" sz="1150" dirty="0">
+                      <a:endParaRPr lang="pt-BR" sz="1150" noProof="0" dirty="0">
                         <a:latin typeface="Calibri" charset="0"/>
                         <a:ea typeface="Calibri" charset="0"/>
                         <a:cs typeface="Calibri" charset="0"/>
                       </a:endParaRPr>
                     </a:p>
                   </a:txBody>
-                  <a:tcPr marL="91440" marR="91440" marT="45720" marB="45720" anchor="ctr">
+                  <a:tcPr anchor="ctr">
                     <a:lnL w="6350" cap="flat" cmpd="sng" algn="ctr">
                       <a:solidFill>
                         <a:srgbClr val="D8E2EA"/>
@@ -4728,11 +4368,11 @@
                     <a:bodyPr/>
                     <a:lstStyle/>
                     <a:p>
-                      <a:pPr algn="ctr" indent="0" marL="0">
+                      <a:pPr marL="0" indent="0" algn="ctr">
                         <a:buNone/>
                       </a:pPr>
                       <a:r>
-                        <a:rPr lang="en-US" sz="1150" b="1" dirty="0">
+                        <a:rPr lang="pt-BR" sz="1150" b="1" noProof="0" dirty="0">
                           <a:solidFill>
                             <a:srgbClr val="B3261E"/>
                           </a:solidFill>
@@ -4742,14 +4382,14 @@
                         </a:rPr>
                         <a:t>0,17</a:t>
                       </a:r>
-                      <a:endParaRPr lang="en-US" sz="1150" dirty="0">
+                      <a:endParaRPr lang="pt-BR" sz="1150" noProof="0" dirty="0">
                         <a:latin typeface="Calibri" charset="0"/>
                         <a:ea typeface="Calibri" charset="0"/>
                         <a:cs typeface="Calibri" charset="0"/>
                       </a:endParaRPr>
                     </a:p>
                   </a:txBody>
-                  <a:tcPr marL="91440" marR="91440" marT="45720" marB="45720" anchor="ctr">
+                  <a:tcPr anchor="ctr">
                     <a:lnL w="6350" cap="flat" cmpd="sng" algn="ctr">
                       <a:solidFill>
                         <a:srgbClr val="D8E2EA"/>
@@ -4796,11 +4436,11 @@
                     <a:bodyPr/>
                     <a:lstStyle/>
                     <a:p>
-                      <a:pPr algn="ctr" indent="0" marL="0">
+                      <a:pPr marL="0" indent="0" algn="ctr">
                         <a:buNone/>
                       </a:pPr>
                       <a:r>
-                        <a:rPr lang="en-US" sz="1150" b="1" dirty="0">
+                        <a:rPr lang="pt-BR" sz="1150" b="1" noProof="0" dirty="0">
                           <a:solidFill>
                             <a:srgbClr val="2A9D8F"/>
                           </a:solidFill>
@@ -4810,14 +4450,14 @@
                         </a:rPr>
                         <a:t>1,00</a:t>
                       </a:r>
-                      <a:endParaRPr lang="en-US" sz="1150" dirty="0">
+                      <a:endParaRPr lang="pt-BR" sz="1150" noProof="0" dirty="0">
                         <a:latin typeface="Calibri" charset="0"/>
                         <a:ea typeface="Calibri" charset="0"/>
                         <a:cs typeface="Calibri" charset="0"/>
                       </a:endParaRPr>
                     </a:p>
                   </a:txBody>
-                  <a:tcPr marL="91440" marR="91440" marT="45720" marB="45720" anchor="ctr">
+                  <a:tcPr anchor="ctr">
                     <a:lnL w="6350" cap="flat" cmpd="sng" algn="ctr">
                       <a:solidFill>
                         <a:srgbClr val="D8E2EA"/>
@@ -4864,11 +4504,11 @@
                     <a:bodyPr/>
                     <a:lstStyle/>
                     <a:p>
-                      <a:pPr algn="ctr" indent="0" marL="0">
+                      <a:pPr marL="0" indent="0" algn="ctr">
                         <a:buNone/>
                       </a:pPr>
                       <a:r>
-                        <a:rPr lang="en-US" sz="1150" b="1" dirty="0">
+                        <a:rPr lang="pt-BR" sz="1150" b="1" noProof="0" dirty="0">
                           <a:solidFill>
                             <a:srgbClr val="2A9D8F"/>
                           </a:solidFill>
@@ -4878,14 +4518,14 @@
                         </a:rPr>
                         <a:t>corrigido</a:t>
                       </a:r>
-                      <a:endParaRPr lang="en-US" sz="1150" dirty="0">
+                      <a:endParaRPr lang="pt-BR" sz="1150" noProof="0" dirty="0">
                         <a:latin typeface="Calibri" charset="0"/>
                         <a:ea typeface="Calibri" charset="0"/>
                         <a:cs typeface="Calibri" charset="0"/>
                       </a:endParaRPr>
                     </a:p>
                   </a:txBody>
-                  <a:tcPr marL="91440" marR="91440" marT="45720" marB="45720" anchor="ctr">
+                  <a:tcPr anchor="ctr">
                     <a:lnL w="6350" cap="flat" cmpd="sng" algn="ctr">
                       <a:solidFill>
                         <a:srgbClr val="D8E2EA"/>
@@ -4927,6 +4567,11 @@
                     </a:solidFill>
                   </a:tcPr>
                 </a:tc>
+                <a:extLst>
+                  <a:ext uri="{0D108BD9-81ED-4DB2-BD59-A6C34878D82A}">
+                    <a16:rowId xmlns:a16="http://schemas.microsoft.com/office/drawing/2014/main" val="10004"/>
+                  </a:ext>
+                </a:extLst>
               </a:tr>
               <a:tr h="324612">
                 <a:tc>
@@ -4934,11 +4579,11 @@
                     <a:bodyPr/>
                     <a:lstStyle/>
                     <a:p>
-                      <a:pPr algn="l" indent="0" marL="0">
+                      <a:pPr marL="0" indent="0" algn="l">
                         <a:buNone/>
                       </a:pPr>
                       <a:r>
-                        <a:rPr lang="en-US" sz="1150" b="1" dirty="0">
+                        <a:rPr lang="pt-BR" sz="1150" b="1" noProof="0" dirty="0">
                           <a:solidFill>
                             <a:srgbClr val="1E2A36"/>
                           </a:solidFill>
@@ -4948,14 +4593,14 @@
                         </a:rPr>
                         <a:t>% analfabetismo (15+)</a:t>
                       </a:r>
-                      <a:endParaRPr lang="en-US" sz="1150" dirty="0">
+                      <a:endParaRPr lang="pt-BR" sz="1150" noProof="0" dirty="0">
                         <a:latin typeface="Calibri" charset="0"/>
                         <a:ea typeface="Calibri" charset="0"/>
                         <a:cs typeface="Calibri" charset="0"/>
                       </a:endParaRPr>
                     </a:p>
                   </a:txBody>
-                  <a:tcPr marL="91440" marR="91440" marT="45720" marB="45720" anchor="ctr">
+                  <a:tcPr anchor="ctr">
                     <a:lnL w="6350" cap="flat" cmpd="sng" algn="ctr">
                       <a:solidFill>
                         <a:srgbClr val="D8E2EA"/>
@@ -5002,11 +4647,11 @@
                     <a:bodyPr/>
                     <a:lstStyle/>
                     <a:p>
-                      <a:pPr algn="ctr" indent="0" marL="0">
+                      <a:pPr marL="0" indent="0" algn="ctr">
                         <a:buNone/>
                       </a:pPr>
                       <a:r>
-                        <a:rPr lang="en-US" sz="1150" dirty="0">
+                        <a:rPr lang="pt-BR" sz="1150" noProof="0" dirty="0">
                           <a:solidFill>
                             <a:srgbClr val="1E2A36"/>
                           </a:solidFill>
@@ -5016,14 +4661,14 @@
                         </a:rPr>
                         <a:t>máximo</a:t>
                       </a:r>
-                      <a:endParaRPr lang="en-US" sz="1150" dirty="0">
+                      <a:endParaRPr lang="pt-BR" sz="1150" noProof="0" dirty="0">
                         <a:latin typeface="Calibri" charset="0"/>
                         <a:ea typeface="Calibri" charset="0"/>
                         <a:cs typeface="Calibri" charset="0"/>
                       </a:endParaRPr>
                     </a:p>
                   </a:txBody>
-                  <a:tcPr marL="91440" marR="91440" marT="45720" marB="45720" anchor="ctr">
+                  <a:tcPr anchor="ctr">
                     <a:lnL w="6350" cap="flat" cmpd="sng" algn="ctr">
                       <a:solidFill>
                         <a:srgbClr val="D8E2EA"/>
@@ -5070,11 +4715,11 @@
                     <a:bodyPr/>
                     <a:lstStyle/>
                     <a:p>
-                      <a:pPr algn="ctr" indent="0" marL="0">
+                      <a:pPr marL="0" indent="0" algn="ctr">
                         <a:buNone/>
                       </a:pPr>
                       <a:r>
-                        <a:rPr lang="en-US" sz="1150" b="1" dirty="0">
+                        <a:rPr lang="pt-BR" sz="1150" b="1" noProof="0" dirty="0">
                           <a:solidFill>
                             <a:srgbClr val="B3261E"/>
                           </a:solidFill>
@@ -5084,14 +4729,14 @@
                         </a:rPr>
                         <a:t>5,33</a:t>
                       </a:r>
-                      <a:endParaRPr lang="en-US" sz="1150" dirty="0">
+                      <a:endParaRPr lang="pt-BR" sz="1150" noProof="0" dirty="0">
                         <a:latin typeface="Calibri" charset="0"/>
                         <a:ea typeface="Calibri" charset="0"/>
                         <a:cs typeface="Calibri" charset="0"/>
                       </a:endParaRPr>
                     </a:p>
                   </a:txBody>
-                  <a:tcPr marL="91440" marR="91440" marT="45720" marB="45720" anchor="ctr">
+                  <a:tcPr anchor="ctr">
                     <a:lnL w="6350" cap="flat" cmpd="sng" algn="ctr">
                       <a:solidFill>
                         <a:srgbClr val="D8E2EA"/>
@@ -5138,11 +4783,11 @@
                     <a:bodyPr/>
                     <a:lstStyle/>
                     <a:p>
-                      <a:pPr algn="ctr" indent="0" marL="0">
+                      <a:pPr marL="0" indent="0" algn="ctr">
                         <a:buNone/>
                       </a:pPr>
                       <a:r>
-                        <a:rPr lang="en-US" sz="1150" b="1" dirty="0">
+                        <a:rPr lang="pt-BR" sz="1150" b="1" noProof="0" dirty="0">
                           <a:solidFill>
                             <a:srgbClr val="2A9D8F"/>
                           </a:solidFill>
@@ -5152,14 +4797,14 @@
                         </a:rPr>
                         <a:t>0,84</a:t>
                       </a:r>
-                      <a:endParaRPr lang="en-US" sz="1150" dirty="0">
+                      <a:endParaRPr lang="pt-BR" sz="1150" noProof="0" dirty="0">
                         <a:latin typeface="Calibri" charset="0"/>
                         <a:ea typeface="Calibri" charset="0"/>
                         <a:cs typeface="Calibri" charset="0"/>
                       </a:endParaRPr>
                     </a:p>
                   </a:txBody>
-                  <a:tcPr marL="91440" marR="91440" marT="45720" marB="45720" anchor="ctr">
+                  <a:tcPr anchor="ctr">
                     <a:lnL w="6350" cap="flat" cmpd="sng" algn="ctr">
                       <a:solidFill>
                         <a:srgbClr val="D8E2EA"/>
@@ -5206,11 +4851,11 @@
                     <a:bodyPr/>
                     <a:lstStyle/>
                     <a:p>
-                      <a:pPr algn="ctr" indent="0" marL="0">
+                      <a:pPr marL="0" indent="0" algn="ctr">
                         <a:buNone/>
                       </a:pPr>
                       <a:r>
-                        <a:rPr lang="en-US" sz="1150" b="1" dirty="0">
+                        <a:rPr lang="pt-BR" sz="1150" b="1" noProof="0" dirty="0">
                           <a:solidFill>
                             <a:srgbClr val="2A9D8F"/>
                           </a:solidFill>
@@ -5220,14 +4865,14 @@
                         </a:rPr>
                         <a:t>corrigido</a:t>
                       </a:r>
-                      <a:endParaRPr lang="en-US" sz="1150" dirty="0">
+                      <a:endParaRPr lang="pt-BR" sz="1150" noProof="0" dirty="0">
                         <a:latin typeface="Calibri" charset="0"/>
                         <a:ea typeface="Calibri" charset="0"/>
                         <a:cs typeface="Calibri" charset="0"/>
                       </a:endParaRPr>
                     </a:p>
                   </a:txBody>
-                  <a:tcPr marL="91440" marR="91440" marT="45720" marB="45720" anchor="ctr">
+                  <a:tcPr anchor="ctr">
                     <a:lnL w="6350" cap="flat" cmpd="sng" algn="ctr">
                       <a:solidFill>
                         <a:srgbClr val="D8E2EA"/>
@@ -5269,6 +4914,11 @@
                     </a:solidFill>
                   </a:tcPr>
                 </a:tc>
+                <a:extLst>
+                  <a:ext uri="{0D108BD9-81ED-4DB2-BD59-A6C34878D82A}">
+                    <a16:rowId xmlns:a16="http://schemas.microsoft.com/office/drawing/2014/main" val="10005"/>
+                  </a:ext>
+                </a:extLst>
               </a:tr>
               <a:tr h="324612">
                 <a:tc>
@@ -5276,11 +4926,11 @@
                     <a:bodyPr/>
                     <a:lstStyle/>
                     <a:p>
-                      <a:pPr algn="l" indent="0" marL="0">
+                      <a:pPr marL="0" indent="0" algn="l">
                         <a:buNone/>
                       </a:pPr>
                       <a:r>
-                        <a:rPr lang="en-US" sz="1150" b="1" dirty="0">
+                        <a:rPr lang="pt-BR" sz="1150" b="1" noProof="0" dirty="0">
                           <a:solidFill>
                             <a:srgbClr val="1E2A36"/>
                           </a:solidFill>
@@ -5290,14 +4940,14 @@
                         </a:rPr>
                         <a:t>% analfabetismo (15+)</a:t>
                       </a:r>
-                      <a:endParaRPr lang="en-US" sz="1150" dirty="0">
+                      <a:endParaRPr lang="pt-BR" sz="1150" noProof="0" dirty="0">
                         <a:latin typeface="Calibri" charset="0"/>
                         <a:ea typeface="Calibri" charset="0"/>
                         <a:cs typeface="Calibri" charset="0"/>
                       </a:endParaRPr>
                     </a:p>
                   </a:txBody>
-                  <a:tcPr marL="91440" marR="91440" marT="45720" marB="45720" anchor="ctr">
+                  <a:tcPr anchor="ctr">
                     <a:lnL w="6350" cap="flat" cmpd="sng" algn="ctr">
                       <a:solidFill>
                         <a:srgbClr val="D8E2EA"/>
@@ -5344,11 +4994,11 @@
                     <a:bodyPr/>
                     <a:lstStyle/>
                     <a:p>
-                      <a:pPr algn="ctr" indent="0" marL="0">
+                      <a:pPr marL="0" indent="0" algn="ctr">
                         <a:buNone/>
                       </a:pPr>
                       <a:r>
-                        <a:rPr lang="en-US" sz="1150" dirty="0">
+                        <a:rPr lang="pt-BR" sz="1150" noProof="0" dirty="0">
                           <a:solidFill>
                             <a:srgbClr val="1E2A36"/>
                           </a:solidFill>
@@ -5358,14 +5008,14 @@
                         </a:rPr>
                         <a:t>setores &gt; 1</a:t>
                       </a:r>
-                      <a:endParaRPr lang="en-US" sz="1150" dirty="0">
+                      <a:endParaRPr lang="pt-BR" sz="1150" noProof="0" dirty="0">
                         <a:latin typeface="Calibri" charset="0"/>
                         <a:ea typeface="Calibri" charset="0"/>
                         <a:cs typeface="Calibri" charset="0"/>
                       </a:endParaRPr>
                     </a:p>
                   </a:txBody>
-                  <a:tcPr marL="91440" marR="91440" marT="45720" marB="45720" anchor="ctr">
+                  <a:tcPr anchor="ctr">
                     <a:lnL w="6350" cap="flat" cmpd="sng" algn="ctr">
                       <a:solidFill>
                         <a:srgbClr val="D8E2EA"/>
@@ -5412,11 +5062,11 @@
                     <a:bodyPr/>
                     <a:lstStyle/>
                     <a:p>
-                      <a:pPr algn="ctr" indent="0" marL="0">
+                      <a:pPr marL="0" indent="0" algn="ctr">
                         <a:buNone/>
                       </a:pPr>
                       <a:r>
-                        <a:rPr lang="en-US" sz="1150" b="1" dirty="0">
+                        <a:rPr lang="pt-BR" sz="1150" b="1" noProof="0" dirty="0">
                           <a:solidFill>
                             <a:srgbClr val="B3261E"/>
                           </a:solidFill>
@@ -5426,14 +5076,14 @@
                         </a:rPr>
                         <a:t>10</a:t>
                       </a:r>
-                      <a:endParaRPr lang="en-US" sz="1150" dirty="0">
+                      <a:endParaRPr lang="pt-BR" sz="1150" noProof="0" dirty="0">
                         <a:latin typeface="Calibri" charset="0"/>
                         <a:ea typeface="Calibri" charset="0"/>
                         <a:cs typeface="Calibri" charset="0"/>
                       </a:endParaRPr>
                     </a:p>
                   </a:txBody>
-                  <a:tcPr marL="91440" marR="91440" marT="45720" marB="45720" anchor="ctr">
+                  <a:tcPr anchor="ctr">
                     <a:lnL w="6350" cap="flat" cmpd="sng" algn="ctr">
                       <a:solidFill>
                         <a:srgbClr val="D8E2EA"/>
@@ -5480,11 +5130,11 @@
                     <a:bodyPr/>
                     <a:lstStyle/>
                     <a:p>
-                      <a:pPr algn="ctr" indent="0" marL="0">
+                      <a:pPr marL="0" indent="0" algn="ctr">
                         <a:buNone/>
                       </a:pPr>
                       <a:r>
-                        <a:rPr lang="en-US" sz="1150" b="1" dirty="0">
+                        <a:rPr lang="pt-BR" sz="1150" b="1" noProof="0" dirty="0">
                           <a:solidFill>
                             <a:srgbClr val="2A9D8F"/>
                           </a:solidFill>
@@ -5494,14 +5144,14 @@
                         </a:rPr>
                         <a:t>0</a:t>
                       </a:r>
-                      <a:endParaRPr lang="en-US" sz="1150" dirty="0">
+                      <a:endParaRPr lang="pt-BR" sz="1150" noProof="0" dirty="0">
                         <a:latin typeface="Calibri" charset="0"/>
                         <a:ea typeface="Calibri" charset="0"/>
                         <a:cs typeface="Calibri" charset="0"/>
                       </a:endParaRPr>
                     </a:p>
                   </a:txBody>
-                  <a:tcPr marL="91440" marR="91440" marT="45720" marB="45720" anchor="ctr">
+                  <a:tcPr anchor="ctr">
                     <a:lnL w="6350" cap="flat" cmpd="sng" algn="ctr">
                       <a:solidFill>
                         <a:srgbClr val="D8E2EA"/>
@@ -5548,11 +5198,11 @@
                     <a:bodyPr/>
                     <a:lstStyle/>
                     <a:p>
-                      <a:pPr algn="ctr" indent="0" marL="0">
+                      <a:pPr marL="0" indent="0" algn="ctr">
                         <a:buNone/>
                       </a:pPr>
                       <a:r>
-                        <a:rPr lang="en-US" sz="1150" b="1" dirty="0">
+                        <a:rPr lang="pt-BR" sz="1150" b="1" noProof="0" dirty="0">
                           <a:solidFill>
                             <a:srgbClr val="2A9D8F"/>
                           </a:solidFill>
@@ -5562,14 +5212,14 @@
                         </a:rPr>
                         <a:t>corrigido</a:t>
                       </a:r>
-                      <a:endParaRPr lang="en-US" sz="1150" dirty="0">
+                      <a:endParaRPr lang="pt-BR" sz="1150" noProof="0" dirty="0">
                         <a:latin typeface="Calibri" charset="0"/>
                         <a:ea typeface="Calibri" charset="0"/>
                         <a:cs typeface="Calibri" charset="0"/>
                       </a:endParaRPr>
                     </a:p>
                   </a:txBody>
-                  <a:tcPr marL="91440" marR="91440" marT="45720" marB="45720" anchor="ctr">
+                  <a:tcPr anchor="ctr">
                     <a:lnL w="6350" cap="flat" cmpd="sng" algn="ctr">
                       <a:solidFill>
                         <a:srgbClr val="D8E2EA"/>
@@ -5611,6 +5261,11 @@
                     </a:solidFill>
                   </a:tcPr>
                 </a:tc>
+                <a:extLst>
+                  <a:ext uri="{0D108BD9-81ED-4DB2-BD59-A6C34878D82A}">
+                    <a16:rowId xmlns:a16="http://schemas.microsoft.com/office/drawing/2014/main" val="10006"/>
+                  </a:ext>
+                </a:extLst>
               </a:tr>
               <a:tr h="324612">
                 <a:tc>
@@ -5618,11 +5273,11 @@
                     <a:bodyPr/>
                     <a:lstStyle/>
                     <a:p>
-                      <a:pPr algn="l" indent="0" marL="0">
+                      <a:pPr marL="0" indent="0" algn="l">
                         <a:buNone/>
                       </a:pPr>
                       <a:r>
-                        <a:rPr lang="en-US" sz="1150" b="1" dirty="0">
+                        <a:rPr lang="pt-BR" sz="1150" b="1" noProof="0" dirty="0">
                           <a:solidFill>
                             <a:srgbClr val="1E2A36"/>
                           </a:solidFill>
@@ -5632,14 +5287,14 @@
                         </a:rPr>
                         <a:t>rendimento médio (R$)</a:t>
                       </a:r>
-                      <a:endParaRPr lang="en-US" sz="1150" dirty="0">
+                      <a:endParaRPr lang="pt-BR" sz="1150" noProof="0" dirty="0">
                         <a:latin typeface="Calibri" charset="0"/>
                         <a:ea typeface="Calibri" charset="0"/>
                         <a:cs typeface="Calibri" charset="0"/>
                       </a:endParaRPr>
                     </a:p>
                   </a:txBody>
-                  <a:tcPr marL="91440" marR="91440" marT="45720" marB="45720" anchor="ctr">
+                  <a:tcPr anchor="ctr">
                     <a:lnL w="6350" cap="flat" cmpd="sng" algn="ctr">
                       <a:solidFill>
                         <a:srgbClr val="D8E2EA"/>
@@ -5686,11 +5341,11 @@
                     <a:bodyPr/>
                     <a:lstStyle/>
                     <a:p>
-                      <a:pPr algn="ctr" indent="0" marL="0">
+                      <a:pPr marL="0" indent="0" algn="ctr">
                         <a:buNone/>
                       </a:pPr>
                       <a:r>
-                        <a:rPr lang="en-US" sz="1150" dirty="0">
+                        <a:rPr lang="pt-BR" sz="1150" noProof="0" dirty="0">
                           <a:solidFill>
                             <a:srgbClr val="1E2A36"/>
                           </a:solidFill>
@@ -5700,14 +5355,14 @@
                         </a:rPr>
                         <a:t>mediana</a:t>
                       </a:r>
-                      <a:endParaRPr lang="en-US" sz="1150" dirty="0">
+                      <a:endParaRPr lang="pt-BR" sz="1150" noProof="0" dirty="0">
                         <a:latin typeface="Calibri" charset="0"/>
                         <a:ea typeface="Calibri" charset="0"/>
                         <a:cs typeface="Calibri" charset="0"/>
                       </a:endParaRPr>
                     </a:p>
                   </a:txBody>
-                  <a:tcPr marL="91440" marR="91440" marT="45720" marB="45720" anchor="ctr">
+                  <a:tcPr anchor="ctr">
                     <a:lnL w="6350" cap="flat" cmpd="sng" algn="ctr">
                       <a:solidFill>
                         <a:srgbClr val="D8E2EA"/>
@@ -5754,11 +5409,11 @@
                     <a:bodyPr/>
                     <a:lstStyle/>
                     <a:p>
-                      <a:pPr algn="ctr" indent="0" marL="0">
+                      <a:pPr marL="0" indent="0" algn="ctr">
                         <a:buNone/>
                       </a:pPr>
                       <a:r>
-                        <a:rPr lang="en-US" sz="1150" dirty="0">
+                        <a:rPr lang="pt-BR" sz="1150" noProof="0" dirty="0">
                           <a:solidFill>
                             <a:srgbClr val="1E2A36"/>
                           </a:solidFill>
@@ -5768,14 +5423,14 @@
                         </a:rPr>
                         <a:t>2.546</a:t>
                       </a:r>
-                      <a:endParaRPr lang="en-US" sz="1150" dirty="0">
+                      <a:endParaRPr lang="pt-BR" sz="1150" noProof="0" dirty="0">
                         <a:latin typeface="Calibri" charset="0"/>
                         <a:ea typeface="Calibri" charset="0"/>
                         <a:cs typeface="Calibri" charset="0"/>
                       </a:endParaRPr>
                     </a:p>
                   </a:txBody>
-                  <a:tcPr marL="91440" marR="91440" marT="45720" marB="45720" anchor="ctr">
+                  <a:tcPr anchor="ctr">
                     <a:lnL w="6350" cap="flat" cmpd="sng" algn="ctr">
                       <a:solidFill>
                         <a:srgbClr val="D8E2EA"/>
@@ -5822,11 +5477,11 @@
                     <a:bodyPr/>
                     <a:lstStyle/>
                     <a:p>
-                      <a:pPr algn="ctr" indent="0" marL="0">
+                      <a:pPr marL="0" indent="0" algn="ctr">
                         <a:buNone/>
                       </a:pPr>
                       <a:r>
-                        <a:rPr lang="en-US" sz="1150" dirty="0">
+                        <a:rPr lang="pt-BR" sz="1150" noProof="0" dirty="0">
                           <a:solidFill>
                             <a:srgbClr val="1E2A36"/>
                           </a:solidFill>
@@ -5836,14 +5491,14 @@
                         </a:rPr>
                         <a:t>2.546</a:t>
                       </a:r>
-                      <a:endParaRPr lang="en-US" sz="1150" dirty="0">
+                      <a:endParaRPr lang="pt-BR" sz="1150" noProof="0" dirty="0">
                         <a:latin typeface="Calibri" charset="0"/>
                         <a:ea typeface="Calibri" charset="0"/>
                         <a:cs typeface="Calibri" charset="0"/>
                       </a:endParaRPr>
                     </a:p>
                   </a:txBody>
-                  <a:tcPr marL="91440" marR="91440" marT="45720" marB="45720" anchor="ctr">
+                  <a:tcPr anchor="ctr">
                     <a:lnL w="6350" cap="flat" cmpd="sng" algn="ctr">
                       <a:solidFill>
                         <a:srgbClr val="D8E2EA"/>
@@ -5890,11 +5545,11 @@
                     <a:bodyPr/>
                     <a:lstStyle/>
                     <a:p>
-                      <a:pPr algn="ctr" indent="0" marL="0">
+                      <a:pPr marL="0" indent="0" algn="ctr">
                         <a:buNone/>
                       </a:pPr>
                       <a:r>
-                        <a:rPr lang="en-US" sz="1150" dirty="0">
+                        <a:rPr lang="pt-BR" sz="1150" noProof="0" dirty="0">
                           <a:solidFill>
                             <a:srgbClr val="5B6B7A"/>
                           </a:solidFill>
@@ -5904,14 +5559,14 @@
                         </a:rPr>
                         <a:t>inalterado</a:t>
                       </a:r>
-                      <a:endParaRPr lang="en-US" sz="1150" dirty="0">
+                      <a:endParaRPr lang="pt-BR" sz="1150" noProof="0" dirty="0">
                         <a:latin typeface="Calibri" charset="0"/>
                         <a:ea typeface="Calibri" charset="0"/>
                         <a:cs typeface="Calibri" charset="0"/>
                       </a:endParaRPr>
                     </a:p>
                   </a:txBody>
-                  <a:tcPr marL="91440" marR="91440" marT="45720" marB="45720" anchor="ctr">
+                  <a:tcPr anchor="ctr">
                     <a:lnL w="6350" cap="flat" cmpd="sng" algn="ctr">
                       <a:solidFill>
                         <a:srgbClr val="D8E2EA"/>
@@ -5953,6 +5608,11 @@
                     </a:solidFill>
                   </a:tcPr>
                 </a:tc>
+                <a:extLst>
+                  <a:ext uri="{0D108BD9-81ED-4DB2-BD59-A6C34878D82A}">
+                    <a16:rowId xmlns:a16="http://schemas.microsoft.com/office/drawing/2014/main" val="10007"/>
+                  </a:ext>
+                </a:extLst>
               </a:tr>
               <a:tr h="324612">
                 <a:tc>
@@ -5960,11 +5620,11 @@
                     <a:bodyPr/>
                     <a:lstStyle/>
                     <a:p>
-                      <a:pPr algn="l" indent="0" marL="0">
+                      <a:pPr marL="0" indent="0" algn="l">
                         <a:buNone/>
                       </a:pPr>
                       <a:r>
-                        <a:rPr lang="en-US" sz="1150" b="1" dirty="0">
+                        <a:rPr lang="pt-BR" sz="1150" b="1" noProof="0" dirty="0">
                           <a:solidFill>
                             <a:srgbClr val="1E2A36"/>
                           </a:solidFill>
@@ -5972,16 +5632,38 @@
                           <a:ea typeface="Calibri" pitchFamily="34" charset="-122"/>
                           <a:cs typeface="Calibri" pitchFamily="34" charset="-120"/>
                         </a:rPr>
-                        <a:t>% preta/parda/indíg.</a:t>
+                        <a:t>% preta/parda/</a:t>
                       </a:r>
-                      <a:endParaRPr lang="en-US" sz="1150" dirty="0">
+                      <a:r>
+                        <a:rPr lang="pt-BR" sz="1150" b="1" noProof="0" dirty="0" err="1">
+                          <a:solidFill>
+                            <a:srgbClr val="1E2A36"/>
+                          </a:solidFill>
+                          <a:latin typeface="Calibri" pitchFamily="34" charset="0"/>
+                          <a:ea typeface="Calibri" pitchFamily="34" charset="-122"/>
+                          <a:cs typeface="Calibri" pitchFamily="34" charset="-120"/>
+                        </a:rPr>
+                        <a:t>indíg</a:t>
+                      </a:r>
+                      <a:r>
+                        <a:rPr lang="pt-BR" sz="1150" b="1" noProof="0" dirty="0">
+                          <a:solidFill>
+                            <a:srgbClr val="1E2A36"/>
+                          </a:solidFill>
+                          <a:latin typeface="Calibri" pitchFamily="34" charset="0"/>
+                          <a:ea typeface="Calibri" pitchFamily="34" charset="-122"/>
+                          <a:cs typeface="Calibri" pitchFamily="34" charset="-120"/>
+                        </a:rPr>
+                        <a:t>.</a:t>
+                      </a:r>
+                      <a:endParaRPr lang="pt-BR" sz="1150" noProof="0" dirty="0">
                         <a:latin typeface="Calibri" charset="0"/>
                         <a:ea typeface="Calibri" charset="0"/>
                         <a:cs typeface="Calibri" charset="0"/>
                       </a:endParaRPr>
                     </a:p>
                   </a:txBody>
-                  <a:tcPr marL="91440" marR="91440" marT="45720" marB="45720" anchor="ctr">
+                  <a:tcPr anchor="ctr">
                     <a:lnL w="6350" cap="flat" cmpd="sng" algn="ctr">
                       <a:solidFill>
                         <a:srgbClr val="D8E2EA"/>
@@ -6028,11 +5710,11 @@
                     <a:bodyPr/>
                     <a:lstStyle/>
                     <a:p>
-                      <a:pPr algn="ctr" indent="0" marL="0">
+                      <a:pPr marL="0" indent="0" algn="ctr">
                         <a:buNone/>
                       </a:pPr>
                       <a:r>
-                        <a:rPr lang="en-US" sz="1150" dirty="0">
+                        <a:rPr lang="pt-BR" sz="1150" noProof="0" dirty="0">
                           <a:solidFill>
                             <a:srgbClr val="1E2A36"/>
                           </a:solidFill>
@@ -6042,14 +5724,14 @@
                         </a:rPr>
                         <a:t>mediana</a:t>
                       </a:r>
-                      <a:endParaRPr lang="en-US" sz="1150" dirty="0">
+                      <a:endParaRPr lang="pt-BR" sz="1150" noProof="0" dirty="0">
                         <a:latin typeface="Calibri" charset="0"/>
                         <a:ea typeface="Calibri" charset="0"/>
                         <a:cs typeface="Calibri" charset="0"/>
                       </a:endParaRPr>
                     </a:p>
                   </a:txBody>
-                  <a:tcPr marL="91440" marR="91440" marT="45720" marB="45720" anchor="ctr">
+                  <a:tcPr anchor="ctr">
                     <a:lnL w="6350" cap="flat" cmpd="sng" algn="ctr">
                       <a:solidFill>
                         <a:srgbClr val="D8E2EA"/>
@@ -6096,11 +5778,11 @@
                     <a:bodyPr/>
                     <a:lstStyle/>
                     <a:p>
-                      <a:pPr algn="ctr" indent="0" marL="0">
+                      <a:pPr marL="0" indent="0" algn="ctr">
                         <a:buNone/>
                       </a:pPr>
                       <a:r>
-                        <a:rPr lang="en-US" sz="1150" dirty="0">
+                        <a:rPr lang="pt-BR" sz="1150" noProof="0" dirty="0">
                           <a:solidFill>
                             <a:srgbClr val="1E2A36"/>
                           </a:solidFill>
@@ -6110,14 +5792,14 @@
                         </a:rPr>
                         <a:t>0,576</a:t>
                       </a:r>
-                      <a:endParaRPr lang="en-US" sz="1150" dirty="0">
+                      <a:endParaRPr lang="pt-BR" sz="1150" noProof="0" dirty="0">
                         <a:latin typeface="Calibri" charset="0"/>
                         <a:ea typeface="Calibri" charset="0"/>
                         <a:cs typeface="Calibri" charset="0"/>
                       </a:endParaRPr>
                     </a:p>
                   </a:txBody>
-                  <a:tcPr marL="91440" marR="91440" marT="45720" marB="45720" anchor="ctr">
+                  <a:tcPr anchor="ctr">
                     <a:lnL w="6350" cap="flat" cmpd="sng" algn="ctr">
                       <a:solidFill>
                         <a:srgbClr val="D8E2EA"/>
@@ -6164,11 +5846,11 @@
                     <a:bodyPr/>
                     <a:lstStyle/>
                     <a:p>
-                      <a:pPr algn="ctr" indent="0" marL="0">
+                      <a:pPr marL="0" indent="0" algn="ctr">
                         <a:buNone/>
                       </a:pPr>
                       <a:r>
-                        <a:rPr lang="en-US" sz="1150" dirty="0">
+                        <a:rPr lang="pt-BR" sz="1150" noProof="0" dirty="0">
                           <a:solidFill>
                             <a:srgbClr val="1E2A36"/>
                           </a:solidFill>
@@ -6178,14 +5860,14 @@
                         </a:rPr>
                         <a:t>0,576</a:t>
                       </a:r>
-                      <a:endParaRPr lang="en-US" sz="1150" dirty="0">
+                      <a:endParaRPr lang="pt-BR" sz="1150" noProof="0" dirty="0">
                         <a:latin typeface="Calibri" charset="0"/>
                         <a:ea typeface="Calibri" charset="0"/>
                         <a:cs typeface="Calibri" charset="0"/>
                       </a:endParaRPr>
                     </a:p>
                   </a:txBody>
-                  <a:tcPr marL="91440" marR="91440" marT="45720" marB="45720" anchor="ctr">
+                  <a:tcPr anchor="ctr">
                     <a:lnL w="6350" cap="flat" cmpd="sng" algn="ctr">
                       <a:solidFill>
                         <a:srgbClr val="D8E2EA"/>
@@ -6232,11 +5914,11 @@
                     <a:bodyPr/>
                     <a:lstStyle/>
                     <a:p>
-                      <a:pPr algn="ctr" indent="0" marL="0">
+                      <a:pPr marL="0" indent="0" algn="ctr">
                         <a:buNone/>
                       </a:pPr>
                       <a:r>
-                        <a:rPr lang="en-US" sz="1150" dirty="0">
+                        <a:rPr lang="pt-BR" sz="1150" noProof="0" dirty="0">
                           <a:solidFill>
                             <a:srgbClr val="5B6B7A"/>
                           </a:solidFill>
@@ -6246,14 +5928,14 @@
                         </a:rPr>
                         <a:t>inalterado</a:t>
                       </a:r>
-                      <a:endParaRPr lang="en-US" sz="1150" dirty="0">
+                      <a:endParaRPr lang="pt-BR" sz="1150" noProof="0" dirty="0">
                         <a:latin typeface="Calibri" charset="0"/>
                         <a:ea typeface="Calibri" charset="0"/>
                         <a:cs typeface="Calibri" charset="0"/>
                       </a:endParaRPr>
                     </a:p>
                   </a:txBody>
-                  <a:tcPr marL="91440" marR="91440" marT="45720" marB="45720" anchor="ctr">
+                  <a:tcPr anchor="ctr">
                     <a:lnL w="6350" cap="flat" cmpd="sng" algn="ctr">
                       <a:solidFill>
                         <a:srgbClr val="D8E2EA"/>
@@ -6295,6 +5977,11 @@
                     </a:solidFill>
                   </a:tcPr>
                 </a:tc>
+                <a:extLst>
+                  <a:ext uri="{0D108BD9-81ED-4DB2-BD59-A6C34878D82A}">
+                    <a16:rowId xmlns:a16="http://schemas.microsoft.com/office/drawing/2014/main" val="10008"/>
+                  </a:ext>
+                </a:extLst>
               </a:tr>
             </a:tbl>
           </a:graphicData>
@@ -6326,6 +6013,13 @@
             <a:prstDash val="solid"/>
           </a:ln>
         </p:spPr>
+        <p:txBody>
+          <a:bodyPr/>
+          <a:lstStyle/>
+          <a:p>
+            <a:endParaRPr lang="pt-BR" noProof="0" dirty="0"/>
+          </a:p>
+        </p:txBody>
       </p:sp>
       <p:sp>
         <p:nvSpPr>
@@ -6348,14 +6042,14 @@
           <a:bodyPr wrap="square" lIns="0" tIns="0" rIns="0" bIns="0" rtlCol="0" anchor="ctr"/>
           <a:lstStyle/>
           <a:p>
-            <a:pPr indent="0" marL="0">
+            <a:pPr marL="0" indent="0">
               <a:lnSpc>
                 <a:spcPct val="102000"/>
               </a:lnSpc>
               <a:buNone/>
             </a:pPr>
             <a:r>
-              <a:rPr lang="en-US" sz="1250" b="1" dirty="0">
+              <a:rPr lang="pt-BR" sz="1250" b="1" noProof="0" dirty="0">
                 <a:solidFill>
                   <a:srgbClr val="2A9D8F"/>
                 </a:solidFill>
@@ -6365,14 +6059,8 @@
               </a:rPr>
               <a:t>Em uma frase:  </a:t>
             </a:r>
-            <a:pPr indent="0" marL="0">
-              <a:lnSpc>
-                <a:spcPct val="102000"/>
-              </a:lnSpc>
-              <a:buNone/>
-            </a:pPr>
-            <a:r>
-              <a:rPr lang="en-US" sz="1250" dirty="0">
+            <a:r>
+              <a:rPr lang="pt-BR" sz="1250" noProof="0" dirty="0">
                 <a:solidFill>
                   <a:srgbClr val="1E2A36"/>
                 </a:solidFill>
@@ -6382,7 +6070,7 @@
               </a:rPr>
               <a:t>o saneamento, a renda e a raça/cor praticamente não mudaram; o que se corrigiu foi a razão de moradores (mínimo impossível) e, sobretudo, a taxa de analfabetismo (valores acima de 1).</a:t>
             </a:r>
-            <a:endParaRPr lang="en-US" sz="1250" dirty="0"/>
+            <a:endParaRPr lang="pt-BR" sz="1250" noProof="0" dirty="0"/>
           </a:p>
         </p:txBody>
       </p:sp>
@@ -6402,6 +6090,7 @@
         <a:solidFill>
           <a:srgbClr val="FFFFFF"/>
         </a:solidFill>
+        <a:effectLst/>
       </p:bgPr>
     </p:bg>
     <p:spTree>
@@ -6439,11 +6128,11 @@
           <a:bodyPr wrap="square" lIns="0" tIns="0" rIns="0" bIns="0" rtlCol="0" anchor="ctr"/>
           <a:lstStyle/>
           <a:p>
-            <a:pPr indent="0" marL="0">
+            <a:pPr marL="0" indent="0">
               <a:buNone/>
             </a:pPr>
             <a:r>
-              <a:rPr lang="en-US" sz="1100" b="1" spc="200" kern="0" dirty="0">
+              <a:rPr lang="pt-BR" sz="1100" b="1" kern="0" spc="200" noProof="0" dirty="0">
                 <a:solidFill>
                   <a:srgbClr val="2A9D8F"/>
                 </a:solidFill>
@@ -6453,7 +6142,7 @@
               </a:rPr>
               <a:t>COMPARATIVO EM FOCO</a:t>
             </a:r>
-            <a:endParaRPr lang="en-US" sz="1100" dirty="0"/>
+            <a:endParaRPr lang="pt-BR" sz="1100" noProof="0" dirty="0"/>
           </a:p>
         </p:txBody>
       </p:sp>
@@ -6478,11 +6167,11 @@
           <a:bodyPr wrap="square" lIns="0" tIns="0" rIns="0" bIns="0" rtlCol="0" anchor="ctr"/>
           <a:lstStyle/>
           <a:p>
-            <a:pPr indent="0" marL="0">
+            <a:pPr marL="0" indent="0">
               <a:buNone/>
             </a:pPr>
             <a:r>
-              <a:rPr lang="en-US" sz="2500" b="1" dirty="0">
+              <a:rPr lang="pt-BR" sz="2500" b="1" noProof="0" dirty="0">
                 <a:solidFill>
                   <a:srgbClr val="1E2A36"/>
                 </a:solidFill>
@@ -6492,7 +6181,7 @@
               </a:rPr>
               <a:t>O analfabetismo ficou mais bem-comportado</a:t>
             </a:r>
-            <a:endParaRPr lang="en-US" sz="2500" dirty="0"/>
+            <a:endParaRPr lang="pt-BR" sz="2500" noProof="0" dirty="0"/>
           </a:p>
         </p:txBody>
       </p:sp>
@@ -6517,11 +6206,11 @@
           <a:bodyPr wrap="square" lIns="0" tIns="0" rIns="0" bIns="0" rtlCol="0" anchor="ctr"/>
           <a:lstStyle/>
           <a:p>
-            <a:pPr indent="0" marL="0">
+            <a:pPr marL="0" indent="0">
               <a:buNone/>
             </a:pPr>
             <a:r>
-              <a:rPr lang="en-US" sz="1350" dirty="0">
+              <a:rPr lang="pt-BR" sz="1350" noProof="0" dirty="0">
                 <a:solidFill>
                   <a:srgbClr val="1E2A36"/>
                 </a:solidFill>
@@ -6531,7 +6220,7 @@
               </a:rPr>
               <a:t>A correção da fórmula não só eliminou os valores impossíveis — deixou a distribuição inteira mais limpa:</a:t>
             </a:r>
-            <a:endParaRPr lang="en-US" sz="1350" dirty="0"/>
+            <a:endParaRPr lang="pt-BR" sz="1350" noProof="0" dirty="0"/>
           </a:p>
         </p:txBody>
       </p:sp>
@@ -6559,13 +6248,20 @@
             <a:prstDash val="solid"/>
           </a:ln>
           <a:effectLst>
-            <a:outerShdw sx="100000" sy="100000" kx="0" ky="0" algn="bl" rotWithShape="0" blurRad="88900" dist="38100" dir="8100000">
+            <a:outerShdw blurRad="88900" dist="38100" dir="8100000" algn="bl" rotWithShape="0">
               <a:srgbClr val="000000">
                 <a:alpha val="15000"/>
               </a:srgbClr>
             </a:outerShdw>
           </a:effectLst>
         </p:spPr>
+        <p:txBody>
+          <a:bodyPr/>
+          <a:lstStyle/>
+          <a:p>
+            <a:endParaRPr lang="pt-BR" noProof="0" dirty="0"/>
+          </a:p>
+        </p:txBody>
       </p:sp>
       <p:sp>
         <p:nvSpPr>
@@ -6588,11 +6284,11 @@
           <a:bodyPr wrap="square" lIns="0" tIns="0" rIns="0" bIns="0" rtlCol="0" anchor="ctr"/>
           <a:lstStyle/>
           <a:p>
-            <a:pPr algn="ctr" indent="0" marL="0">
+            <a:pPr marL="0" indent="0" algn="ctr">
               <a:buNone/>
             </a:pPr>
             <a:r>
-              <a:rPr lang="en-US" sz="2400" b="1" strike="sngStrike" dirty="0">
+              <a:rPr lang="pt-BR" sz="2400" b="1" strike="sngStrike" noProof="0" dirty="0">
                 <a:solidFill>
                   <a:srgbClr val="B3261E"/>
                 </a:solidFill>
@@ -6602,11 +6298,8 @@
               </a:rPr>
               <a:t>0,042</a:t>
             </a:r>
-            <a:pPr algn="ctr" indent="0" marL="0">
-              <a:buNone/>
-            </a:pPr>
-            <a:r>
-              <a:rPr lang="en-US" sz="1600" dirty="0">
+            <a:r>
+              <a:rPr lang="pt-BR" sz="1600" noProof="0" dirty="0">
                 <a:solidFill>
                   <a:srgbClr val="5B6B7A"/>
                 </a:solidFill>
@@ -6616,11 +6309,8 @@
               </a:rPr>
               <a:t>  →  </a:t>
             </a:r>
-            <a:pPr algn="ctr" indent="0" marL="0">
-              <a:buNone/>
-            </a:pPr>
-            <a:r>
-              <a:rPr lang="en-US" sz="2800" b="1" dirty="0">
+            <a:r>
+              <a:rPr lang="pt-BR" sz="2800" b="1" noProof="0" dirty="0">
                 <a:solidFill>
                   <a:srgbClr val="2A9D8F"/>
                 </a:solidFill>
@@ -6630,7 +6320,7 @@
               </a:rPr>
               <a:t>0,039</a:t>
             </a:r>
-            <a:endParaRPr lang="en-US" sz="2400" dirty="0"/>
+            <a:endParaRPr lang="pt-BR" sz="2400" noProof="0" dirty="0"/>
           </a:p>
         </p:txBody>
       </p:sp>
@@ -6655,11 +6345,11 @@
           <a:bodyPr wrap="square" lIns="0" tIns="0" rIns="0" bIns="0" rtlCol="0" anchor="ctr"/>
           <a:lstStyle/>
           <a:p>
-            <a:pPr algn="ctr" indent="0" marL="0">
+            <a:pPr marL="0" indent="0" algn="ctr">
               <a:buNone/>
             </a:pPr>
             <a:r>
-              <a:rPr lang="en-US" sz="1150" dirty="0">
+              <a:rPr lang="pt-BR" sz="1150" noProof="0" dirty="0">
                 <a:solidFill>
                   <a:srgbClr val="1E2A36"/>
                 </a:solidFill>
@@ -6669,7 +6359,7 @@
               </a:rPr>
               <a:t>média da taxa</a:t>
             </a:r>
-            <a:endParaRPr lang="en-US" sz="1150" dirty="0"/>
+            <a:endParaRPr lang="pt-BR" sz="1150" noProof="0" dirty="0"/>
           </a:p>
         </p:txBody>
       </p:sp>
@@ -6697,13 +6387,20 @@
             <a:prstDash val="solid"/>
           </a:ln>
           <a:effectLst>
-            <a:outerShdw sx="100000" sy="100000" kx="0" ky="0" algn="bl" rotWithShape="0" blurRad="88900" dist="38100" dir="8100000">
+            <a:outerShdw blurRad="88900" dist="38100" dir="8100000" algn="bl" rotWithShape="0">
               <a:srgbClr val="000000">
                 <a:alpha val="15000"/>
               </a:srgbClr>
             </a:outerShdw>
           </a:effectLst>
         </p:spPr>
+        <p:txBody>
+          <a:bodyPr/>
+          <a:lstStyle/>
+          <a:p>
+            <a:endParaRPr lang="pt-BR" noProof="0" dirty="0"/>
+          </a:p>
+        </p:txBody>
       </p:sp>
       <p:sp>
         <p:nvSpPr>
@@ -6726,11 +6423,11 @@
           <a:bodyPr wrap="square" lIns="0" tIns="0" rIns="0" bIns="0" rtlCol="0" anchor="ctr"/>
           <a:lstStyle/>
           <a:p>
-            <a:pPr algn="ctr" indent="0" marL="0">
+            <a:pPr marL="0" indent="0" algn="ctr">
               <a:buNone/>
             </a:pPr>
             <a:r>
-              <a:rPr lang="en-US" sz="2400" b="1" strike="sngStrike" dirty="0">
+              <a:rPr lang="pt-BR" sz="2400" b="1" strike="sngStrike" noProof="0" dirty="0">
                 <a:solidFill>
                   <a:srgbClr val="B3261E"/>
                 </a:solidFill>
@@ -6740,11 +6437,8 @@
               </a:rPr>
               <a:t>0,051</a:t>
             </a:r>
-            <a:pPr algn="ctr" indent="0" marL="0">
-              <a:buNone/>
-            </a:pPr>
-            <a:r>
-              <a:rPr lang="en-US" sz="1600" dirty="0">
+            <a:r>
+              <a:rPr lang="pt-BR" sz="1600" noProof="0" dirty="0">
                 <a:solidFill>
                   <a:srgbClr val="5B6B7A"/>
                 </a:solidFill>
@@ -6754,11 +6448,8 @@
               </a:rPr>
               <a:t>  →  </a:t>
             </a:r>
-            <a:pPr algn="ctr" indent="0" marL="0">
-              <a:buNone/>
-            </a:pPr>
-            <a:r>
-              <a:rPr lang="en-US" sz="2800" b="1" dirty="0">
+            <a:r>
+              <a:rPr lang="pt-BR" sz="2800" b="1" noProof="0" dirty="0">
                 <a:solidFill>
                   <a:srgbClr val="2A9D8F"/>
                 </a:solidFill>
@@ -6768,7 +6459,7 @@
               </a:rPr>
               <a:t>0,041</a:t>
             </a:r>
-            <a:endParaRPr lang="en-US" sz="2400" dirty="0"/>
+            <a:endParaRPr lang="pt-BR" sz="2400" noProof="0" dirty="0"/>
           </a:p>
         </p:txBody>
       </p:sp>
@@ -6793,11 +6484,11 @@
           <a:bodyPr wrap="square" lIns="0" tIns="0" rIns="0" bIns="0" rtlCol="0" anchor="ctr"/>
           <a:lstStyle/>
           <a:p>
-            <a:pPr algn="ctr" indent="0" marL="0">
+            <a:pPr marL="0" indent="0" algn="ctr">
               <a:buNone/>
             </a:pPr>
             <a:r>
-              <a:rPr lang="en-US" sz="1150" dirty="0">
+              <a:rPr lang="pt-BR" sz="1150" noProof="0" dirty="0">
                 <a:solidFill>
                   <a:srgbClr val="1E2A36"/>
                 </a:solidFill>
@@ -6807,7 +6498,7 @@
               </a:rPr>
               <a:t>desvio-padrão</a:t>
             </a:r>
-            <a:endParaRPr lang="en-US" sz="1150" dirty="0"/>
+            <a:endParaRPr lang="pt-BR" sz="1150" noProof="0" dirty="0"/>
           </a:p>
         </p:txBody>
       </p:sp>
@@ -6835,13 +6526,20 @@
             <a:prstDash val="solid"/>
           </a:ln>
           <a:effectLst>
-            <a:outerShdw sx="100000" sy="100000" kx="0" ky="0" algn="bl" rotWithShape="0" blurRad="88900" dist="38100" dir="8100000">
+            <a:outerShdw blurRad="88900" dist="38100" dir="8100000" algn="bl" rotWithShape="0">
               <a:srgbClr val="000000">
                 <a:alpha val="15000"/>
               </a:srgbClr>
             </a:outerShdw>
           </a:effectLst>
         </p:spPr>
+        <p:txBody>
+          <a:bodyPr/>
+          <a:lstStyle/>
+          <a:p>
+            <a:endParaRPr lang="pt-BR" noProof="0" dirty="0"/>
+          </a:p>
+        </p:txBody>
       </p:sp>
       <p:sp>
         <p:nvSpPr>
@@ -6864,11 +6562,11 @@
           <a:bodyPr wrap="square" lIns="0" tIns="0" rIns="0" bIns="0" rtlCol="0" anchor="ctr"/>
           <a:lstStyle/>
           <a:p>
-            <a:pPr algn="ctr" indent="0" marL="0">
+            <a:pPr marL="0" indent="0" algn="ctr">
               <a:buNone/>
             </a:pPr>
             <a:r>
-              <a:rPr lang="en-US" sz="2400" b="1" strike="sngStrike" dirty="0">
+              <a:rPr lang="pt-BR" sz="2400" b="1" strike="sngStrike" noProof="0" dirty="0">
                 <a:solidFill>
                   <a:srgbClr val="B3261E"/>
                 </a:solidFill>
@@ -6878,11 +6576,8 @@
               </a:rPr>
               <a:t>4,69</a:t>
             </a:r>
-            <a:pPr algn="ctr" indent="0" marL="0">
-              <a:buNone/>
-            </a:pPr>
-            <a:r>
-              <a:rPr lang="en-US" sz="1600" dirty="0">
+            <a:r>
+              <a:rPr lang="pt-BR" sz="1600" noProof="0" dirty="0">
                 <a:solidFill>
                   <a:srgbClr val="5B6B7A"/>
                 </a:solidFill>
@@ -6892,11 +6587,8 @@
               </a:rPr>
               <a:t>  →  </a:t>
             </a:r>
-            <a:pPr algn="ctr" indent="0" marL="0">
-              <a:buNone/>
-            </a:pPr>
-            <a:r>
-              <a:rPr lang="en-US" sz="2800" b="1" dirty="0">
+            <a:r>
+              <a:rPr lang="pt-BR" sz="2800" b="1" noProof="0" dirty="0">
                 <a:solidFill>
                   <a:srgbClr val="2A9D8F"/>
                 </a:solidFill>
@@ -6906,7 +6598,7 @@
               </a:rPr>
               <a:t>2,98</a:t>
             </a:r>
-            <a:endParaRPr lang="en-US" sz="2400" dirty="0"/>
+            <a:endParaRPr lang="pt-BR" sz="2400" noProof="0" dirty="0"/>
           </a:p>
         </p:txBody>
       </p:sp>
@@ -6931,11 +6623,11 @@
           <a:bodyPr wrap="square" lIns="0" tIns="0" rIns="0" bIns="0" rtlCol="0" anchor="ctr"/>
           <a:lstStyle/>
           <a:p>
-            <a:pPr algn="ctr" indent="0" marL="0">
+            <a:pPr marL="0" indent="0" algn="ctr">
               <a:buNone/>
             </a:pPr>
             <a:r>
-              <a:rPr lang="en-US" sz="1150" dirty="0">
+              <a:rPr lang="pt-BR" sz="1150" noProof="0" dirty="0">
                 <a:solidFill>
                   <a:srgbClr val="1E2A36"/>
                 </a:solidFill>
@@ -6945,7 +6637,7 @@
               </a:rPr>
               <a:t>assimetria (cauda à direita)</a:t>
             </a:r>
-            <a:endParaRPr lang="en-US" sz="1150" dirty="0"/>
+            <a:endParaRPr lang="pt-BR" sz="1150" noProof="0" dirty="0"/>
           </a:p>
         </p:txBody>
       </p:sp>
@@ -6973,13 +6665,20 @@
             <a:prstDash val="solid"/>
           </a:ln>
           <a:effectLst>
-            <a:outerShdw sx="100000" sy="100000" kx="0" ky="0" algn="bl" rotWithShape="0" blurRad="88900" dist="38100" dir="8100000">
+            <a:outerShdw blurRad="88900" dist="38100" dir="8100000" algn="bl" rotWithShape="0">
               <a:srgbClr val="000000">
                 <a:alpha val="15000"/>
               </a:srgbClr>
             </a:outerShdw>
           </a:effectLst>
         </p:spPr>
+        <p:txBody>
+          <a:bodyPr/>
+          <a:lstStyle/>
+          <a:p>
+            <a:endParaRPr lang="pt-BR" noProof="0" dirty="0"/>
+          </a:p>
+        </p:txBody>
       </p:sp>
       <p:sp>
         <p:nvSpPr>
@@ -7002,11 +6701,11 @@
           <a:bodyPr wrap="square" lIns="0" tIns="0" rIns="0" bIns="0" rtlCol="0" anchor="ctr"/>
           <a:lstStyle/>
           <a:p>
-            <a:pPr algn="ctr" indent="0" marL="0">
+            <a:pPr marL="0" indent="0" algn="ctr">
               <a:buNone/>
             </a:pPr>
             <a:r>
-              <a:rPr lang="en-US" sz="2400" b="1" strike="sngStrike" dirty="0">
+              <a:rPr lang="pt-BR" sz="2400" b="1" strike="sngStrike" noProof="0" dirty="0">
                 <a:solidFill>
                   <a:srgbClr val="B3261E"/>
                 </a:solidFill>
@@ -7016,11 +6715,8 @@
               </a:rPr>
               <a:t>44,1</a:t>
             </a:r>
-            <a:pPr algn="ctr" indent="0" marL="0">
-              <a:buNone/>
-            </a:pPr>
-            <a:r>
-              <a:rPr lang="en-US" sz="1600" dirty="0">
+            <a:r>
+              <a:rPr lang="pt-BR" sz="1600" noProof="0" dirty="0">
                 <a:solidFill>
                   <a:srgbClr val="5B6B7A"/>
                 </a:solidFill>
@@ -7030,11 +6726,8 @@
               </a:rPr>
               <a:t>  →  </a:t>
             </a:r>
-            <a:pPr algn="ctr" indent="0" marL="0">
-              <a:buNone/>
-            </a:pPr>
-            <a:r>
-              <a:rPr lang="en-US" sz="2800" b="1" dirty="0">
+            <a:r>
+              <a:rPr lang="pt-BR" sz="2800" b="1" noProof="0" dirty="0">
                 <a:solidFill>
                   <a:srgbClr val="2A9D8F"/>
                 </a:solidFill>
@@ -7044,7 +6737,7 @@
               </a:rPr>
               <a:t>17,7</a:t>
             </a:r>
-            <a:endParaRPr lang="en-US" sz="2400" dirty="0"/>
+            <a:endParaRPr lang="pt-BR" sz="2400" noProof="0" dirty="0"/>
           </a:p>
         </p:txBody>
       </p:sp>
@@ -7069,11 +6762,11 @@
           <a:bodyPr wrap="square" lIns="0" tIns="0" rIns="0" bIns="0" rtlCol="0" anchor="ctr"/>
           <a:lstStyle/>
           <a:p>
-            <a:pPr algn="ctr" indent="0" marL="0">
+            <a:pPr marL="0" indent="0" algn="ctr">
               <a:buNone/>
             </a:pPr>
             <a:r>
-              <a:rPr lang="en-US" sz="1150" dirty="0">
+              <a:rPr lang="pt-BR" sz="1150" noProof="0" dirty="0">
                 <a:solidFill>
                   <a:srgbClr val="1E2A36"/>
                 </a:solidFill>
@@ -7083,7 +6776,7 @@
               </a:rPr>
               <a:t>curtose</a:t>
             </a:r>
-            <a:endParaRPr lang="en-US" sz="1150" dirty="0"/>
+            <a:endParaRPr lang="pt-BR" sz="1150" noProof="0" dirty="0"/>
           </a:p>
         </p:txBody>
       </p:sp>
@@ -7111,13 +6804,20 @@
             <a:prstDash val="solid"/>
           </a:ln>
           <a:effectLst>
-            <a:outerShdw sx="100000" sy="100000" kx="0" ky="0" algn="bl" rotWithShape="0" blurRad="88900" dist="38100" dir="8100000">
+            <a:outerShdw blurRad="88900" dist="38100" dir="8100000" algn="bl" rotWithShape="0">
               <a:srgbClr val="000000">
                 <a:alpha val="15000"/>
               </a:srgbClr>
             </a:outerShdw>
           </a:effectLst>
         </p:spPr>
+        <p:txBody>
+          <a:bodyPr/>
+          <a:lstStyle/>
+          <a:p>
+            <a:endParaRPr lang="pt-BR" noProof="0" dirty="0"/>
+          </a:p>
+        </p:txBody>
       </p:sp>
       <p:sp>
         <p:nvSpPr>
@@ -7140,11 +6840,11 @@
           <a:bodyPr wrap="square" lIns="0" tIns="0" rIns="0" bIns="0" rtlCol="0" anchor="ctr"/>
           <a:lstStyle/>
           <a:p>
-            <a:pPr algn="ctr" indent="0" marL="0">
+            <a:pPr marL="0" indent="0" algn="ctr">
               <a:buNone/>
             </a:pPr>
             <a:r>
-              <a:rPr lang="en-US" sz="2400" b="1" strike="sngStrike" dirty="0">
+              <a:rPr lang="pt-BR" sz="2400" b="1" strike="sngStrike" noProof="0" dirty="0">
                 <a:solidFill>
                   <a:srgbClr val="B3261E"/>
                 </a:solidFill>
@@ -7154,11 +6854,8 @@
               </a:rPr>
               <a:t>5,33</a:t>
             </a:r>
-            <a:pPr algn="ctr" indent="0" marL="0">
-              <a:buNone/>
-            </a:pPr>
-            <a:r>
-              <a:rPr lang="en-US" sz="1600" dirty="0">
+            <a:r>
+              <a:rPr lang="pt-BR" sz="1600" noProof="0" dirty="0">
                 <a:solidFill>
                   <a:srgbClr val="5B6B7A"/>
                 </a:solidFill>
@@ -7168,11 +6865,8 @@
               </a:rPr>
               <a:t>  →  </a:t>
             </a:r>
-            <a:pPr algn="ctr" indent="0" marL="0">
-              <a:buNone/>
-            </a:pPr>
-            <a:r>
-              <a:rPr lang="en-US" sz="2800" b="1" dirty="0">
+            <a:r>
+              <a:rPr lang="pt-BR" sz="2800" b="1" noProof="0" dirty="0">
                 <a:solidFill>
                   <a:srgbClr val="2A9D8F"/>
                 </a:solidFill>
@@ -7182,7 +6876,7 @@
               </a:rPr>
               <a:t>0,84</a:t>
             </a:r>
-            <a:endParaRPr lang="en-US" sz="2400" dirty="0"/>
+            <a:endParaRPr lang="pt-BR" sz="2400" noProof="0" dirty="0"/>
           </a:p>
         </p:txBody>
       </p:sp>
@@ -7207,11 +6901,11 @@
           <a:bodyPr wrap="square" lIns="0" tIns="0" rIns="0" bIns="0" rtlCol="0" anchor="ctr"/>
           <a:lstStyle/>
           <a:p>
-            <a:pPr algn="ctr" indent="0" marL="0">
+            <a:pPr marL="0" indent="0" algn="ctr">
               <a:buNone/>
             </a:pPr>
             <a:r>
-              <a:rPr lang="en-US" sz="1150" dirty="0">
+              <a:rPr lang="pt-BR" sz="1150" noProof="0" dirty="0">
                 <a:solidFill>
                   <a:srgbClr val="1E2A36"/>
                 </a:solidFill>
@@ -7221,7 +6915,7 @@
               </a:rPr>
               <a:t>valor máximo</a:t>
             </a:r>
-            <a:endParaRPr lang="en-US" sz="1150" dirty="0"/>
+            <a:endParaRPr lang="pt-BR" sz="1150" noProof="0" dirty="0"/>
           </a:p>
         </p:txBody>
       </p:sp>
@@ -7249,13 +6943,20 @@
             <a:prstDash val="solid"/>
           </a:ln>
           <a:effectLst>
-            <a:outerShdw sx="100000" sy="100000" kx="0" ky="0" algn="bl" rotWithShape="0" blurRad="88900" dist="38100" dir="8100000">
+            <a:outerShdw blurRad="88900" dist="38100" dir="8100000" algn="bl" rotWithShape="0">
               <a:srgbClr val="000000">
                 <a:alpha val="15000"/>
               </a:srgbClr>
             </a:outerShdw>
           </a:effectLst>
         </p:spPr>
+        <p:txBody>
+          <a:bodyPr/>
+          <a:lstStyle/>
+          <a:p>
+            <a:endParaRPr lang="pt-BR" noProof="0" dirty="0"/>
+          </a:p>
+        </p:txBody>
       </p:sp>
       <p:sp>
         <p:nvSpPr>
@@ -7278,11 +6979,11 @@
           <a:bodyPr wrap="square" lIns="0" tIns="0" rIns="0" bIns="0" rtlCol="0" anchor="ctr"/>
           <a:lstStyle/>
           <a:p>
-            <a:pPr algn="ctr" indent="0" marL="0">
+            <a:pPr marL="0" indent="0" algn="ctr">
               <a:buNone/>
             </a:pPr>
             <a:r>
-              <a:rPr lang="en-US" sz="2400" b="1" strike="sngStrike" dirty="0">
+              <a:rPr lang="pt-BR" sz="2400" b="1" strike="sngStrike" noProof="0" dirty="0">
                 <a:solidFill>
                   <a:srgbClr val="B3261E"/>
                 </a:solidFill>
@@ -7292,11 +6993,8 @@
               </a:rPr>
               <a:t>10</a:t>
             </a:r>
-            <a:pPr algn="ctr" indent="0" marL="0">
-              <a:buNone/>
-            </a:pPr>
-            <a:r>
-              <a:rPr lang="en-US" sz="1600" dirty="0">
+            <a:r>
+              <a:rPr lang="pt-BR" sz="1600" noProof="0" dirty="0">
                 <a:solidFill>
                   <a:srgbClr val="5B6B7A"/>
                 </a:solidFill>
@@ -7306,11 +7004,8 @@
               </a:rPr>
               <a:t>  →  </a:t>
             </a:r>
-            <a:pPr algn="ctr" indent="0" marL="0">
-              <a:buNone/>
-            </a:pPr>
-            <a:r>
-              <a:rPr lang="en-US" sz="2800" b="1" dirty="0">
+            <a:r>
+              <a:rPr lang="pt-BR" sz="2800" b="1" noProof="0" dirty="0">
                 <a:solidFill>
                   <a:srgbClr val="2A9D8F"/>
                 </a:solidFill>
@@ -7320,7 +7015,7 @@
               </a:rPr>
               <a:t>0</a:t>
             </a:r>
-            <a:endParaRPr lang="en-US" sz="2400" dirty="0"/>
+            <a:endParaRPr lang="pt-BR" sz="2400" noProof="0" dirty="0"/>
           </a:p>
         </p:txBody>
       </p:sp>
@@ -7345,11 +7040,11 @@
           <a:bodyPr wrap="square" lIns="0" tIns="0" rIns="0" bIns="0" rtlCol="0" anchor="ctr"/>
           <a:lstStyle/>
           <a:p>
-            <a:pPr algn="ctr" indent="0" marL="0">
+            <a:pPr marL="0" indent="0" algn="ctr">
               <a:buNone/>
             </a:pPr>
             <a:r>
-              <a:rPr lang="en-US" sz="1150" dirty="0">
+              <a:rPr lang="pt-BR" sz="1150" noProof="0" dirty="0">
                 <a:solidFill>
                   <a:srgbClr val="1E2A36"/>
                 </a:solidFill>
@@ -7359,7 +7054,7 @@
               </a:rPr>
               <a:t>valores impossíveis (&gt;1)</a:t>
             </a:r>
-            <a:endParaRPr lang="en-US" sz="1150" dirty="0"/>
+            <a:endParaRPr lang="pt-BR" sz="1150" noProof="0" dirty="0"/>
           </a:p>
         </p:txBody>
       </p:sp>
@@ -7384,6 +7079,13 @@
           </a:solidFill>
           <a:ln/>
         </p:spPr>
+        <p:txBody>
+          <a:bodyPr/>
+          <a:lstStyle/>
+          <a:p>
+            <a:endParaRPr lang="pt-BR" noProof="0" dirty="0"/>
+          </a:p>
+        </p:txBody>
       </p:sp>
       <p:sp>
         <p:nvSpPr>
@@ -7406,11 +7108,11 @@
           <a:bodyPr wrap="square" lIns="0" tIns="0" rIns="0" bIns="0" rtlCol="0" anchor="ctr"/>
           <a:lstStyle/>
           <a:p>
-            <a:pPr algn="ctr" indent="0" marL="0">
+            <a:pPr marL="0" indent="0" algn="ctr">
               <a:buNone/>
             </a:pPr>
             <a:r>
-              <a:rPr lang="en-US" sz="1150" b="1" dirty="0">
+              <a:rPr lang="pt-BR" sz="1150" b="1" noProof="0" dirty="0">
                 <a:solidFill>
                   <a:srgbClr val="2A9D8F"/>
                 </a:solidFill>
@@ -7420,11 +7122,8 @@
               </a:rPr>
               <a:t>Como ler:  </a:t>
             </a:r>
-            <a:pPr algn="ctr" indent="0" marL="0">
-              <a:buNone/>
-            </a:pPr>
-            <a:r>
-              <a:rPr lang="en-US" sz="1150" dirty="0">
+            <a:r>
+              <a:rPr lang="pt-BR" sz="1150" noProof="0" dirty="0">
                 <a:solidFill>
                   <a:srgbClr val="FFFFFF"/>
                 </a:solidFill>
@@ -7434,7 +7133,7 @@
               </a:rPr>
               <a:t>assimetria e curtose menores = menos distorção por extremos. O n (89.527) depende do sigilo, não da fórmula.</a:t>
             </a:r>
-            <a:endParaRPr lang="en-US" sz="1150" dirty="0"/>
+            <a:endParaRPr lang="pt-BR" sz="1150" noProof="0" dirty="0"/>
           </a:p>
         </p:txBody>
       </p:sp>
@@ -7454,6 +7153,7 @@
         <a:solidFill>
           <a:srgbClr val="FFFFFF"/>
         </a:solidFill>
+        <a:effectLst/>
       </p:bgPr>
     </p:bg>
     <p:spTree>
@@ -7491,11 +7191,11 @@
           <a:bodyPr wrap="square" lIns="0" tIns="0" rIns="0" bIns="0" rtlCol="0" anchor="ctr"/>
           <a:lstStyle/>
           <a:p>
-            <a:pPr indent="0" marL="0">
+            <a:pPr marL="0" indent="0">
               <a:buNone/>
             </a:pPr>
             <a:r>
-              <a:rPr lang="en-US" sz="1100" b="1" spc="200" kern="0" dirty="0">
+              <a:rPr lang="pt-BR" sz="1100" b="1" kern="0" spc="200" noProof="0" dirty="0">
                 <a:solidFill>
                   <a:srgbClr val="1C7293"/>
                 </a:solidFill>
@@ -7505,7 +7205,7 @@
               </a:rPr>
               <a:t>DISTRIBUIÇÕES (BASE NOVA)</a:t>
             </a:r>
-            <a:endParaRPr lang="en-US" sz="1100" dirty="0"/>
+            <a:endParaRPr lang="pt-BR" sz="1100" noProof="0" dirty="0"/>
           </a:p>
         </p:txBody>
       </p:sp>
@@ -7530,11 +7230,11 @@
           <a:bodyPr wrap="square" lIns="0" tIns="0" rIns="0" bIns="0" rtlCol="0" anchor="ctr"/>
           <a:lstStyle/>
           <a:p>
-            <a:pPr indent="0" marL="0">
+            <a:pPr marL="0" indent="0">
               <a:buNone/>
             </a:pPr>
             <a:r>
-              <a:rPr lang="en-US" sz="2500" b="1" dirty="0">
+              <a:rPr lang="pt-BR" sz="2500" b="1" noProof="0" dirty="0">
                 <a:solidFill>
                   <a:srgbClr val="1E2A36"/>
                 </a:solidFill>
@@ -7544,20 +7244,20 @@
               </a:rPr>
               <a:t>Forma de cada uma das 7 variáveis</a:t>
             </a:r>
-            <a:endParaRPr lang="en-US" sz="2500" dirty="0"/>
+            <a:endParaRPr lang="pt-BR" sz="2500" noProof="0" dirty="0"/>
           </a:p>
         </p:txBody>
       </p:sp>
       <p:pic>
         <p:nvPicPr>
-          <p:cNvPr id="4" name="Image 0" descr="D:/Iniciação Cientifica/Projeto_IVS_Censo22/banco_de_dados/eda/figuras/histogramas.png">    </p:cNvPr>
+          <p:cNvPr id="4" name="Image 0" descr="D:/Iniciação Cientifica/Projeto_IVS_Censo22/banco_de_dados/eda/figuras/histogramas.png"/>
           <p:cNvPicPr>
             <a:picLocks noChangeAspect="1"/>
           </p:cNvPicPr>
           <p:nvPr/>
         </p:nvPicPr>
         <p:blipFill>
-          <a:blip r:embed="rId1"/>
+          <a:blip r:embed="rId3"/>
           <a:stretch>
             <a:fillRect/>
           </a:stretch>
@@ -7604,7 +7304,7 @@
               <a:buChar char="•"/>
             </a:pPr>
             <a:r>
-              <a:rPr lang="en-US" sz="1300" dirty="0">
+              <a:rPr lang="pt-BR" sz="1300" noProof="0" dirty="0">
                 <a:solidFill>
                   <a:srgbClr val="1E2A36"/>
                 </a:solidFill>
@@ -7614,7 +7314,7 @@
               </a:rPr>
               <a:t>Água, esgoto e lixo: a maioria dos setores tem 0% de inadequação (pico em zero) e uma cauda de bolsões críticos.</a:t>
             </a:r>
-            <a:endParaRPr lang="en-US" sz="1300" dirty="0"/>
+            <a:endParaRPr lang="pt-BR" sz="1300" noProof="0" dirty="0"/>
           </a:p>
           <a:p>
             <a:pPr marL="177800" indent="-177800">
@@ -7628,7 +7328,7 @@
               <a:buChar char="•"/>
             </a:pPr>
             <a:r>
-              <a:rPr lang="en-US" sz="1300" b="1" dirty="0">
+              <a:rPr lang="pt-BR" sz="1300" b="1" noProof="0" dirty="0">
                 <a:solidFill>
                   <a:srgbClr val="1C7293"/>
                 </a:solidFill>
@@ -7638,7 +7338,7 @@
               </a:rPr>
               <a:t>Razão de moradores: a única quase simétrica (~normal em torno de 2,7).</a:t>
             </a:r>
-            <a:endParaRPr lang="en-US" sz="1300" dirty="0"/>
+            <a:endParaRPr lang="pt-BR" sz="1300" noProof="0" dirty="0"/>
           </a:p>
           <a:p>
             <a:pPr marL="177800" indent="-177800">
@@ -7652,7 +7352,7 @@
               <a:buChar char="•"/>
             </a:pPr>
             <a:r>
-              <a:rPr lang="en-US" sz="1300" b="1" dirty="0">
+              <a:rPr lang="pt-BR" sz="1300" b="1" noProof="0" dirty="0">
                 <a:solidFill>
                   <a:srgbClr val="2A9D8F"/>
                 </a:solidFill>
@@ -7662,7 +7362,7 @@
               </a:rPr>
               <a:t>Analfabetismo: assimétrico, agora contido em [0; 0,84] após a correção.</a:t>
             </a:r>
-            <a:endParaRPr lang="en-US" sz="1300" dirty="0"/>
+            <a:endParaRPr lang="pt-BR" sz="1300" noProof="0" dirty="0"/>
           </a:p>
           <a:p>
             <a:pPr marL="177800" indent="-177800">
@@ -7676,7 +7376,7 @@
               <a:buChar char="•"/>
             </a:pPr>
             <a:r>
-              <a:rPr lang="en-US" sz="1300" dirty="0">
+              <a:rPr lang="pt-BR" sz="1300" noProof="0" dirty="0">
                 <a:solidFill>
                   <a:srgbClr val="1E2A36"/>
                 </a:solidFill>
@@ -7686,7 +7386,7 @@
               </a:rPr>
               <a:t>Renda: cauda longuíssima (máx. R$ 170 mil em 1 setor).</a:t>
             </a:r>
-            <a:endParaRPr lang="en-US" sz="1300" dirty="0"/>
+            <a:endParaRPr lang="pt-BR" sz="1300" noProof="0" dirty="0"/>
           </a:p>
           <a:p>
             <a:pPr marL="177800" indent="-177800">
@@ -7700,7 +7400,7 @@
               <a:buChar char="•"/>
             </a:pPr>
             <a:r>
-              <a:rPr lang="en-US" sz="1300" dirty="0">
+              <a:rPr lang="pt-BR" sz="1300" noProof="0" dirty="0">
                 <a:solidFill>
                   <a:srgbClr val="1E2A36"/>
                 </a:solidFill>
@@ -7710,7 +7410,7 @@
               </a:rPr>
               <a:t>Raça PPI: a mais espalhada — reflete a diversidade entre municípios.</a:t>
             </a:r>
-            <a:endParaRPr lang="en-US" sz="1300" dirty="0"/>
+            <a:endParaRPr lang="pt-BR" sz="1300" noProof="0" dirty="0"/>
           </a:p>
         </p:txBody>
       </p:sp>
@@ -7730,6 +7430,7 @@
         <a:solidFill>
           <a:srgbClr val="FFFFFF"/>
         </a:solidFill>
+        <a:effectLst/>
       </p:bgPr>
     </p:bg>
     <p:spTree>
@@ -7767,11 +7468,11 @@
           <a:bodyPr wrap="square" lIns="0" tIns="0" rIns="0" bIns="0" rtlCol="0" anchor="ctr"/>
           <a:lstStyle/>
           <a:p>
-            <a:pPr indent="0" marL="0">
+            <a:pPr marL="0" indent="0">
               <a:buNone/>
             </a:pPr>
             <a:r>
-              <a:rPr lang="en-US" sz="1100" b="1" spc="200" kern="0" dirty="0">
+              <a:rPr lang="pt-BR" sz="1100" b="1" kern="0" spc="200" noProof="0" dirty="0">
                 <a:solidFill>
                   <a:srgbClr val="1C7293"/>
                 </a:solidFill>
@@ -7781,7 +7482,7 @@
               </a:rPr>
               <a:t>O QUE SE MANTEVE</a:t>
             </a:r>
-            <a:endParaRPr lang="en-US" sz="1100" dirty="0"/>
+            <a:endParaRPr lang="pt-BR" sz="1100" noProof="0" dirty="0"/>
           </a:p>
         </p:txBody>
       </p:sp>
@@ -7806,11 +7507,11 @@
           <a:bodyPr wrap="square" lIns="0" tIns="0" rIns="0" bIns="0" rtlCol="0" anchor="ctr"/>
           <a:lstStyle/>
           <a:p>
-            <a:pPr indent="0" marL="0">
+            <a:pPr marL="0" indent="0">
               <a:buNone/>
             </a:pPr>
             <a:r>
-              <a:rPr lang="en-US" sz="2500" b="1" dirty="0">
+              <a:rPr lang="pt-BR" sz="2500" b="1" noProof="0" dirty="0">
                 <a:solidFill>
                   <a:srgbClr val="1E2A36"/>
                 </a:solidFill>
@@ -7820,13 +7521,13 @@
               </a:rPr>
               <a:t>Gradiente regional Norte → Sul (média)</a:t>
             </a:r>
-            <a:endParaRPr lang="en-US" sz="2500" dirty="0"/>
+            <a:endParaRPr lang="pt-BR" sz="2500" noProof="0" dirty="0"/>
           </a:p>
         </p:txBody>
       </p:sp>
       <p:graphicFrame>
         <p:nvGraphicFramePr>
-          <p:cNvPr id="4" name="Chart 0" descr=""/>
+          <p:cNvPr id="4" name="Chart 0"/>
           <p:cNvGraphicFramePr/>
           <p:nvPr/>
         </p:nvGraphicFramePr>
@@ -7834,9 +7535,9 @@
           <a:off x="365760" y="1325880"/>
           <a:ext cx="5394960" cy="3383280"/>
         </p:xfrm>
-        <a:graphic xmlns:a="http://schemas.openxmlformats.org/drawingml/2006/main">
+        <a:graphic>
           <a:graphicData uri="http://schemas.openxmlformats.org/drawingml/2006/chart">
-            <c:chart xmlns:c="http://schemas.openxmlformats.org/drawingml/2006/chart" r:id="rId1"/>
+            <c:chart xmlns:c="http://schemas.openxmlformats.org/drawingml/2006/chart" xmlns:r="http://schemas.openxmlformats.org/officeDocument/2006/relationships" r:id="rId3"/>
           </a:graphicData>
         </a:graphic>
       </p:graphicFrame>
@@ -7872,7 +7573,7 @@
               <a:buChar char="•"/>
             </a:pPr>
             <a:r>
-              <a:rPr lang="en-US" sz="1300" b="1" dirty="0">
+              <a:rPr lang="pt-BR" sz="1300" b="1" noProof="0" dirty="0">
                 <a:solidFill>
                   <a:srgbClr val="B3261E"/>
                 </a:solidFill>
@@ -7882,7 +7583,7 @@
               </a:rPr>
               <a:t>A correção não alterou o retrato regional: a vulnerabilidade ainda cai do Norte para o Sul.</a:t>
             </a:r>
-            <a:endParaRPr lang="en-US" sz="1300" dirty="0"/>
+            <a:endParaRPr lang="pt-BR" sz="1300" noProof="0" dirty="0"/>
           </a:p>
           <a:p>
             <a:pPr marL="177800" indent="-177800">
@@ -7896,7 +7597,7 @@
               <a:buChar char="•"/>
             </a:pPr>
             <a:r>
-              <a:rPr lang="en-US" sz="1300" dirty="0">
+              <a:rPr lang="pt-BR" sz="1300" noProof="0" dirty="0">
                 <a:solidFill>
                   <a:srgbClr val="1E2A36"/>
                 </a:solidFill>
@@ -7906,7 +7607,7 @@
               </a:rPr>
               <a:t>Água inadequada no Norte (36%) é ~10× a do Sul (3,5%).</a:t>
             </a:r>
-            <a:endParaRPr lang="en-US" sz="1300" dirty="0"/>
+            <a:endParaRPr lang="pt-BR" sz="1300" noProof="0" dirty="0"/>
           </a:p>
           <a:p>
             <a:pPr marL="177800" indent="-177800">
@@ -7920,7 +7621,7 @@
               <a:buChar char="•"/>
             </a:pPr>
             <a:r>
-              <a:rPr lang="en-US" sz="1300" b="1" dirty="0">
+              <a:rPr lang="pt-BR" sz="1300" b="1" noProof="0" dirty="0">
                 <a:solidFill>
                   <a:srgbClr val="1C7293"/>
                 </a:solidFill>
@@ -7928,9 +7629,53 @@
                 <a:ea typeface="Calibri" pitchFamily="34" charset="-122"/>
                 <a:cs typeface="Calibri" pitchFamily="34" charset="-120"/>
               </a:rPr>
-              <a:t>Socioeconômico: analfabetismo NE 6,7% vs Sul 2,2%; raça PPI Norte 76% vs Sul 25%; renda NE R$2.960 (menor).</a:t>
-            </a:r>
-            <a:endParaRPr lang="en-US" sz="1300" dirty="0"/>
+              <a:t>Socioeconômico: analfabetismo NE 6,7% </a:t>
+            </a:r>
+            <a:r>
+              <a:rPr lang="pt-BR" sz="1300" b="1" noProof="0" dirty="0" err="1">
+                <a:solidFill>
+                  <a:srgbClr val="1C7293"/>
+                </a:solidFill>
+                <a:latin typeface="Calibri" pitchFamily="34" charset="0"/>
+                <a:ea typeface="Calibri" pitchFamily="34" charset="-122"/>
+                <a:cs typeface="Calibri" pitchFamily="34" charset="-120"/>
+              </a:rPr>
+              <a:t>vs</a:t>
+            </a:r>
+            <a:r>
+              <a:rPr lang="pt-BR" sz="1300" b="1" noProof="0" dirty="0">
+                <a:solidFill>
+                  <a:srgbClr val="1C7293"/>
+                </a:solidFill>
+                <a:latin typeface="Calibri" pitchFamily="34" charset="0"/>
+                <a:ea typeface="Calibri" pitchFamily="34" charset="-122"/>
+                <a:cs typeface="Calibri" pitchFamily="34" charset="-120"/>
+              </a:rPr>
+              <a:t> Sul 2,2%; raça PPI Norte 76% </a:t>
+            </a:r>
+            <a:r>
+              <a:rPr lang="pt-BR" sz="1300" b="1" noProof="0" dirty="0" err="1">
+                <a:solidFill>
+                  <a:srgbClr val="1C7293"/>
+                </a:solidFill>
+                <a:latin typeface="Calibri" pitchFamily="34" charset="0"/>
+                <a:ea typeface="Calibri" pitchFamily="34" charset="-122"/>
+                <a:cs typeface="Calibri" pitchFamily="34" charset="-120"/>
+              </a:rPr>
+              <a:t>vs</a:t>
+            </a:r>
+            <a:r>
+              <a:rPr lang="pt-BR" sz="1300" b="1" noProof="0" dirty="0">
+                <a:solidFill>
+                  <a:srgbClr val="1C7293"/>
+                </a:solidFill>
+                <a:latin typeface="Calibri" pitchFamily="34" charset="0"/>
+                <a:ea typeface="Calibri" pitchFamily="34" charset="-122"/>
+                <a:cs typeface="Calibri" pitchFamily="34" charset="-120"/>
+              </a:rPr>
+              <a:t> Sul 25%; renda média mais baixa no Norte e NE (R$2,8–3,0 mil).</a:t>
+            </a:r>
+            <a:endParaRPr lang="pt-BR" sz="1300" noProof="0" dirty="0"/>
           </a:p>
           <a:p>
             <a:pPr marL="177800" indent="-177800">
@@ -7944,7 +7689,7 @@
               <a:buChar char="•"/>
             </a:pPr>
             <a:r>
-              <a:rPr lang="en-US" sz="1300" b="1" dirty="0">
+              <a:rPr lang="pt-BR" sz="1300" b="1" noProof="0" dirty="0">
                 <a:solidFill>
                   <a:srgbClr val="1E2A36"/>
                 </a:solidFill>
@@ -7954,7 +7699,7 @@
               </a:rPr>
               <a:t>Ou seja: as conclusões substantivas da EDA antiga continuam válidas.</a:t>
             </a:r>
-            <a:endParaRPr lang="en-US" sz="1300" dirty="0"/>
+            <a:endParaRPr lang="pt-BR" sz="1300" noProof="0" dirty="0"/>
           </a:p>
         </p:txBody>
       </p:sp>
@@ -7974,6 +7719,7 @@
         <a:solidFill>
           <a:srgbClr val="FFFFFF"/>
         </a:solidFill>
+        <a:effectLst/>
       </p:bgPr>
     </p:bg>
     <p:spTree>
@@ -8011,11 +7757,11 @@
           <a:bodyPr wrap="square" lIns="0" tIns="0" rIns="0" bIns="0" rtlCol="0" anchor="ctr"/>
           <a:lstStyle/>
           <a:p>
-            <a:pPr indent="0" marL="0">
+            <a:pPr marL="0" indent="0">
               <a:buNone/>
             </a:pPr>
             <a:r>
-              <a:rPr lang="en-US" sz="1100" b="1" spc="200" kern="0" dirty="0">
+              <a:rPr lang="pt-BR" sz="1100" b="1" kern="0" spc="200" noProof="0" dirty="0">
                 <a:solidFill>
                   <a:srgbClr val="1C7293"/>
                 </a:solidFill>
@@ -8025,7 +7771,7 @@
               </a:rPr>
               <a:t>O QUE SE MANTEVE</a:t>
             </a:r>
-            <a:endParaRPr lang="en-US" sz="1100" dirty="0"/>
+            <a:endParaRPr lang="pt-BR" sz="1100" noProof="0" dirty="0"/>
           </a:p>
         </p:txBody>
       </p:sp>
@@ -8050,11 +7796,11 @@
           <a:bodyPr wrap="square" lIns="0" tIns="0" rIns="0" bIns="0" rtlCol="0" anchor="ctr"/>
           <a:lstStyle/>
           <a:p>
-            <a:pPr indent="0" marL="0">
+            <a:pPr marL="0" indent="0">
               <a:buNone/>
             </a:pPr>
             <a:r>
-              <a:rPr lang="en-US" sz="2500" b="1" dirty="0">
+              <a:rPr lang="pt-BR" sz="2500" b="1" noProof="0" dirty="0">
                 <a:solidFill>
                   <a:srgbClr val="1E2A36"/>
                 </a:solidFill>
@@ -8062,22 +7808,44 @@
                 <a:ea typeface="Georgia" pitchFamily="34" charset="-122"/>
                 <a:cs typeface="Georgia" pitchFamily="34" charset="-120"/>
               </a:rPr>
-              <a:t>Estrutura de correlações (Spearman)</a:t>
-            </a:r>
-            <a:endParaRPr lang="en-US" sz="2500" dirty="0"/>
+              <a:t>Estrutura de correlações (</a:t>
+            </a:r>
+            <a:r>
+              <a:rPr lang="pt-BR" sz="2500" b="1" noProof="0" dirty="0" err="1">
+                <a:solidFill>
+                  <a:srgbClr val="1E2A36"/>
+                </a:solidFill>
+                <a:latin typeface="Georgia" pitchFamily="34" charset="0"/>
+                <a:ea typeface="Georgia" pitchFamily="34" charset="-122"/>
+                <a:cs typeface="Georgia" pitchFamily="34" charset="-120"/>
+              </a:rPr>
+              <a:t>Spearman</a:t>
+            </a:r>
+            <a:r>
+              <a:rPr lang="pt-BR" sz="2500" b="1" noProof="0" dirty="0">
+                <a:solidFill>
+                  <a:srgbClr val="1E2A36"/>
+                </a:solidFill>
+                <a:latin typeface="Georgia" pitchFamily="34" charset="0"/>
+                <a:ea typeface="Georgia" pitchFamily="34" charset="-122"/>
+                <a:cs typeface="Georgia" pitchFamily="34" charset="-120"/>
+              </a:rPr>
+              <a:t>)</a:t>
+            </a:r>
+            <a:endParaRPr lang="pt-BR" sz="2500" noProof="0" dirty="0"/>
           </a:p>
         </p:txBody>
       </p:sp>
       <p:pic>
         <p:nvPicPr>
-          <p:cNvPr id="4" name="Image 0" descr="D:/Iniciação Cientifica/Projeto_IVS_Censo22/banco_de_dados/eda/figuras/matriz_correlacao.png">    </p:cNvPr>
+          <p:cNvPr id="4" name="Image 0" descr="D:/Iniciação Cientifica/Projeto_IVS_Censo22/banco_de_dados/eda/figuras/matriz_correlacao.png"/>
           <p:cNvPicPr>
             <a:picLocks noChangeAspect="1"/>
           </p:cNvPicPr>
           <p:nvPr/>
         </p:nvPicPr>
         <p:blipFill>
-          <a:blip r:embed="rId1"/>
+          <a:blip r:embed="rId3"/>
           <a:stretch>
             <a:fillRect/>
           </a:stretch>
@@ -8118,6 +7886,13 @@
             <a:prstDash val="solid"/>
           </a:ln>
         </p:spPr>
+        <p:txBody>
+          <a:bodyPr/>
+          <a:lstStyle/>
+          <a:p>
+            <a:endParaRPr lang="pt-BR" noProof="0" dirty="0"/>
+          </a:p>
+        </p:txBody>
       </p:sp>
       <p:sp>
         <p:nvSpPr>
@@ -8140,11 +7915,11 @@
           <a:bodyPr wrap="square" lIns="0" tIns="0" rIns="0" bIns="0" rtlCol="0" anchor="ctr"/>
           <a:lstStyle/>
           <a:p>
-            <a:pPr indent="0" marL="0">
+            <a:pPr marL="0" indent="0">
               <a:buNone/>
             </a:pPr>
             <a:r>
-              <a:rPr lang="en-US" sz="1300" b="1" dirty="0">
+              <a:rPr lang="pt-BR" sz="1300" b="1" noProof="0" dirty="0">
                 <a:solidFill>
                   <a:srgbClr val="B3261E"/>
                 </a:solidFill>
@@ -8154,11 +7929,8 @@
               </a:rPr>
               <a:t>−0,81  </a:t>
             </a:r>
-            <a:pPr indent="0" marL="0">
-              <a:buNone/>
-            </a:pPr>
-            <a:r>
-              <a:rPr lang="en-US" sz="1000" dirty="0">
+            <a:r>
+              <a:rPr lang="pt-BR" sz="1000" noProof="0" dirty="0">
                 <a:solidFill>
                   <a:srgbClr val="1E2A36"/>
                 </a:solidFill>
@@ -8168,7 +7940,7 @@
               </a:rPr>
               <a:t>renda × raça/cor (a mais forte)</a:t>
             </a:r>
-            <a:endParaRPr lang="en-US" sz="1300" dirty="0"/>
+            <a:endParaRPr lang="pt-BR" sz="1300" noProof="0" dirty="0"/>
           </a:p>
         </p:txBody>
       </p:sp>
@@ -8198,6 +7970,13 @@
             <a:prstDash val="solid"/>
           </a:ln>
         </p:spPr>
+        <p:txBody>
+          <a:bodyPr/>
+          <a:lstStyle/>
+          <a:p>
+            <a:endParaRPr lang="pt-BR" noProof="0" dirty="0"/>
+          </a:p>
+        </p:txBody>
       </p:sp>
       <p:sp>
         <p:nvSpPr>
@@ -8220,11 +7999,11 @@
           <a:bodyPr wrap="square" lIns="0" tIns="0" rIns="0" bIns="0" rtlCol="0" anchor="ctr"/>
           <a:lstStyle/>
           <a:p>
-            <a:pPr indent="0" marL="0">
+            <a:pPr marL="0" indent="0">
               <a:buNone/>
             </a:pPr>
             <a:r>
-              <a:rPr lang="en-US" sz="1300" b="1" dirty="0">
+              <a:rPr lang="pt-BR" sz="1300" b="1" noProof="0" dirty="0">
                 <a:solidFill>
                   <a:srgbClr val="19599A"/>
                 </a:solidFill>
@@ -8234,11 +8013,8 @@
               </a:rPr>
               <a:t>−0,75  </a:t>
             </a:r>
-            <a:pPr indent="0" marL="0">
-              <a:buNone/>
-            </a:pPr>
-            <a:r>
-              <a:rPr lang="en-US" sz="1000" dirty="0">
+            <a:r>
+              <a:rPr lang="pt-BR" sz="1000" noProof="0" dirty="0">
                 <a:solidFill>
                   <a:srgbClr val="1E2A36"/>
                 </a:solidFill>
@@ -8248,7 +8024,7 @@
               </a:rPr>
               <a:t>analfabetismo × renda</a:t>
             </a:r>
-            <a:endParaRPr lang="en-US" sz="1300" dirty="0"/>
+            <a:endParaRPr lang="pt-BR" sz="1300" noProof="0" dirty="0"/>
           </a:p>
         </p:txBody>
       </p:sp>
@@ -8278,6 +8054,13 @@
             <a:prstDash val="solid"/>
           </a:ln>
         </p:spPr>
+        <p:txBody>
+          <a:bodyPr/>
+          <a:lstStyle/>
+          <a:p>
+            <a:endParaRPr lang="pt-BR" noProof="0" dirty="0"/>
+          </a:p>
+        </p:txBody>
       </p:sp>
       <p:sp>
         <p:nvSpPr>
@@ -8300,11 +8083,11 @@
           <a:bodyPr wrap="square" lIns="0" tIns="0" rIns="0" bIns="0" rtlCol="0" anchor="ctr"/>
           <a:lstStyle/>
           <a:p>
-            <a:pPr indent="0" marL="0">
+            <a:pPr marL="0" indent="0">
               <a:buNone/>
             </a:pPr>
             <a:r>
-              <a:rPr lang="en-US" sz="1300" b="1" dirty="0">
+              <a:rPr lang="pt-BR" sz="1300" b="1" noProof="0" dirty="0">
                 <a:solidFill>
                   <a:srgbClr val="C7861B"/>
                 </a:solidFill>
@@ -8314,11 +8097,8 @@
               </a:rPr>
               <a:t>−0,04  </a:t>
             </a:r>
-            <a:pPr indent="0" marL="0">
-              <a:buNone/>
-            </a:pPr>
-            <a:r>
-              <a:rPr lang="en-US" sz="1000" dirty="0">
+            <a:r>
+              <a:rPr lang="pt-BR" sz="1000" noProof="0" dirty="0">
                 <a:solidFill>
                   <a:srgbClr val="1E2A36"/>
                 </a:solidFill>
@@ -8328,7 +8108,7 @@
               </a:rPr>
               <a:t>lixo × razão (quase nula)</a:t>
             </a:r>
-            <a:endParaRPr lang="en-US" sz="1300" dirty="0"/>
+            <a:endParaRPr lang="pt-BR" sz="1300" noProof="0" dirty="0"/>
           </a:p>
         </p:txBody>
       </p:sp>
@@ -8348,6 +8128,7 @@
         <a:solidFill>
           <a:srgbClr val="FFFFFF"/>
         </a:solidFill>
+        <a:effectLst/>
       </p:bgPr>
     </p:bg>
     <p:spTree>
@@ -8385,11 +8166,11 @@
           <a:bodyPr wrap="square" lIns="0" tIns="0" rIns="0" bIns="0" rtlCol="0" anchor="ctr"/>
           <a:lstStyle/>
           <a:p>
-            <a:pPr indent="0" marL="0">
+            <a:pPr marL="0" indent="0">
               <a:buNone/>
             </a:pPr>
             <a:r>
-              <a:rPr lang="en-US" sz="1100" b="1" spc="200" kern="0" dirty="0">
+              <a:rPr lang="pt-BR" sz="1100" b="1" kern="0" spc="200" noProof="0" dirty="0">
                 <a:solidFill>
                   <a:srgbClr val="C7861B"/>
                 </a:solidFill>
@@ -8399,7 +8180,7 @@
               </a:rPr>
               <a:t>PONTO DE ATENÇÃO</a:t>
             </a:r>
-            <a:endParaRPr lang="en-US" sz="1100" dirty="0"/>
+            <a:endParaRPr lang="pt-BR" sz="1100" noProof="0" dirty="0"/>
           </a:p>
         </p:txBody>
       </p:sp>
@@ -8424,11 +8205,11 @@
           <a:bodyPr wrap="square" lIns="0" tIns="0" rIns="0" bIns="0" rtlCol="0" anchor="ctr"/>
           <a:lstStyle/>
           <a:p>
-            <a:pPr indent="0" marL="0">
+            <a:pPr marL="0" indent="0">
               <a:buNone/>
             </a:pPr>
             <a:r>
-              <a:rPr lang="en-US" sz="2500" b="1" dirty="0">
+              <a:rPr lang="pt-BR" sz="2500" b="1" noProof="0" dirty="0">
                 <a:solidFill>
                   <a:srgbClr val="1E2A36"/>
                 </a:solidFill>
@@ -8438,20 +8219,20 @@
               </a:rPr>
               <a:t>O sigilo do analfabetismo permanece</a:t>
             </a:r>
-            <a:endParaRPr lang="en-US" sz="2500" dirty="0"/>
+            <a:endParaRPr lang="pt-BR" sz="2500" noProof="0" dirty="0"/>
           </a:p>
         </p:txBody>
       </p:sp>
       <p:pic>
         <p:nvPicPr>
-          <p:cNvPr id="4" name="Image 0" descr="D:/Iniciação Cientifica/Projeto_IVS_Censo22/banco_de_dados/eda/figuras/missing_por_municipio.png">    </p:cNvPr>
+          <p:cNvPr id="4" name="Image 0" descr="D:/Iniciação Cientifica/Projeto_IVS_Censo22/banco_de_dados/eda/figuras/missing_por_municipio.png"/>
           <p:cNvPicPr>
             <a:picLocks noChangeAspect="1"/>
           </p:cNvPicPr>
           <p:nvPr/>
         </p:nvPicPr>
         <p:blipFill>
-          <a:blip r:embed="rId1"/>
+          <a:blip r:embed="rId3"/>
           <a:stretch>
             <a:fillRect/>
           </a:stretch>
@@ -8498,7 +8279,7 @@
               <a:buChar char="•"/>
             </a:pPr>
             <a:r>
-              <a:rPr lang="en-US" sz="1300" dirty="0">
+              <a:rPr lang="pt-BR" sz="1300" noProof="0" dirty="0">
                 <a:solidFill>
                   <a:srgbClr val="1E2A36"/>
                 </a:solidFill>
@@ -8508,7 +8289,7 @@
               </a:rPr>
               <a:t>A correção da fórmula resolveu a matemática, mas não a cobertura: 15,76% dos setores OK têm o analfabetismo sigilado pelo IBGE.</a:t>
             </a:r>
-            <a:endParaRPr lang="en-US" sz="1300" dirty="0"/>
+            <a:endParaRPr lang="pt-BR" sz="1300" noProof="0" dirty="0"/>
           </a:p>
           <a:p>
             <a:pPr marL="177800" indent="-177800">
@@ -8522,7 +8303,7 @@
               <a:buChar char="•"/>
             </a:pPr>
             <a:r>
-              <a:rPr lang="en-US" sz="1300" b="1" dirty="0">
+              <a:rPr lang="pt-BR" sz="1300" b="1" noProof="0" dirty="0">
                 <a:solidFill>
                   <a:srgbClr val="C7861B"/>
                 </a:solidFill>
@@ -8532,7 +8313,7 @@
               </a:rPr>
               <a:t>O sigilo é sistemático, não aleatório — concentra-se nas capitais: São Caetano do Sul 29,7%, Porto Alegre 27,5%, Curitiba 23,1%, Belo Horizonte 22,5%.</a:t>
             </a:r>
-            <a:endParaRPr lang="en-US" sz="1300" dirty="0"/>
+            <a:endParaRPr lang="pt-BR" sz="1300" noProof="0" dirty="0"/>
           </a:p>
           <a:p>
             <a:pPr marL="177800" indent="-177800">
@@ -8546,7 +8327,7 @@
               <a:buChar char="•"/>
             </a:pPr>
             <a:r>
-              <a:rPr lang="en-US" sz="1300" dirty="0">
+              <a:rPr lang="pt-BR" sz="1300" noProof="0" dirty="0">
                 <a:solidFill>
                   <a:srgbClr val="1E2A36"/>
                 </a:solidFill>
@@ -8556,7 +8337,7 @@
               </a:rPr>
               <a:t>Causa: o IBGE não divulga contagens muito pequenas. Em setores urbanos centrais, o nº absoluto de analfabetos cai abaixo do limite (44% de sigilo nos setores com 1–10 alfabetizados; só 3% nos maiores).</a:t>
             </a:r>
-            <a:endParaRPr lang="en-US" sz="1300" dirty="0"/>
+            <a:endParaRPr lang="pt-BR" sz="1300" noProof="0" dirty="0"/>
           </a:p>
           <a:p>
             <a:pPr marL="177800" indent="-177800">
@@ -8570,7 +8351,7 @@
               <a:buChar char="•"/>
             </a:pPr>
             <a:r>
-              <a:rPr lang="en-US" sz="1300" b="1" dirty="0">
+              <a:rPr lang="pt-BR" sz="1300" b="1" noProof="0" dirty="0">
                 <a:solidFill>
                   <a:srgbClr val="1C7293"/>
                 </a:solidFill>
@@ -8578,9 +8359,31 @@
                 <a:ea typeface="Calibri" pitchFamily="34" charset="-122"/>
                 <a:cs typeface="Calibri" pitchFamily="34" charset="-120"/>
               </a:rPr>
-              <a:t>Decisão: manter NaN (transparente). Imputar zero subestimaria o analfabetismo justamente onde a vulnerabilidade é menor. Tratar no cálculo do IVS, com a orientadora.</a:t>
-            </a:r>
-            <a:endParaRPr lang="en-US" sz="1300" dirty="0"/>
+              <a:t>Decisão: manter </a:t>
+            </a:r>
+            <a:r>
+              <a:rPr lang="pt-BR" sz="1300" b="1" noProof="0" dirty="0" err="1">
+                <a:solidFill>
+                  <a:srgbClr val="1C7293"/>
+                </a:solidFill>
+                <a:latin typeface="Calibri" pitchFamily="34" charset="0"/>
+                <a:ea typeface="Calibri" pitchFamily="34" charset="-122"/>
+                <a:cs typeface="Calibri" pitchFamily="34" charset="-120"/>
+              </a:rPr>
+              <a:t>NaN</a:t>
+            </a:r>
+            <a:r>
+              <a:rPr lang="pt-BR" sz="1300" b="1" noProof="0" dirty="0">
+                <a:solidFill>
+                  <a:srgbClr val="1C7293"/>
+                </a:solidFill>
+                <a:latin typeface="Calibri" pitchFamily="34" charset="0"/>
+                <a:ea typeface="Calibri" pitchFamily="34" charset="-122"/>
+                <a:cs typeface="Calibri" pitchFamily="34" charset="-120"/>
+              </a:rPr>
+              <a:t> (transparente). Imputar zero subestimaria o analfabetismo justamente onde a vulnerabilidade é menor. Tratar no cálculo do IVS, com a orientadora.</a:t>
+            </a:r>
+            <a:endParaRPr lang="pt-BR" sz="1300" noProof="0" dirty="0"/>
           </a:p>
         </p:txBody>
       </p:sp>
@@ -8600,6 +8403,7 @@
         <a:solidFill>
           <a:srgbClr val="0B2447"/>
         </a:solidFill>
+        <a:effectLst/>
       </p:bgPr>
     </p:bg>
     <p:spTree>
@@ -8635,6 +8439,13 @@
           </a:solidFill>
           <a:ln/>
         </p:spPr>
+        <p:txBody>
+          <a:bodyPr/>
+          <a:lstStyle/>
+          <a:p>
+            <a:endParaRPr lang="pt-BR" noProof="0" dirty="0"/>
+          </a:p>
+        </p:txBody>
       </p:sp>
       <p:sp>
         <p:nvSpPr>
@@ -8657,11 +8468,11 @@
           <a:bodyPr wrap="square" lIns="0" tIns="0" rIns="0" bIns="0" rtlCol="0" anchor="ctr"/>
           <a:lstStyle/>
           <a:p>
-            <a:pPr indent="0" marL="0">
+            <a:pPr marL="0" indent="0">
               <a:buNone/>
             </a:pPr>
             <a:r>
-              <a:rPr lang="en-US" sz="1200" b="1" spc="200" kern="0" dirty="0">
+              <a:rPr lang="pt-BR" sz="1200" b="1" kern="0" spc="200" noProof="0" dirty="0">
                 <a:solidFill>
                   <a:srgbClr val="8FB7D9"/>
                 </a:solidFill>
@@ -8671,7 +8482,7 @@
               </a:rPr>
               <a:t>SÍNTESE</a:t>
             </a:r>
-            <a:endParaRPr lang="en-US" sz="1200" dirty="0"/>
+            <a:endParaRPr lang="pt-BR" sz="1200" noProof="0" dirty="0"/>
           </a:p>
         </p:txBody>
       </p:sp>
@@ -8696,11 +8507,11 @@
           <a:bodyPr wrap="square" lIns="0" tIns="0" rIns="0" bIns="0" rtlCol="0" anchor="ctr"/>
           <a:lstStyle/>
           <a:p>
-            <a:pPr indent="0" marL="0">
+            <a:pPr marL="0" indent="0">
               <a:buNone/>
             </a:pPr>
             <a:r>
-              <a:rPr lang="en-US" sz="2700" b="1" dirty="0">
+              <a:rPr lang="pt-BR" sz="2700" b="1" noProof="0" dirty="0">
                 <a:solidFill>
                   <a:srgbClr val="FFFFFF"/>
                 </a:solidFill>
@@ -8710,7 +8521,7 @@
               </a:rPr>
               <a:t>O que mudou × o que se manteve</a:t>
             </a:r>
-            <a:endParaRPr lang="en-US" sz="2700" dirty="0"/>
+            <a:endParaRPr lang="pt-BR" sz="2700" noProof="0" dirty="0"/>
           </a:p>
         </p:txBody>
       </p:sp>
@@ -8738,6 +8549,13 @@
             <a:prstDash val="solid"/>
           </a:ln>
         </p:spPr>
+        <p:txBody>
+          <a:bodyPr/>
+          <a:lstStyle/>
+          <a:p>
+            <a:endParaRPr lang="pt-BR" noProof="0" dirty="0"/>
+          </a:p>
+        </p:txBody>
       </p:sp>
       <p:sp>
         <p:nvSpPr>
@@ -8760,11 +8578,11 @@
           <a:bodyPr wrap="square" lIns="0" tIns="0" rIns="0" bIns="0" rtlCol="0" anchor="ctr"/>
           <a:lstStyle/>
           <a:p>
-            <a:pPr indent="0" marL="0">
+            <a:pPr marL="0" indent="0">
               <a:buNone/>
             </a:pPr>
             <a:r>
-              <a:rPr lang="en-US" sz="1200" b="1" spc="100" kern="0" dirty="0">
+              <a:rPr lang="pt-BR" sz="1200" b="1" kern="0" spc="100" noProof="0" dirty="0">
                 <a:solidFill>
                   <a:srgbClr val="2A9D8F"/>
                 </a:solidFill>
@@ -8774,7 +8592,7 @@
               </a:rPr>
               <a:t>MUDOU (corrigido)</a:t>
             </a:r>
-            <a:endParaRPr lang="en-US" sz="1200" dirty="0"/>
+            <a:endParaRPr lang="pt-BR" sz="1200" noProof="0" dirty="0"/>
           </a:p>
         </p:txBody>
       </p:sp>
@@ -8807,7 +8625,7 @@
               <a:buChar char="•"/>
             </a:pPr>
             <a:r>
-              <a:rPr lang="en-US" sz="1200" dirty="0">
+              <a:rPr lang="pt-BR" sz="1200" noProof="0" dirty="0">
                 <a:solidFill>
                   <a:srgbClr val="E6EEF6"/>
                 </a:solidFill>
@@ -8817,7 +8635,7 @@
               </a:rPr>
               <a:t>Denominador domiciliar → V00001 (conceito correto).</a:t>
             </a:r>
-            <a:endParaRPr lang="en-US" sz="1200" dirty="0"/>
+            <a:endParaRPr lang="pt-BR" sz="1200" noProof="0" dirty="0"/>
           </a:p>
           <a:p>
             <a:pPr marL="152400" indent="-152400">
@@ -8828,7 +8646,7 @@
               <a:buChar char="•"/>
             </a:pPr>
             <a:r>
-              <a:rPr lang="en-US" sz="1200" dirty="0">
+              <a:rPr lang="pt-BR" sz="1200" noProof="0" dirty="0">
                 <a:solidFill>
                   <a:srgbClr val="E6EEF6"/>
                 </a:solidFill>
@@ -8838,7 +8656,7 @@
               </a:rPr>
               <a:t>Taxa de analfabetismo → válida em [0,1] (máx. 5,33 → 0,84).</a:t>
             </a:r>
-            <a:endParaRPr lang="en-US" sz="1200" dirty="0"/>
+            <a:endParaRPr lang="pt-BR" sz="1200" noProof="0" dirty="0"/>
           </a:p>
           <a:p>
             <a:pPr marL="152400" indent="-152400">
@@ -8849,7 +8667,7 @@
               <a:buChar char="•"/>
             </a:pPr>
             <a:r>
-              <a:rPr lang="en-US" sz="1200" dirty="0">
+              <a:rPr lang="pt-BR" sz="1200" noProof="0" dirty="0">
                 <a:solidFill>
                   <a:srgbClr val="E6EEF6"/>
                 </a:solidFill>
@@ -8859,7 +8677,7 @@
               </a:rPr>
               <a:t>Razão de moradores → mínimo impossível 0,17 → 1,00.</a:t>
             </a:r>
-            <a:endParaRPr lang="en-US" sz="1200" dirty="0"/>
+            <a:endParaRPr lang="pt-BR" sz="1200" noProof="0" dirty="0"/>
           </a:p>
           <a:p>
             <a:pPr marL="152400" indent="-152400">
@@ -8867,7 +8685,7 @@
               <a:buChar char="•"/>
             </a:pPr>
             <a:r>
-              <a:rPr lang="en-US" sz="1200" dirty="0">
+              <a:rPr lang="pt-BR" sz="1200" noProof="0" dirty="0">
                 <a:solidFill>
                   <a:srgbClr val="E6EEF6"/>
                 </a:solidFill>
@@ -8875,9 +8693,31 @@
                 <a:ea typeface="Calibri" pitchFamily="34" charset="-122"/>
                 <a:cs typeface="Calibri" pitchFamily="34" charset="-120"/>
               </a:rPr>
-              <a:t>Regra Dados_sig e esgoto → conferidas no dicionário IBGE.</a:t>
-            </a:r>
-            <a:endParaRPr lang="en-US" sz="1200" dirty="0"/>
+              <a:t>Regra </a:t>
+            </a:r>
+            <a:r>
+              <a:rPr lang="pt-BR" sz="1200" noProof="0" dirty="0" err="1">
+                <a:solidFill>
+                  <a:srgbClr val="E6EEF6"/>
+                </a:solidFill>
+                <a:latin typeface="Calibri" pitchFamily="34" charset="0"/>
+                <a:ea typeface="Calibri" pitchFamily="34" charset="-122"/>
+                <a:cs typeface="Calibri" pitchFamily="34" charset="-120"/>
+              </a:rPr>
+              <a:t>Dados_sig</a:t>
+            </a:r>
+            <a:r>
+              <a:rPr lang="pt-BR" sz="1200" noProof="0" dirty="0">
+                <a:solidFill>
+                  <a:srgbClr val="E6EEF6"/>
+                </a:solidFill>
+                <a:latin typeface="Calibri" pitchFamily="34" charset="0"/>
+                <a:ea typeface="Calibri" pitchFamily="34" charset="-122"/>
+                <a:cs typeface="Calibri" pitchFamily="34" charset="-120"/>
+              </a:rPr>
+              <a:t> e esgoto → conferidas no dicionário IBGE.</a:t>
+            </a:r>
+            <a:endParaRPr lang="pt-BR" sz="1200" noProof="0" dirty="0"/>
           </a:p>
         </p:txBody>
       </p:sp>
@@ -8905,6 +8745,13 @@
             <a:prstDash val="solid"/>
           </a:ln>
         </p:spPr>
+        <p:txBody>
+          <a:bodyPr/>
+          <a:lstStyle/>
+          <a:p>
+            <a:endParaRPr lang="pt-BR" noProof="0" dirty="0"/>
+          </a:p>
+        </p:txBody>
       </p:sp>
       <p:sp>
         <p:nvSpPr>
@@ -8927,11 +8774,11 @@
           <a:bodyPr wrap="square" lIns="0" tIns="0" rIns="0" bIns="0" rtlCol="0" anchor="ctr"/>
           <a:lstStyle/>
           <a:p>
-            <a:pPr indent="0" marL="0">
+            <a:pPr marL="0" indent="0">
               <a:buNone/>
             </a:pPr>
             <a:r>
-              <a:rPr lang="en-US" sz="1200" b="1" spc="100" kern="0" dirty="0">
+              <a:rPr lang="pt-BR" sz="1200" b="1" kern="0" spc="100" noProof="0" dirty="0">
                 <a:solidFill>
                   <a:srgbClr val="8FB7D9"/>
                 </a:solidFill>
@@ -8941,7 +8788,7 @@
               </a:rPr>
               <a:t>MANTEVE-SE (robusto)</a:t>
             </a:r>
-            <a:endParaRPr lang="en-US" sz="1200" dirty="0"/>
+            <a:endParaRPr lang="pt-BR" sz="1200" noProof="0" dirty="0"/>
           </a:p>
         </p:txBody>
       </p:sp>
@@ -8974,7 +8821,7 @@
               <a:buChar char="•"/>
             </a:pPr>
             <a:r>
-              <a:rPr lang="en-US" sz="1250" dirty="0">
+              <a:rPr lang="pt-BR" sz="1250" noProof="0" dirty="0">
                 <a:solidFill>
                   <a:srgbClr val="E6EEF6"/>
                 </a:solidFill>
@@ -8984,7 +8831,7 @@
               </a:rPr>
               <a:t>Saneamento, renda e raça/cor: valores praticamente iguais.</a:t>
             </a:r>
-            <a:endParaRPr lang="en-US" sz="1250" dirty="0"/>
+            <a:endParaRPr lang="pt-BR" sz="1250" noProof="0" dirty="0"/>
           </a:p>
           <a:p>
             <a:pPr marL="152400" indent="-152400">
@@ -8995,7 +8842,7 @@
               <a:buChar char="•"/>
             </a:pPr>
             <a:r>
-              <a:rPr lang="en-US" sz="1250" dirty="0">
+              <a:rPr lang="pt-BR" sz="1250" noProof="0" dirty="0">
                 <a:solidFill>
                   <a:srgbClr val="E6EEF6"/>
                 </a:solidFill>
@@ -9005,7 +8852,7 @@
               </a:rPr>
               <a:t>Gradiente regional Norte → Sul.</a:t>
             </a:r>
-            <a:endParaRPr lang="en-US" sz="1250" dirty="0"/>
+            <a:endParaRPr lang="pt-BR" sz="1250" noProof="0" dirty="0"/>
           </a:p>
           <a:p>
             <a:pPr marL="152400" indent="-152400">
@@ -9016,7 +8863,7 @@
               <a:buChar char="•"/>
             </a:pPr>
             <a:r>
-              <a:rPr lang="en-US" sz="1250" dirty="0">
+              <a:rPr lang="pt-BR" sz="1250" noProof="0" dirty="0">
                 <a:solidFill>
                   <a:srgbClr val="E6EEF6"/>
                 </a:solidFill>
@@ -9026,7 +8873,7 @@
               </a:rPr>
               <a:t>Eixo racial-econômico (renda × raça = −0,81).</a:t>
             </a:r>
-            <a:endParaRPr lang="en-US" sz="1250" dirty="0"/>
+            <a:endParaRPr lang="pt-BR" sz="1250" noProof="0" dirty="0"/>
           </a:p>
           <a:p>
             <a:pPr marL="152400" indent="-152400">
@@ -9034,7 +8881,7 @@
               <a:buChar char="•"/>
             </a:pPr>
             <a:r>
-              <a:rPr lang="en-US" sz="1200" dirty="0">
+              <a:rPr lang="pt-BR" sz="1200" noProof="0" dirty="0">
                 <a:solidFill>
                   <a:srgbClr val="E6EEF6"/>
                 </a:solidFill>
@@ -9044,154 +8891,7 @@
               </a:rPr>
               <a:t>106.281 setores OK (97,48%) e o sigilo do analfabetismo.</a:t>
             </a:r>
-            <a:endParaRPr lang="en-US" sz="1250" dirty="0"/>
-          </a:p>
-        </p:txBody>
-      </p:sp>
-      <p:sp>
-        <p:nvSpPr>
-          <p:cNvPr id="11" name="Shape 9"/>
-          <p:cNvSpPr/>
-          <p:nvPr/>
-        </p:nvSpPr>
-        <p:spPr>
-          <a:xfrm>
-            <a:off x="822960" y="3566160"/>
-            <a:ext cx="7589520" cy="713232"/>
-          </a:xfrm>
-          <a:prstGeom prst="roundRect">
-            <a:avLst>
-              <a:gd name="adj" fmla="val 10256"/>
-            </a:avLst>
-          </a:prstGeom>
-          <a:solidFill>
-            <a:srgbClr val="12365E"/>
-          </a:solidFill>
-          <a:ln w="15875">
-            <a:solidFill>
-              <a:srgbClr val="2A9D8F"/>
-            </a:solidFill>
-            <a:prstDash val="solid"/>
-          </a:ln>
-        </p:spPr>
-      </p:sp>
-      <p:sp>
-        <p:nvSpPr>
-          <p:cNvPr id="12" name="Text 10"/>
-          <p:cNvSpPr/>
-          <p:nvPr/>
-        </p:nvSpPr>
-        <p:spPr>
-          <a:xfrm>
-            <a:off x="1051560" y="3648456"/>
-            <a:ext cx="7315200" cy="256032"/>
-          </a:xfrm>
-          <a:prstGeom prst="rect">
-            <a:avLst/>
-          </a:prstGeom>
-          <a:noFill/>
-          <a:ln/>
-        </p:spPr>
-        <p:txBody>
-          <a:bodyPr wrap="square" lIns="0" tIns="0" rIns="0" bIns="0" rtlCol="0" anchor="ctr"/>
-          <a:lstStyle/>
-          <a:p>
-            <a:pPr indent="0" marL="0">
-              <a:buNone/>
-            </a:pPr>
-            <a:r>
-              <a:rPr lang="en-US" sz="1050" b="1" spc="100" kern="0" dirty="0">
-                <a:solidFill>
-                  <a:srgbClr val="2A9D8F"/>
-                </a:solidFill>
-                <a:latin typeface="Calibri" pitchFamily="34" charset="0"/>
-                <a:ea typeface="Calibri" pitchFamily="34" charset="-122"/>
-                <a:cs typeface="Calibri" pitchFamily="34" charset="-120"/>
-              </a:rPr>
-              <a:t>PRÓXIMOS PASSOS</a:t>
-            </a:r>
-            <a:endParaRPr lang="en-US" sz="1050" dirty="0"/>
-          </a:p>
-        </p:txBody>
-      </p:sp>
-      <p:sp>
-        <p:nvSpPr>
-          <p:cNvPr id="13" name="Text 11"/>
-          <p:cNvSpPr/>
-          <p:nvPr/>
-        </p:nvSpPr>
-        <p:spPr>
-          <a:xfrm>
-            <a:off x="1051560" y="3895344"/>
-            <a:ext cx="7223760" cy="365760"/>
-          </a:xfrm>
-          <a:prstGeom prst="rect">
-            <a:avLst/>
-          </a:prstGeom>
-          <a:noFill/>
-          <a:ln/>
-        </p:spPr>
-        <p:txBody>
-          <a:bodyPr wrap="square" lIns="0" tIns="0" rIns="0" bIns="0" rtlCol="0" anchor="ctr"/>
-          <a:lstStyle/>
-          <a:p>
-            <a:pPr indent="0" marL="0">
-              <a:buNone/>
-            </a:pPr>
-            <a:r>
-              <a:rPr lang="en-US" sz="1300" dirty="0">
-                <a:solidFill>
-                  <a:srgbClr val="FFFFFF"/>
-                </a:solidFill>
-                <a:latin typeface="Calibri" pitchFamily="34" charset="0"/>
-                <a:ea typeface="Calibri" pitchFamily="34" charset="-122"/>
-                <a:cs typeface="Calibri" pitchFamily="34" charset="-120"/>
-              </a:rPr>
-              <a:t>normalização por município  →  análise fatorial e pesos  →  IVS final  →  4 faixas de risco  →  mapas (QGIS)</a:t>
-            </a:r>
-            <a:endParaRPr lang="en-US" sz="1300" dirty="0"/>
-          </a:p>
-        </p:txBody>
-      </p:sp>
-      <p:sp>
-        <p:nvSpPr>
-          <p:cNvPr id="14" name="Text 12"/>
-          <p:cNvSpPr/>
-          <p:nvPr/>
-        </p:nvSpPr>
-        <p:spPr>
-          <a:xfrm>
-            <a:off x="822960" y="4434840"/>
-            <a:ext cx="7589520" cy="411480"/>
-          </a:xfrm>
-          <a:prstGeom prst="rect">
-            <a:avLst/>
-          </a:prstGeom>
-          <a:noFill/>
-          <a:ln/>
-        </p:spPr>
-        <p:txBody>
-          <a:bodyPr wrap="square" lIns="0" tIns="0" rIns="0" bIns="0" rtlCol="0" anchor="ctr"/>
-          <a:lstStyle/>
-          <a:p>
-            <a:pPr indent="0" marL="0">
-              <a:lnSpc>
-                <a:spcPct val="100000"/>
-              </a:lnSpc>
-              <a:buNone/>
-            </a:pPr>
-            <a:r>
-              <a:rPr lang="en-US" sz="1100" i="1" dirty="0">
-                <a:solidFill>
-                  <a:srgbClr val="7E97AE"/>
-                </a:solidFill>
-                <a:latin typeface="Calibri" pitchFamily="34" charset="0"/>
-                <a:ea typeface="Calibri" pitchFamily="34" charset="-122"/>
-                <a:cs typeface="Calibri" pitchFamily="34" charset="-120"/>
-              </a:rPr>
-              <a:t>Base recalculada, reproduzível e auditada — pronta para o cálculo do índice.  Fonte: Censo 2022 (IBGE), 70 municípios ELSI-Brasil.</a:t>
-            </a:r>
-            <a:endParaRPr lang="en-US" sz="1100" dirty="0"/>
+            <a:endParaRPr lang="pt-BR" sz="1250" noProof="0" dirty="0"/>
           </a:p>
         </p:txBody>
       </p:sp>
@@ -9211,6 +8911,7 @@
         <a:solidFill>
           <a:srgbClr val="FFFFFF"/>
         </a:solidFill>
+        <a:effectLst/>
       </p:bgPr>
     </p:bg>
     <p:spTree>
@@ -9248,11 +8949,11 @@
           <a:bodyPr wrap="square" lIns="0" tIns="0" rIns="0" bIns="0" rtlCol="0" anchor="ctr"/>
           <a:lstStyle/>
           <a:p>
-            <a:pPr indent="0" marL="0">
+            <a:pPr marL="0" indent="0">
               <a:buNone/>
             </a:pPr>
             <a:r>
-              <a:rPr lang="en-US" sz="1100" b="1" spc="200" kern="0" dirty="0">
+              <a:rPr lang="pt-BR" sz="1100" b="1" kern="0" spc="200" noProof="0" dirty="0">
                 <a:solidFill>
                   <a:srgbClr val="1C7293"/>
                 </a:solidFill>
@@ -9262,20 +8963,20 @@
               </a:rPr>
               <a:t>CONTEXTO</a:t>
             </a:r>
-            <a:endParaRPr lang="en-US" sz="1100" dirty="0"/>
-          </a:p>
-        </p:txBody>
-      </p:sp>
-      <p:sp>
-        <p:nvSpPr>
-          <p:cNvPr id="3" name="Text 1"/>
-          <p:cNvSpPr/>
-          <p:nvPr/>
-        </p:nvSpPr>
-        <p:spPr>
-          <a:xfrm>
-            <a:off x="457200" y="548640"/>
-            <a:ext cx="7863840" cy="530352"/>
+            <a:endParaRPr lang="pt-BR" sz="1100" noProof="0" dirty="0"/>
+          </a:p>
+        </p:txBody>
+      </p:sp>
+      <p:sp>
+        <p:nvSpPr>
+          <p:cNvPr id="4" name="Text 2"/>
+          <p:cNvSpPr/>
+          <p:nvPr/>
+        </p:nvSpPr>
+        <p:spPr>
+          <a:xfrm>
+            <a:off x="457200" y="1234440"/>
+            <a:ext cx="8229600" cy="685800"/>
           </a:xfrm>
           <a:prstGeom prst="rect">
             <a:avLst/>
@@ -9287,53 +8988,14 @@
           <a:bodyPr wrap="square" lIns="0" tIns="0" rIns="0" bIns="0" rtlCol="0" anchor="ctr"/>
           <a:lstStyle/>
           <a:p>
-            <a:pPr indent="0" marL="0">
-              <a:buNone/>
-            </a:pPr>
-            <a:r>
-              <a:rPr lang="en-US" sz="2500" b="1" dirty="0">
-                <a:solidFill>
-                  <a:srgbClr val="1E2A36"/>
-                </a:solidFill>
-                <a:latin typeface="Georgia" pitchFamily="34" charset="0"/>
-                <a:ea typeface="Georgia" pitchFamily="34" charset="-122"/>
-                <a:cs typeface="Georgia" pitchFamily="34" charset="-120"/>
-              </a:rPr>
-              <a:t>O que é o projeto, em uma página</a:t>
-            </a:r>
-            <a:endParaRPr lang="en-US" sz="2500" dirty="0"/>
-          </a:p>
-        </p:txBody>
-      </p:sp>
-      <p:sp>
-        <p:nvSpPr>
-          <p:cNvPr id="4" name="Text 2"/>
-          <p:cNvSpPr/>
-          <p:nvPr/>
-        </p:nvSpPr>
-        <p:spPr>
-          <a:xfrm>
-            <a:off x="457200" y="1234440"/>
-            <a:ext cx="8229600" cy="685800"/>
-          </a:xfrm>
-          <a:prstGeom prst="rect">
-            <a:avLst/>
-          </a:prstGeom>
-          <a:noFill/>
-          <a:ln/>
-        </p:spPr>
-        <p:txBody>
-          <a:bodyPr wrap="square" lIns="0" tIns="0" rIns="0" bIns="0" rtlCol="0" anchor="ctr"/>
-          <a:lstStyle/>
-          <a:p>
-            <a:pPr indent="0" marL="0">
+            <a:pPr marL="0" indent="0">
               <a:lnSpc>
                 <a:spcPct val="105000"/>
               </a:lnSpc>
               <a:buNone/>
             </a:pPr>
             <a:r>
-              <a:rPr lang="en-US" sz="1450" b="1" dirty="0">
+              <a:rPr lang="pt-BR" sz="1450" b="1" noProof="0" dirty="0">
                 <a:solidFill>
                   <a:srgbClr val="1C7293"/>
                 </a:solidFill>
@@ -9343,14 +9005,8 @@
               </a:rPr>
               <a:t>Objetivo:  </a:t>
             </a:r>
-            <a:pPr indent="0" marL="0">
-              <a:lnSpc>
-                <a:spcPct val="105000"/>
-              </a:lnSpc>
-              <a:buNone/>
-            </a:pPr>
-            <a:r>
-              <a:rPr lang="en-US" sz="1450" dirty="0">
+            <a:r>
+              <a:rPr lang="pt-BR" sz="1450" noProof="0" dirty="0">
                 <a:solidFill>
                   <a:srgbClr val="1E2A36"/>
                 </a:solidFill>
@@ -9360,14 +9016,8 @@
               </a:rPr>
               <a:t>construir um Índice de Vulnerabilidade à Saúde (IVS) </a:t>
             </a:r>
-            <a:pPr indent="0" marL="0">
-              <a:lnSpc>
-                <a:spcPct val="105000"/>
-              </a:lnSpc>
-              <a:buNone/>
-            </a:pPr>
-            <a:r>
-              <a:rPr lang="en-US" sz="1450" b="1" dirty="0">
+            <a:r>
+              <a:rPr lang="pt-BR" sz="1450" b="1" noProof="0" dirty="0">
                 <a:solidFill>
                   <a:srgbClr val="1E2A36"/>
                 </a:solidFill>
@@ -9377,14 +9027,8 @@
               </a:rPr>
               <a:t>intraurbano</a:t>
             </a:r>
-            <a:pPr indent="0" marL="0">
-              <a:lnSpc>
-                <a:spcPct val="105000"/>
-              </a:lnSpc>
-              <a:buNone/>
-            </a:pPr>
-            <a:r>
-              <a:rPr lang="en-US" sz="1450" dirty="0">
+            <a:r>
+              <a:rPr lang="pt-BR" sz="1450" noProof="0" dirty="0">
                 <a:solidFill>
                   <a:srgbClr val="1E2A36"/>
                 </a:solidFill>
@@ -9394,14 +9038,8 @@
               </a:rPr>
               <a:t> — comparar a vulnerabilidade entre setores </a:t>
             </a:r>
-            <a:pPr indent="0" marL="0">
-              <a:lnSpc>
-                <a:spcPct val="105000"/>
-              </a:lnSpc>
-              <a:buNone/>
-            </a:pPr>
-            <a:r>
-              <a:rPr lang="en-US" sz="1450" i="1" dirty="0">
+            <a:r>
+              <a:rPr lang="pt-BR" sz="1450" i="1" noProof="0" dirty="0">
                 <a:solidFill>
                   <a:srgbClr val="1E2A36"/>
                 </a:solidFill>
@@ -9411,14 +9049,8 @@
               </a:rPr>
               <a:t>dentro</a:t>
             </a:r>
-            <a:pPr indent="0" marL="0">
-              <a:lnSpc>
-                <a:spcPct val="105000"/>
-              </a:lnSpc>
-              <a:buNone/>
-            </a:pPr>
-            <a:r>
-              <a:rPr lang="en-US" sz="1450" dirty="0">
+            <a:r>
+              <a:rPr lang="pt-BR" sz="1450" noProof="0" dirty="0">
                 <a:solidFill>
                   <a:srgbClr val="1E2A36"/>
                 </a:solidFill>
@@ -9428,7 +9060,7 @@
               </a:rPr>
               <a:t> de cada cidade — com dados do Censo 2022, para os 70 municípios do ELSI-Brasil.</a:t>
             </a:r>
-            <a:endParaRPr lang="en-US" sz="1450" dirty="0"/>
+            <a:endParaRPr lang="pt-BR" sz="1450" noProof="0" dirty="0"/>
           </a:p>
         </p:txBody>
       </p:sp>
@@ -9456,13 +9088,20 @@
             <a:prstDash val="solid"/>
           </a:ln>
           <a:effectLst>
-            <a:outerShdw sx="100000" sy="100000" kx="0" ky="0" algn="bl" rotWithShape="0" blurRad="88900" dist="38100" dir="8100000">
+            <a:outerShdw blurRad="88900" dist="38100" dir="8100000" algn="bl" rotWithShape="0">
               <a:srgbClr val="000000">
                 <a:alpha val="15000"/>
               </a:srgbClr>
             </a:outerShdw>
           </a:effectLst>
         </p:spPr>
+        <p:txBody>
+          <a:bodyPr/>
+          <a:lstStyle/>
+          <a:p>
+            <a:endParaRPr lang="pt-BR" noProof="0" dirty="0"/>
+          </a:p>
+        </p:txBody>
       </p:sp>
       <p:sp>
         <p:nvSpPr>
@@ -9483,6 +9122,13 @@
           </a:solidFill>
           <a:ln/>
         </p:spPr>
+        <p:txBody>
+          <a:bodyPr/>
+          <a:lstStyle/>
+          <a:p>
+            <a:endParaRPr lang="pt-BR" noProof="0" dirty="0"/>
+          </a:p>
+        </p:txBody>
       </p:sp>
       <p:sp>
         <p:nvSpPr>
@@ -9505,11 +9151,11 @@
           <a:bodyPr wrap="square" lIns="0" tIns="0" rIns="0" bIns="0" rtlCol="0" anchor="ctr"/>
           <a:lstStyle/>
           <a:p>
-            <a:pPr indent="0" marL="0">
+            <a:pPr marL="0" indent="0">
               <a:buNone/>
             </a:pPr>
             <a:r>
-              <a:rPr lang="en-US" sz="1500" b="1" dirty="0">
+              <a:rPr lang="pt-BR" sz="1500" b="1" noProof="0" dirty="0">
                 <a:solidFill>
                   <a:srgbClr val="19599A"/>
                 </a:solidFill>
@@ -9519,7 +9165,7 @@
               </a:rPr>
               <a:t>Unidade</a:t>
             </a:r>
-            <a:endParaRPr lang="en-US" sz="1500" dirty="0"/>
+            <a:endParaRPr lang="pt-BR" sz="1500" noProof="0" dirty="0"/>
           </a:p>
         </p:txBody>
       </p:sp>
@@ -9544,14 +9190,14 @@
           <a:bodyPr wrap="square" lIns="0" tIns="0" rIns="0" bIns="0" rtlCol="0" anchor="ctr"/>
           <a:lstStyle/>
           <a:p>
-            <a:pPr indent="0" marL="0">
+            <a:pPr marL="0" indent="0">
               <a:lnSpc>
                 <a:spcPct val="100000"/>
               </a:lnSpc>
               <a:buNone/>
             </a:pPr>
             <a:r>
-              <a:rPr lang="en-US" sz="1150" dirty="0">
+              <a:rPr lang="pt-BR" sz="1150" noProof="0" dirty="0">
                 <a:solidFill>
                   <a:srgbClr val="1E2A36"/>
                 </a:solidFill>
@@ -9561,7 +9207,7 @@
               </a:rPr>
               <a:t>O setor censitário — a menor área do IBGE. Permite enxergar desigualdades dentro da cidade.</a:t>
             </a:r>
-            <a:endParaRPr lang="en-US" sz="1150" dirty="0"/>
+            <a:endParaRPr lang="pt-BR" sz="1150" noProof="0" dirty="0"/>
           </a:p>
         </p:txBody>
       </p:sp>
@@ -9589,13 +9235,20 @@
             <a:prstDash val="solid"/>
           </a:ln>
           <a:effectLst>
-            <a:outerShdw sx="100000" sy="100000" kx="0" ky="0" algn="bl" rotWithShape="0" blurRad="88900" dist="38100" dir="8100000">
+            <a:outerShdw blurRad="88900" dist="38100" dir="8100000" algn="bl" rotWithShape="0">
               <a:srgbClr val="000000">
                 <a:alpha val="15000"/>
               </a:srgbClr>
             </a:outerShdw>
           </a:effectLst>
         </p:spPr>
+        <p:txBody>
+          <a:bodyPr/>
+          <a:lstStyle/>
+          <a:p>
+            <a:endParaRPr lang="pt-BR" noProof="0" dirty="0"/>
+          </a:p>
+        </p:txBody>
       </p:sp>
       <p:sp>
         <p:nvSpPr>
@@ -9616,6 +9269,13 @@
           </a:solidFill>
           <a:ln/>
         </p:spPr>
+        <p:txBody>
+          <a:bodyPr/>
+          <a:lstStyle/>
+          <a:p>
+            <a:endParaRPr lang="pt-BR" noProof="0" dirty="0"/>
+          </a:p>
+        </p:txBody>
       </p:sp>
       <p:sp>
         <p:nvSpPr>
@@ -9638,11 +9298,11 @@
           <a:bodyPr wrap="square" lIns="0" tIns="0" rIns="0" bIns="0" rtlCol="0" anchor="ctr"/>
           <a:lstStyle/>
           <a:p>
-            <a:pPr indent="0" marL="0">
+            <a:pPr marL="0" indent="0">
               <a:buNone/>
             </a:pPr>
             <a:r>
-              <a:rPr lang="en-US" sz="1500" b="1" dirty="0">
+              <a:rPr lang="pt-BR" sz="1500" b="1" noProof="0" dirty="0">
                 <a:solidFill>
                   <a:srgbClr val="1C7293"/>
                 </a:solidFill>
@@ -9652,7 +9312,7 @@
               </a:rPr>
               <a:t>Método</a:t>
             </a:r>
-            <a:endParaRPr lang="en-US" sz="1500" dirty="0"/>
+            <a:endParaRPr lang="pt-BR" sz="1500" noProof="0" dirty="0"/>
           </a:p>
         </p:txBody>
       </p:sp>
@@ -9677,14 +9337,14 @@
           <a:bodyPr wrap="square" lIns="0" tIns="0" rIns="0" bIns="0" rtlCol="0" anchor="ctr"/>
           <a:lstStyle/>
           <a:p>
-            <a:pPr indent="0" marL="0">
+            <a:pPr marL="0" indent="0">
               <a:lnSpc>
                 <a:spcPct val="100000"/>
               </a:lnSpc>
               <a:buNone/>
             </a:pPr>
             <a:r>
-              <a:rPr lang="en-US" sz="1150" dirty="0">
+              <a:rPr lang="pt-BR" sz="1150" noProof="0" dirty="0">
                 <a:solidFill>
                   <a:srgbClr val="1E2A36"/>
                 </a:solidFill>
@@ -9694,7 +9354,7 @@
               </a:rPr>
               <a:t>Estudo ecológico baseado no IVS de Belo Horizonte (2012): 7 variáveis em 2 dimensões.</a:t>
             </a:r>
-            <a:endParaRPr lang="en-US" sz="1150" dirty="0"/>
+            <a:endParaRPr lang="pt-BR" sz="1150" noProof="0" dirty="0"/>
           </a:p>
         </p:txBody>
       </p:sp>
@@ -9722,13 +9382,20 @@
             <a:prstDash val="solid"/>
           </a:ln>
           <a:effectLst>
-            <a:outerShdw sx="100000" sy="100000" kx="0" ky="0" algn="bl" rotWithShape="0" blurRad="88900" dist="38100" dir="8100000">
+            <a:outerShdw blurRad="88900" dist="38100" dir="8100000" algn="bl" rotWithShape="0">
               <a:srgbClr val="000000">
                 <a:alpha val="15000"/>
               </a:srgbClr>
             </a:outerShdw>
           </a:effectLst>
         </p:spPr>
+        <p:txBody>
+          <a:bodyPr/>
+          <a:lstStyle/>
+          <a:p>
+            <a:endParaRPr lang="pt-BR" noProof="0" dirty="0"/>
+          </a:p>
+        </p:txBody>
       </p:sp>
       <p:sp>
         <p:nvSpPr>
@@ -9749,6 +9416,13 @@
           </a:solidFill>
           <a:ln/>
         </p:spPr>
+        <p:txBody>
+          <a:bodyPr/>
+          <a:lstStyle/>
+          <a:p>
+            <a:endParaRPr lang="pt-BR" noProof="0" dirty="0"/>
+          </a:p>
+        </p:txBody>
       </p:sp>
       <p:sp>
         <p:nvSpPr>
@@ -9771,11 +9445,11 @@
           <a:bodyPr wrap="square" lIns="0" tIns="0" rIns="0" bIns="0" rtlCol="0" anchor="ctr"/>
           <a:lstStyle/>
           <a:p>
-            <a:pPr indent="0" marL="0">
+            <a:pPr marL="0" indent="0">
               <a:buNone/>
             </a:pPr>
             <a:r>
-              <a:rPr lang="en-US" sz="1500" b="1" dirty="0">
+              <a:rPr lang="pt-BR" sz="1500" b="1" noProof="0" dirty="0">
                 <a:solidFill>
                   <a:srgbClr val="2A9D8F"/>
                 </a:solidFill>
@@ -9785,7 +9459,7 @@
               </a:rPr>
               <a:t>Produto</a:t>
             </a:r>
-            <a:endParaRPr lang="en-US" sz="1500" dirty="0"/>
+            <a:endParaRPr lang="pt-BR" sz="1500" noProof="0" dirty="0"/>
           </a:p>
         </p:txBody>
       </p:sp>
@@ -9810,14 +9484,14 @@
           <a:bodyPr wrap="square" lIns="0" tIns="0" rIns="0" bIns="0" rtlCol="0" anchor="ctr"/>
           <a:lstStyle/>
           <a:p>
-            <a:pPr indent="0" marL="0">
+            <a:pPr marL="0" indent="0">
               <a:lnSpc>
                 <a:spcPct val="100000"/>
               </a:lnSpc>
               <a:buNone/>
             </a:pPr>
             <a:r>
-              <a:rPr lang="en-US" sz="1150" dirty="0">
+              <a:rPr lang="pt-BR" sz="1150" noProof="0" dirty="0">
                 <a:solidFill>
                   <a:srgbClr val="1E2A36"/>
                 </a:solidFill>
@@ -9825,95 +9499,9 @@
                 <a:ea typeface="Calibri" pitchFamily="34" charset="-122"/>
                 <a:cs typeface="Calibri" pitchFamily="34" charset="-120"/>
               </a:rPr>
-              <a:t>Relatório Final de IC + artigo científico. Hoje estamos na EDA (Fase 3).</a:t>
-            </a:r>
-            <a:endParaRPr lang="en-US" sz="1150" dirty="0"/>
-          </a:p>
-        </p:txBody>
-      </p:sp>
-      <p:sp>
-        <p:nvSpPr>
-          <p:cNvPr id="17" name="Shape 15"/>
-          <p:cNvSpPr/>
-          <p:nvPr/>
-        </p:nvSpPr>
-        <p:spPr>
-          <a:xfrm>
-            <a:off x="457200" y="3840480"/>
-            <a:ext cx="8229600" cy="868680"/>
-          </a:xfrm>
-          <a:prstGeom prst="roundRect">
-            <a:avLst>
-              <a:gd name="adj" fmla="val 8421"/>
-            </a:avLst>
-          </a:prstGeom>
-          <a:solidFill>
-            <a:srgbClr val="E9F1F7"/>
-          </a:solidFill>
-          <a:ln w="12700">
-            <a:solidFill>
-              <a:srgbClr val="19599A"/>
-            </a:solidFill>
-            <a:prstDash val="solid"/>
-          </a:ln>
-        </p:spPr>
-      </p:sp>
-      <p:sp>
-        <p:nvSpPr>
-          <p:cNvPr id="18" name="Text 16"/>
-          <p:cNvSpPr/>
-          <p:nvPr/>
-        </p:nvSpPr>
-        <p:spPr>
-          <a:xfrm>
-            <a:off x="685800" y="3840480"/>
-            <a:ext cx="7772400" cy="868680"/>
-          </a:xfrm>
-          <a:prstGeom prst="rect">
-            <a:avLst/>
-          </a:prstGeom>
-          <a:noFill/>
-          <a:ln/>
-        </p:spPr>
-        <p:txBody>
-          <a:bodyPr wrap="square" lIns="0" tIns="0" rIns="0" bIns="0" rtlCol="0" anchor="ctr"/>
-          <a:lstStyle/>
-          <a:p>
-            <a:pPr indent="0" marL="0">
-              <a:lnSpc>
-                <a:spcPct val="105000"/>
-              </a:lnSpc>
-              <a:buNone/>
-            </a:pPr>
-            <a:r>
-              <a:rPr lang="en-US" sz="1300" b="1" dirty="0">
-                <a:solidFill>
-                  <a:srgbClr val="19599A"/>
-                </a:solidFill>
-                <a:latin typeface="Calibri" pitchFamily="34" charset="0"/>
-                <a:ea typeface="Calibri" pitchFamily="34" charset="-122"/>
-                <a:cs typeface="Calibri" pitchFamily="34" charset="-120"/>
-              </a:rPr>
-              <a:t>Por que isso importa para esta apresentação:  </a:t>
-            </a:r>
-            <a:pPr indent="0" marL="0">
-              <a:lnSpc>
-                <a:spcPct val="105000"/>
-              </a:lnSpc>
-              <a:buNone/>
-            </a:pPr>
-            <a:r>
-              <a:rPr lang="en-US" sz="1300" dirty="0">
-                <a:solidFill>
-                  <a:srgbClr val="1E2A36"/>
-                </a:solidFill>
-                <a:latin typeface="Calibri" pitchFamily="34" charset="0"/>
-                <a:ea typeface="Calibri" pitchFamily="34" charset="-122"/>
-                <a:cs typeface="Calibri" pitchFamily="34" charset="-120"/>
-              </a:rPr>
-              <a:t>a EDA é a base que alimenta o cálculo do índice. Se os indicadores forem definidos de forma incorreta, todo o IVS herda o erro. Por isso revisamos a EDA antes de avançar.</a:t>
-            </a:r>
-            <a:endParaRPr lang="en-US" sz="1300" dirty="0"/>
+              <a:t>Relatório Final de IC + artigo científico. </a:t>
+            </a:r>
+            <a:endParaRPr lang="pt-BR" sz="1150" noProof="0" dirty="0"/>
           </a:p>
         </p:txBody>
       </p:sp>
@@ -9933,6 +9521,7 @@
         <a:solidFill>
           <a:srgbClr val="FFFFFF"/>
         </a:solidFill>
+        <a:effectLst/>
       </p:bgPr>
     </p:bg>
     <p:spTree>
@@ -9970,11 +9559,11 @@
           <a:bodyPr wrap="square" lIns="0" tIns="0" rIns="0" bIns="0" rtlCol="0" anchor="ctr"/>
           <a:lstStyle/>
           <a:p>
-            <a:pPr indent="0" marL="0">
+            <a:pPr marL="0" indent="0">
               <a:buNone/>
             </a:pPr>
             <a:r>
-              <a:rPr lang="en-US" sz="1100" b="1" spc="200" kern="0" dirty="0">
+              <a:rPr lang="pt-BR" sz="1100" b="1" kern="0" spc="200" noProof="0" dirty="0">
                 <a:solidFill>
                   <a:srgbClr val="1C7293"/>
                 </a:solidFill>
@@ -9984,7 +9573,7 @@
               </a:rPr>
               <a:t>O OBJETO</a:t>
             </a:r>
-            <a:endParaRPr lang="en-US" sz="1100" dirty="0"/>
+            <a:endParaRPr lang="pt-BR" sz="1100" noProof="0" dirty="0"/>
           </a:p>
         </p:txBody>
       </p:sp>
@@ -10009,11 +9598,11 @@
           <a:bodyPr wrap="square" lIns="0" tIns="0" rIns="0" bIns="0" rtlCol="0" anchor="ctr"/>
           <a:lstStyle/>
           <a:p>
-            <a:pPr indent="0" marL="0">
+            <a:pPr marL="0" indent="0">
               <a:buNone/>
             </a:pPr>
             <a:r>
-              <a:rPr lang="en-US" sz="2500" b="1" dirty="0">
+              <a:rPr lang="pt-BR" sz="2500" b="1" noProof="0" dirty="0">
                 <a:solidFill>
                   <a:srgbClr val="1E2A36"/>
                 </a:solidFill>
@@ -10023,7 +9612,7 @@
               </a:rPr>
               <a:t>As 7 variáveis-componente do IVS</a:t>
             </a:r>
-            <a:endParaRPr lang="en-US" sz="2500" dirty="0"/>
+            <a:endParaRPr lang="pt-BR" sz="2500" noProof="0" dirty="0"/>
           </a:p>
         </p:txBody>
       </p:sp>
@@ -10036,23 +9625,41 @@
           <p:nvPr>
             <p:extLst>
               <p:ext uri="{D42A27DB-BD31-4B8C-83A1-F6EECF244321}">
-                <p14:modId xmlns:p14="http://schemas.microsoft.com/office/powerpoint/2010/main" val="1579011935"/>
+                <p14:modId xmlns:p14="http://schemas.microsoft.com/office/powerpoint/2010/main" val="623311273"/>
               </p:ext>
             </p:extLst>
           </p:nvPr>
         </p:nvGraphicFramePr>
         <p:xfrm>
           <a:off x="457200" y="1234440"/>
-          <a:ext cx="8229600" cy="914400"/>
+          <a:ext cx="8229600" cy="2926080"/>
         </p:xfrm>
         <a:graphic>
           <a:graphicData uri="http://schemas.openxmlformats.org/drawingml/2006/table">
             <a:tbl>
               <a:tblPr/>
               <a:tblGrid>
-                <a:gridCol w="2103120"/>
-                <a:gridCol w="4480560"/>
-                <a:gridCol w="1645920"/>
+                <a:gridCol w="2103120">
+                  <a:extLst>
+                    <a:ext uri="{9D8B030D-6E8A-4147-A177-3AD203B41FA5}">
+                      <a16:colId xmlns:a16="http://schemas.microsoft.com/office/drawing/2014/main" val="20000"/>
+                    </a:ext>
+                  </a:extLst>
+                </a:gridCol>
+                <a:gridCol w="4480560">
+                  <a:extLst>
+                    <a:ext uri="{9D8B030D-6E8A-4147-A177-3AD203B41FA5}">
+                      <a16:colId xmlns:a16="http://schemas.microsoft.com/office/drawing/2014/main" val="20001"/>
+                    </a:ext>
+                  </a:extLst>
+                </a:gridCol>
+                <a:gridCol w="1645920">
+                  <a:extLst>
+                    <a:ext uri="{9D8B030D-6E8A-4147-A177-3AD203B41FA5}">
+                      <a16:colId xmlns:a16="http://schemas.microsoft.com/office/drawing/2014/main" val="20002"/>
+                    </a:ext>
+                  </a:extLst>
+                </a:gridCol>
               </a:tblGrid>
               <a:tr h="365760">
                 <a:tc>
@@ -10060,11 +9667,11 @@
                     <a:bodyPr/>
                     <a:lstStyle/>
                     <a:p>
-                      <a:pPr algn="l" indent="0" marL="0">
+                      <a:pPr marL="0" indent="0" algn="l">
                         <a:buNone/>
                       </a:pPr>
                       <a:r>
-                        <a:rPr lang="en-US" sz="1200" b="1" dirty="0">
+                        <a:rPr lang="pt-BR" sz="1200" b="1" noProof="0" dirty="0">
                           <a:solidFill>
                             <a:srgbClr val="FFFFFF"/>
                           </a:solidFill>
@@ -10074,14 +9681,14 @@
                         </a:rPr>
                         <a:t>Dimensão</a:t>
                       </a:r>
-                      <a:endParaRPr lang="en-US" sz="1200" dirty="0">
+                      <a:endParaRPr lang="pt-BR" sz="1200" noProof="0" dirty="0">
                         <a:latin typeface="Calibri" charset="0"/>
                         <a:ea typeface="Calibri" charset="0"/>
                         <a:cs typeface="Calibri" charset="0"/>
                       </a:endParaRPr>
                     </a:p>
                   </a:txBody>
-                  <a:tcPr marL="91440" marR="91440" marT="45720" marB="45720" anchor="ctr">
+                  <a:tcPr anchor="ctr">
                     <a:lnL w="6350" cap="flat" cmpd="sng" algn="ctr">
                       <a:solidFill>
                         <a:srgbClr val="D8E2EA"/>
@@ -10128,11 +9735,11 @@
                     <a:bodyPr/>
                     <a:lstStyle/>
                     <a:p>
-                      <a:pPr algn="l" indent="0" marL="0">
+                      <a:pPr marL="0" indent="0" algn="l">
                         <a:buNone/>
                       </a:pPr>
                       <a:r>
-                        <a:rPr lang="en-US" sz="1200" b="1" dirty="0">
+                        <a:rPr lang="pt-BR" sz="1200" b="1" noProof="0" dirty="0">
                           <a:solidFill>
                             <a:srgbClr val="FFFFFF"/>
                           </a:solidFill>
@@ -10142,14 +9749,14 @@
                         </a:rPr>
                         <a:t>O que mede</a:t>
                       </a:r>
-                      <a:endParaRPr lang="en-US" sz="1200" dirty="0">
+                      <a:endParaRPr lang="pt-BR" sz="1200" noProof="0" dirty="0">
                         <a:latin typeface="Calibri" charset="0"/>
                         <a:ea typeface="Calibri" charset="0"/>
                         <a:cs typeface="Calibri" charset="0"/>
                       </a:endParaRPr>
                     </a:p>
                   </a:txBody>
-                  <a:tcPr marL="91440" marR="91440" marT="45720" marB="45720" anchor="ctr">
+                  <a:tcPr anchor="ctr">
                     <a:lnL w="6350" cap="flat" cmpd="sng" algn="ctr">
                       <a:solidFill>
                         <a:srgbClr val="D8E2EA"/>
@@ -10196,11 +9803,11 @@
                     <a:bodyPr/>
                     <a:lstStyle/>
                     <a:p>
-                      <a:pPr algn="l" indent="0" marL="0">
+                      <a:pPr marL="0" indent="0" algn="l">
                         <a:buNone/>
                       </a:pPr>
                       <a:r>
-                        <a:rPr lang="en-US" sz="1200" b="1" dirty="0">
+                        <a:rPr lang="pt-BR" sz="1200" b="1" noProof="0" dirty="0">
                           <a:solidFill>
                             <a:srgbClr val="FFFFFF"/>
                           </a:solidFill>
@@ -10210,14 +9817,14 @@
                         </a:rPr>
                         <a:t>Direção</a:t>
                       </a:r>
-                      <a:endParaRPr lang="en-US" sz="1200" dirty="0">
+                      <a:endParaRPr lang="pt-BR" sz="1200" noProof="0" dirty="0">
                         <a:latin typeface="Calibri" charset="0"/>
                         <a:ea typeface="Calibri" charset="0"/>
                         <a:cs typeface="Calibri" charset="0"/>
                       </a:endParaRPr>
                     </a:p>
                   </a:txBody>
-                  <a:tcPr marL="91440" marR="91440" marT="45720" marB="45720" anchor="ctr">
+                  <a:tcPr anchor="ctr">
                     <a:lnL w="6350" cap="flat" cmpd="sng" algn="ctr">
                       <a:solidFill>
                         <a:srgbClr val="D8E2EA"/>
@@ -10259,6 +9866,11 @@
                     </a:solidFill>
                   </a:tcPr>
                 </a:tc>
+                <a:extLst>
+                  <a:ext uri="{0D108BD9-81ED-4DB2-BD59-A6C34878D82A}">
+                    <a16:rowId xmlns:a16="http://schemas.microsoft.com/office/drawing/2014/main" val="10000"/>
+                  </a:ext>
+                </a:extLst>
               </a:tr>
               <a:tr h="365760">
                 <a:tc>
@@ -10266,11 +9878,11 @@
                     <a:bodyPr/>
                     <a:lstStyle/>
                     <a:p>
-                      <a:pPr algn="l" indent="0" marL="0">
+                      <a:pPr marL="0" indent="0" algn="l">
                         <a:buNone/>
                       </a:pPr>
                       <a:r>
-                        <a:rPr lang="en-US" sz="1150" b="1" dirty="0">
+                        <a:rPr lang="pt-BR" sz="1150" b="1" noProof="0" dirty="0">
                           <a:solidFill>
                             <a:srgbClr val="19599A"/>
                           </a:solidFill>
@@ -10280,14 +9892,14 @@
                         </a:rPr>
                         <a:t>Saneamento</a:t>
                       </a:r>
-                      <a:endParaRPr lang="en-US" sz="1150" dirty="0">
+                      <a:endParaRPr lang="pt-BR" sz="1150" noProof="0" dirty="0">
                         <a:latin typeface="Calibri" charset="0"/>
                         <a:ea typeface="Calibri" charset="0"/>
                         <a:cs typeface="Calibri" charset="0"/>
                       </a:endParaRPr>
                     </a:p>
                   </a:txBody>
-                  <a:tcPr marL="91440" marR="91440" marT="45720" marB="45720" anchor="ctr">
+                  <a:tcPr anchor="ctr">
                     <a:lnL w="6350" cap="flat" cmpd="sng" algn="ctr">
                       <a:solidFill>
                         <a:srgbClr val="D8E2EA"/>
@@ -10334,11 +9946,11 @@
                     <a:bodyPr/>
                     <a:lstStyle/>
                     <a:p>
-                      <a:pPr algn="l" indent="0" marL="0">
+                      <a:pPr marL="0" indent="0" algn="l">
                         <a:buNone/>
                       </a:pPr>
                       <a:r>
-                        <a:rPr lang="en-US" sz="1150" dirty="0">
+                        <a:rPr lang="pt-BR" sz="1150" noProof="0" dirty="0">
                           <a:solidFill>
                             <a:srgbClr val="1E2A36"/>
                           </a:solidFill>
@@ -10348,14 +9960,14 @@
                         </a:rPr>
                         <a:t>% domicílios com água inadequada</a:t>
                       </a:r>
-                      <a:endParaRPr lang="en-US" sz="1150" dirty="0">
+                      <a:endParaRPr lang="pt-BR" sz="1150" noProof="0" dirty="0">
                         <a:latin typeface="Calibri" charset="0"/>
                         <a:ea typeface="Calibri" charset="0"/>
                         <a:cs typeface="Calibri" charset="0"/>
                       </a:endParaRPr>
                     </a:p>
                   </a:txBody>
-                  <a:tcPr marL="91440" marR="91440" marT="45720" marB="45720" anchor="ctr">
+                  <a:tcPr anchor="ctr">
                     <a:lnL w="6350" cap="flat" cmpd="sng" algn="ctr">
                       <a:solidFill>
                         <a:srgbClr val="D8E2EA"/>
@@ -10402,11 +10014,11 @@
                     <a:bodyPr/>
                     <a:lstStyle/>
                     <a:p>
-                      <a:pPr algn="l" indent="0" marL="0">
+                      <a:pPr marL="0" indent="0" algn="l">
                         <a:buNone/>
                       </a:pPr>
                       <a:r>
-                        <a:rPr lang="en-US" sz="1150" b="1" dirty="0">
+                        <a:rPr lang="pt-BR" sz="1150" b="1" noProof="0" dirty="0">
                           <a:solidFill>
                             <a:srgbClr val="B3261E"/>
                           </a:solidFill>
@@ -10416,14 +10028,14 @@
                         </a:rPr>
                         <a:t>↑ pior</a:t>
                       </a:r>
-                      <a:endParaRPr lang="en-US" sz="1150" dirty="0">
+                      <a:endParaRPr lang="pt-BR" sz="1150" noProof="0" dirty="0">
                         <a:latin typeface="Calibri" charset="0"/>
                         <a:ea typeface="Calibri" charset="0"/>
                         <a:cs typeface="Calibri" charset="0"/>
                       </a:endParaRPr>
                     </a:p>
                   </a:txBody>
-                  <a:tcPr marL="91440" marR="91440" marT="45720" marB="45720" anchor="ctr">
+                  <a:tcPr anchor="ctr">
                     <a:lnL w="6350" cap="flat" cmpd="sng" algn="ctr">
                       <a:solidFill>
                         <a:srgbClr val="D8E2EA"/>
@@ -10465,6 +10077,11 @@
                     </a:solidFill>
                   </a:tcPr>
                 </a:tc>
+                <a:extLst>
+                  <a:ext uri="{0D108BD9-81ED-4DB2-BD59-A6C34878D82A}">
+                    <a16:rowId xmlns:a16="http://schemas.microsoft.com/office/drawing/2014/main" val="10001"/>
+                  </a:ext>
+                </a:extLst>
               </a:tr>
               <a:tr h="365760">
                 <a:tc>
@@ -10472,17 +10089,17 @@
                     <a:bodyPr/>
                     <a:lstStyle/>
                     <a:p>
-                      <a:pPr algn="l" indent="0" marL="0">
+                      <a:pPr marL="0" indent="0" algn="l">
                         <a:buNone/>
                       </a:pPr>
-                      <a:endParaRPr lang="en-US" sz="1150" dirty="0">
+                      <a:endParaRPr lang="pt-BR" sz="1150" noProof="0" dirty="0">
                         <a:latin typeface="Calibri" charset="0"/>
                         <a:ea typeface="Calibri" charset="0"/>
                         <a:cs typeface="Calibri" charset="0"/>
                       </a:endParaRPr>
                     </a:p>
                   </a:txBody>
-                  <a:tcPr marL="91440" marR="91440" marT="45720" marB="45720" anchor="ctr">
+                  <a:tcPr anchor="ctr">
                     <a:lnL w="6350" cap="flat" cmpd="sng" algn="ctr">
                       <a:solidFill>
                         <a:srgbClr val="D8E2EA"/>
@@ -10529,11 +10146,11 @@
                     <a:bodyPr/>
                     <a:lstStyle/>
                     <a:p>
-                      <a:pPr algn="l" indent="0" marL="0">
+                      <a:pPr marL="0" indent="0" algn="l">
                         <a:buNone/>
                       </a:pPr>
                       <a:r>
-                        <a:rPr lang="en-US" sz="1150" dirty="0">
+                        <a:rPr lang="pt-BR" sz="1150" noProof="0" dirty="0">
                           <a:solidFill>
                             <a:srgbClr val="1E2A36"/>
                           </a:solidFill>
@@ -10543,14 +10160,14 @@
                         </a:rPr>
                         <a:t>% domicílios com esgoto inadequado</a:t>
                       </a:r>
-                      <a:endParaRPr lang="en-US" sz="1150" dirty="0">
+                      <a:endParaRPr lang="pt-BR" sz="1150" noProof="0" dirty="0">
                         <a:latin typeface="Calibri" charset="0"/>
                         <a:ea typeface="Calibri" charset="0"/>
                         <a:cs typeface="Calibri" charset="0"/>
                       </a:endParaRPr>
                     </a:p>
                   </a:txBody>
-                  <a:tcPr marL="91440" marR="91440" marT="45720" marB="45720" anchor="ctr">
+                  <a:tcPr anchor="ctr">
                     <a:lnL w="6350" cap="flat" cmpd="sng" algn="ctr">
                       <a:solidFill>
                         <a:srgbClr val="D8E2EA"/>
@@ -10597,11 +10214,11 @@
                     <a:bodyPr/>
                     <a:lstStyle/>
                     <a:p>
-                      <a:pPr algn="l" indent="0" marL="0">
+                      <a:pPr marL="0" indent="0" algn="l">
                         <a:buNone/>
                       </a:pPr>
                       <a:r>
-                        <a:rPr lang="en-US" sz="1150" b="1" dirty="0">
+                        <a:rPr lang="pt-BR" sz="1150" b="1" noProof="0" dirty="0">
                           <a:solidFill>
                             <a:srgbClr val="B3261E"/>
                           </a:solidFill>
@@ -10611,14 +10228,14 @@
                         </a:rPr>
                         <a:t>↑ pior</a:t>
                       </a:r>
-                      <a:endParaRPr lang="en-US" sz="1150" dirty="0">
+                      <a:endParaRPr lang="pt-BR" sz="1150" noProof="0" dirty="0">
                         <a:latin typeface="Calibri" charset="0"/>
                         <a:ea typeface="Calibri" charset="0"/>
                         <a:cs typeface="Calibri" charset="0"/>
                       </a:endParaRPr>
                     </a:p>
                   </a:txBody>
-                  <a:tcPr marL="91440" marR="91440" marT="45720" marB="45720" anchor="ctr">
+                  <a:tcPr anchor="ctr">
                     <a:lnL w="6350" cap="flat" cmpd="sng" algn="ctr">
                       <a:solidFill>
                         <a:srgbClr val="D8E2EA"/>
@@ -10660,6 +10277,11 @@
                     </a:solidFill>
                   </a:tcPr>
                 </a:tc>
+                <a:extLst>
+                  <a:ext uri="{0D108BD9-81ED-4DB2-BD59-A6C34878D82A}">
+                    <a16:rowId xmlns:a16="http://schemas.microsoft.com/office/drawing/2014/main" val="10002"/>
+                  </a:ext>
+                </a:extLst>
               </a:tr>
               <a:tr h="365760">
                 <a:tc>
@@ -10667,17 +10289,17 @@
                     <a:bodyPr/>
                     <a:lstStyle/>
                     <a:p>
-                      <a:pPr algn="l" indent="0" marL="0">
+                      <a:pPr marL="0" indent="0" algn="l">
                         <a:buNone/>
                       </a:pPr>
-                      <a:endParaRPr lang="en-US" sz="1150" dirty="0">
+                      <a:endParaRPr lang="pt-BR" sz="1150" noProof="0" dirty="0">
                         <a:latin typeface="Calibri" charset="0"/>
                         <a:ea typeface="Calibri" charset="0"/>
                         <a:cs typeface="Calibri" charset="0"/>
                       </a:endParaRPr>
                     </a:p>
                   </a:txBody>
-                  <a:tcPr marL="91440" marR="91440" marT="45720" marB="45720" anchor="ctr">
+                  <a:tcPr anchor="ctr">
                     <a:lnL w="6350" cap="flat" cmpd="sng" algn="ctr">
                       <a:solidFill>
                         <a:srgbClr val="D8E2EA"/>
@@ -10724,11 +10346,11 @@
                     <a:bodyPr/>
                     <a:lstStyle/>
                     <a:p>
-                      <a:pPr algn="l" indent="0" marL="0">
+                      <a:pPr marL="0" indent="0" algn="l">
                         <a:buNone/>
                       </a:pPr>
                       <a:r>
-                        <a:rPr lang="en-US" sz="1150" dirty="0">
+                        <a:rPr lang="pt-BR" sz="1150" noProof="0" dirty="0">
                           <a:solidFill>
                             <a:srgbClr val="1E2A36"/>
                           </a:solidFill>
@@ -10738,14 +10360,14 @@
                         </a:rPr>
                         <a:t>% domicílios com lixo inadequado</a:t>
                       </a:r>
-                      <a:endParaRPr lang="en-US" sz="1150" dirty="0">
+                      <a:endParaRPr lang="pt-BR" sz="1150" noProof="0" dirty="0">
                         <a:latin typeface="Calibri" charset="0"/>
                         <a:ea typeface="Calibri" charset="0"/>
                         <a:cs typeface="Calibri" charset="0"/>
                       </a:endParaRPr>
                     </a:p>
                   </a:txBody>
-                  <a:tcPr marL="91440" marR="91440" marT="45720" marB="45720" anchor="ctr">
+                  <a:tcPr anchor="ctr">
                     <a:lnL w="6350" cap="flat" cmpd="sng" algn="ctr">
                       <a:solidFill>
                         <a:srgbClr val="D8E2EA"/>
@@ -10792,11 +10414,11 @@
                     <a:bodyPr/>
                     <a:lstStyle/>
                     <a:p>
-                      <a:pPr algn="l" indent="0" marL="0">
+                      <a:pPr marL="0" indent="0" algn="l">
                         <a:buNone/>
                       </a:pPr>
                       <a:r>
-                        <a:rPr lang="en-US" sz="1150" b="1" dirty="0">
+                        <a:rPr lang="pt-BR" sz="1150" b="1" noProof="0" dirty="0">
                           <a:solidFill>
                             <a:srgbClr val="B3261E"/>
                           </a:solidFill>
@@ -10806,14 +10428,14 @@
                         </a:rPr>
                         <a:t>↑ pior</a:t>
                       </a:r>
-                      <a:endParaRPr lang="en-US" sz="1150" dirty="0">
+                      <a:endParaRPr lang="pt-BR" sz="1150" noProof="0" dirty="0">
                         <a:latin typeface="Calibri" charset="0"/>
                         <a:ea typeface="Calibri" charset="0"/>
                         <a:cs typeface="Calibri" charset="0"/>
                       </a:endParaRPr>
                     </a:p>
                   </a:txBody>
-                  <a:tcPr marL="91440" marR="91440" marT="45720" marB="45720" anchor="ctr">
+                  <a:tcPr anchor="ctr">
                     <a:lnL w="6350" cap="flat" cmpd="sng" algn="ctr">
                       <a:solidFill>
                         <a:srgbClr val="D8E2EA"/>
@@ -10855,6 +10477,11 @@
                     </a:solidFill>
                   </a:tcPr>
                 </a:tc>
+                <a:extLst>
+                  <a:ext uri="{0D108BD9-81ED-4DB2-BD59-A6C34878D82A}">
+                    <a16:rowId xmlns:a16="http://schemas.microsoft.com/office/drawing/2014/main" val="10003"/>
+                  </a:ext>
+                </a:extLst>
               </a:tr>
               <a:tr h="365760">
                 <a:tc>
@@ -10862,11 +10489,11 @@
                     <a:bodyPr/>
                     <a:lstStyle/>
                     <a:p>
-                      <a:pPr algn="l" indent="0" marL="0">
+                      <a:pPr marL="0" indent="0" algn="l">
                         <a:buNone/>
                       </a:pPr>
                       <a:r>
-                        <a:rPr lang="en-US" sz="1150" b="1" dirty="0">
+                        <a:rPr lang="pt-BR" sz="1150" b="1" noProof="0" dirty="0">
                           <a:solidFill>
                             <a:srgbClr val="2A9D8F"/>
                           </a:solidFill>
@@ -10876,14 +10503,14 @@
                         </a:rPr>
                         <a:t>Socioeconômica</a:t>
                       </a:r>
-                      <a:endParaRPr lang="en-US" sz="1150" dirty="0">
+                      <a:endParaRPr lang="pt-BR" sz="1150" noProof="0" dirty="0">
                         <a:latin typeface="Calibri" charset="0"/>
                         <a:ea typeface="Calibri" charset="0"/>
                         <a:cs typeface="Calibri" charset="0"/>
                       </a:endParaRPr>
                     </a:p>
                   </a:txBody>
-                  <a:tcPr marL="91440" marR="91440" marT="45720" marB="45720" anchor="ctr">
+                  <a:tcPr anchor="ctr">
                     <a:lnL w="6350" cap="flat" cmpd="sng" algn="ctr">
                       <a:solidFill>
                         <a:srgbClr val="D8E2EA"/>
@@ -10930,11 +10557,11 @@
                     <a:bodyPr/>
                     <a:lstStyle/>
                     <a:p>
-                      <a:pPr algn="l" indent="0" marL="0">
+                      <a:pPr marL="0" indent="0" algn="l">
                         <a:buNone/>
                       </a:pPr>
                       <a:r>
-                        <a:rPr lang="en-US" sz="1150" dirty="0">
+                        <a:rPr lang="pt-BR" sz="1150" noProof="0" dirty="0">
                           <a:solidFill>
                             <a:srgbClr val="1E2A36"/>
                           </a:solidFill>
@@ -10944,14 +10571,14 @@
                         </a:rPr>
                         <a:t>Razão de moradores por domicílio (densidade)</a:t>
                       </a:r>
-                      <a:endParaRPr lang="en-US" sz="1150" dirty="0">
+                      <a:endParaRPr lang="pt-BR" sz="1150" noProof="0" dirty="0">
                         <a:latin typeface="Calibri" charset="0"/>
                         <a:ea typeface="Calibri" charset="0"/>
                         <a:cs typeface="Calibri" charset="0"/>
                       </a:endParaRPr>
                     </a:p>
                   </a:txBody>
-                  <a:tcPr marL="91440" marR="91440" marT="45720" marB="45720" anchor="ctr">
+                  <a:tcPr anchor="ctr">
                     <a:lnL w="6350" cap="flat" cmpd="sng" algn="ctr">
                       <a:solidFill>
                         <a:srgbClr val="D8E2EA"/>
@@ -10998,11 +10625,11 @@
                     <a:bodyPr/>
                     <a:lstStyle/>
                     <a:p>
-                      <a:pPr algn="l" indent="0" marL="0">
+                      <a:pPr marL="0" indent="0" algn="l">
                         <a:buNone/>
                       </a:pPr>
                       <a:r>
-                        <a:rPr lang="en-US" sz="1150" b="1" dirty="0">
+                        <a:rPr lang="pt-BR" sz="1150" b="1" noProof="0" dirty="0">
                           <a:solidFill>
                             <a:srgbClr val="B3261E"/>
                           </a:solidFill>
@@ -11012,14 +10639,14 @@
                         </a:rPr>
                         <a:t>↑ pior</a:t>
                       </a:r>
-                      <a:endParaRPr lang="en-US" sz="1150" dirty="0">
+                      <a:endParaRPr lang="pt-BR" sz="1150" noProof="0" dirty="0">
                         <a:latin typeface="Calibri" charset="0"/>
                         <a:ea typeface="Calibri" charset="0"/>
                         <a:cs typeface="Calibri" charset="0"/>
                       </a:endParaRPr>
                     </a:p>
                   </a:txBody>
-                  <a:tcPr marL="91440" marR="91440" marT="45720" marB="45720" anchor="ctr">
+                  <a:tcPr anchor="ctr">
                     <a:lnL w="6350" cap="flat" cmpd="sng" algn="ctr">
                       <a:solidFill>
                         <a:srgbClr val="D8E2EA"/>
@@ -11061,6 +10688,11 @@
                     </a:solidFill>
                   </a:tcPr>
                 </a:tc>
+                <a:extLst>
+                  <a:ext uri="{0D108BD9-81ED-4DB2-BD59-A6C34878D82A}">
+                    <a16:rowId xmlns:a16="http://schemas.microsoft.com/office/drawing/2014/main" val="10004"/>
+                  </a:ext>
+                </a:extLst>
               </a:tr>
               <a:tr h="365760">
                 <a:tc>
@@ -11068,17 +10700,17 @@
                     <a:bodyPr/>
                     <a:lstStyle/>
                     <a:p>
-                      <a:pPr algn="l" indent="0" marL="0">
+                      <a:pPr marL="0" indent="0" algn="l">
                         <a:buNone/>
                       </a:pPr>
-                      <a:endParaRPr lang="en-US" sz="1150" dirty="0">
+                      <a:endParaRPr lang="pt-BR" sz="1150" noProof="0" dirty="0">
                         <a:latin typeface="Calibri" charset="0"/>
                         <a:ea typeface="Calibri" charset="0"/>
                         <a:cs typeface="Calibri" charset="0"/>
                       </a:endParaRPr>
                     </a:p>
                   </a:txBody>
-                  <a:tcPr marL="91440" marR="91440" marT="45720" marB="45720" anchor="ctr">
+                  <a:tcPr anchor="ctr">
                     <a:lnL w="6350" cap="flat" cmpd="sng" algn="ctr">
                       <a:solidFill>
                         <a:srgbClr val="D8E2EA"/>
@@ -11125,11 +10757,11 @@
                     <a:bodyPr/>
                     <a:lstStyle/>
                     <a:p>
-                      <a:pPr algn="l" indent="0" marL="0">
+                      <a:pPr marL="0" indent="0" algn="l">
                         <a:buNone/>
                       </a:pPr>
                       <a:r>
-                        <a:rPr lang="en-US" sz="1150" dirty="0">
+                        <a:rPr lang="pt-BR" sz="1150" noProof="0" dirty="0">
                           <a:solidFill>
                             <a:srgbClr val="1E2A36"/>
                           </a:solidFill>
@@ -11139,14 +10771,14 @@
                         </a:rPr>
                         <a:t>% de pessoas analfabetas (15+)</a:t>
                       </a:r>
-                      <a:endParaRPr lang="en-US" sz="1150" dirty="0">
+                      <a:endParaRPr lang="pt-BR" sz="1150" noProof="0" dirty="0">
                         <a:latin typeface="Calibri" charset="0"/>
                         <a:ea typeface="Calibri" charset="0"/>
                         <a:cs typeface="Calibri" charset="0"/>
                       </a:endParaRPr>
                     </a:p>
                   </a:txBody>
-                  <a:tcPr marL="91440" marR="91440" marT="45720" marB="45720" anchor="ctr">
+                  <a:tcPr anchor="ctr">
                     <a:lnL w="6350" cap="flat" cmpd="sng" algn="ctr">
                       <a:solidFill>
                         <a:srgbClr val="D8E2EA"/>
@@ -11193,11 +10825,11 @@
                     <a:bodyPr/>
                     <a:lstStyle/>
                     <a:p>
-                      <a:pPr algn="l" indent="0" marL="0">
+                      <a:pPr marL="0" indent="0" algn="l">
                         <a:buNone/>
                       </a:pPr>
                       <a:r>
-                        <a:rPr lang="en-US" sz="1150" b="1" dirty="0">
+                        <a:rPr lang="pt-BR" sz="1150" b="1" noProof="0" dirty="0">
                           <a:solidFill>
                             <a:srgbClr val="B3261E"/>
                           </a:solidFill>
@@ -11207,14 +10839,14 @@
                         </a:rPr>
                         <a:t>↑ pior</a:t>
                       </a:r>
-                      <a:endParaRPr lang="en-US" sz="1150" dirty="0">
+                      <a:endParaRPr lang="pt-BR" sz="1150" noProof="0" dirty="0">
                         <a:latin typeface="Calibri" charset="0"/>
                         <a:ea typeface="Calibri" charset="0"/>
                         <a:cs typeface="Calibri" charset="0"/>
                       </a:endParaRPr>
                     </a:p>
                   </a:txBody>
-                  <a:tcPr marL="91440" marR="91440" marT="45720" marB="45720" anchor="ctr">
+                  <a:tcPr anchor="ctr">
                     <a:lnL w="6350" cap="flat" cmpd="sng" algn="ctr">
                       <a:solidFill>
                         <a:srgbClr val="D8E2EA"/>
@@ -11256,6 +10888,11 @@
                     </a:solidFill>
                   </a:tcPr>
                 </a:tc>
+                <a:extLst>
+                  <a:ext uri="{0D108BD9-81ED-4DB2-BD59-A6C34878D82A}">
+                    <a16:rowId xmlns:a16="http://schemas.microsoft.com/office/drawing/2014/main" val="10005"/>
+                  </a:ext>
+                </a:extLst>
               </a:tr>
               <a:tr h="365760">
                 <a:tc>
@@ -11263,17 +10900,17 @@
                     <a:bodyPr/>
                     <a:lstStyle/>
                     <a:p>
-                      <a:pPr algn="l" indent="0" marL="0">
+                      <a:pPr marL="0" indent="0" algn="l">
                         <a:buNone/>
                       </a:pPr>
-                      <a:endParaRPr lang="en-US" sz="1150" dirty="0">
+                      <a:endParaRPr lang="pt-BR" sz="1150" noProof="0" dirty="0">
                         <a:latin typeface="Calibri" charset="0"/>
                         <a:ea typeface="Calibri" charset="0"/>
                         <a:cs typeface="Calibri" charset="0"/>
                       </a:endParaRPr>
                     </a:p>
                   </a:txBody>
-                  <a:tcPr marL="91440" marR="91440" marT="45720" marB="45720" anchor="ctr">
+                  <a:tcPr anchor="ctr">
                     <a:lnL w="6350" cap="flat" cmpd="sng" algn="ctr">
                       <a:solidFill>
                         <a:srgbClr val="D8E2EA"/>
@@ -11320,11 +10957,11 @@
                     <a:bodyPr/>
                     <a:lstStyle/>
                     <a:p>
-                      <a:pPr algn="l" indent="0" marL="0">
+                      <a:pPr marL="0" indent="0" algn="l">
                         <a:buNone/>
                       </a:pPr>
                       <a:r>
-                        <a:rPr lang="en-US" sz="1150" dirty="0">
+                        <a:rPr lang="pt-BR" sz="1150" noProof="0" dirty="0">
                           <a:solidFill>
                             <a:srgbClr val="1E2A36"/>
                           </a:solidFill>
@@ -11334,14 +10971,14 @@
                         </a:rPr>
                         <a:t>Rendimento médio mensal dos responsáveis</a:t>
                       </a:r>
-                      <a:endParaRPr lang="en-US" sz="1150" dirty="0">
+                      <a:endParaRPr lang="pt-BR" sz="1150" noProof="0" dirty="0">
                         <a:latin typeface="Calibri" charset="0"/>
                         <a:ea typeface="Calibri" charset="0"/>
                         <a:cs typeface="Calibri" charset="0"/>
                       </a:endParaRPr>
                     </a:p>
                   </a:txBody>
-                  <a:tcPr marL="91440" marR="91440" marT="45720" marB="45720" anchor="ctr">
+                  <a:tcPr anchor="ctr">
                     <a:lnL w="6350" cap="flat" cmpd="sng" algn="ctr">
                       <a:solidFill>
                         <a:srgbClr val="D8E2EA"/>
@@ -11388,11 +11025,11 @@
                     <a:bodyPr/>
                     <a:lstStyle/>
                     <a:p>
-                      <a:pPr algn="l" indent="0" marL="0">
+                      <a:pPr marL="0" indent="0" algn="l">
                         <a:buNone/>
                       </a:pPr>
                       <a:r>
-                        <a:rPr lang="en-US" sz="1150" b="1" dirty="0">
+                        <a:rPr lang="pt-BR" sz="1150" b="1" noProof="0" dirty="0">
                           <a:solidFill>
                             <a:srgbClr val="19599A"/>
                           </a:solidFill>
@@ -11402,14 +11039,14 @@
                         </a:rPr>
                         <a:t>↓ pior</a:t>
                       </a:r>
-                      <a:endParaRPr lang="en-US" sz="1150" dirty="0">
+                      <a:endParaRPr lang="pt-BR" sz="1150" noProof="0" dirty="0">
                         <a:latin typeface="Calibri" charset="0"/>
                         <a:ea typeface="Calibri" charset="0"/>
                         <a:cs typeface="Calibri" charset="0"/>
                       </a:endParaRPr>
                     </a:p>
                   </a:txBody>
-                  <a:tcPr marL="91440" marR="91440" marT="45720" marB="45720" anchor="ctr">
+                  <a:tcPr anchor="ctr">
                     <a:lnL w="6350" cap="flat" cmpd="sng" algn="ctr">
                       <a:solidFill>
                         <a:srgbClr val="D8E2EA"/>
@@ -11451,6 +11088,11 @@
                     </a:solidFill>
                   </a:tcPr>
                 </a:tc>
+                <a:extLst>
+                  <a:ext uri="{0D108BD9-81ED-4DB2-BD59-A6C34878D82A}">
+                    <a16:rowId xmlns:a16="http://schemas.microsoft.com/office/drawing/2014/main" val="10006"/>
+                  </a:ext>
+                </a:extLst>
               </a:tr>
               <a:tr h="365760">
                 <a:tc>
@@ -11458,17 +11100,17 @@
                     <a:bodyPr/>
                     <a:lstStyle/>
                     <a:p>
-                      <a:pPr algn="l" indent="0" marL="0">
+                      <a:pPr marL="0" indent="0" algn="l">
                         <a:buNone/>
                       </a:pPr>
-                      <a:endParaRPr lang="en-US" sz="1150" dirty="0">
+                      <a:endParaRPr lang="pt-BR" sz="1150" noProof="0" dirty="0">
                         <a:latin typeface="Calibri" charset="0"/>
                         <a:ea typeface="Calibri" charset="0"/>
                         <a:cs typeface="Calibri" charset="0"/>
                       </a:endParaRPr>
                     </a:p>
                   </a:txBody>
-                  <a:tcPr marL="91440" marR="91440" marT="45720" marB="45720" anchor="ctr">
+                  <a:tcPr anchor="ctr">
                     <a:lnL w="6350" cap="flat" cmpd="sng" algn="ctr">
                       <a:solidFill>
                         <a:srgbClr val="D8E2EA"/>
@@ -11515,11 +11157,11 @@
                     <a:bodyPr/>
                     <a:lstStyle/>
                     <a:p>
-                      <a:pPr algn="l" indent="0" marL="0">
+                      <a:pPr marL="0" indent="0" algn="l">
                         <a:buNone/>
                       </a:pPr>
                       <a:r>
-                        <a:rPr lang="en-US" sz="1150" dirty="0">
+                        <a:rPr lang="pt-BR" sz="1150" noProof="0" dirty="0">
                           <a:solidFill>
                             <a:srgbClr val="1E2A36"/>
                           </a:solidFill>
@@ -11529,14 +11171,14 @@
                         </a:rPr>
                         <a:t>% de pessoas pretas, pardas e indígenas</a:t>
                       </a:r>
-                      <a:endParaRPr lang="en-US" sz="1150" dirty="0">
+                      <a:endParaRPr lang="pt-BR" sz="1150" noProof="0" dirty="0">
                         <a:latin typeface="Calibri" charset="0"/>
                         <a:ea typeface="Calibri" charset="0"/>
                         <a:cs typeface="Calibri" charset="0"/>
                       </a:endParaRPr>
                     </a:p>
                   </a:txBody>
-                  <a:tcPr marL="91440" marR="91440" marT="45720" marB="45720" anchor="ctr">
+                  <a:tcPr anchor="ctr">
                     <a:lnL w="6350" cap="flat" cmpd="sng" algn="ctr">
                       <a:solidFill>
                         <a:srgbClr val="D8E2EA"/>
@@ -11583,11 +11225,11 @@
                     <a:bodyPr/>
                     <a:lstStyle/>
                     <a:p>
-                      <a:pPr algn="l" indent="0" marL="0">
+                      <a:pPr marL="0" indent="0" algn="l">
                         <a:buNone/>
                       </a:pPr>
                       <a:r>
-                        <a:rPr lang="en-US" sz="1150" b="1" dirty="0">
+                        <a:rPr lang="pt-BR" sz="1150" b="1" noProof="0" dirty="0">
                           <a:solidFill>
                             <a:srgbClr val="B3261E"/>
                           </a:solidFill>
@@ -11597,14 +11239,14 @@
                         </a:rPr>
                         <a:t>↑ pior</a:t>
                       </a:r>
-                      <a:endParaRPr lang="en-US" sz="1150" dirty="0">
+                      <a:endParaRPr lang="pt-BR" sz="1150" noProof="0" dirty="0">
                         <a:latin typeface="Calibri" charset="0"/>
                         <a:ea typeface="Calibri" charset="0"/>
                         <a:cs typeface="Calibri" charset="0"/>
                       </a:endParaRPr>
                     </a:p>
                   </a:txBody>
-                  <a:tcPr marL="91440" marR="91440" marT="45720" marB="45720" anchor="ctr">
+                  <a:tcPr anchor="ctr">
                     <a:lnL w="6350" cap="flat" cmpd="sng" algn="ctr">
                       <a:solidFill>
                         <a:srgbClr val="D8E2EA"/>
@@ -11646,64 +11288,16 @@
                     </a:solidFill>
                   </a:tcPr>
                 </a:tc>
+                <a:extLst>
+                  <a:ext uri="{0D108BD9-81ED-4DB2-BD59-A6C34878D82A}">
+                    <a16:rowId xmlns:a16="http://schemas.microsoft.com/office/drawing/2014/main" val="10007"/>
+                  </a:ext>
+                </a:extLst>
               </a:tr>
             </a:tbl>
           </a:graphicData>
         </a:graphic>
       </p:graphicFrame>
-      <p:sp>
-        <p:nvSpPr>
-          <p:cNvPr id="5" name="Text 2"/>
-          <p:cNvSpPr/>
-          <p:nvPr/>
-        </p:nvSpPr>
-        <p:spPr>
-          <a:xfrm>
-            <a:off x="457200" y="4572000"/>
-            <a:ext cx="8229600" cy="365760"/>
-          </a:xfrm>
-          <a:prstGeom prst="rect">
-            <a:avLst/>
-          </a:prstGeom>
-          <a:noFill/>
-          <a:ln/>
-        </p:spPr>
-        <p:txBody>
-          <a:bodyPr wrap="square" lIns="0" tIns="0" rIns="0" bIns="0" rtlCol="0" anchor="ctr"/>
-          <a:lstStyle/>
-          <a:p>
-            <a:pPr indent="0" marL="0">
-              <a:buNone/>
-            </a:pPr>
-            <a:r>
-              <a:rPr lang="en-US" sz="1150" b="1" i="1" dirty="0">
-                <a:solidFill>
-                  <a:srgbClr val="1C7293"/>
-                </a:solidFill>
-                <a:latin typeface="Calibri" pitchFamily="34" charset="0"/>
-                <a:ea typeface="Calibri" pitchFamily="34" charset="-122"/>
-                <a:cs typeface="Calibri" pitchFamily="34" charset="-120"/>
-              </a:rPr>
-              <a:t>Como ler “direção”:  </a:t>
-            </a:r>
-            <a:pPr indent="0" marL="0">
-              <a:buNone/>
-            </a:pPr>
-            <a:r>
-              <a:rPr lang="en-US" sz="1150" i="1" dirty="0">
-                <a:solidFill>
-                  <a:srgbClr val="5B6B7A"/>
-                </a:solidFill>
-                <a:latin typeface="Calibri" pitchFamily="34" charset="0"/>
-                <a:ea typeface="Calibri" pitchFamily="34" charset="-122"/>
-                <a:cs typeface="Calibri" pitchFamily="34" charset="-120"/>
-              </a:rPr>
-              <a:t>em todas, maior valor = mais vulnerável; só o rendimento é invertido (quanto menor a renda, mais vulnerável).</a:t>
-            </a:r>
-            <a:endParaRPr lang="en-US" sz="1150" dirty="0"/>
-          </a:p>
-        </p:txBody>
-      </p:sp>
     </p:spTree>
   </p:cSld>
   <p:clrMapOvr>
@@ -11720,6 +11314,7 @@
         <a:solidFill>
           <a:srgbClr val="FFFFFF"/>
         </a:solidFill>
+        <a:effectLst/>
       </p:bgPr>
     </p:bg>
     <p:spTree>
@@ -11757,11 +11352,11 @@
           <a:bodyPr wrap="square" lIns="0" tIns="0" rIns="0" bIns="0" rtlCol="0" anchor="ctr"/>
           <a:lstStyle/>
           <a:p>
-            <a:pPr indent="0" marL="0">
+            <a:pPr marL="0" indent="0">
               <a:buNone/>
             </a:pPr>
             <a:r>
-              <a:rPr lang="en-US" sz="1100" b="1" spc="200" kern="0" dirty="0">
+              <a:rPr lang="pt-BR" sz="1100" b="1" kern="0" spc="200" noProof="0" dirty="0">
                 <a:solidFill>
                   <a:srgbClr val="1C7293"/>
                 </a:solidFill>
@@ -11771,20 +11366,20 @@
               </a:rPr>
               <a:t>O PONTO DE PARTIDA</a:t>
             </a:r>
-            <a:endParaRPr lang="en-US" sz="1100" dirty="0"/>
-          </a:p>
-        </p:txBody>
-      </p:sp>
-      <p:sp>
-        <p:nvSpPr>
-          <p:cNvPr id="3" name="Text 1"/>
-          <p:cNvSpPr/>
-          <p:nvPr/>
-        </p:nvSpPr>
-        <p:spPr>
-          <a:xfrm>
-            <a:off x="457200" y="548640"/>
-            <a:ext cx="7863840" cy="530352"/>
+            <a:endParaRPr lang="pt-BR" sz="1100" noProof="0" dirty="0"/>
+          </a:p>
+        </p:txBody>
+      </p:sp>
+      <p:sp>
+        <p:nvSpPr>
+          <p:cNvPr id="4" name="Text 2"/>
+          <p:cNvSpPr/>
+          <p:nvPr/>
+        </p:nvSpPr>
+        <p:spPr>
+          <a:xfrm>
+            <a:off x="457200" y="1234440"/>
+            <a:ext cx="8229600" cy="594360"/>
           </a:xfrm>
           <a:prstGeom prst="rect">
             <a:avLst/>
@@ -11796,53 +11391,14 @@
           <a:bodyPr wrap="square" lIns="0" tIns="0" rIns="0" bIns="0" rtlCol="0" anchor="ctr"/>
           <a:lstStyle/>
           <a:p>
-            <a:pPr indent="0" marL="0">
-              <a:buNone/>
-            </a:pPr>
-            <a:r>
-              <a:rPr lang="en-US" sz="2500" b="1" dirty="0">
-                <a:solidFill>
-                  <a:srgbClr val="1E2A36"/>
-                </a:solidFill>
-                <a:latin typeface="Georgia" pitchFamily="34" charset="0"/>
-                <a:ea typeface="Georgia" pitchFamily="34" charset="-122"/>
-                <a:cs typeface="Georgia" pitchFamily="34" charset="-120"/>
-              </a:rPr>
-              <a:t>Por que revisar a EDA de 15/05?</a:t>
-            </a:r>
-            <a:endParaRPr lang="en-US" sz="2500" dirty="0"/>
-          </a:p>
-        </p:txBody>
-      </p:sp>
-      <p:sp>
-        <p:nvSpPr>
-          <p:cNvPr id="4" name="Text 2"/>
-          <p:cNvSpPr/>
-          <p:nvPr/>
-        </p:nvSpPr>
-        <p:spPr>
-          <a:xfrm>
-            <a:off x="457200" y="1234440"/>
-            <a:ext cx="8229600" cy="594360"/>
-          </a:xfrm>
-          <a:prstGeom prst="rect">
-            <a:avLst/>
-          </a:prstGeom>
-          <a:noFill/>
-          <a:ln/>
-        </p:spPr>
-        <p:txBody>
-          <a:bodyPr wrap="square" lIns="0" tIns="0" rIns="0" bIns="0" rtlCol="0" anchor="ctr"/>
-          <a:lstStyle/>
-          <a:p>
-            <a:pPr indent="0" marL="0">
+            <a:pPr marL="0" indent="0">
               <a:lnSpc>
                 <a:spcPct val="105000"/>
               </a:lnSpc>
               <a:buNone/>
             </a:pPr>
             <a:r>
-              <a:rPr lang="en-US" sz="1400" dirty="0">
+              <a:rPr lang="pt-BR" sz="1400" noProof="0" dirty="0">
                 <a:solidFill>
                   <a:srgbClr val="1E2A36"/>
                 </a:solidFill>
@@ -11850,9 +11406,9 @@
                 <a:ea typeface="Calibri" pitchFamily="34" charset="-122"/>
                 <a:cs typeface="Calibri" pitchFamily="34" charset="-120"/>
               </a:rPr>
-              <a:t>A primeira EDA estava tecnicamente bem feita, mas tinha duas decisões metodológicas que, revisadas com a orientadora e o dicionário oficial do IBGE, precisavam ser corrigidas:</a:t>
-            </a:r>
-            <a:endParaRPr lang="en-US" sz="1400" dirty="0"/>
+              <a:t>A primeira analise exploratória de dados estava tecnicamente bem feita, mas tinha duas decisões metodológicas que, revisadas com a orientadora e o dicionário oficial do IBGE, precisavam ser corrigidas:</a:t>
+            </a:r>
+            <a:endParaRPr lang="pt-BR" sz="1400" noProof="0" dirty="0"/>
           </a:p>
         </p:txBody>
       </p:sp>
@@ -11880,6 +11436,13 @@
             <a:prstDash val="solid"/>
           </a:ln>
         </p:spPr>
+        <p:txBody>
+          <a:bodyPr/>
+          <a:lstStyle/>
+          <a:p>
+            <a:endParaRPr lang="pt-BR" noProof="0" dirty="0"/>
+          </a:p>
+        </p:txBody>
       </p:sp>
       <p:sp>
         <p:nvSpPr>
@@ -11900,6 +11463,13 @@
           </a:solidFill>
           <a:ln/>
         </p:spPr>
+        <p:txBody>
+          <a:bodyPr/>
+          <a:lstStyle/>
+          <a:p>
+            <a:endParaRPr lang="pt-BR" noProof="0" dirty="0"/>
+          </a:p>
+        </p:txBody>
       </p:sp>
       <p:sp>
         <p:nvSpPr>
@@ -11922,11 +11492,11 @@
           <a:bodyPr wrap="square" rtlCol="0" anchor="ctr"/>
           <a:lstStyle/>
           <a:p>
-            <a:pPr algn="ctr" indent="0" marL="0">
+            <a:pPr marL="0" indent="0" algn="ctr">
               <a:buNone/>
             </a:pPr>
             <a:r>
-              <a:rPr lang="en-US" sz="2000" b="1" dirty="0">
+              <a:rPr lang="pt-BR" sz="2000" b="1" noProof="0" dirty="0">
                 <a:solidFill>
                   <a:srgbClr val="FFFFFF"/>
                 </a:solidFill>
@@ -11936,7 +11506,7 @@
               </a:rPr>
               <a:t>1</a:t>
             </a:r>
-            <a:endParaRPr lang="en-US" sz="2000" dirty="0"/>
+            <a:endParaRPr lang="pt-BR" sz="2000" noProof="0" dirty="0"/>
           </a:p>
         </p:txBody>
       </p:sp>
@@ -11961,11 +11531,11 @@
           <a:bodyPr wrap="square" lIns="0" tIns="0" rIns="0" bIns="0" rtlCol="0" anchor="ctr"/>
           <a:lstStyle/>
           <a:p>
-            <a:pPr indent="0" marL="0">
+            <a:pPr marL="0" indent="0">
               <a:buNone/>
             </a:pPr>
             <a:r>
-              <a:rPr lang="en-US" sz="1500" b="1" dirty="0">
+              <a:rPr lang="pt-BR" sz="1500" b="1" noProof="0" dirty="0">
                 <a:solidFill>
                   <a:srgbClr val="1E2A36"/>
                 </a:solidFill>
@@ -11975,7 +11545,7 @@
               </a:rPr>
               <a:t>O denominador dos indicadores de saneamento era uma contagem de pessoas (V01042)</a:t>
             </a:r>
-            <a:endParaRPr lang="en-US" sz="1500" dirty="0"/>
+            <a:endParaRPr lang="pt-BR" sz="1500" noProof="0" dirty="0"/>
           </a:p>
         </p:txBody>
       </p:sp>
@@ -12000,14 +11570,14 @@
           <a:bodyPr wrap="square" lIns="0" tIns="0" rIns="0" bIns="0" rtlCol="0" anchor="ctr"/>
           <a:lstStyle/>
           <a:p>
-            <a:pPr indent="0" marL="0">
+            <a:pPr marL="0" indent="0">
               <a:lnSpc>
                 <a:spcPct val="100000"/>
               </a:lnSpc>
               <a:buNone/>
             </a:pPr>
             <a:r>
-              <a:rPr lang="en-US" sz="1250" dirty="0">
+              <a:rPr lang="pt-BR" sz="1250" noProof="0" dirty="0">
                 <a:solidFill>
                   <a:srgbClr val="1E2A36"/>
                 </a:solidFill>
@@ -12017,7 +11587,7 @@
               </a:rPr>
               <a:t>Indicadores que falam de “% de domicílios” precisam ser divididos por domicílios — não por pessoas. A unidade estava trocada.</a:t>
             </a:r>
-            <a:endParaRPr lang="en-US" sz="1250" dirty="0"/>
+            <a:endParaRPr lang="pt-BR" sz="1250" noProof="0" dirty="0"/>
           </a:p>
         </p:txBody>
       </p:sp>
@@ -12045,6 +11615,13 @@
             <a:prstDash val="solid"/>
           </a:ln>
         </p:spPr>
+        <p:txBody>
+          <a:bodyPr/>
+          <a:lstStyle/>
+          <a:p>
+            <a:endParaRPr lang="pt-BR" noProof="0" dirty="0"/>
+          </a:p>
+        </p:txBody>
       </p:sp>
       <p:sp>
         <p:nvSpPr>
@@ -12065,6 +11642,13 @@
           </a:solidFill>
           <a:ln/>
         </p:spPr>
+        <p:txBody>
+          <a:bodyPr/>
+          <a:lstStyle/>
+          <a:p>
+            <a:endParaRPr lang="pt-BR" noProof="0" dirty="0"/>
+          </a:p>
+        </p:txBody>
       </p:sp>
       <p:sp>
         <p:nvSpPr>
@@ -12087,11 +11671,11 @@
           <a:bodyPr wrap="square" rtlCol="0" anchor="ctr"/>
           <a:lstStyle/>
           <a:p>
-            <a:pPr algn="ctr" indent="0" marL="0">
+            <a:pPr marL="0" indent="0" algn="ctr">
               <a:buNone/>
             </a:pPr>
             <a:r>
-              <a:rPr lang="en-US" sz="2000" b="1" dirty="0">
+              <a:rPr lang="pt-BR" sz="2000" b="1" noProof="0" dirty="0">
                 <a:solidFill>
                   <a:srgbClr val="FFFFFF"/>
                 </a:solidFill>
@@ -12101,7 +11685,7 @@
               </a:rPr>
               <a:t>2</a:t>
             </a:r>
-            <a:endParaRPr lang="en-US" sz="2000" dirty="0"/>
+            <a:endParaRPr lang="pt-BR" sz="2000" noProof="0" dirty="0"/>
           </a:p>
         </p:txBody>
       </p:sp>
@@ -12126,11 +11710,11 @@
           <a:bodyPr wrap="square" lIns="0" tIns="0" rIns="0" bIns="0" rtlCol="0" anchor="ctr"/>
           <a:lstStyle/>
           <a:p>
-            <a:pPr indent="0" marL="0">
+            <a:pPr marL="0" indent="0">
               <a:buNone/>
             </a:pPr>
             <a:r>
-              <a:rPr lang="en-US" sz="1500" b="1" dirty="0">
+              <a:rPr lang="pt-BR" sz="1500" b="1" noProof="0" dirty="0">
                 <a:solidFill>
                   <a:srgbClr val="1E2A36"/>
                 </a:solidFill>
@@ -12140,7 +11724,7 @@
               </a:rPr>
               <a:t>A taxa de analfabetismo usava um denominador que não fechava (V00901 / V00900)</a:t>
             </a:r>
-            <a:endParaRPr lang="en-US" sz="1500" dirty="0"/>
+            <a:endParaRPr lang="pt-BR" sz="1500" noProof="0" dirty="0"/>
           </a:p>
         </p:txBody>
       </p:sp>
@@ -12165,14 +11749,14 @@
           <a:bodyPr wrap="square" lIns="0" tIns="0" rIns="0" bIns="0" rtlCol="0" anchor="ctr"/>
           <a:lstStyle/>
           <a:p>
-            <a:pPr indent="0" marL="0">
+            <a:pPr marL="0" indent="0">
               <a:lnSpc>
                 <a:spcPct val="100000"/>
               </a:lnSpc>
               <a:buNone/>
             </a:pPr>
             <a:r>
-              <a:rPr lang="en-US" sz="1250" dirty="0">
+              <a:rPr lang="pt-BR" sz="1250" noProof="0" dirty="0">
                 <a:solidFill>
                   <a:srgbClr val="1E2A36"/>
                 </a:solidFill>
@@ -12182,82 +11766,7 @@
               </a:rPr>
               <a:t>Dividia analfabetos por alfabetizados (uma razão), não pelo total de pessoas 15+. Produzia “taxas” acima de 100% — matematicamente impossíveis.</a:t>
             </a:r>
-            <a:endParaRPr lang="en-US" sz="1250" dirty="0"/>
-          </a:p>
-        </p:txBody>
-      </p:sp>
-      <p:sp>
-        <p:nvSpPr>
-          <p:cNvPr id="15" name="Shape 13"/>
-          <p:cNvSpPr/>
-          <p:nvPr/>
-        </p:nvSpPr>
-        <p:spPr>
-          <a:xfrm>
-            <a:off x="457200" y="4370832"/>
-            <a:ext cx="8229600" cy="548640"/>
-          </a:xfrm>
-          <a:prstGeom prst="roundRect">
-            <a:avLst>
-              <a:gd name="adj" fmla="val 13333"/>
-            </a:avLst>
-          </a:prstGeom>
-          <a:solidFill>
-            <a:srgbClr val="0B2447"/>
-          </a:solidFill>
-          <a:ln/>
-        </p:spPr>
-      </p:sp>
-      <p:sp>
-        <p:nvSpPr>
-          <p:cNvPr id="16" name="Text 14"/>
-          <p:cNvSpPr/>
-          <p:nvPr/>
-        </p:nvSpPr>
-        <p:spPr>
-          <a:xfrm>
-            <a:off x="457200" y="4370832"/>
-            <a:ext cx="8229600" cy="548640"/>
-          </a:xfrm>
-          <a:prstGeom prst="rect">
-            <a:avLst/>
-          </a:prstGeom>
-          <a:noFill/>
-          <a:ln/>
-        </p:spPr>
-        <p:txBody>
-          <a:bodyPr wrap="square" lIns="0" tIns="0" rIns="0" bIns="0" rtlCol="0" anchor="ctr"/>
-          <a:lstStyle/>
-          <a:p>
-            <a:pPr algn="ctr" indent="0" marL="0">
-              <a:buNone/>
-            </a:pPr>
-            <a:r>
-              <a:rPr lang="en-US" sz="1300" b="1" dirty="0">
-                <a:solidFill>
-                  <a:srgbClr val="2A9D8F"/>
-                </a:solidFill>
-                <a:latin typeface="Calibri" pitchFamily="34" charset="0"/>
-                <a:ea typeface="Calibri" pitchFamily="34" charset="-122"/>
-                <a:cs typeface="Calibri" pitchFamily="34" charset="-120"/>
-              </a:rPr>
-              <a:t>Importante:  </a:t>
-            </a:r>
-            <a:pPr algn="ctr" indent="0" marL="0">
-              <a:buNone/>
-            </a:pPr>
-            <a:r>
-              <a:rPr lang="en-US" sz="1300" dirty="0">
-                <a:solidFill>
-                  <a:srgbClr val="FFFFFF"/>
-                </a:solidFill>
-                <a:latin typeface="Calibri" pitchFamily="34" charset="0"/>
-                <a:ea typeface="Calibri" pitchFamily="34" charset="-122"/>
-                <a:cs typeface="Calibri" pitchFamily="34" charset="-120"/>
-              </a:rPr>
-              <a:t>os dados brutos do IBGE não mudaram. O que mudou foi como calculamos os indicadores a partir deles.</a:t>
-            </a:r>
-            <a:endParaRPr lang="en-US" sz="1300" dirty="0"/>
+            <a:endParaRPr lang="pt-BR" sz="1250" noProof="0" dirty="0"/>
           </a:p>
         </p:txBody>
       </p:sp>
@@ -12277,6 +11786,7 @@
         <a:solidFill>
           <a:srgbClr val="FFFFFF"/>
         </a:solidFill>
+        <a:effectLst/>
       </p:bgPr>
     </p:bg>
     <p:spTree>
@@ -12314,11 +11824,11 @@
           <a:bodyPr wrap="square" lIns="0" tIns="0" rIns="0" bIns="0" rtlCol="0" anchor="ctr"/>
           <a:lstStyle/>
           <a:p>
-            <a:pPr indent="0" marL="0">
+            <a:pPr marL="0" indent="0">
               <a:buNone/>
             </a:pPr>
             <a:r>
-              <a:rPr lang="en-US" sz="1100" b="1" spc="200" kern="0" dirty="0">
+              <a:rPr lang="pt-BR" sz="1100" b="1" kern="0" spc="200" noProof="0" dirty="0">
                 <a:solidFill>
                   <a:srgbClr val="1C7293"/>
                 </a:solidFill>
@@ -12328,7 +11838,7 @@
               </a:rPr>
               <a:t>VISÃO GERAL</a:t>
             </a:r>
-            <a:endParaRPr lang="en-US" sz="1100" dirty="0"/>
+            <a:endParaRPr lang="pt-BR" sz="1100" noProof="0" dirty="0"/>
           </a:p>
         </p:txBody>
       </p:sp>
@@ -12353,11 +11863,11 @@
           <a:bodyPr wrap="square" lIns="0" tIns="0" rIns="0" bIns="0" rtlCol="0" anchor="ctr"/>
           <a:lstStyle/>
           <a:p>
-            <a:pPr indent="0" marL="0">
+            <a:pPr marL="0" indent="0">
               <a:buNone/>
             </a:pPr>
             <a:r>
-              <a:rPr lang="en-US" sz="2500" b="1" dirty="0">
+              <a:rPr lang="pt-BR" sz="2500" b="1" noProof="0" dirty="0">
                 <a:solidFill>
                   <a:srgbClr val="1E2A36"/>
                 </a:solidFill>
@@ -12367,7 +11877,7 @@
               </a:rPr>
               <a:t>As 5 correções desta revisão</a:t>
             </a:r>
-            <a:endParaRPr lang="en-US" sz="2500" dirty="0"/>
+            <a:endParaRPr lang="pt-BR" sz="2500" noProof="0" dirty="0"/>
           </a:p>
         </p:txBody>
       </p:sp>
@@ -12395,13 +11905,20 @@
             <a:prstDash val="solid"/>
           </a:ln>
           <a:effectLst>
-            <a:outerShdw sx="100000" sy="100000" kx="0" ky="0" algn="bl" rotWithShape="0" blurRad="88900" dist="38100" dir="8100000">
+            <a:outerShdw blurRad="88900" dist="38100" dir="8100000" algn="bl" rotWithShape="0">
               <a:srgbClr val="000000">
                 <a:alpha val="15000"/>
               </a:srgbClr>
             </a:outerShdw>
           </a:effectLst>
         </p:spPr>
+        <p:txBody>
+          <a:bodyPr/>
+          <a:lstStyle/>
+          <a:p>
+            <a:endParaRPr lang="pt-BR" noProof="0" dirty="0"/>
+          </a:p>
+        </p:txBody>
       </p:sp>
       <p:sp>
         <p:nvSpPr>
@@ -12422,6 +11939,13 @@
           </a:solidFill>
           <a:ln/>
         </p:spPr>
+        <p:txBody>
+          <a:bodyPr/>
+          <a:lstStyle/>
+          <a:p>
+            <a:endParaRPr lang="pt-BR" noProof="0" dirty="0"/>
+          </a:p>
+        </p:txBody>
       </p:sp>
       <p:sp>
         <p:nvSpPr>
@@ -12444,11 +11968,11 @@
           <a:bodyPr wrap="square" rtlCol="0" anchor="ctr"/>
           <a:lstStyle/>
           <a:p>
-            <a:pPr algn="ctr" indent="0" marL="0">
+            <a:pPr marL="0" indent="0" algn="ctr">
               <a:buNone/>
             </a:pPr>
             <a:r>
-              <a:rPr lang="en-US" sz="1600" b="1" dirty="0">
+              <a:rPr lang="pt-BR" sz="1600" b="1" noProof="0" dirty="0">
                 <a:solidFill>
                   <a:srgbClr val="FFFFFF"/>
                 </a:solidFill>
@@ -12458,7 +11982,7 @@
               </a:rPr>
               <a:t>1</a:t>
             </a:r>
-            <a:endParaRPr lang="en-US" sz="1600" dirty="0"/>
+            <a:endParaRPr lang="pt-BR" sz="1600" noProof="0" dirty="0"/>
           </a:p>
         </p:txBody>
       </p:sp>
@@ -12483,11 +12007,11 @@
           <a:bodyPr wrap="square" lIns="0" tIns="0" rIns="0" bIns="0" rtlCol="0" anchor="ctr"/>
           <a:lstStyle/>
           <a:p>
-            <a:pPr indent="0" marL="0">
+            <a:pPr marL="0" indent="0">
               <a:buNone/>
             </a:pPr>
             <a:r>
-              <a:rPr lang="en-US" sz="1400" b="1" dirty="0">
+              <a:rPr lang="pt-BR" sz="1400" b="1" noProof="0" dirty="0">
                 <a:solidFill>
                   <a:srgbClr val="1E2A36"/>
                 </a:solidFill>
@@ -12497,7 +12021,7 @@
               </a:rPr>
               <a:t>Denominador domiciliar</a:t>
             </a:r>
-            <a:endParaRPr lang="en-US" sz="1400" dirty="0"/>
+            <a:endParaRPr lang="pt-BR" sz="1400" noProof="0" dirty="0"/>
           </a:p>
         </p:txBody>
       </p:sp>
@@ -12522,14 +12046,14 @@
           <a:bodyPr wrap="square" lIns="0" tIns="0" rIns="0" bIns="0" rtlCol="0" anchor="ctr"/>
           <a:lstStyle/>
           <a:p>
-            <a:pPr indent="0" marL="0">
+            <a:pPr marL="0" indent="0">
               <a:lnSpc>
                 <a:spcPct val="100000"/>
               </a:lnSpc>
               <a:buNone/>
             </a:pPr>
             <a:r>
-              <a:rPr lang="en-US" sz="1150" dirty="0">
+              <a:rPr lang="pt-BR" sz="1150" noProof="0" dirty="0">
                 <a:solidFill>
                   <a:srgbClr val="5B6B7A"/>
                 </a:solidFill>
@@ -12539,7 +12063,7 @@
               </a:rPr>
               <a:t>V01042 (pessoas) → V00001 (domicílios particulares permanentes ocupados).</a:t>
             </a:r>
-            <a:endParaRPr lang="en-US" sz="1150" dirty="0"/>
+            <a:endParaRPr lang="pt-BR" sz="1150" noProof="0" dirty="0"/>
           </a:p>
         </p:txBody>
       </p:sp>
@@ -12567,13 +12091,20 @@
             <a:prstDash val="solid"/>
           </a:ln>
           <a:effectLst>
-            <a:outerShdw sx="100000" sy="100000" kx="0" ky="0" algn="bl" rotWithShape="0" blurRad="88900" dist="38100" dir="8100000">
+            <a:outerShdw blurRad="88900" dist="38100" dir="8100000" algn="bl" rotWithShape="0">
               <a:srgbClr val="000000">
                 <a:alpha val="15000"/>
               </a:srgbClr>
             </a:outerShdw>
           </a:effectLst>
         </p:spPr>
+        <p:txBody>
+          <a:bodyPr/>
+          <a:lstStyle/>
+          <a:p>
+            <a:endParaRPr lang="pt-BR" noProof="0" dirty="0"/>
+          </a:p>
+        </p:txBody>
       </p:sp>
       <p:sp>
         <p:nvSpPr>
@@ -12594,6 +12125,13 @@
           </a:solidFill>
           <a:ln/>
         </p:spPr>
+        <p:txBody>
+          <a:bodyPr/>
+          <a:lstStyle/>
+          <a:p>
+            <a:endParaRPr lang="pt-BR" noProof="0" dirty="0"/>
+          </a:p>
+        </p:txBody>
       </p:sp>
       <p:sp>
         <p:nvSpPr>
@@ -12616,11 +12154,11 @@
           <a:bodyPr wrap="square" rtlCol="0" anchor="ctr"/>
           <a:lstStyle/>
           <a:p>
-            <a:pPr algn="ctr" indent="0" marL="0">
+            <a:pPr marL="0" indent="0" algn="ctr">
               <a:buNone/>
             </a:pPr>
             <a:r>
-              <a:rPr lang="en-US" sz="1600" b="1" dirty="0">
+              <a:rPr lang="pt-BR" sz="1600" b="1" noProof="0" dirty="0">
                 <a:solidFill>
                   <a:srgbClr val="FFFFFF"/>
                 </a:solidFill>
@@ -12630,7 +12168,7 @@
               </a:rPr>
               <a:t>2</a:t>
             </a:r>
-            <a:endParaRPr lang="en-US" sz="1600" dirty="0"/>
+            <a:endParaRPr lang="pt-BR" sz="1600" noProof="0" dirty="0"/>
           </a:p>
         </p:txBody>
       </p:sp>
@@ -12655,11 +12193,11 @@
           <a:bodyPr wrap="square" lIns="0" tIns="0" rIns="0" bIns="0" rtlCol="0" anchor="ctr"/>
           <a:lstStyle/>
           <a:p>
-            <a:pPr indent="0" marL="0">
+            <a:pPr marL="0" indent="0">
               <a:buNone/>
             </a:pPr>
             <a:r>
-              <a:rPr lang="en-US" sz="1400" b="1" dirty="0">
+              <a:rPr lang="pt-BR" sz="1400" b="1" noProof="0" dirty="0">
                 <a:solidFill>
                   <a:srgbClr val="1E2A36"/>
                 </a:solidFill>
@@ -12669,7 +12207,7 @@
               </a:rPr>
               <a:t>Taxa de analfabetismo</a:t>
             </a:r>
-            <a:endParaRPr lang="en-US" sz="1400" dirty="0"/>
+            <a:endParaRPr lang="pt-BR" sz="1400" noProof="0" dirty="0"/>
           </a:p>
         </p:txBody>
       </p:sp>
@@ -12694,14 +12232,14 @@
           <a:bodyPr wrap="square" lIns="0" tIns="0" rIns="0" bIns="0" rtlCol="0" anchor="ctr"/>
           <a:lstStyle/>
           <a:p>
-            <a:pPr indent="0" marL="0">
+            <a:pPr marL="0" indent="0">
               <a:lnSpc>
                 <a:spcPct val="100000"/>
               </a:lnSpc>
               <a:buNone/>
             </a:pPr>
             <a:r>
-              <a:rPr lang="en-US" sz="1150" dirty="0">
+              <a:rPr lang="pt-BR" sz="1150" noProof="0" dirty="0">
                 <a:solidFill>
                   <a:srgbClr val="5B6B7A"/>
                 </a:solidFill>
@@ -12711,7 +12249,7 @@
               </a:rPr>
               <a:t>V00901/V00900 → V00901/(V00900+V00901): taxa válida em [0,1].</a:t>
             </a:r>
-            <a:endParaRPr lang="en-US" sz="1150" dirty="0"/>
+            <a:endParaRPr lang="pt-BR" sz="1150" noProof="0" dirty="0"/>
           </a:p>
         </p:txBody>
       </p:sp>
@@ -12739,13 +12277,20 @@
             <a:prstDash val="solid"/>
           </a:ln>
           <a:effectLst>
-            <a:outerShdw sx="100000" sy="100000" kx="0" ky="0" algn="bl" rotWithShape="0" blurRad="88900" dist="38100" dir="8100000">
+            <a:outerShdw blurRad="88900" dist="38100" dir="8100000" algn="bl" rotWithShape="0">
               <a:srgbClr val="000000">
                 <a:alpha val="15000"/>
               </a:srgbClr>
             </a:outerShdw>
           </a:effectLst>
         </p:spPr>
+        <p:txBody>
+          <a:bodyPr/>
+          <a:lstStyle/>
+          <a:p>
+            <a:endParaRPr lang="pt-BR" noProof="0" dirty="0"/>
+          </a:p>
+        </p:txBody>
       </p:sp>
       <p:sp>
         <p:nvSpPr>
@@ -12766,6 +12311,13 @@
           </a:solidFill>
           <a:ln/>
         </p:spPr>
+        <p:txBody>
+          <a:bodyPr/>
+          <a:lstStyle/>
+          <a:p>
+            <a:endParaRPr lang="pt-BR" noProof="0" dirty="0"/>
+          </a:p>
+        </p:txBody>
       </p:sp>
       <p:sp>
         <p:nvSpPr>
@@ -12788,11 +12340,11 @@
           <a:bodyPr wrap="square" rtlCol="0" anchor="ctr"/>
           <a:lstStyle/>
           <a:p>
-            <a:pPr algn="ctr" indent="0" marL="0">
+            <a:pPr marL="0" indent="0" algn="ctr">
               <a:buNone/>
             </a:pPr>
             <a:r>
-              <a:rPr lang="en-US" sz="1600" b="1" dirty="0">
+              <a:rPr lang="pt-BR" sz="1600" b="1" noProof="0" dirty="0">
                 <a:solidFill>
                   <a:srgbClr val="FFFFFF"/>
                 </a:solidFill>
@@ -12802,7 +12354,7 @@
               </a:rPr>
               <a:t>3</a:t>
             </a:r>
-            <a:endParaRPr lang="en-US" sz="1600" dirty="0"/>
+            <a:endParaRPr lang="pt-BR" sz="1600" noProof="0" dirty="0"/>
           </a:p>
         </p:txBody>
       </p:sp>
@@ -12827,11 +12379,11 @@
           <a:bodyPr wrap="square" lIns="0" tIns="0" rIns="0" bIns="0" rtlCol="0" anchor="ctr"/>
           <a:lstStyle/>
           <a:p>
-            <a:pPr indent="0" marL="0">
+            <a:pPr marL="0" indent="0">
               <a:buNone/>
             </a:pPr>
             <a:r>
-              <a:rPr lang="en-US" sz="1400" b="1" dirty="0">
+              <a:rPr lang="pt-BR" sz="1400" b="1" noProof="0" dirty="0">
                 <a:solidFill>
                   <a:srgbClr val="1E2A36"/>
                 </a:solidFill>
@@ -12841,7 +12393,7 @@
               </a:rPr>
               <a:t>Razão de moradores</a:t>
             </a:r>
-            <a:endParaRPr lang="en-US" sz="1400" dirty="0"/>
+            <a:endParaRPr lang="pt-BR" sz="1400" noProof="0" dirty="0"/>
           </a:p>
         </p:txBody>
       </p:sp>
@@ -12866,14 +12418,14 @@
           <a:bodyPr wrap="square" lIns="0" tIns="0" rIns="0" bIns="0" rtlCol="0" anchor="ctr"/>
           <a:lstStyle/>
           <a:p>
-            <a:pPr indent="0" marL="0">
+            <a:pPr marL="0" indent="0">
               <a:lnSpc>
                 <a:spcPct val="100000"/>
               </a:lnSpc>
               <a:buNone/>
             </a:pPr>
             <a:r>
-              <a:rPr lang="en-US" sz="1150" dirty="0">
+              <a:rPr lang="pt-BR" sz="1150" noProof="0" dirty="0">
                 <a:solidFill>
                   <a:srgbClr val="5B6B7A"/>
                 </a:solidFill>
@@ -12883,7 +12435,7 @@
               </a:rPr>
               <a:t>Denominador (V00001+V00002): reproduz o V0005 oficial do IBGE.</a:t>
             </a:r>
-            <a:endParaRPr lang="en-US" sz="1150" dirty="0"/>
+            <a:endParaRPr lang="pt-BR" sz="1150" noProof="0" dirty="0"/>
           </a:p>
         </p:txBody>
       </p:sp>
@@ -12911,13 +12463,20 @@
             <a:prstDash val="solid"/>
           </a:ln>
           <a:effectLst>
-            <a:outerShdw sx="100000" sy="100000" kx="0" ky="0" algn="bl" rotWithShape="0" blurRad="88900" dist="38100" dir="8100000">
+            <a:outerShdw blurRad="88900" dist="38100" dir="8100000" algn="bl" rotWithShape="0">
               <a:srgbClr val="000000">
                 <a:alpha val="15000"/>
               </a:srgbClr>
             </a:outerShdw>
           </a:effectLst>
         </p:spPr>
+        <p:txBody>
+          <a:bodyPr/>
+          <a:lstStyle/>
+          <a:p>
+            <a:endParaRPr lang="pt-BR" noProof="0" dirty="0"/>
+          </a:p>
+        </p:txBody>
       </p:sp>
       <p:sp>
         <p:nvSpPr>
@@ -12938,6 +12497,13 @@
           </a:solidFill>
           <a:ln/>
         </p:spPr>
+        <p:txBody>
+          <a:bodyPr/>
+          <a:lstStyle/>
+          <a:p>
+            <a:endParaRPr lang="pt-BR" noProof="0" dirty="0"/>
+          </a:p>
+        </p:txBody>
       </p:sp>
       <p:sp>
         <p:nvSpPr>
@@ -12960,11 +12526,11 @@
           <a:bodyPr wrap="square" rtlCol="0" anchor="ctr"/>
           <a:lstStyle/>
           <a:p>
-            <a:pPr algn="ctr" indent="0" marL="0">
+            <a:pPr marL="0" indent="0" algn="ctr">
               <a:buNone/>
             </a:pPr>
             <a:r>
-              <a:rPr lang="en-US" sz="1600" b="1" dirty="0">
+              <a:rPr lang="pt-BR" sz="1600" b="1" noProof="0" dirty="0">
                 <a:solidFill>
                   <a:srgbClr val="FFFFFF"/>
                 </a:solidFill>
@@ -12974,7 +12540,7 @@
               </a:rPr>
               <a:t>4</a:t>
             </a:r>
-            <a:endParaRPr lang="en-US" sz="1600" dirty="0"/>
+            <a:endParaRPr lang="pt-BR" sz="1600" noProof="0" dirty="0"/>
           </a:p>
         </p:txBody>
       </p:sp>
@@ -12999,11 +12565,11 @@
           <a:bodyPr wrap="square" lIns="0" tIns="0" rIns="0" bIns="0" rtlCol="0" anchor="ctr"/>
           <a:lstStyle/>
           <a:p>
-            <a:pPr indent="0" marL="0">
+            <a:pPr marL="0" indent="0">
               <a:buNone/>
             </a:pPr>
             <a:r>
-              <a:rPr lang="en-US" sz="1400" b="1" dirty="0">
+              <a:rPr lang="pt-BR" sz="1400" b="1" noProof="0" dirty="0">
                 <a:solidFill>
                   <a:srgbClr val="1E2A36"/>
                 </a:solidFill>
@@ -13011,9 +12577,20 @@
                 <a:ea typeface="Georgia" pitchFamily="34" charset="-122"/>
                 <a:cs typeface="Georgia" pitchFamily="34" charset="-120"/>
               </a:rPr>
-              <a:t>Regra Dados_sig</a:t>
-            </a:r>
-            <a:endParaRPr lang="en-US" sz="1400" dirty="0"/>
+              <a:t>Regra </a:t>
+            </a:r>
+            <a:r>
+              <a:rPr lang="pt-BR" sz="1400" b="1" noProof="0" dirty="0" err="1">
+                <a:solidFill>
+                  <a:srgbClr val="1E2A36"/>
+                </a:solidFill>
+                <a:latin typeface="Georgia" pitchFamily="34" charset="0"/>
+                <a:ea typeface="Georgia" pitchFamily="34" charset="-122"/>
+                <a:cs typeface="Georgia" pitchFamily="34" charset="-120"/>
+              </a:rPr>
+              <a:t>Dados_sig</a:t>
+            </a:r>
+            <a:endParaRPr lang="pt-BR" sz="1400" noProof="0" dirty="0"/>
           </a:p>
         </p:txBody>
       </p:sp>
@@ -13038,14 +12615,14 @@
           <a:bodyPr wrap="square" lIns="0" tIns="0" rIns="0" bIns="0" rtlCol="0" anchor="ctr"/>
           <a:lstStyle/>
           <a:p>
-            <a:pPr indent="0" marL="0">
+            <a:pPr marL="0" indent="0">
               <a:lnSpc>
                 <a:spcPct val="100000"/>
               </a:lnSpc>
               <a:buNone/>
             </a:pPr>
             <a:r>
-              <a:rPr lang="en-US" sz="1150" dirty="0">
+              <a:rPr lang="pt-BR" sz="1150" noProof="0" dirty="0">
                 <a:solidFill>
                   <a:srgbClr val="5B6B7A"/>
                 </a:solidFill>
@@ -13053,9 +12630,31 @@
                 <a:ea typeface="Calibri" pitchFamily="34" charset="-122"/>
                 <a:cs typeface="Calibri" pitchFamily="34" charset="-120"/>
               </a:rPr>
-              <a:t>Elegibilidade reancorada em v0001 e V00001 (não mais em V01042).</a:t>
-            </a:r>
-            <a:endParaRPr lang="en-US" sz="1150" dirty="0"/>
+              <a:t>Elegibilidade </a:t>
+            </a:r>
+            <a:r>
+              <a:rPr lang="pt-BR" sz="1150" noProof="0" dirty="0" err="1">
+                <a:solidFill>
+                  <a:srgbClr val="5B6B7A"/>
+                </a:solidFill>
+                <a:latin typeface="Calibri" pitchFamily="34" charset="0"/>
+                <a:ea typeface="Calibri" pitchFamily="34" charset="-122"/>
+                <a:cs typeface="Calibri" pitchFamily="34" charset="-120"/>
+              </a:rPr>
+              <a:t>reancorada</a:t>
+            </a:r>
+            <a:r>
+              <a:rPr lang="pt-BR" sz="1150" noProof="0" dirty="0">
+                <a:solidFill>
+                  <a:srgbClr val="5B6B7A"/>
+                </a:solidFill>
+                <a:latin typeface="Calibri" pitchFamily="34" charset="0"/>
+                <a:ea typeface="Calibri" pitchFamily="34" charset="-122"/>
+                <a:cs typeface="Calibri" pitchFamily="34" charset="-120"/>
+              </a:rPr>
+              <a:t> em v0001 e V00001 (não mais em V01042).</a:t>
+            </a:r>
+            <a:endParaRPr lang="pt-BR" sz="1150" noProof="0" dirty="0"/>
           </a:p>
         </p:txBody>
       </p:sp>
@@ -13083,13 +12682,20 @@
             <a:prstDash val="solid"/>
           </a:ln>
           <a:effectLst>
-            <a:outerShdw sx="100000" sy="100000" kx="0" ky="0" algn="bl" rotWithShape="0" blurRad="88900" dist="38100" dir="8100000">
+            <a:outerShdw blurRad="88900" dist="38100" dir="8100000" algn="bl" rotWithShape="0">
               <a:srgbClr val="000000">
                 <a:alpha val="15000"/>
               </a:srgbClr>
             </a:outerShdw>
           </a:effectLst>
         </p:spPr>
+        <p:txBody>
+          <a:bodyPr/>
+          <a:lstStyle/>
+          <a:p>
+            <a:endParaRPr lang="pt-BR" noProof="0" dirty="0"/>
+          </a:p>
+        </p:txBody>
       </p:sp>
       <p:sp>
         <p:nvSpPr>
@@ -13110,6 +12716,13 @@
           </a:solidFill>
           <a:ln/>
         </p:spPr>
+        <p:txBody>
+          <a:bodyPr/>
+          <a:lstStyle/>
+          <a:p>
+            <a:endParaRPr lang="pt-BR" noProof="0" dirty="0"/>
+          </a:p>
+        </p:txBody>
       </p:sp>
       <p:sp>
         <p:nvSpPr>
@@ -13132,11 +12745,11 @@
           <a:bodyPr wrap="square" rtlCol="0" anchor="ctr"/>
           <a:lstStyle/>
           <a:p>
-            <a:pPr algn="ctr" indent="0" marL="0">
+            <a:pPr marL="0" indent="0" algn="ctr">
               <a:buNone/>
             </a:pPr>
             <a:r>
-              <a:rPr lang="en-US" sz="1500" b="1" dirty="0">
+              <a:rPr lang="pt-BR" sz="1500" b="1" noProof="0" dirty="0">
                 <a:solidFill>
                   <a:srgbClr val="FFFFFF"/>
                 </a:solidFill>
@@ -13146,7 +12759,7 @@
               </a:rPr>
               <a:t>5</a:t>
             </a:r>
-            <a:endParaRPr lang="en-US" sz="1500" dirty="0"/>
+            <a:endParaRPr lang="pt-BR" sz="1500" noProof="0" dirty="0"/>
           </a:p>
         </p:txBody>
       </p:sp>
@@ -13171,11 +12784,11 @@
           <a:bodyPr wrap="square" lIns="0" tIns="0" rIns="0" bIns="0" rtlCol="0" anchor="ctr"/>
           <a:lstStyle/>
           <a:p>
-            <a:pPr indent="0" marL="0">
+            <a:pPr marL="0" indent="0">
               <a:buNone/>
             </a:pPr>
             <a:r>
-              <a:rPr lang="en-US" sz="1250" b="1" dirty="0">
+              <a:rPr lang="pt-BR" sz="1250" b="1" noProof="0" dirty="0">
                 <a:solidFill>
                   <a:srgbClr val="1E2A36"/>
                 </a:solidFill>
@@ -13185,11 +12798,8 @@
               </a:rPr>
               <a:t>Variáveis de esgoto confirmadas:  </a:t>
             </a:r>
-            <a:pPr indent="0" marL="0">
-              <a:buNone/>
-            </a:pPr>
-            <a:r>
-              <a:rPr lang="en-US" sz="1250" dirty="0">
+            <a:r>
+              <a:rPr lang="pt-BR" sz="1250" noProof="0" dirty="0">
                 <a:solidFill>
                   <a:srgbClr val="5B6B7A"/>
                 </a:solidFill>
@@ -13199,7 +12809,7 @@
               </a:rPr>
               <a:t>V00312–V00316 (destino do esgoto). O bloco V00249–V00253 é tipologia de habitação, não esgoto.</a:t>
             </a:r>
-            <a:endParaRPr lang="en-US" sz="1250" dirty="0"/>
+            <a:endParaRPr lang="pt-BR" sz="1250" noProof="0" dirty="0"/>
           </a:p>
         </p:txBody>
       </p:sp>
@@ -13219,6 +12829,7 @@
         <a:solidFill>
           <a:srgbClr val="FFFFFF"/>
         </a:solidFill>
+        <a:effectLst/>
       </p:bgPr>
     </p:bg>
     <p:spTree>
@@ -13256,11 +12867,11 @@
           <a:bodyPr wrap="square" lIns="0" tIns="0" rIns="0" bIns="0" rtlCol="0" anchor="ctr"/>
           <a:lstStyle/>
           <a:p>
-            <a:pPr indent="0" marL="0">
+            <a:pPr marL="0" indent="0">
               <a:buNone/>
             </a:pPr>
             <a:r>
-              <a:rPr lang="en-US" sz="1100" b="1" spc="200" kern="0" dirty="0">
+              <a:rPr lang="pt-BR" sz="1100" b="1" kern="0" spc="200" noProof="0" dirty="0">
                 <a:solidFill>
                   <a:srgbClr val="19599A"/>
                 </a:solidFill>
@@ -13270,7 +12881,7 @@
               </a:rPr>
               <a:t>CORREÇÃO 1</a:t>
             </a:r>
-            <a:endParaRPr lang="en-US" sz="1100" dirty="0"/>
+            <a:endParaRPr lang="pt-BR" sz="1100" noProof="0" dirty="0"/>
           </a:p>
         </p:txBody>
       </p:sp>
@@ -13295,11 +12906,11 @@
           <a:bodyPr wrap="square" lIns="0" tIns="0" rIns="0" bIns="0" rtlCol="0" anchor="ctr"/>
           <a:lstStyle/>
           <a:p>
-            <a:pPr indent="0" marL="0">
+            <a:pPr marL="0" indent="0">
               <a:buNone/>
             </a:pPr>
             <a:r>
-              <a:rPr lang="en-US" sz="2500" b="1" dirty="0">
+              <a:rPr lang="pt-BR" sz="2500" b="1" noProof="0" dirty="0">
                 <a:solidFill>
                   <a:srgbClr val="1E2A36"/>
                 </a:solidFill>
@@ -13309,7 +12920,7 @@
               </a:rPr>
               <a:t>Denominador: pessoas → domicílios</a:t>
             </a:r>
-            <a:endParaRPr lang="en-US" sz="2500" dirty="0"/>
+            <a:endParaRPr lang="pt-BR" sz="2500" noProof="0" dirty="0"/>
           </a:p>
         </p:txBody>
       </p:sp>
@@ -13337,13 +12948,20 @@
             <a:prstDash val="solid"/>
           </a:ln>
           <a:effectLst>
-            <a:outerShdw sx="100000" sy="100000" kx="0" ky="0" algn="bl" rotWithShape="0" blurRad="88900" dist="38100" dir="8100000">
+            <a:outerShdw blurRad="88900" dist="38100" dir="8100000" algn="bl" rotWithShape="0">
               <a:srgbClr val="000000">
                 <a:alpha val="15000"/>
               </a:srgbClr>
             </a:outerShdw>
           </a:effectLst>
         </p:spPr>
+        <p:txBody>
+          <a:bodyPr/>
+          <a:lstStyle/>
+          <a:p>
+            <a:endParaRPr lang="pt-BR" noProof="0" dirty="0"/>
+          </a:p>
+        </p:txBody>
       </p:sp>
       <p:sp>
         <p:nvSpPr>
@@ -13364,6 +12982,13 @@
           </a:solidFill>
           <a:ln/>
         </p:spPr>
+        <p:txBody>
+          <a:bodyPr/>
+          <a:lstStyle/>
+          <a:p>
+            <a:endParaRPr lang="pt-BR" noProof="0" dirty="0"/>
+          </a:p>
+        </p:txBody>
       </p:sp>
       <p:sp>
         <p:nvSpPr>
@@ -13386,11 +13011,11 @@
           <a:bodyPr wrap="square" lIns="0" tIns="0" rIns="0" bIns="0" rtlCol="0" anchor="ctr"/>
           <a:lstStyle/>
           <a:p>
-            <a:pPr indent="0" marL="0">
+            <a:pPr marL="0" indent="0">
               <a:buNone/>
             </a:pPr>
             <a:r>
-              <a:rPr lang="en-US" sz="1200" b="1" spc="100" kern="0" dirty="0">
+              <a:rPr lang="pt-BR" sz="1200" b="1" kern="0" spc="100" noProof="0" dirty="0">
                 <a:solidFill>
                   <a:srgbClr val="FFFFFF"/>
                 </a:solidFill>
@@ -13400,7 +13025,7 @@
               </a:rPr>
               <a:t>REJEITADO — conta PESSOAS</a:t>
             </a:r>
-            <a:endParaRPr lang="en-US" sz="1200" dirty="0"/>
+            <a:endParaRPr lang="pt-BR" sz="1200" noProof="0" dirty="0"/>
           </a:p>
         </p:txBody>
       </p:sp>
@@ -13425,11 +13050,11 @@
           <a:bodyPr wrap="square" lIns="0" tIns="0" rIns="0" bIns="0" rtlCol="0" anchor="ctr"/>
           <a:lstStyle/>
           <a:p>
-            <a:pPr indent="0" marL="0">
+            <a:pPr marL="0" indent="0">
               <a:buNone/>
             </a:pPr>
             <a:r>
-              <a:rPr lang="en-US" sz="2000" b="1" dirty="0">
+              <a:rPr lang="pt-BR" sz="2000" b="1" noProof="0" dirty="0">
                 <a:solidFill>
                   <a:srgbClr val="1E2A36"/>
                 </a:solidFill>
@@ -13439,7 +13064,7 @@
               </a:rPr>
               <a:t>V01042</a:t>
             </a:r>
-            <a:endParaRPr lang="en-US" sz="2000" dirty="0"/>
+            <a:endParaRPr lang="pt-BR" sz="2000" noProof="0" dirty="0"/>
           </a:p>
         </p:txBody>
       </p:sp>
@@ -13464,14 +13089,14 @@
           <a:bodyPr wrap="square" lIns="0" tIns="0" rIns="0" bIns="0" rtlCol="0" anchor="ctr"/>
           <a:lstStyle/>
           <a:p>
-            <a:pPr indent="0" marL="0">
+            <a:pPr marL="0" indent="0">
               <a:lnSpc>
                 <a:spcPct val="95000"/>
               </a:lnSpc>
               <a:buNone/>
             </a:pPr>
             <a:r>
-              <a:rPr lang="en-US" sz="1200" dirty="0">
+              <a:rPr lang="pt-BR" sz="1200" noProof="0" dirty="0">
                 <a:solidFill>
                   <a:srgbClr val="1E2A36"/>
                 </a:solidFill>
@@ -13481,7 +13106,7 @@
               </a:rPr>
               <a:t>Pessoas responsáveis pelo domicílio (arquivo Parentesco).</a:t>
             </a:r>
-            <a:endParaRPr lang="en-US" sz="1200" dirty="0"/>
+            <a:endParaRPr lang="pt-BR" sz="1200" noProof="0" dirty="0"/>
           </a:p>
         </p:txBody>
       </p:sp>
@@ -13509,13 +13134,20 @@
             <a:prstDash val="solid"/>
           </a:ln>
           <a:effectLst>
-            <a:outerShdw sx="100000" sy="100000" kx="0" ky="0" algn="bl" rotWithShape="0" blurRad="88900" dist="38100" dir="8100000">
+            <a:outerShdw blurRad="88900" dist="38100" dir="8100000" algn="bl" rotWithShape="0">
               <a:srgbClr val="000000">
                 <a:alpha val="15000"/>
               </a:srgbClr>
             </a:outerShdw>
           </a:effectLst>
         </p:spPr>
+        <p:txBody>
+          <a:bodyPr/>
+          <a:lstStyle/>
+          <a:p>
+            <a:endParaRPr lang="pt-BR" noProof="0" dirty="0"/>
+          </a:p>
+        </p:txBody>
       </p:sp>
       <p:sp>
         <p:nvSpPr>
@@ -13536,6 +13168,13 @@
           </a:solidFill>
           <a:ln/>
         </p:spPr>
+        <p:txBody>
+          <a:bodyPr/>
+          <a:lstStyle/>
+          <a:p>
+            <a:endParaRPr lang="pt-BR" noProof="0" dirty="0"/>
+          </a:p>
+        </p:txBody>
       </p:sp>
       <p:sp>
         <p:nvSpPr>
@@ -13558,11 +13197,11 @@
           <a:bodyPr wrap="square" lIns="0" tIns="0" rIns="0" bIns="0" rtlCol="0" anchor="ctr"/>
           <a:lstStyle/>
           <a:p>
-            <a:pPr indent="0" marL="0">
+            <a:pPr marL="0" indent="0">
               <a:buNone/>
             </a:pPr>
             <a:r>
-              <a:rPr lang="en-US" sz="1200" b="1" spc="100" kern="0" dirty="0">
+              <a:rPr lang="pt-BR" sz="1200" b="1" kern="0" spc="100" noProof="0" dirty="0">
                 <a:solidFill>
                   <a:srgbClr val="FFFFFF"/>
                 </a:solidFill>
@@ -13572,7 +13211,7 @@
               </a:rPr>
               <a:t>ADOTADO — conta DOMICÍLIOS</a:t>
             </a:r>
-            <a:endParaRPr lang="en-US" sz="1200" dirty="0"/>
+            <a:endParaRPr lang="pt-BR" sz="1200" noProof="0" dirty="0"/>
           </a:p>
         </p:txBody>
       </p:sp>
@@ -13597,11 +13236,11 @@
           <a:bodyPr wrap="square" lIns="0" tIns="0" rIns="0" bIns="0" rtlCol="0" anchor="ctr"/>
           <a:lstStyle/>
           <a:p>
-            <a:pPr indent="0" marL="0">
+            <a:pPr marL="0" indent="0">
               <a:buNone/>
             </a:pPr>
             <a:r>
-              <a:rPr lang="en-US" sz="2000" b="1" dirty="0">
+              <a:rPr lang="pt-BR" sz="2000" b="1" noProof="0" dirty="0">
                 <a:solidFill>
                   <a:srgbClr val="1E2A36"/>
                 </a:solidFill>
@@ -13611,7 +13250,7 @@
               </a:rPr>
               <a:t>V00001</a:t>
             </a:r>
-            <a:endParaRPr lang="en-US" sz="2000" dirty="0"/>
+            <a:endParaRPr lang="pt-BR" sz="2000" noProof="0" dirty="0"/>
           </a:p>
         </p:txBody>
       </p:sp>
@@ -13636,14 +13275,14 @@
           <a:bodyPr wrap="square" lIns="0" tIns="0" rIns="0" bIns="0" rtlCol="0" anchor="ctr"/>
           <a:lstStyle/>
           <a:p>
-            <a:pPr indent="0" marL="0">
+            <a:pPr marL="0" indent="0">
               <a:lnSpc>
                 <a:spcPct val="95000"/>
               </a:lnSpc>
               <a:buNone/>
             </a:pPr>
             <a:r>
-              <a:rPr lang="en-US" sz="1200" dirty="0">
+              <a:rPr lang="pt-BR" sz="1200" noProof="0" dirty="0">
                 <a:solidFill>
                   <a:srgbClr val="1E2A36"/>
                 </a:solidFill>
@@ -13653,7 +13292,7 @@
               </a:rPr>
               <a:t>Domicílios Particulares Permanentes Ocupados — padrão IVS-BH.</a:t>
             </a:r>
-            <a:endParaRPr lang="en-US" sz="1200" dirty="0"/>
+            <a:endParaRPr lang="pt-BR" sz="1200" noProof="0" dirty="0"/>
           </a:p>
         </p:txBody>
       </p:sp>
@@ -13678,11 +13317,11 @@
           <a:bodyPr wrap="square" lIns="0" tIns="0" rIns="0" bIns="0" rtlCol="0" anchor="ctr"/>
           <a:lstStyle/>
           <a:p>
-            <a:pPr indent="0" marL="0">
+            <a:pPr marL="0" indent="0">
               <a:buNone/>
             </a:pPr>
             <a:r>
-              <a:rPr lang="en-US" sz="1400" b="1" i="1" dirty="0">
+              <a:rPr lang="pt-BR" sz="1400" b="1" i="1" noProof="0" dirty="0">
                 <a:solidFill>
                   <a:srgbClr val="1E2A36"/>
                 </a:solidFill>
@@ -13692,7 +13331,7 @@
               </a:rPr>
               <a:t>Impacto nos números: quase nenhum — porque as duas variáveis são quase idênticas por setor</a:t>
             </a:r>
-            <a:endParaRPr lang="en-US" sz="1400" dirty="0"/>
+            <a:endParaRPr lang="pt-BR" sz="1400" noProof="0" dirty="0"/>
           </a:p>
         </p:txBody>
       </p:sp>
@@ -13722,6 +13361,13 @@
             <a:prstDash val="solid"/>
           </a:ln>
         </p:spPr>
+        <p:txBody>
+          <a:bodyPr/>
+          <a:lstStyle/>
+          <a:p>
+            <a:endParaRPr lang="pt-BR" noProof="0" dirty="0"/>
+          </a:p>
+        </p:txBody>
       </p:sp>
       <p:sp>
         <p:nvSpPr>
@@ -13744,11 +13390,11 @@
           <a:bodyPr wrap="square" lIns="0" tIns="0" rIns="0" bIns="0" rtlCol="0" anchor="ctr"/>
           <a:lstStyle/>
           <a:p>
-            <a:pPr algn="ctr" indent="0" marL="0">
+            <a:pPr marL="0" indent="0" algn="ctr">
               <a:buNone/>
             </a:pPr>
             <a:r>
-              <a:rPr lang="en-US" sz="2600" b="1" dirty="0">
+              <a:rPr lang="pt-BR" sz="2600" b="1" noProof="0" dirty="0">
                 <a:solidFill>
                   <a:srgbClr val="19599A"/>
                 </a:solidFill>
@@ -13758,7 +13404,7 @@
               </a:rPr>
               <a:t>0,9993</a:t>
             </a:r>
-            <a:endParaRPr lang="en-US" sz="2600" dirty="0"/>
+            <a:endParaRPr lang="pt-BR" sz="2600" noProof="0" dirty="0"/>
           </a:p>
         </p:txBody>
       </p:sp>
@@ -13783,14 +13429,14 @@
           <a:bodyPr wrap="square" lIns="0" tIns="0" rIns="0" bIns="0" rtlCol="0" anchor="ctr"/>
           <a:lstStyle/>
           <a:p>
-            <a:pPr algn="ctr" indent="0" marL="0">
+            <a:pPr marL="0" indent="0" algn="ctr">
               <a:lnSpc>
                 <a:spcPct val="95000"/>
               </a:lnSpc>
               <a:buNone/>
             </a:pPr>
             <a:r>
-              <a:rPr lang="en-US" sz="1100" dirty="0">
+              <a:rPr lang="pt-BR" sz="1100" noProof="0" dirty="0">
                 <a:solidFill>
                   <a:srgbClr val="1E2A36"/>
                 </a:solidFill>
@@ -13800,7 +13446,7 @@
               </a:rPr>
               <a:t>correlação entre V00001 e V01042</a:t>
             </a:r>
-            <a:endParaRPr lang="en-US" sz="1100" dirty="0"/>
+            <a:endParaRPr lang="pt-BR" sz="1100" noProof="0" dirty="0"/>
           </a:p>
         </p:txBody>
       </p:sp>
@@ -13830,6 +13476,13 @@
             <a:prstDash val="solid"/>
           </a:ln>
         </p:spPr>
+        <p:txBody>
+          <a:bodyPr/>
+          <a:lstStyle/>
+          <a:p>
+            <a:endParaRPr lang="pt-BR" noProof="0" dirty="0"/>
+          </a:p>
+        </p:txBody>
       </p:sp>
       <p:sp>
         <p:nvSpPr>
@@ -13852,11 +13505,11 @@
           <a:bodyPr wrap="square" lIns="0" tIns="0" rIns="0" bIns="0" rtlCol="0" anchor="ctr"/>
           <a:lstStyle/>
           <a:p>
-            <a:pPr algn="ctr" indent="0" marL="0">
+            <a:pPr marL="0" indent="0" algn="ctr">
               <a:buNone/>
             </a:pPr>
             <a:r>
-              <a:rPr lang="en-US" sz="2600" b="1" dirty="0">
+              <a:rPr lang="pt-BR" sz="2600" b="1" noProof="0" dirty="0">
                 <a:solidFill>
                   <a:srgbClr val="19599A"/>
                 </a:solidFill>
@@ -13866,7 +13519,7 @@
               </a:rPr>
               <a:t>93,2%</a:t>
             </a:r>
-            <a:endParaRPr lang="en-US" sz="2600" dirty="0"/>
+            <a:endParaRPr lang="pt-BR" sz="2600" noProof="0" dirty="0"/>
           </a:p>
         </p:txBody>
       </p:sp>
@@ -13891,14 +13544,14 @@
           <a:bodyPr wrap="square" lIns="0" tIns="0" rIns="0" bIns="0" rtlCol="0" anchor="ctr"/>
           <a:lstStyle/>
           <a:p>
-            <a:pPr algn="ctr" indent="0" marL="0">
+            <a:pPr marL="0" indent="0" algn="ctr">
               <a:lnSpc>
                 <a:spcPct val="95000"/>
               </a:lnSpc>
               <a:buNone/>
             </a:pPr>
             <a:r>
-              <a:rPr lang="en-US" sz="1100" dirty="0">
+              <a:rPr lang="pt-BR" sz="1100" noProof="0" dirty="0">
                 <a:solidFill>
                   <a:srgbClr val="1E2A36"/>
                 </a:solidFill>
@@ -13908,7 +13561,7 @@
               </a:rPr>
               <a:t>dos setores: V00001 = V01042 (idênticos)</a:t>
             </a:r>
-            <a:endParaRPr lang="en-US" sz="1100" dirty="0"/>
+            <a:endParaRPr lang="pt-BR" sz="1100" noProof="0" dirty="0"/>
           </a:p>
         </p:txBody>
       </p:sp>
@@ -13938,6 +13591,13 @@
             <a:prstDash val="solid"/>
           </a:ln>
         </p:spPr>
+        <p:txBody>
+          <a:bodyPr/>
+          <a:lstStyle/>
+          <a:p>
+            <a:endParaRPr lang="pt-BR" noProof="0" dirty="0"/>
+          </a:p>
+        </p:txBody>
       </p:sp>
       <p:sp>
         <p:nvSpPr>
@@ -13960,11 +13620,11 @@
           <a:bodyPr wrap="square" lIns="0" tIns="0" rIns="0" bIns="0" rtlCol="0" anchor="ctr"/>
           <a:lstStyle/>
           <a:p>
-            <a:pPr algn="ctr" indent="0" marL="0">
+            <a:pPr marL="0" indent="0" algn="ctr">
               <a:buNone/>
             </a:pPr>
             <a:r>
-              <a:rPr lang="en-US" sz="2600" b="1" dirty="0">
+              <a:rPr lang="pt-BR" sz="2600" b="1" noProof="0" dirty="0">
                 <a:solidFill>
                   <a:srgbClr val="19599A"/>
                 </a:solidFill>
@@ -13974,7 +13634,7 @@
               </a:rPr>
               <a:t>6,8%</a:t>
             </a:r>
-            <a:endParaRPr lang="en-US" sz="2600" dirty="0"/>
+            <a:endParaRPr lang="pt-BR" sz="2600" noProof="0" dirty="0"/>
           </a:p>
         </p:txBody>
       </p:sp>
@@ -13999,14 +13659,14 @@
           <a:bodyPr wrap="square" lIns="0" tIns="0" rIns="0" bIns="0" rtlCol="0" anchor="ctr"/>
           <a:lstStyle/>
           <a:p>
-            <a:pPr algn="ctr" indent="0" marL="0">
+            <a:pPr marL="0" indent="0" algn="ctr">
               <a:lnSpc>
                 <a:spcPct val="95000"/>
               </a:lnSpc>
               <a:buNone/>
             </a:pPr>
             <a:r>
-              <a:rPr lang="en-US" sz="1100" dirty="0">
+              <a:rPr lang="pt-BR" sz="1100" noProof="0" dirty="0">
                 <a:solidFill>
                   <a:srgbClr val="1E2A36"/>
                 </a:solidFill>
@@ -14016,7 +13676,7 @@
               </a:rPr>
               <a:t>diferem ligeiramente (nunca o contrário)</a:t>
             </a:r>
-            <a:endParaRPr lang="en-US" sz="1100" dirty="0"/>
+            <a:endParaRPr lang="pt-BR" sz="1100" noProof="0" dirty="0"/>
           </a:p>
         </p:txBody>
       </p:sp>
@@ -14041,11 +13701,11 @@
           <a:bodyPr wrap="square" lIns="0" tIns="0" rIns="0" bIns="0" rtlCol="0" anchor="ctr"/>
           <a:lstStyle/>
           <a:p>
-            <a:pPr indent="0" marL="0">
+            <a:pPr marL="0" indent="0">
               <a:buNone/>
             </a:pPr>
             <a:r>
-              <a:rPr lang="en-US" sz="1250" i="1" dirty="0">
+              <a:rPr lang="pt-BR" sz="1250" i="1" noProof="0" dirty="0">
                 <a:solidFill>
                   <a:srgbClr val="1C7293"/>
                 </a:solidFill>
@@ -14055,7 +13715,7 @@
               </a:rPr>
               <a:t>Conclusão: correção conceitual com impacto numérico mínimo — mas agora dividimos domicílios por domicílios.</a:t>
             </a:r>
-            <a:endParaRPr lang="en-US" sz="1250" dirty="0"/>
+            <a:endParaRPr lang="pt-BR" sz="1250" noProof="0" dirty="0"/>
           </a:p>
         </p:txBody>
       </p:sp>
@@ -14075,6 +13735,7 @@
         <a:solidFill>
           <a:srgbClr val="FFFFFF"/>
         </a:solidFill>
+        <a:effectLst/>
       </p:bgPr>
     </p:bg>
     <p:spTree>
@@ -14112,11 +13773,11 @@
           <a:bodyPr wrap="square" lIns="0" tIns="0" rIns="0" bIns="0" rtlCol="0" anchor="ctr"/>
           <a:lstStyle/>
           <a:p>
-            <a:pPr indent="0" marL="0">
+            <a:pPr marL="0" indent="0">
               <a:buNone/>
             </a:pPr>
             <a:r>
-              <a:rPr lang="en-US" sz="1100" b="1" spc="200" kern="0" dirty="0">
+              <a:rPr lang="pt-BR" sz="1100" b="1" kern="0" spc="200" noProof="0" dirty="0">
                 <a:solidFill>
                   <a:srgbClr val="2A9D8F"/>
                 </a:solidFill>
@@ -14126,7 +13787,7 @@
               </a:rPr>
               <a:t>CORREÇÃO 2</a:t>
             </a:r>
-            <a:endParaRPr lang="en-US" sz="1100" dirty="0"/>
+            <a:endParaRPr lang="pt-BR" sz="1100" noProof="0" dirty="0"/>
           </a:p>
         </p:txBody>
       </p:sp>
@@ -14151,11 +13812,11 @@
           <a:bodyPr wrap="square" lIns="0" tIns="0" rIns="0" bIns="0" rtlCol="0" anchor="ctr"/>
           <a:lstStyle/>
           <a:p>
-            <a:pPr indent="0" marL="0">
+            <a:pPr marL="0" indent="0">
               <a:buNone/>
             </a:pPr>
             <a:r>
-              <a:rPr lang="en-US" sz="2500" b="1" dirty="0">
+              <a:rPr lang="pt-BR" sz="2500" b="1" noProof="0" dirty="0">
                 <a:solidFill>
                   <a:srgbClr val="1E2A36"/>
                 </a:solidFill>
@@ -14165,7 +13826,7 @@
               </a:rPr>
               <a:t>Taxa de analfabetismo: a mais importante</a:t>
             </a:r>
-            <a:endParaRPr lang="en-US" sz="2500" dirty="0"/>
+            <a:endParaRPr lang="pt-BR" sz="2500" noProof="0" dirty="0"/>
           </a:p>
         </p:txBody>
       </p:sp>
@@ -14193,6 +13854,13 @@
             <a:prstDash val="solid"/>
           </a:ln>
         </p:spPr>
+        <p:txBody>
+          <a:bodyPr/>
+          <a:lstStyle/>
+          <a:p>
+            <a:endParaRPr lang="pt-BR" noProof="0" dirty="0"/>
+          </a:p>
+        </p:txBody>
       </p:sp>
       <p:sp>
         <p:nvSpPr>
@@ -14215,11 +13883,11 @@
           <a:bodyPr wrap="square" lIns="0" tIns="0" rIns="0" bIns="0" rtlCol="0" anchor="ctr"/>
           <a:lstStyle/>
           <a:p>
-            <a:pPr algn="ctr" indent="0" marL="0">
+            <a:pPr marL="0" indent="0" algn="ctr">
               <a:buNone/>
             </a:pPr>
             <a:r>
-              <a:rPr lang="en-US" sz="1150" b="1" spc="100" kern="0" dirty="0">
+              <a:rPr lang="pt-BR" sz="1150" b="1" kern="0" spc="100" noProof="0" dirty="0">
                 <a:solidFill>
                   <a:srgbClr val="B3261E"/>
                 </a:solidFill>
@@ -14229,7 +13897,7 @@
               </a:rPr>
               <a:t>ANTES (incorreto)</a:t>
             </a:r>
-            <a:endParaRPr lang="en-US" sz="1150" dirty="0"/>
+            <a:endParaRPr lang="pt-BR" sz="1150" noProof="0" dirty="0"/>
           </a:p>
         </p:txBody>
       </p:sp>
@@ -14254,11 +13922,11 @@
           <a:bodyPr wrap="square" lIns="0" tIns="0" rIns="0" bIns="0" rtlCol="0" anchor="ctr"/>
           <a:lstStyle/>
           <a:p>
-            <a:pPr algn="ctr" indent="0" marL="0">
+            <a:pPr marL="0" indent="0" algn="ctr">
               <a:buNone/>
             </a:pPr>
             <a:r>
-              <a:rPr lang="en-US" sz="1800" b="1" dirty="0">
+              <a:rPr lang="pt-BR" sz="1800" b="1" noProof="0" dirty="0">
                 <a:solidFill>
                   <a:srgbClr val="1E2A36"/>
                 </a:solidFill>
@@ -14268,7 +13936,7 @@
               </a:rPr>
               <a:t>V00901  ÷  V00900</a:t>
             </a:r>
-            <a:endParaRPr lang="en-US" sz="1800" dirty="0"/>
+            <a:endParaRPr lang="pt-BR" sz="1800" noProof="0" dirty="0"/>
           </a:p>
         </p:txBody>
       </p:sp>
@@ -14293,14 +13961,14 @@
           <a:bodyPr wrap="square" lIns="0" tIns="0" rIns="0" bIns="0" rtlCol="0" anchor="ctr"/>
           <a:lstStyle/>
           <a:p>
-            <a:pPr algn="ctr" indent="0" marL="0">
+            <a:pPr marL="0" indent="0" algn="ctr">
               <a:lnSpc>
                 <a:spcPct val="95000"/>
               </a:lnSpc>
               <a:buNone/>
             </a:pPr>
             <a:r>
-              <a:rPr lang="en-US" sz="1200" i="1" dirty="0">
+              <a:rPr lang="pt-BR" sz="1200" i="1" noProof="0" dirty="0">
                 <a:solidFill>
                   <a:srgbClr val="B3261E"/>
                 </a:solidFill>
@@ -14310,7 +13978,7 @@
               </a:rPr>
               <a:t>analfabetos ÷ alfabetizados — é uma razão, não uma taxa.</a:t>
             </a:r>
-            <a:endParaRPr lang="en-US" sz="1200" dirty="0"/>
+            <a:endParaRPr lang="pt-BR" sz="1200" noProof="0" dirty="0"/>
           </a:p>
         </p:txBody>
       </p:sp>
@@ -14338,6 +14006,13 @@
             <a:prstDash val="solid"/>
           </a:ln>
         </p:spPr>
+        <p:txBody>
+          <a:bodyPr/>
+          <a:lstStyle/>
+          <a:p>
+            <a:endParaRPr lang="pt-BR" noProof="0" dirty="0"/>
+          </a:p>
+        </p:txBody>
       </p:sp>
       <p:sp>
         <p:nvSpPr>
@@ -14360,11 +14035,11 @@
           <a:bodyPr wrap="square" lIns="0" tIns="0" rIns="0" bIns="0" rtlCol="0" anchor="ctr"/>
           <a:lstStyle/>
           <a:p>
-            <a:pPr algn="ctr" indent="0" marL="0">
+            <a:pPr marL="0" indent="0" algn="ctr">
               <a:buNone/>
             </a:pPr>
             <a:r>
-              <a:rPr lang="en-US" sz="1150" b="1" spc="100" kern="0" dirty="0">
+              <a:rPr lang="pt-BR" sz="1150" b="1" kern="0" spc="100" noProof="0" dirty="0">
                 <a:solidFill>
                   <a:srgbClr val="2A9D8F"/>
                 </a:solidFill>
@@ -14374,7 +14049,7 @@
               </a:rPr>
               <a:t>AGORA (correto)</a:t>
             </a:r>
-            <a:endParaRPr lang="en-US" sz="1150" dirty="0"/>
+            <a:endParaRPr lang="pt-BR" sz="1150" noProof="0" dirty="0"/>
           </a:p>
         </p:txBody>
       </p:sp>
@@ -14399,11 +14074,11 @@
           <a:bodyPr wrap="square" lIns="0" tIns="0" rIns="0" bIns="0" rtlCol="0" anchor="ctr"/>
           <a:lstStyle/>
           <a:p>
-            <a:pPr algn="ctr" indent="0" marL="0">
+            <a:pPr marL="0" indent="0" algn="ctr">
               <a:buNone/>
             </a:pPr>
             <a:r>
-              <a:rPr lang="en-US" sz="1600" b="1" dirty="0">
+              <a:rPr lang="pt-BR" sz="1600" b="1" noProof="0" dirty="0">
                 <a:solidFill>
                   <a:srgbClr val="1E2A36"/>
                 </a:solidFill>
@@ -14413,7 +14088,7 @@
               </a:rPr>
               <a:t>V00901  ÷  (V00900 + V00901)</a:t>
             </a:r>
-            <a:endParaRPr lang="en-US" sz="1600" dirty="0"/>
+            <a:endParaRPr lang="pt-BR" sz="1600" noProof="0" dirty="0"/>
           </a:p>
         </p:txBody>
       </p:sp>
@@ -14438,14 +14113,14 @@
           <a:bodyPr wrap="square" lIns="0" tIns="0" rIns="0" bIns="0" rtlCol="0" anchor="ctr"/>
           <a:lstStyle/>
           <a:p>
-            <a:pPr algn="ctr" indent="0" marL="0">
+            <a:pPr marL="0" indent="0" algn="ctr">
               <a:lnSpc>
                 <a:spcPct val="95000"/>
               </a:lnSpc>
               <a:buNone/>
             </a:pPr>
             <a:r>
-              <a:rPr lang="en-US" sz="1200" i="1" dirty="0">
+              <a:rPr lang="pt-BR" sz="1200" i="1" noProof="0" dirty="0">
                 <a:solidFill>
                   <a:srgbClr val="2A9D8F"/>
                 </a:solidFill>
@@ -14455,7 +14130,7 @@
               </a:rPr>
               <a:t>analfabetos ÷ total de pessoas 15+ — taxa válida em [0, 1].</a:t>
             </a:r>
-            <a:endParaRPr lang="en-US" sz="1200" dirty="0"/>
+            <a:endParaRPr lang="pt-BR" sz="1200" noProof="0" dirty="0"/>
           </a:p>
         </p:txBody>
       </p:sp>
@@ -14480,11 +14155,11 @@
           <a:bodyPr wrap="square" lIns="0" tIns="0" rIns="0" bIns="0" rtlCol="0" anchor="ctr"/>
           <a:lstStyle/>
           <a:p>
-            <a:pPr indent="0" marL="0">
+            <a:pPr marL="0" indent="0">
               <a:buNone/>
             </a:pPr>
             <a:r>
-              <a:rPr lang="en-US" sz="1400" b="1" dirty="0">
+              <a:rPr lang="pt-BR" sz="1400" b="1" noProof="0" dirty="0">
                 <a:solidFill>
                   <a:srgbClr val="1E2A36"/>
                 </a:solidFill>
@@ -14494,7 +14169,7 @@
               </a:rPr>
               <a:t>O que isso mudou nos dados (antes → depois)</a:t>
             </a:r>
-            <a:endParaRPr lang="en-US" sz="1400" dirty="0"/>
+            <a:endParaRPr lang="pt-BR" sz="1400" noProof="0" dirty="0"/>
           </a:p>
         </p:txBody>
       </p:sp>
@@ -14522,13 +14197,20 @@
             <a:prstDash val="solid"/>
           </a:ln>
           <a:effectLst>
-            <a:outerShdw sx="100000" sy="100000" kx="0" ky="0" algn="bl" rotWithShape="0" blurRad="88900" dist="38100" dir="8100000">
+            <a:outerShdw blurRad="88900" dist="38100" dir="8100000" algn="bl" rotWithShape="0">
               <a:srgbClr val="000000">
                 <a:alpha val="15000"/>
               </a:srgbClr>
             </a:outerShdw>
           </a:effectLst>
         </p:spPr>
+        <p:txBody>
+          <a:bodyPr/>
+          <a:lstStyle/>
+          <a:p>
+            <a:endParaRPr lang="pt-BR" noProof="0" dirty="0"/>
+          </a:p>
+        </p:txBody>
       </p:sp>
       <p:sp>
         <p:nvSpPr>
@@ -14551,11 +14233,11 @@
           <a:bodyPr wrap="square" lIns="0" tIns="0" rIns="0" bIns="0" rtlCol="0" anchor="ctr"/>
           <a:lstStyle/>
           <a:p>
-            <a:pPr algn="ctr" indent="0" marL="0">
+            <a:pPr marL="0" indent="0" algn="ctr">
               <a:buNone/>
             </a:pPr>
             <a:r>
-              <a:rPr lang="en-US" sz="2400" b="1" strike="sngStrike" dirty="0">
+              <a:rPr lang="pt-BR" sz="2400" b="1" strike="sngStrike" noProof="0" dirty="0">
                 <a:solidFill>
                   <a:srgbClr val="B3261E"/>
                 </a:solidFill>
@@ -14565,11 +14247,8 @@
               </a:rPr>
               <a:t>10</a:t>
             </a:r>
-            <a:pPr algn="ctr" indent="0" marL="0">
-              <a:buNone/>
-            </a:pPr>
-            <a:r>
-              <a:rPr lang="en-US" sz="1600" dirty="0">
+            <a:r>
+              <a:rPr lang="pt-BR" sz="1600" noProof="0" dirty="0">
                 <a:solidFill>
                   <a:srgbClr val="5B6B7A"/>
                 </a:solidFill>
@@ -14579,11 +14258,8 @@
               </a:rPr>
               <a:t>  →  </a:t>
             </a:r>
-            <a:pPr algn="ctr" indent="0" marL="0">
-              <a:buNone/>
-            </a:pPr>
-            <a:r>
-              <a:rPr lang="en-US" sz="2800" b="1" dirty="0">
+            <a:r>
+              <a:rPr lang="pt-BR" sz="2800" b="1" noProof="0" dirty="0">
                 <a:solidFill>
                   <a:srgbClr val="2A9D8F"/>
                 </a:solidFill>
@@ -14593,7 +14269,7 @@
               </a:rPr>
               <a:t>0</a:t>
             </a:r>
-            <a:endParaRPr lang="en-US" sz="2400" dirty="0"/>
+            <a:endParaRPr lang="pt-BR" sz="2400" noProof="0" dirty="0"/>
           </a:p>
         </p:txBody>
       </p:sp>
@@ -14618,11 +14294,11 @@
           <a:bodyPr wrap="square" lIns="0" tIns="0" rIns="0" bIns="0" rtlCol="0" anchor="ctr"/>
           <a:lstStyle/>
           <a:p>
-            <a:pPr algn="ctr" indent="0" marL="0">
+            <a:pPr marL="0" indent="0" algn="ctr">
               <a:buNone/>
             </a:pPr>
             <a:r>
-              <a:rPr lang="en-US" sz="1150" dirty="0">
+              <a:rPr lang="pt-BR" sz="1150" noProof="0" dirty="0">
                 <a:solidFill>
                   <a:srgbClr val="1E2A36"/>
                 </a:solidFill>
@@ -14632,7 +14308,7 @@
               </a:rPr>
               <a:t>setores com valor impossível (&gt;1)</a:t>
             </a:r>
-            <a:endParaRPr lang="en-US" sz="1150" dirty="0"/>
+            <a:endParaRPr lang="pt-BR" sz="1150" noProof="0" dirty="0"/>
           </a:p>
         </p:txBody>
       </p:sp>
@@ -14660,13 +14336,20 @@
             <a:prstDash val="solid"/>
           </a:ln>
           <a:effectLst>
-            <a:outerShdw sx="100000" sy="100000" kx="0" ky="0" algn="bl" rotWithShape="0" blurRad="88900" dist="38100" dir="8100000">
+            <a:outerShdw blurRad="88900" dist="38100" dir="8100000" algn="bl" rotWithShape="0">
               <a:srgbClr val="000000">
                 <a:alpha val="15000"/>
               </a:srgbClr>
             </a:outerShdw>
           </a:effectLst>
         </p:spPr>
+        <p:txBody>
+          <a:bodyPr/>
+          <a:lstStyle/>
+          <a:p>
+            <a:endParaRPr lang="pt-BR" noProof="0" dirty="0"/>
+          </a:p>
+        </p:txBody>
       </p:sp>
       <p:sp>
         <p:nvSpPr>
@@ -14689,11 +14372,11 @@
           <a:bodyPr wrap="square" lIns="0" tIns="0" rIns="0" bIns="0" rtlCol="0" anchor="ctr"/>
           <a:lstStyle/>
           <a:p>
-            <a:pPr algn="ctr" indent="0" marL="0">
+            <a:pPr marL="0" indent="0" algn="ctr">
               <a:buNone/>
             </a:pPr>
             <a:r>
-              <a:rPr lang="en-US" sz="2400" b="1" strike="sngStrike" dirty="0">
+              <a:rPr lang="pt-BR" sz="2400" b="1" strike="sngStrike" noProof="0" dirty="0">
                 <a:solidFill>
                   <a:srgbClr val="B3261E"/>
                 </a:solidFill>
@@ -14703,11 +14386,8 @@
               </a:rPr>
               <a:t>5,33</a:t>
             </a:r>
-            <a:pPr algn="ctr" indent="0" marL="0">
-              <a:buNone/>
-            </a:pPr>
-            <a:r>
-              <a:rPr lang="en-US" sz="1600" dirty="0">
+            <a:r>
+              <a:rPr lang="pt-BR" sz="1600" noProof="0" dirty="0">
                 <a:solidFill>
                   <a:srgbClr val="5B6B7A"/>
                 </a:solidFill>
@@ -14717,11 +14397,8 @@
               </a:rPr>
               <a:t>  →  </a:t>
             </a:r>
-            <a:pPr algn="ctr" indent="0" marL="0">
-              <a:buNone/>
-            </a:pPr>
-            <a:r>
-              <a:rPr lang="en-US" sz="2800" b="1" dirty="0">
+            <a:r>
+              <a:rPr lang="pt-BR" sz="2800" b="1" noProof="0" dirty="0">
                 <a:solidFill>
                   <a:srgbClr val="2A9D8F"/>
                 </a:solidFill>
@@ -14731,7 +14408,7 @@
               </a:rPr>
               <a:t>0,84</a:t>
             </a:r>
-            <a:endParaRPr lang="en-US" sz="2400" dirty="0"/>
+            <a:endParaRPr lang="pt-BR" sz="2400" noProof="0" dirty="0"/>
           </a:p>
         </p:txBody>
       </p:sp>
@@ -14756,11 +14433,11 @@
           <a:bodyPr wrap="square" lIns="0" tIns="0" rIns="0" bIns="0" rtlCol="0" anchor="ctr"/>
           <a:lstStyle/>
           <a:p>
-            <a:pPr algn="ctr" indent="0" marL="0">
+            <a:pPr marL="0" indent="0" algn="ctr">
               <a:buNone/>
             </a:pPr>
             <a:r>
-              <a:rPr lang="en-US" sz="1150" dirty="0">
+              <a:rPr lang="pt-BR" sz="1150" noProof="0" dirty="0">
                 <a:solidFill>
                   <a:srgbClr val="1E2A36"/>
                 </a:solidFill>
@@ -14770,7 +14447,7 @@
               </a:rPr>
               <a:t>valor máximo da taxa</a:t>
             </a:r>
-            <a:endParaRPr lang="en-US" sz="1150" dirty="0"/>
+            <a:endParaRPr lang="pt-BR" sz="1150" noProof="0" dirty="0"/>
           </a:p>
         </p:txBody>
       </p:sp>
@@ -14798,13 +14475,20 @@
             <a:prstDash val="solid"/>
           </a:ln>
           <a:effectLst>
-            <a:outerShdw sx="100000" sy="100000" kx="0" ky="0" algn="bl" rotWithShape="0" blurRad="88900" dist="38100" dir="8100000">
+            <a:outerShdw blurRad="88900" dist="38100" dir="8100000" algn="bl" rotWithShape="0">
               <a:srgbClr val="000000">
                 <a:alpha val="15000"/>
               </a:srgbClr>
             </a:outerShdw>
           </a:effectLst>
         </p:spPr>
+        <p:txBody>
+          <a:bodyPr/>
+          <a:lstStyle/>
+          <a:p>
+            <a:endParaRPr lang="pt-BR" noProof="0" dirty="0"/>
+          </a:p>
+        </p:txBody>
       </p:sp>
       <p:sp>
         <p:nvSpPr>
@@ -14827,11 +14511,11 @@
           <a:bodyPr wrap="square" lIns="0" tIns="0" rIns="0" bIns="0" rtlCol="0" anchor="ctr"/>
           <a:lstStyle/>
           <a:p>
-            <a:pPr algn="ctr" indent="0" marL="0">
+            <a:pPr marL="0" indent="0" algn="ctr">
               <a:buNone/>
             </a:pPr>
             <a:r>
-              <a:rPr lang="en-US" sz="2400" b="1" strike="sngStrike" dirty="0">
+              <a:rPr lang="pt-BR" sz="2400" b="1" strike="sngStrike" noProof="0" dirty="0">
                 <a:solidFill>
                   <a:srgbClr val="B3261E"/>
                 </a:solidFill>
@@ -14841,11 +14525,8 @@
               </a:rPr>
               <a:t>44,1</a:t>
             </a:r>
-            <a:pPr algn="ctr" indent="0" marL="0">
-              <a:buNone/>
-            </a:pPr>
-            <a:r>
-              <a:rPr lang="en-US" sz="1600" dirty="0">
+            <a:r>
+              <a:rPr lang="pt-BR" sz="1600" noProof="0" dirty="0">
                 <a:solidFill>
                   <a:srgbClr val="5B6B7A"/>
                 </a:solidFill>
@@ -14855,11 +14536,8 @@
               </a:rPr>
               <a:t>  →  </a:t>
             </a:r>
-            <a:pPr algn="ctr" indent="0" marL="0">
-              <a:buNone/>
-            </a:pPr>
-            <a:r>
-              <a:rPr lang="en-US" sz="2800" b="1" dirty="0">
+            <a:r>
+              <a:rPr lang="pt-BR" sz="2800" b="1" noProof="0" dirty="0">
                 <a:solidFill>
                   <a:srgbClr val="2A9D8F"/>
                 </a:solidFill>
@@ -14869,7 +14547,7 @@
               </a:rPr>
               <a:t>17,7</a:t>
             </a:r>
-            <a:endParaRPr lang="en-US" sz="2400" dirty="0"/>
+            <a:endParaRPr lang="pt-BR" sz="2400" noProof="0" dirty="0"/>
           </a:p>
         </p:txBody>
       </p:sp>
@@ -14894,11 +14572,11 @@
           <a:bodyPr wrap="square" lIns="0" tIns="0" rIns="0" bIns="0" rtlCol="0" anchor="ctr"/>
           <a:lstStyle/>
           <a:p>
-            <a:pPr algn="ctr" indent="0" marL="0">
+            <a:pPr marL="0" indent="0" algn="ctr">
               <a:buNone/>
             </a:pPr>
             <a:r>
-              <a:rPr lang="en-US" sz="1150" dirty="0">
+              <a:rPr lang="pt-BR" sz="1150" noProof="0" dirty="0">
                 <a:solidFill>
                   <a:srgbClr val="1E2A36"/>
                 </a:solidFill>
@@ -14908,7 +14586,7 @@
               </a:rPr>
               <a:t>curtose (peso dos extremos)</a:t>
             </a:r>
-            <a:endParaRPr lang="en-US" sz="1150" dirty="0"/>
+            <a:endParaRPr lang="pt-BR" sz="1150" noProof="0" dirty="0"/>
           </a:p>
         </p:txBody>
       </p:sp>
@@ -14933,11 +14611,11 @@
           <a:bodyPr wrap="square" lIns="0" tIns="0" rIns="0" bIns="0" rtlCol="0" anchor="ctr"/>
           <a:lstStyle/>
           <a:p>
-            <a:pPr indent="0" marL="0">
+            <a:pPr marL="0" indent="0">
               <a:buNone/>
             </a:pPr>
             <a:r>
-              <a:rPr lang="en-US" sz="1150" b="1" i="1" dirty="0">
+              <a:rPr lang="pt-BR" sz="1150" b="1" i="1" noProof="0" dirty="0">
                 <a:solidFill>
                   <a:srgbClr val="2A9D8F"/>
                 </a:solidFill>
@@ -14947,11 +14625,8 @@
               </a:rPr>
               <a:t>Por que importa:  </a:t>
             </a:r>
-            <a:pPr indent="0" marL="0">
-              <a:buNone/>
-            </a:pPr>
-            <a:r>
-              <a:rPr lang="en-US" sz="1150" i="1" dirty="0">
+            <a:r>
+              <a:rPr lang="pt-BR" sz="1150" i="1" noProof="0" dirty="0">
                 <a:solidFill>
                   <a:srgbClr val="1E2A36"/>
                 </a:solidFill>
@@ -14961,7 +14636,7 @@
               </a:rPr>
               <a:t>uma proporção tem de ficar entre 0 e 1. A fórmula antiga estourava 1 onde havia mais analfabetos que alfabetizados — justamente os setores mais vulneráveis.</a:t>
             </a:r>
-            <a:endParaRPr lang="en-US" sz="1150" dirty="0"/>
+            <a:endParaRPr lang="pt-BR" sz="1150" noProof="0" dirty="0"/>
           </a:p>
         </p:txBody>
       </p:sp>
@@ -14981,6 +14656,7 @@
         <a:solidFill>
           <a:srgbClr val="FFFFFF"/>
         </a:solidFill>
+        <a:effectLst/>
       </p:bgPr>
     </p:bg>
     <p:spTree>
@@ -15018,11 +14694,11 @@
           <a:bodyPr wrap="square" lIns="0" tIns="0" rIns="0" bIns="0" rtlCol="0" anchor="ctr"/>
           <a:lstStyle/>
           <a:p>
-            <a:pPr indent="0" marL="0">
+            <a:pPr marL="0" indent="0">
               <a:buNone/>
             </a:pPr>
             <a:r>
-              <a:rPr lang="en-US" sz="1100" b="1" spc="200" kern="0" dirty="0">
+              <a:rPr lang="pt-BR" sz="1100" b="1" kern="0" spc="200" noProof="0" dirty="0">
                 <a:solidFill>
                   <a:srgbClr val="1C7293"/>
                 </a:solidFill>
@@ -15032,7 +14708,7 @@
               </a:rPr>
               <a:t>CORREÇÃO 3</a:t>
             </a:r>
-            <a:endParaRPr lang="en-US" sz="1100" dirty="0"/>
+            <a:endParaRPr lang="pt-BR" sz="1100" noProof="0" dirty="0"/>
           </a:p>
         </p:txBody>
       </p:sp>
@@ -15057,11 +14733,11 @@
           <a:bodyPr wrap="square" lIns="0" tIns="0" rIns="0" bIns="0" rtlCol="0" anchor="ctr"/>
           <a:lstStyle/>
           <a:p>
-            <a:pPr indent="0" marL="0">
+            <a:pPr marL="0" indent="0">
               <a:buNone/>
             </a:pPr>
             <a:r>
-              <a:rPr lang="en-US" sz="2500" b="1" dirty="0">
+              <a:rPr lang="pt-BR" sz="2500" b="1" noProof="0" dirty="0">
                 <a:solidFill>
                   <a:srgbClr val="1E2A36"/>
                 </a:solidFill>
@@ -15071,7 +14747,7 @@
               </a:rPr>
               <a:t>Razão de moradores: alinhada ao IBGE</a:t>
             </a:r>
-            <a:endParaRPr lang="en-US" sz="2500" dirty="0"/>
+            <a:endParaRPr lang="pt-BR" sz="2500" noProof="0" dirty="0"/>
           </a:p>
         </p:txBody>
       </p:sp>
@@ -15096,14 +14772,14 @@
           <a:bodyPr wrap="square" lIns="0" tIns="0" rIns="0" bIns="0" rtlCol="0" anchor="ctr"/>
           <a:lstStyle/>
           <a:p>
-            <a:pPr indent="0" marL="0">
+            <a:pPr marL="0" indent="0">
               <a:lnSpc>
                 <a:spcPct val="105000"/>
               </a:lnSpc>
               <a:buNone/>
             </a:pPr>
             <a:r>
-              <a:rPr lang="en-US" sz="1350" b="1" dirty="0">
+              <a:rPr lang="pt-BR" sz="1350" b="1" noProof="0" dirty="0">
                 <a:solidFill>
                   <a:srgbClr val="1C7293"/>
                 </a:solidFill>
@@ -15113,14 +14789,8 @@
               </a:rPr>
               <a:t>Nova fórmula:  </a:t>
             </a:r>
-            <a:pPr indent="0" marL="0">
-              <a:lnSpc>
-                <a:spcPct val="105000"/>
-              </a:lnSpc>
-              <a:buNone/>
-            </a:pPr>
-            <a:r>
-              <a:rPr lang="en-US" sz="1350" b="1" dirty="0">
+            <a:r>
+              <a:rPr lang="pt-BR" sz="1350" b="1" noProof="0" dirty="0">
                 <a:solidFill>
                   <a:srgbClr val="1E2A36"/>
                 </a:solidFill>
@@ -15130,14 +14800,8 @@
               </a:rPr>
               <a:t>(V00005 + V00006) / (V00001 + V00002)</a:t>
             </a:r>
-            <a:pPr indent="0" marL="0">
-              <a:lnSpc>
-                <a:spcPct val="105000"/>
-              </a:lnSpc>
-              <a:buNone/>
-            </a:pPr>
-            <a:r>
-              <a:rPr lang="en-US" sz="1350" dirty="0">
+            <a:r>
+              <a:rPr lang="pt-BR" sz="1350" noProof="0" dirty="0">
                 <a:solidFill>
                   <a:srgbClr val="1E2A36"/>
                 </a:solidFill>
@@ -15147,7 +14811,7 @@
               </a:rPr>
               <a:t>  — reproduz exatamente a definição oficial do V0005 do IBGE (moradores ÷ domicílios particulares ocupados).</a:t>
             </a:r>
-            <a:endParaRPr lang="en-US" sz="1350" dirty="0"/>
+            <a:endParaRPr lang="pt-BR" sz="1350" noProof="0" dirty="0"/>
           </a:p>
         </p:txBody>
       </p:sp>
@@ -15175,13 +14839,20 @@
             <a:prstDash val="solid"/>
           </a:ln>
           <a:effectLst>
-            <a:outerShdw sx="100000" sy="100000" kx="0" ky="0" algn="bl" rotWithShape="0" blurRad="88900" dist="38100" dir="8100000">
+            <a:outerShdw blurRad="88900" dist="38100" dir="8100000" algn="bl" rotWithShape="0">
               <a:srgbClr val="000000">
                 <a:alpha val="15000"/>
               </a:srgbClr>
             </a:outerShdw>
           </a:effectLst>
         </p:spPr>
+        <p:txBody>
+          <a:bodyPr/>
+          <a:lstStyle/>
+          <a:p>
+            <a:endParaRPr lang="pt-BR" noProof="0" dirty="0"/>
+          </a:p>
+        </p:txBody>
       </p:sp>
       <p:sp>
         <p:nvSpPr>
@@ -15204,11 +14875,11 @@
           <a:bodyPr wrap="square" lIns="0" tIns="0" rIns="0" bIns="0" rtlCol="0" anchor="ctr"/>
           <a:lstStyle/>
           <a:p>
-            <a:pPr algn="ctr" indent="0" marL="0">
+            <a:pPr marL="0" indent="0" algn="ctr">
               <a:buNone/>
             </a:pPr>
             <a:r>
-              <a:rPr lang="en-US" sz="3000" b="1" strike="sngStrike" dirty="0">
+              <a:rPr lang="pt-BR" sz="3000" b="1" strike="sngStrike" noProof="0" dirty="0">
                 <a:solidFill>
                   <a:srgbClr val="B3261E"/>
                 </a:solidFill>
@@ -15218,11 +14889,8 @@
               </a:rPr>
               <a:t>0,17</a:t>
             </a:r>
-            <a:pPr algn="ctr" indent="0" marL="0">
-              <a:buNone/>
-            </a:pPr>
-            <a:r>
-              <a:rPr lang="en-US" sz="1600" dirty="0">
+            <a:r>
+              <a:rPr lang="pt-BR" sz="1600" noProof="0" dirty="0">
                 <a:solidFill>
                   <a:srgbClr val="5B6B7A"/>
                 </a:solidFill>
@@ -15232,11 +14900,8 @@
               </a:rPr>
               <a:t>  →  </a:t>
             </a:r>
-            <a:pPr algn="ctr" indent="0" marL="0">
-              <a:buNone/>
-            </a:pPr>
-            <a:r>
-              <a:rPr lang="en-US" sz="3200" b="1" dirty="0">
+            <a:r>
+              <a:rPr lang="pt-BR" sz="3200" b="1" noProof="0" dirty="0">
                 <a:solidFill>
                   <a:srgbClr val="2A9D8F"/>
                 </a:solidFill>
@@ -15246,7 +14911,7 @@
               </a:rPr>
               <a:t>1,00</a:t>
             </a:r>
-            <a:endParaRPr lang="en-US" sz="3000" dirty="0"/>
+            <a:endParaRPr lang="pt-BR" sz="3000" noProof="0" dirty="0"/>
           </a:p>
         </p:txBody>
       </p:sp>
@@ -15271,11 +14936,11 @@
           <a:bodyPr wrap="square" lIns="0" tIns="0" rIns="0" bIns="0" rtlCol="0" anchor="ctr"/>
           <a:lstStyle/>
           <a:p>
-            <a:pPr algn="ctr" indent="0" marL="0">
+            <a:pPr marL="0" indent="0" algn="ctr">
               <a:buNone/>
             </a:pPr>
             <a:r>
-              <a:rPr lang="en-US" sz="1150" dirty="0">
+              <a:rPr lang="pt-BR" sz="1150" noProof="0" dirty="0">
                 <a:solidFill>
                   <a:srgbClr val="1E2A36"/>
                 </a:solidFill>
@@ -15285,7 +14950,7 @@
               </a:rPr>
               <a:t>mínimo da razão de moradores</a:t>
             </a:r>
-            <a:endParaRPr lang="en-US" sz="1150" dirty="0"/>
+            <a:endParaRPr lang="pt-BR" sz="1150" noProof="0" dirty="0"/>
           </a:p>
         </p:txBody>
       </p:sp>
@@ -15313,13 +14978,20 @@
             <a:prstDash val="solid"/>
           </a:ln>
           <a:effectLst>
-            <a:outerShdw sx="100000" sy="100000" kx="0" ky="0" algn="bl" rotWithShape="0" blurRad="88900" dist="38100" dir="8100000">
+            <a:outerShdw blurRad="88900" dist="38100" dir="8100000" algn="bl" rotWithShape="0">
               <a:srgbClr val="000000">
                 <a:alpha val="15000"/>
               </a:srgbClr>
             </a:outerShdw>
           </a:effectLst>
         </p:spPr>
+        <p:txBody>
+          <a:bodyPr/>
+          <a:lstStyle/>
+          <a:p>
+            <a:endParaRPr lang="pt-BR" noProof="0" dirty="0"/>
+          </a:p>
+        </p:txBody>
       </p:sp>
       <p:sp>
         <p:nvSpPr>
@@ -15342,11 +15014,11 @@
           <a:bodyPr wrap="square" lIns="0" tIns="0" rIns="0" bIns="0" rtlCol="0" anchor="ctr"/>
           <a:lstStyle/>
           <a:p>
-            <a:pPr algn="ctr" indent="0" marL="0">
+            <a:pPr marL="0" indent="0" algn="ctr">
               <a:buNone/>
             </a:pPr>
             <a:r>
-              <a:rPr lang="en-US" sz="3000" b="1" dirty="0">
+              <a:rPr lang="pt-BR" sz="3000" b="1" noProof="0" dirty="0">
                 <a:solidFill>
                   <a:srgbClr val="1C7293"/>
                 </a:solidFill>
@@ -15356,7 +15028,7 @@
               </a:rPr>
               <a:t>8,79</a:t>
             </a:r>
-            <a:endParaRPr lang="en-US" sz="3000" dirty="0"/>
+            <a:endParaRPr lang="pt-BR" sz="3000" noProof="0" dirty="0"/>
           </a:p>
         </p:txBody>
       </p:sp>
@@ -15381,14 +15053,14 @@
           <a:bodyPr wrap="square" lIns="0" tIns="0" rIns="0" bIns="0" rtlCol="0" anchor="ctr"/>
           <a:lstStyle/>
           <a:p>
-            <a:pPr algn="ctr" indent="0" marL="0">
+            <a:pPr marL="0" indent="0" algn="ctr">
               <a:lnSpc>
                 <a:spcPct val="95000"/>
               </a:lnSpc>
               <a:buNone/>
             </a:pPr>
             <a:r>
-              <a:rPr lang="en-US" sz="1150" dirty="0">
+              <a:rPr lang="pt-BR" sz="1150" noProof="0" dirty="0">
                 <a:solidFill>
                   <a:srgbClr val="1E2A36"/>
                 </a:solidFill>
@@ -15398,17 +15070,17 @@
               </a:rPr>
               <a:t>máximo — inalterado, mas agora interpretável</a:t>
             </a:r>
-            <a:endParaRPr lang="en-US" sz="1150" dirty="0"/>
-          </a:p>
-          <a:p>
-            <a:pPr algn="ctr" indent="0" marL="0">
+            <a:endParaRPr lang="pt-BR" sz="1150" noProof="0" dirty="0"/>
+          </a:p>
+          <a:p>
+            <a:pPr marL="0" indent="0" algn="ctr">
               <a:lnSpc>
                 <a:spcPct val="95000"/>
               </a:lnSpc>
               <a:buNone/>
             </a:pPr>
             <a:r>
-              <a:rPr lang="en-US" sz="1150" dirty="0">
+              <a:rPr lang="pt-BR" sz="1150" noProof="0" dirty="0">
                 <a:solidFill>
                   <a:srgbClr val="1E2A36"/>
                 </a:solidFill>
@@ -15416,9 +15088,31 @@
                 <a:ea typeface="Calibri" pitchFamily="34" charset="-122"/>
                 <a:cs typeface="Calibri" pitchFamily="34" charset="-120"/>
               </a:rPr>
-              <a:t>(setores reais com domicílios grandes, ex.: Portel-PA)</a:t>
-            </a:r>
-            <a:endParaRPr lang="en-US" sz="1150" dirty="0"/>
+              <a:t>(setores reais com domicílios grandes, ex.: </a:t>
+            </a:r>
+            <a:r>
+              <a:rPr lang="pt-BR" sz="1150" noProof="0" dirty="0" err="1">
+                <a:solidFill>
+                  <a:srgbClr val="1E2A36"/>
+                </a:solidFill>
+                <a:latin typeface="Calibri" pitchFamily="34" charset="0"/>
+                <a:ea typeface="Calibri" pitchFamily="34" charset="-122"/>
+                <a:cs typeface="Calibri" pitchFamily="34" charset="-120"/>
+              </a:rPr>
+              <a:t>Portel-PA</a:t>
+            </a:r>
+            <a:r>
+              <a:rPr lang="pt-BR" sz="1150" noProof="0" dirty="0">
+                <a:solidFill>
+                  <a:srgbClr val="1E2A36"/>
+                </a:solidFill>
+                <a:latin typeface="Calibri" pitchFamily="34" charset="0"/>
+                <a:ea typeface="Calibri" pitchFamily="34" charset="-122"/>
+                <a:cs typeface="Calibri" pitchFamily="34" charset="-120"/>
+              </a:rPr>
+              <a:t>)</a:t>
+            </a:r>
+            <a:endParaRPr lang="pt-BR" sz="1150" noProof="0" dirty="0"/>
           </a:p>
         </p:txBody>
       </p:sp>
@@ -15448,6 +15142,13 @@
             <a:prstDash val="solid"/>
           </a:ln>
         </p:spPr>
+        <p:txBody>
+          <a:bodyPr/>
+          <a:lstStyle/>
+          <a:p>
+            <a:endParaRPr lang="pt-BR" noProof="0" dirty="0"/>
+          </a:p>
+        </p:txBody>
       </p:sp>
       <p:sp>
         <p:nvSpPr>
@@ -15470,14 +15171,14 @@
           <a:bodyPr wrap="square" lIns="0" tIns="0" rIns="0" bIns="0" rtlCol="0" anchor="ctr"/>
           <a:lstStyle/>
           <a:p>
-            <a:pPr indent="0" marL="0">
+            <a:pPr marL="0" indent="0">
               <a:lnSpc>
                 <a:spcPct val="105000"/>
               </a:lnSpc>
               <a:buNone/>
             </a:pPr>
             <a:r>
-              <a:rPr lang="en-US" sz="1300" b="1" dirty="0">
+              <a:rPr lang="pt-BR" sz="1300" b="1" noProof="0" dirty="0">
                 <a:solidFill>
                   <a:srgbClr val="B3261E"/>
                 </a:solidFill>
@@ -15487,14 +15188,8 @@
               </a:rPr>
               <a:t>O problema que isso resolveu:  </a:t>
             </a:r>
-            <a:pPr indent="0" marL="0">
-              <a:lnSpc>
-                <a:spcPct val="105000"/>
-              </a:lnSpc>
-              <a:buNone/>
-            </a:pPr>
-            <a:r>
-              <a:rPr lang="en-US" sz="1300" dirty="0">
+            <a:r>
+              <a:rPr lang="pt-BR" sz="1300" noProof="0" dirty="0">
                 <a:solidFill>
                   <a:srgbClr val="1E2A36"/>
                 </a:solidFill>
@@ -15504,14 +15199,8 @@
               </a:rPr>
               <a:t>com o denominador antigo (V01042), um setor de Brasília tinha razão de 0,17 — cerca de 1 morador para 6 domicílios, fisicamente impossível. Era um artefato do denominador errado. </a:t>
             </a:r>
-            <a:pPr indent="0" marL="0">
-              <a:lnSpc>
-                <a:spcPct val="105000"/>
-              </a:lnSpc>
-              <a:buNone/>
-            </a:pPr>
-            <a:r>
-              <a:rPr lang="en-US" sz="1300" b="1" dirty="0">
+            <a:r>
+              <a:rPr lang="pt-BR" sz="1300" b="1" noProof="0" dirty="0">
                 <a:solidFill>
                   <a:srgbClr val="1E2A36"/>
                 </a:solidFill>
@@ -15521,7 +15210,7 @@
               </a:rPr>
               <a:t>Com (V00001+V00002), o mínimo passa a 1,00 — coerente: nunca há menos de 1 morador por domicílio ocupado.</a:t>
             </a:r>
-            <a:endParaRPr lang="en-US" sz="1300" dirty="0"/>
+            <a:endParaRPr lang="pt-BR" sz="1300" noProof="0" dirty="0"/>
           </a:p>
         </p:txBody>
       </p:sp>
@@ -15541,6 +15230,7 @@
         <a:solidFill>
           <a:srgbClr val="FFFFFF"/>
         </a:solidFill>
+        <a:effectLst/>
       </p:bgPr>
     </p:bg>
     <p:spTree>
@@ -15578,11 +15268,11 @@
           <a:bodyPr wrap="square" lIns="0" tIns="0" rIns="0" bIns="0" rtlCol="0" anchor="ctr"/>
           <a:lstStyle/>
           <a:p>
-            <a:pPr indent="0" marL="0">
+            <a:pPr marL="0" indent="0">
               <a:buNone/>
             </a:pPr>
             <a:r>
-              <a:rPr lang="en-US" sz="1100" b="1" spc="200" kern="0" dirty="0">
+              <a:rPr lang="pt-BR" sz="1100" b="1" kern="0" spc="200" noProof="0" dirty="0">
                 <a:solidFill>
                   <a:srgbClr val="C7861B"/>
                 </a:solidFill>
@@ -15592,7 +15282,7 @@
               </a:rPr>
               <a:t>CORREÇÕES 4 E 5</a:t>
             </a:r>
-            <a:endParaRPr lang="en-US" sz="1100" dirty="0"/>
+            <a:endParaRPr lang="pt-BR" sz="1100" noProof="0" dirty="0"/>
           </a:p>
         </p:txBody>
       </p:sp>
@@ -15617,11 +15307,11 @@
           <a:bodyPr wrap="square" lIns="0" tIns="0" rIns="0" bIns="0" rtlCol="0" anchor="ctr"/>
           <a:lstStyle/>
           <a:p>
-            <a:pPr indent="0" marL="0">
+            <a:pPr marL="0" indent="0">
               <a:buNone/>
             </a:pPr>
             <a:r>
-              <a:rPr lang="en-US" sz="2500" b="1" dirty="0">
+              <a:rPr lang="pt-BR" sz="2500" b="1" noProof="0" dirty="0">
                 <a:solidFill>
                   <a:srgbClr val="1E2A36"/>
                 </a:solidFill>
@@ -15631,7 +15321,7 @@
               </a:rPr>
               <a:t>Elegibilidade e variáveis de esgoto</a:t>
             </a:r>
-            <a:endParaRPr lang="en-US" sz="2500" dirty="0"/>
+            <a:endParaRPr lang="pt-BR" sz="2500" noProof="0" dirty="0"/>
           </a:p>
         </p:txBody>
       </p:sp>
@@ -15659,13 +15349,20 @@
             <a:prstDash val="solid"/>
           </a:ln>
           <a:effectLst>
-            <a:outerShdw sx="100000" sy="100000" kx="0" ky="0" algn="bl" rotWithShape="0" blurRad="88900" dist="38100" dir="8100000">
+            <a:outerShdw blurRad="88900" dist="38100" dir="8100000" algn="bl" rotWithShape="0">
               <a:srgbClr val="000000">
                 <a:alpha val="15000"/>
               </a:srgbClr>
             </a:outerShdw>
           </a:effectLst>
         </p:spPr>
+        <p:txBody>
+          <a:bodyPr/>
+          <a:lstStyle/>
+          <a:p>
+            <a:endParaRPr lang="pt-BR" noProof="0" dirty="0"/>
+          </a:p>
+        </p:txBody>
       </p:sp>
       <p:sp>
         <p:nvSpPr>
@@ -15686,6 +15383,13 @@
           </a:solidFill>
           <a:ln/>
         </p:spPr>
+        <p:txBody>
+          <a:bodyPr/>
+          <a:lstStyle/>
+          <a:p>
+            <a:endParaRPr lang="pt-BR" noProof="0" dirty="0"/>
+          </a:p>
+        </p:txBody>
       </p:sp>
       <p:sp>
         <p:nvSpPr>
@@ -15708,11 +15412,11 @@
           <a:bodyPr wrap="square" lIns="0" tIns="0" rIns="0" bIns="0" rtlCol="0" anchor="ctr"/>
           <a:lstStyle/>
           <a:p>
-            <a:pPr indent="0" marL="0">
+            <a:pPr marL="0" indent="0">
               <a:buNone/>
             </a:pPr>
             <a:r>
-              <a:rPr lang="en-US" sz="1500" b="1" dirty="0">
+              <a:rPr lang="pt-BR" sz="1500" b="1" noProof="0" dirty="0">
                 <a:solidFill>
                   <a:srgbClr val="1E2A36"/>
                 </a:solidFill>
@@ -15720,9 +15424,31 @@
                 <a:ea typeface="Georgia" pitchFamily="34" charset="-122"/>
                 <a:cs typeface="Georgia" pitchFamily="34" charset="-120"/>
               </a:rPr>
-              <a:t>4 · Regra Dados_sig (quais setores entram na análise)</a:t>
-            </a:r>
-            <a:endParaRPr lang="en-US" sz="1500" dirty="0"/>
+              <a:t>4 · Regra </a:t>
+            </a:r>
+            <a:r>
+              <a:rPr lang="pt-BR" sz="1500" b="1" noProof="0" dirty="0" err="1">
+                <a:solidFill>
+                  <a:srgbClr val="1E2A36"/>
+                </a:solidFill>
+                <a:latin typeface="Georgia" pitchFamily="34" charset="0"/>
+                <a:ea typeface="Georgia" pitchFamily="34" charset="-122"/>
+                <a:cs typeface="Georgia" pitchFamily="34" charset="-120"/>
+              </a:rPr>
+              <a:t>Dados_sig</a:t>
+            </a:r>
+            <a:r>
+              <a:rPr lang="pt-BR" sz="1500" b="1" noProof="0" dirty="0">
+                <a:solidFill>
+                  <a:srgbClr val="1E2A36"/>
+                </a:solidFill>
+                <a:latin typeface="Georgia" pitchFamily="34" charset="0"/>
+                <a:ea typeface="Georgia" pitchFamily="34" charset="-122"/>
+                <a:cs typeface="Georgia" pitchFamily="34" charset="-120"/>
+              </a:rPr>
+              <a:t> (quais setores entram na análise)</a:t>
+            </a:r>
+            <a:endParaRPr lang="pt-BR" sz="1500" noProof="0" dirty="0"/>
           </a:p>
         </p:txBody>
       </p:sp>
@@ -15747,14 +15473,14 @@
           <a:bodyPr wrap="square" lIns="0" tIns="0" rIns="0" bIns="0" rtlCol="0" anchor="ctr"/>
           <a:lstStyle/>
           <a:p>
-            <a:pPr indent="0" marL="0">
+            <a:pPr marL="0" indent="0">
               <a:lnSpc>
                 <a:spcPct val="100000"/>
               </a:lnSpc>
               <a:buNone/>
             </a:pPr>
             <a:r>
-              <a:rPr lang="en-US" sz="1250" dirty="0">
+              <a:rPr lang="pt-BR" sz="1250" noProof="0" dirty="0">
                 <a:solidFill>
                   <a:srgbClr val="1E2A36"/>
                 </a:solidFill>
@@ -15764,14 +15490,8 @@
               </a:rPr>
               <a:t>Antes a regra de domicílios coletivos usava V00002/V01042 — mas V00002 são domicílios improvisados, não coletivos. </a:t>
             </a:r>
-            <a:pPr indent="0" marL="0">
-              <a:lnSpc>
-                <a:spcPct val="100000"/>
-              </a:lnSpc>
-              <a:buNone/>
-            </a:pPr>
-            <a:r>
-              <a:rPr lang="en-US" sz="1250" b="1" dirty="0">
+            <a:r>
+              <a:rPr lang="pt-BR" sz="1250" b="1" noProof="0" dirty="0">
                 <a:solidFill>
                   <a:srgbClr val="1E2A36"/>
                 </a:solidFill>
@@ -15779,16 +15499,10 @@
                 <a:ea typeface="Calibri" pitchFamily="34" charset="-122"/>
                 <a:cs typeface="Calibri" pitchFamily="34" charset="-120"/>
               </a:rPr>
-              <a:t>Reescrita e reancorada em v0001 e V00001. </a:t>
-            </a:r>
-            <a:pPr indent="0" marL="0">
-              <a:lnSpc>
-                <a:spcPct val="100000"/>
-              </a:lnSpc>
-              <a:buNone/>
-            </a:pPr>
-            <a:r>
-              <a:rPr lang="en-US" sz="1250" dirty="0">
+              <a:t>Reescrita e </a:t>
+            </a:r>
+            <a:r>
+              <a:rPr lang="pt-BR" sz="1250" b="1" noProof="0" dirty="0" err="1">
                 <a:solidFill>
                   <a:srgbClr val="1E2A36"/>
                 </a:solidFill>
@@ -15796,9 +15510,31 @@
                 <a:ea typeface="Calibri" pitchFamily="34" charset="-122"/>
                 <a:cs typeface="Calibri" pitchFamily="34" charset="-120"/>
               </a:rPr>
+              <a:t>reancorada</a:t>
+            </a:r>
+            <a:r>
+              <a:rPr lang="pt-BR" sz="1250" b="1" noProof="0" dirty="0">
+                <a:solidFill>
+                  <a:srgbClr val="1E2A36"/>
+                </a:solidFill>
+                <a:latin typeface="Calibri" pitchFamily="34" charset="0"/>
+                <a:ea typeface="Calibri" pitchFamily="34" charset="-122"/>
+                <a:cs typeface="Calibri" pitchFamily="34" charset="-120"/>
+              </a:rPr>
+              <a:t> em v0001 e V00001. </a:t>
+            </a:r>
+            <a:r>
+              <a:rPr lang="pt-BR" sz="1250" noProof="0" dirty="0">
+                <a:solidFill>
+                  <a:srgbClr val="1E2A36"/>
+                </a:solidFill>
+                <a:latin typeface="Calibri" pitchFamily="34" charset="0"/>
+                <a:ea typeface="Calibri" pitchFamily="34" charset="-122"/>
+                <a:cs typeface="Calibri" pitchFamily="34" charset="-120"/>
+              </a:rPr>
               <a:t>Resultado nos 70 municípios ELSI:</a:t>
             </a:r>
-            <a:endParaRPr lang="en-US" sz="1250" dirty="0"/>
+            <a:endParaRPr lang="pt-BR" sz="1250" noProof="0" dirty="0"/>
           </a:p>
         </p:txBody>
       </p:sp>
@@ -15823,11 +15559,11 @@
           <a:bodyPr wrap="square" lIns="0" tIns="0" rIns="0" bIns="0" rtlCol="0" anchor="ctr"/>
           <a:lstStyle/>
           <a:p>
-            <a:pPr algn="ctr" indent="0" marL="0">
+            <a:pPr marL="0" indent="0" algn="ctr">
               <a:buNone/>
             </a:pPr>
             <a:r>
-              <a:rPr lang="en-US" sz="1500" b="1" dirty="0">
+              <a:rPr lang="pt-BR" sz="1500" b="1" noProof="0" dirty="0">
                 <a:solidFill>
                   <a:srgbClr val="2A9D8F"/>
                 </a:solidFill>
@@ -15837,7 +15573,7 @@
               </a:rPr>
               <a:t>106.281</a:t>
             </a:r>
-            <a:endParaRPr lang="en-US" sz="1500" dirty="0"/>
+            <a:endParaRPr lang="pt-BR" sz="1500" noProof="0" dirty="0"/>
           </a:p>
         </p:txBody>
       </p:sp>
@@ -15862,11 +15598,11 @@
           <a:bodyPr wrap="square" lIns="0" tIns="0" rIns="0" bIns="0" rtlCol="0" anchor="ctr"/>
           <a:lstStyle/>
           <a:p>
-            <a:pPr algn="ctr" indent="0" marL="0">
+            <a:pPr marL="0" indent="0" algn="ctr">
               <a:buNone/>
             </a:pPr>
             <a:r>
-              <a:rPr lang="en-US" sz="1050" dirty="0">
+              <a:rPr lang="pt-BR" sz="1050" noProof="0" dirty="0">
                 <a:solidFill>
                   <a:srgbClr val="5B6B7A"/>
                 </a:solidFill>
@@ -15876,7 +15612,7 @@
               </a:rPr>
               <a:t>OK (97,48%)</a:t>
             </a:r>
-            <a:endParaRPr lang="en-US" sz="1050" dirty="0"/>
+            <a:endParaRPr lang="pt-BR" sz="1050" noProof="0" dirty="0"/>
           </a:p>
         </p:txBody>
       </p:sp>
@@ -15901,11 +15637,11 @@
           <a:bodyPr wrap="square" lIns="0" tIns="0" rIns="0" bIns="0" rtlCol="0" anchor="ctr"/>
           <a:lstStyle/>
           <a:p>
-            <a:pPr algn="ctr" indent="0" marL="0">
+            <a:pPr marL="0" indent="0" algn="ctr">
               <a:buNone/>
             </a:pPr>
             <a:r>
-              <a:rPr lang="en-US" sz="1500" b="1" dirty="0">
+              <a:rPr lang="pt-BR" sz="1500" b="1" noProof="0" dirty="0">
                 <a:solidFill>
                   <a:srgbClr val="C7861B"/>
                 </a:solidFill>
@@ -15915,7 +15651,7 @@
               </a:rPr>
               <a:t>2.751</a:t>
             </a:r>
-            <a:endParaRPr lang="en-US" sz="1500" dirty="0"/>
+            <a:endParaRPr lang="pt-BR" sz="1500" noProof="0" dirty="0"/>
           </a:p>
         </p:txBody>
       </p:sp>
@@ -15940,11 +15676,11 @@
           <a:bodyPr wrap="square" lIns="0" tIns="0" rIns="0" bIns="0" rtlCol="0" anchor="ctr"/>
           <a:lstStyle/>
           <a:p>
-            <a:pPr algn="ctr" indent="0" marL="0">
+            <a:pPr marL="0" indent="0" algn="ctr">
               <a:buNone/>
             </a:pPr>
             <a:r>
-              <a:rPr lang="en-US" sz="1050" dirty="0">
+              <a:rPr lang="pt-BR" sz="1050" noProof="0" dirty="0">
                 <a:solidFill>
                   <a:srgbClr val="5B6B7A"/>
                 </a:solidFill>
@@ -15954,7 +15690,7 @@
               </a:rPr>
               <a:t>SIGILOSO (2,52%)</a:t>
             </a:r>
-            <a:endParaRPr lang="en-US" sz="1050" dirty="0"/>
+            <a:endParaRPr lang="pt-BR" sz="1050" noProof="0" dirty="0"/>
           </a:p>
         </p:txBody>
       </p:sp>
@@ -15979,11 +15715,11 @@
           <a:bodyPr wrap="square" lIns="0" tIns="0" rIns="0" bIns="0" rtlCol="0" anchor="ctr"/>
           <a:lstStyle/>
           <a:p>
-            <a:pPr algn="ctr" indent="0" marL="0">
+            <a:pPr marL="0" indent="0" algn="ctr">
               <a:buNone/>
             </a:pPr>
             <a:r>
-              <a:rPr lang="en-US" sz="1500" b="1" dirty="0">
+              <a:rPr lang="pt-BR" sz="1500" b="1" noProof="0" dirty="0">
                 <a:solidFill>
                   <a:srgbClr val="5B6B7A"/>
                 </a:solidFill>
@@ -15993,7 +15729,7 @@
               </a:rPr>
               <a:t>0</a:t>
             </a:r>
-            <a:endParaRPr lang="en-US" sz="1500" dirty="0"/>
+            <a:endParaRPr lang="pt-BR" sz="1500" noProof="0" dirty="0"/>
           </a:p>
         </p:txBody>
       </p:sp>
@@ -16018,11 +15754,11 @@
           <a:bodyPr wrap="square" lIns="0" tIns="0" rIns="0" bIns="0" rtlCol="0" anchor="ctr"/>
           <a:lstStyle/>
           <a:p>
-            <a:pPr algn="ctr" indent="0" marL="0">
+            <a:pPr marL="0" indent="0" algn="ctr">
               <a:buNone/>
             </a:pPr>
             <a:r>
-              <a:rPr lang="en-US" sz="1050" dirty="0">
+              <a:rPr lang="pt-BR" sz="1050" noProof="0" dirty="0">
                 <a:solidFill>
                   <a:srgbClr val="5B6B7A"/>
                 </a:solidFill>
@@ -16032,7 +15768,7 @@
               </a:rPr>
               <a:t>COLETIVO</a:t>
             </a:r>
-            <a:endParaRPr lang="en-US" sz="1050" dirty="0"/>
+            <a:endParaRPr lang="pt-BR" sz="1050" noProof="0" dirty="0"/>
           </a:p>
         </p:txBody>
       </p:sp>
@@ -16057,11 +15793,11 @@
           <a:bodyPr wrap="square" lIns="0" tIns="0" rIns="0" bIns="0" rtlCol="0" anchor="ctr"/>
           <a:lstStyle/>
           <a:p>
-            <a:pPr algn="ctr" indent="0" marL="0">
+            <a:pPr marL="0" indent="0" algn="ctr">
               <a:buNone/>
             </a:pPr>
             <a:r>
-              <a:rPr lang="en-US" sz="1500" b="1" dirty="0">
+              <a:rPr lang="pt-BR" sz="1500" b="1" noProof="0" dirty="0">
                 <a:solidFill>
                   <a:srgbClr val="5B6B7A"/>
                 </a:solidFill>
@@ -16071,7 +15807,7 @@
               </a:rPr>
               <a:t>0</a:t>
             </a:r>
-            <a:endParaRPr lang="en-US" sz="1500" dirty="0"/>
+            <a:endParaRPr lang="pt-BR" sz="1500" noProof="0" dirty="0"/>
           </a:p>
         </p:txBody>
       </p:sp>
@@ -16096,11 +15832,11 @@
           <a:bodyPr wrap="square" lIns="0" tIns="0" rIns="0" bIns="0" rtlCol="0" anchor="ctr"/>
           <a:lstStyle/>
           <a:p>
-            <a:pPr algn="ctr" indent="0" marL="0">
+            <a:pPr marL="0" indent="0" algn="ctr">
               <a:buNone/>
             </a:pPr>
             <a:r>
-              <a:rPr lang="en-US" sz="1050" dirty="0">
+              <a:rPr lang="pt-BR" sz="1050" noProof="0" dirty="0">
                 <a:solidFill>
                   <a:srgbClr val="5B6B7A"/>
                 </a:solidFill>
@@ -16110,7 +15846,7 @@
               </a:rPr>
               <a:t>ZERADO</a:t>
             </a:r>
-            <a:endParaRPr lang="en-US" sz="1050" dirty="0"/>
+            <a:endParaRPr lang="pt-BR" sz="1050" noProof="0" dirty="0"/>
           </a:p>
         </p:txBody>
       </p:sp>
@@ -16138,13 +15874,20 @@
             <a:prstDash val="solid"/>
           </a:ln>
           <a:effectLst>
-            <a:outerShdw sx="100000" sy="100000" kx="0" ky="0" algn="bl" rotWithShape="0" blurRad="88900" dist="38100" dir="8100000">
+            <a:outerShdw blurRad="88900" dist="38100" dir="8100000" algn="bl" rotWithShape="0">
               <a:srgbClr val="000000">
                 <a:alpha val="15000"/>
               </a:srgbClr>
             </a:outerShdw>
           </a:effectLst>
         </p:spPr>
+        <p:txBody>
+          <a:bodyPr/>
+          <a:lstStyle/>
+          <a:p>
+            <a:endParaRPr lang="pt-BR" noProof="0" dirty="0"/>
+          </a:p>
+        </p:txBody>
       </p:sp>
       <p:sp>
         <p:nvSpPr>
@@ -16165,6 +15908,13 @@
           </a:solidFill>
           <a:ln/>
         </p:spPr>
+        <p:txBody>
+          <a:bodyPr/>
+          <a:lstStyle/>
+          <a:p>
+            <a:endParaRPr lang="pt-BR" noProof="0" dirty="0"/>
+          </a:p>
+        </p:txBody>
       </p:sp>
       <p:sp>
         <p:nvSpPr>
@@ -16187,11 +15937,11 @@
           <a:bodyPr wrap="square" lIns="0" tIns="0" rIns="0" bIns="0" rtlCol="0" anchor="ctr"/>
           <a:lstStyle/>
           <a:p>
-            <a:pPr indent="0" marL="0">
+            <a:pPr marL="0" indent="0">
               <a:buNone/>
             </a:pPr>
             <a:r>
-              <a:rPr lang="en-US" sz="1500" b="1" dirty="0">
+              <a:rPr lang="pt-BR" sz="1500" b="1" noProof="0" dirty="0">
                 <a:solidFill>
                   <a:srgbClr val="1E2A36"/>
                 </a:solidFill>
@@ -16201,7 +15951,7 @@
               </a:rPr>
               <a:t>5 · Variáveis de esgoto confirmadas no dicionário oficial</a:t>
             </a:r>
-            <a:endParaRPr lang="en-US" sz="1500" dirty="0"/>
+            <a:endParaRPr lang="pt-BR" sz="1500" noProof="0" dirty="0"/>
           </a:p>
         </p:txBody>
       </p:sp>
@@ -16226,14 +15976,14 @@
           <a:bodyPr wrap="square" lIns="0" tIns="0" rIns="0" bIns="0" rtlCol="0" anchor="ctr"/>
           <a:lstStyle/>
           <a:p>
-            <a:pPr indent="0" marL="0">
+            <a:pPr marL="0" indent="0">
               <a:lnSpc>
                 <a:spcPct val="100000"/>
               </a:lnSpc>
               <a:buNone/>
             </a:pPr>
             <a:r>
-              <a:rPr lang="en-US" sz="1300" b="1" dirty="0">
+              <a:rPr lang="pt-BR" sz="1300" b="1" noProof="0" dirty="0">
                 <a:solidFill>
                   <a:srgbClr val="2A9D8F"/>
                 </a:solidFill>
@@ -16243,17 +15993,17 @@
               </a:rPr>
               <a:t>V00312–V00316  ✓ esgoto</a:t>
             </a:r>
-            <a:endParaRPr lang="en-US" sz="1300" dirty="0"/>
-          </a:p>
-          <a:p>
-            <a:pPr indent="0" marL="0">
+            <a:endParaRPr lang="pt-BR" sz="1300" noProof="0" dirty="0"/>
+          </a:p>
+          <a:p>
+            <a:pPr marL="0" indent="0">
               <a:lnSpc>
                 <a:spcPct val="100000"/>
               </a:lnSpc>
               <a:buNone/>
             </a:pPr>
             <a:r>
-              <a:rPr lang="en-US" sz="1200" dirty="0">
+              <a:rPr lang="pt-BR" sz="1200" noProof="0" dirty="0">
                 <a:solidFill>
                   <a:srgbClr val="1E2A36"/>
                 </a:solidFill>
@@ -16263,7 +16013,7 @@
               </a:rPr>
               <a:t>Destino do esgoto: fossa rudimentar, vala, rio/córrego, sem banheiro. É o bloco correto (equivale ao V019–V028 do Censo 2010).</a:t>
             </a:r>
-            <a:endParaRPr lang="en-US" sz="1300" dirty="0"/>
+            <a:endParaRPr lang="pt-BR" sz="1300" noProof="0" dirty="0"/>
           </a:p>
         </p:txBody>
       </p:sp>
@@ -16288,14 +16038,14 @@
           <a:bodyPr wrap="square" lIns="0" tIns="0" rIns="0" bIns="0" rtlCol="0" anchor="ctr"/>
           <a:lstStyle/>
           <a:p>
-            <a:pPr indent="0" marL="0">
+            <a:pPr marL="0" indent="0">
               <a:lnSpc>
                 <a:spcPct val="100000"/>
               </a:lnSpc>
               <a:buNone/>
             </a:pPr>
             <a:r>
-              <a:rPr lang="en-US" sz="1300" b="1" dirty="0">
+              <a:rPr lang="pt-BR" sz="1300" b="1" noProof="0" dirty="0">
                 <a:solidFill>
                   <a:srgbClr val="B3261E"/>
                 </a:solidFill>
@@ -16305,17 +16055,17 @@
               </a:rPr>
               <a:t>V00249–V00253  ✗ não é esgoto</a:t>
             </a:r>
-            <a:endParaRPr lang="en-US" sz="1300" dirty="0"/>
-          </a:p>
-          <a:p>
-            <a:pPr indent="0" marL="0">
+            <a:endParaRPr lang="pt-BR" sz="1300" noProof="0" dirty="0"/>
+          </a:p>
+          <a:p>
+            <a:pPr marL="0" indent="0">
               <a:lnSpc>
                 <a:spcPct val="100000"/>
               </a:lnSpc>
               <a:buNone/>
             </a:pPr>
             <a:r>
-              <a:rPr lang="en-US" sz="1200" dirty="0">
+              <a:rPr lang="pt-BR" sz="1200" noProof="0" dirty="0">
                 <a:solidFill>
                   <a:srgbClr val="1E2A36"/>
                 </a:solidFill>
@@ -16325,7 +16075,7 @@
               </a:rPr>
               <a:t>Tipologia de habitação (casa de vila, apartamento, contagem de banheiros). O relatório legado divergia; o dicionário resolveu.</a:t>
             </a:r>
-            <a:endParaRPr lang="en-US" sz="1300" dirty="0"/>
+            <a:endParaRPr lang="pt-BR" sz="1300" noProof="0" dirty="0"/>
           </a:p>
         </p:txBody>
       </p:sp>
@@ -16350,11 +16100,11 @@
           <a:bodyPr wrap="square" lIns="0" tIns="0" rIns="0" bIns="0" rtlCol="0" anchor="ctr"/>
           <a:lstStyle/>
           <a:p>
-            <a:pPr algn="ctr" indent="0" marL="0">
+            <a:pPr marL="0" indent="0" algn="ctr">
               <a:buNone/>
             </a:pPr>
             <a:r>
-              <a:rPr lang="en-US" sz="1200" i="1" dirty="0">
+              <a:rPr lang="pt-BR" sz="1200" i="1" noProof="0" dirty="0">
                 <a:solidFill>
                   <a:srgbClr val="1C7293"/>
                 </a:solidFill>
@@ -16364,7 +16114,7 @@
               </a:rPr>
               <a:t>Nenhum setor COLETIVO ou ZERADO apareceu no recorte ELSI — só OK e SIGILOSO.</a:t>
             </a:r>
-            <a:endParaRPr lang="en-US" sz="1200" dirty="0"/>
+            <a:endParaRPr lang="pt-BR" sz="1200" noProof="0" dirty="0"/>
           </a:p>
         </p:txBody>
       </p:sp>
@@ -16669,4 +16419,319 @@
     </a:ext>
   </a:extLst>
 </a:theme>
+</file>
+
+<file path=ppt/theme/theme2.xml><?xml version="1.0" encoding="utf-8"?>
+<a:theme xmlns:a="http://schemas.openxmlformats.org/drawingml/2006/main" name="Tema do Office">
+  <a:themeElements>
+    <a:clrScheme name="Office">
+      <a:dk1>
+        <a:sysClr val="windowText" lastClr="000000"/>
+      </a:dk1>
+      <a:lt1>
+        <a:sysClr val="window" lastClr="FFFFFF"/>
+      </a:lt1>
+      <a:dk2>
+        <a:srgbClr val="0E2841"/>
+      </a:dk2>
+      <a:lt2>
+        <a:srgbClr val="E8E8E8"/>
+      </a:lt2>
+      <a:accent1>
+        <a:srgbClr val="156082"/>
+      </a:accent1>
+      <a:accent2>
+        <a:srgbClr val="E97132"/>
+      </a:accent2>
+      <a:accent3>
+        <a:srgbClr val="196B24"/>
+      </a:accent3>
+      <a:accent4>
+        <a:srgbClr val="0F9ED5"/>
+      </a:accent4>
+      <a:accent5>
+        <a:srgbClr val="A02B93"/>
+      </a:accent5>
+      <a:accent6>
+        <a:srgbClr val="4EA72E"/>
+      </a:accent6>
+      <a:hlink>
+        <a:srgbClr val="467886"/>
+      </a:hlink>
+      <a:folHlink>
+        <a:srgbClr val="96607D"/>
+      </a:folHlink>
+    </a:clrScheme>
+    <a:fontScheme name="Office">
+      <a:majorFont>
+        <a:latin typeface="Aptos Display" panose="02110004020202020204"/>
+        <a:ea typeface=""/>
+        <a:cs typeface=""/>
+        <a:font script="Jpan" typeface="游ゴシック Light"/>
+        <a:font script="Hang" typeface="맑은 고딕"/>
+        <a:font script="Hans" typeface="等线 Light"/>
+        <a:font script="Hant" typeface="新細明體"/>
+        <a:font script="Arab" typeface="Times New Roman"/>
+        <a:font script="Hebr" typeface="Times New Roman"/>
+        <a:font script="Thai" typeface="Angsana New"/>
+        <a:font script="Ethi" typeface="Nyala"/>
+        <a:font script="Beng" typeface="Vrinda"/>
+        <a:font script="Gujr" typeface="Shruti"/>
+        <a:font script="Khmr" typeface="MoolBoran"/>
+        <a:font script="Knda" typeface="Tunga"/>
+        <a:font script="Guru" typeface="Raavi"/>
+        <a:font script="Cans" typeface="Euphemia"/>
+        <a:font script="Cher" typeface="Plantagenet Cherokee"/>
+        <a:font script="Yiii" typeface="Microsoft Yi Baiti"/>
+        <a:font script="Tibt" typeface="Microsoft Himalaya"/>
+        <a:font script="Thaa" typeface="MV Boli"/>
+        <a:font script="Deva" typeface="Mangal"/>
+        <a:font script="Telu" typeface="Gautami"/>
+        <a:font script="Taml" typeface="Latha"/>
+        <a:font script="Syrc" typeface="Estrangelo Edessa"/>
+        <a:font script="Orya" typeface="Kalinga"/>
+        <a:font script="Mlym" typeface="Kartika"/>
+        <a:font script="Laoo" typeface="DokChampa"/>
+        <a:font script="Sinh" typeface="Iskoola Pota"/>
+        <a:font script="Mong" typeface="Mongolian Baiti"/>
+        <a:font script="Viet" typeface="Times New Roman"/>
+        <a:font script="Uigh" typeface="Microsoft Uighur"/>
+        <a:font script="Geor" typeface="Sylfaen"/>
+        <a:font script="Armn" typeface="Arial"/>
+        <a:font script="Bugi" typeface="Leelawadee UI"/>
+        <a:font script="Bopo" typeface="Microsoft JhengHei"/>
+        <a:font script="Java" typeface="Javanese Text"/>
+        <a:font script="Lisu" typeface="Segoe UI"/>
+        <a:font script="Mymr" typeface="Myanmar Text"/>
+        <a:font script="Nkoo" typeface="Ebrima"/>
+        <a:font script="Olck" typeface="Nirmala UI"/>
+        <a:font script="Osma" typeface="Ebrima"/>
+        <a:font script="Phag" typeface="Phagspa"/>
+        <a:font script="Syrn" typeface="Estrangelo Edessa"/>
+        <a:font script="Syrj" typeface="Estrangelo Edessa"/>
+        <a:font script="Syre" typeface="Estrangelo Edessa"/>
+        <a:font script="Sora" typeface="Nirmala UI"/>
+        <a:font script="Tale" typeface="Microsoft Tai Le"/>
+        <a:font script="Talu" typeface="Microsoft New Tai Lue"/>
+        <a:font script="Tfng" typeface="Ebrima"/>
+      </a:majorFont>
+      <a:minorFont>
+        <a:latin typeface="Aptos" panose="02110004020202020204"/>
+        <a:ea typeface=""/>
+        <a:cs typeface=""/>
+        <a:font script="Jpan" typeface="游ゴシック"/>
+        <a:font script="Hang" typeface="맑은 고딕"/>
+        <a:font script="Hans" typeface="等线"/>
+        <a:font script="Hant" typeface="新細明體"/>
+        <a:font script="Arab" typeface="Arial"/>
+        <a:font script="Hebr" typeface="Arial"/>
+        <a:font script="Thai" typeface="Cordia New"/>
+        <a:font script="Ethi" typeface="Nyala"/>
+        <a:font script="Beng" typeface="Vrinda"/>
+        <a:font script="Gujr" typeface="Shruti"/>
+        <a:font script="Khmr" typeface="DaunPenh"/>
+        <a:font script="Knda" typeface="Tunga"/>
+        <a:font script="Guru" typeface="Raavi"/>
+        <a:font script="Cans" typeface="Euphemia"/>
+        <a:font script="Cher" typeface="Plantagenet Cherokee"/>
+        <a:font script="Yiii" typeface="Microsoft Yi Baiti"/>
+        <a:font script="Tibt" typeface="Microsoft Himalaya"/>
+        <a:font script="Thaa" typeface="MV Boli"/>
+        <a:font script="Deva" typeface="Mangal"/>
+        <a:font script="Telu" typeface="Gautami"/>
+        <a:font script="Taml" typeface="Latha"/>
+        <a:font script="Syrc" typeface="Estrangelo Edessa"/>
+        <a:font script="Orya" typeface="Kalinga"/>
+        <a:font script="Mlym" typeface="Kartika"/>
+        <a:font script="Laoo" typeface="DokChampa"/>
+        <a:font script="Sinh" typeface="Iskoola Pota"/>
+        <a:font script="Mong" typeface="Mongolian Baiti"/>
+        <a:font script="Viet" typeface="Arial"/>
+        <a:font script="Uigh" typeface="Microsoft Uighur"/>
+        <a:font script="Geor" typeface="Sylfaen"/>
+        <a:font script="Armn" typeface="Arial"/>
+        <a:font script="Bugi" typeface="Leelawadee UI"/>
+        <a:font script="Bopo" typeface="Microsoft JhengHei"/>
+        <a:font script="Java" typeface="Javanese Text"/>
+        <a:font script="Lisu" typeface="Segoe UI"/>
+        <a:font script="Mymr" typeface="Myanmar Text"/>
+        <a:font script="Nkoo" typeface="Ebrima"/>
+        <a:font script="Olck" typeface="Nirmala UI"/>
+        <a:font script="Osma" typeface="Ebrima"/>
+        <a:font script="Phag" typeface="Phagspa"/>
+        <a:font script="Syrn" typeface="Estrangelo Edessa"/>
+        <a:font script="Syrj" typeface="Estrangelo Edessa"/>
+        <a:font script="Syre" typeface="Estrangelo Edessa"/>
+        <a:font script="Sora" typeface="Nirmala UI"/>
+        <a:font script="Tale" typeface="Microsoft Tai Le"/>
+        <a:font script="Talu" typeface="Microsoft New Tai Lue"/>
+        <a:font script="Tfng" typeface="Ebrima"/>
+      </a:minorFont>
+    </a:fontScheme>
+    <a:fmtScheme name="Office">
+      <a:fillStyleLst>
+        <a:solidFill>
+          <a:schemeClr val="phClr"/>
+        </a:solidFill>
+        <a:gradFill rotWithShape="1">
+          <a:gsLst>
+            <a:gs pos="0">
+              <a:schemeClr val="phClr">
+                <a:lumMod val="110000"/>
+                <a:satMod val="105000"/>
+                <a:tint val="67000"/>
+              </a:schemeClr>
+            </a:gs>
+            <a:gs pos="50000">
+              <a:schemeClr val="phClr">
+                <a:lumMod val="105000"/>
+                <a:satMod val="103000"/>
+                <a:tint val="73000"/>
+              </a:schemeClr>
+            </a:gs>
+            <a:gs pos="100000">
+              <a:schemeClr val="phClr">
+                <a:lumMod val="105000"/>
+                <a:satMod val="109000"/>
+                <a:tint val="81000"/>
+              </a:schemeClr>
+            </a:gs>
+          </a:gsLst>
+          <a:lin ang="5400000" scaled="0"/>
+        </a:gradFill>
+        <a:gradFill rotWithShape="1">
+          <a:gsLst>
+            <a:gs pos="0">
+              <a:schemeClr val="phClr">
+                <a:satMod val="103000"/>
+                <a:lumMod val="102000"/>
+                <a:tint val="94000"/>
+              </a:schemeClr>
+            </a:gs>
+            <a:gs pos="50000">
+              <a:schemeClr val="phClr">
+                <a:satMod val="110000"/>
+                <a:lumMod val="100000"/>
+                <a:shade val="100000"/>
+              </a:schemeClr>
+            </a:gs>
+            <a:gs pos="100000">
+              <a:schemeClr val="phClr">
+                <a:lumMod val="99000"/>
+                <a:satMod val="120000"/>
+                <a:shade val="78000"/>
+              </a:schemeClr>
+            </a:gs>
+          </a:gsLst>
+          <a:lin ang="5400000" scaled="0"/>
+        </a:gradFill>
+      </a:fillStyleLst>
+      <a:lnStyleLst>
+        <a:ln w="12700" cap="flat" cmpd="sng" algn="ctr">
+          <a:solidFill>
+            <a:schemeClr val="phClr"/>
+          </a:solidFill>
+          <a:prstDash val="solid"/>
+          <a:miter lim="800000"/>
+        </a:ln>
+        <a:ln w="19050" cap="flat" cmpd="sng" algn="ctr">
+          <a:solidFill>
+            <a:schemeClr val="phClr"/>
+          </a:solidFill>
+          <a:prstDash val="solid"/>
+          <a:miter lim="800000"/>
+        </a:ln>
+        <a:ln w="25400" cap="flat" cmpd="sng" algn="ctr">
+          <a:solidFill>
+            <a:schemeClr val="phClr"/>
+          </a:solidFill>
+          <a:prstDash val="solid"/>
+          <a:miter lim="800000"/>
+        </a:ln>
+      </a:lnStyleLst>
+      <a:effectStyleLst>
+        <a:effectStyle>
+          <a:effectLst/>
+        </a:effectStyle>
+        <a:effectStyle>
+          <a:effectLst/>
+        </a:effectStyle>
+        <a:effectStyle>
+          <a:effectLst>
+            <a:outerShdw blurRad="57150" dist="19050" dir="5400000" algn="ctr" rotWithShape="0">
+              <a:srgbClr val="000000">
+                <a:alpha val="63000"/>
+              </a:srgbClr>
+            </a:outerShdw>
+          </a:effectLst>
+        </a:effectStyle>
+      </a:effectStyleLst>
+      <a:bgFillStyleLst>
+        <a:solidFill>
+          <a:schemeClr val="phClr"/>
+        </a:solidFill>
+        <a:solidFill>
+          <a:schemeClr val="phClr">
+            <a:tint val="95000"/>
+            <a:satMod val="170000"/>
+          </a:schemeClr>
+        </a:solidFill>
+        <a:gradFill rotWithShape="1">
+          <a:gsLst>
+            <a:gs pos="0">
+              <a:schemeClr val="phClr">
+                <a:tint val="93000"/>
+                <a:satMod val="150000"/>
+                <a:shade val="98000"/>
+                <a:lumMod val="102000"/>
+              </a:schemeClr>
+            </a:gs>
+            <a:gs pos="50000">
+              <a:schemeClr val="phClr">
+                <a:tint val="98000"/>
+                <a:satMod val="130000"/>
+                <a:shade val="90000"/>
+                <a:lumMod val="103000"/>
+              </a:schemeClr>
+            </a:gs>
+            <a:gs pos="100000">
+              <a:schemeClr val="phClr">
+                <a:shade val="63000"/>
+                <a:satMod val="120000"/>
+              </a:schemeClr>
+            </a:gs>
+          </a:gsLst>
+          <a:lin ang="5400000" scaled="0"/>
+        </a:gradFill>
+      </a:bgFillStyleLst>
+    </a:fmtScheme>
+  </a:themeElements>
+  <a:objectDefaults>
+    <a:lnDef>
+      <a:spPr/>
+      <a:bodyPr/>
+      <a:lstStyle/>
+      <a:style>
+        <a:lnRef idx="2">
+          <a:schemeClr val="accent1"/>
+        </a:lnRef>
+        <a:fillRef idx="0">
+          <a:schemeClr val="accent1"/>
+        </a:fillRef>
+        <a:effectRef idx="1">
+          <a:schemeClr val="accent1"/>
+        </a:effectRef>
+        <a:fontRef idx="minor">
+          <a:schemeClr val="tx1"/>
+        </a:fontRef>
+      </a:style>
+    </a:lnDef>
+  </a:objectDefaults>
+  <a:extraClrSchemeLst/>
+  <a:extLst>
+    <a:ext uri="{05A4C25C-085E-4340-85A3-A5531E510DB2}">
+      <thm15:themeFamily xmlns:thm15="http://schemas.microsoft.com/office/thememl/2012/main" name="Office Theme" id="{2E142A2C-CD16-42D6-873A-C26D2A0506FA}" vid="{1BDDFF52-6CD6-40A5-AB3C-68EB2F1E4D0A}"/>
+    </a:ext>
+  </a:extLst>
+</a:theme>
 </file>
--- a/docs/Apresentacoes_IVS/1_APRESENTAR_Comparativo_EDA_antiga_vs_nova.pptx
+++ b/docs/Apresentacoes_IVS/1_APRESENTAR_Comparativo_EDA_antiga_vs_nova.pptx
@@ -11372,55 +11372,13 @@
       </p:sp>
       <p:sp>
         <p:nvSpPr>
-          <p:cNvPr id="4" name="Text 2"/>
-          <p:cNvSpPr/>
-          <p:nvPr/>
-        </p:nvSpPr>
-        <p:spPr>
-          <a:xfrm>
-            <a:off x="457200" y="1234440"/>
-            <a:ext cx="8229600" cy="594360"/>
-          </a:xfrm>
-          <a:prstGeom prst="rect">
-            <a:avLst/>
-          </a:prstGeom>
-          <a:noFill/>
-          <a:ln/>
-        </p:spPr>
-        <p:txBody>
-          <a:bodyPr wrap="square" lIns="0" tIns="0" rIns="0" bIns="0" rtlCol="0" anchor="ctr"/>
-          <a:lstStyle/>
-          <a:p>
-            <a:pPr marL="0" indent="0">
-              <a:lnSpc>
-                <a:spcPct val="105000"/>
-              </a:lnSpc>
-              <a:buNone/>
-            </a:pPr>
-            <a:r>
-              <a:rPr lang="pt-BR" sz="1400" noProof="0" dirty="0">
-                <a:solidFill>
-                  <a:srgbClr val="1E2A36"/>
-                </a:solidFill>
-                <a:latin typeface="Calibri" pitchFamily="34" charset="0"/>
-                <a:ea typeface="Calibri" pitchFamily="34" charset="-122"/>
-                <a:cs typeface="Calibri" pitchFamily="34" charset="-120"/>
-              </a:rPr>
-              <a:t>A primeira analise exploratória de dados estava tecnicamente bem feita, mas tinha duas decisões metodológicas que, revisadas com a orientadora e o dicionário oficial do IBGE, precisavam ser corrigidas:</a:t>
-            </a:r>
-            <a:endParaRPr lang="pt-BR" sz="1400" noProof="0" dirty="0"/>
-          </a:p>
-        </p:txBody>
-      </p:sp>
-      <p:sp>
-        <p:nvSpPr>
           <p:cNvPr id="5" name="Shape 3"/>
           <p:cNvSpPr/>
           <p:nvPr/>
         </p:nvSpPr>
         <p:spPr>
           <a:xfrm>
-            <a:off x="457200" y="1965960"/>
+            <a:off x="457200" y="1359567"/>
             <a:ext cx="8229600" cy="1051560"/>
           </a:xfrm>
           <a:prstGeom prst="rect">
@@ -11452,7 +11410,7 @@
         </p:nvSpPr>
         <p:spPr>
           <a:xfrm>
-            <a:off x="685800" y="2258568"/>
+            <a:off x="685800" y="1652175"/>
             <a:ext cx="502920" cy="502920"/>
           </a:xfrm>
           <a:prstGeom prst="ellipse">
@@ -11479,7 +11437,7 @@
         </p:nvSpPr>
         <p:spPr>
           <a:xfrm>
-            <a:off x="685800" y="2258568"/>
+            <a:off x="685800" y="1652175"/>
             <a:ext cx="502920" cy="502920"/>
           </a:xfrm>
           <a:prstGeom prst="rect">
@@ -11518,7 +11476,7 @@
         </p:nvSpPr>
         <p:spPr>
           <a:xfrm>
-            <a:off x="1371600" y="2093976"/>
+            <a:off x="1371600" y="1487583"/>
             <a:ext cx="7132320" cy="320040"/>
           </a:xfrm>
           <a:prstGeom prst="rect">
@@ -11557,7 +11515,7 @@
         </p:nvSpPr>
         <p:spPr>
           <a:xfrm>
-            <a:off x="1371600" y="2423160"/>
+            <a:off x="1371600" y="1816767"/>
             <a:ext cx="7132320" cy="548640"/>
           </a:xfrm>
           <a:prstGeom prst="rect">
@@ -11599,7 +11557,7 @@
         </p:nvSpPr>
         <p:spPr>
           <a:xfrm>
-            <a:off x="457200" y="3200400"/>
+            <a:off x="457200" y="2594007"/>
             <a:ext cx="8229600" cy="1051560"/>
           </a:xfrm>
           <a:prstGeom prst="rect">
@@ -11631,7 +11589,7 @@
         </p:nvSpPr>
         <p:spPr>
           <a:xfrm>
-            <a:off x="685800" y="3493008"/>
+            <a:off x="685800" y="2886615"/>
             <a:ext cx="502920" cy="502920"/>
           </a:xfrm>
           <a:prstGeom prst="ellipse">
@@ -11658,7 +11616,7 @@
         </p:nvSpPr>
         <p:spPr>
           <a:xfrm>
-            <a:off x="685800" y="3493008"/>
+            <a:off x="685800" y="2886615"/>
             <a:ext cx="502920" cy="502920"/>
           </a:xfrm>
           <a:prstGeom prst="rect">
@@ -11697,7 +11655,7 @@
         </p:nvSpPr>
         <p:spPr>
           <a:xfrm>
-            <a:off x="1371600" y="3328416"/>
+            <a:off x="1371600" y="2722023"/>
             <a:ext cx="7132320" cy="320040"/>
           </a:xfrm>
           <a:prstGeom prst="rect">
@@ -11736,7 +11694,7 @@
         </p:nvSpPr>
         <p:spPr>
           <a:xfrm>
-            <a:off x="1371600" y="3657600"/>
+            <a:off x="1371600" y="3051207"/>
             <a:ext cx="7132320" cy="548640"/>
           </a:xfrm>
           <a:prstGeom prst="rect">
